--- a/Lectures/Lecture20-FieldValidation.pptx
+++ b/Lectures/Lecture20-FieldValidation.pptx
@@ -5,29 +5,28 @@
     <p:sldMasterId id="2147483648" r:id="rId1"/>
   </p:sldMasterIdLst>
   <p:notesMasterIdLst>
-    <p:notesMasterId r:id="rId22"/>
+    <p:notesMasterId r:id="rId21"/>
   </p:notesMasterIdLst>
   <p:sldIdLst>
     <p:sldId id="256" r:id="rId2"/>
     <p:sldId id="604" r:id="rId3"/>
-    <p:sldId id="499" r:id="rId4"/>
-    <p:sldId id="323" r:id="rId5"/>
-    <p:sldId id="257" r:id="rId6"/>
-    <p:sldId id="274" r:id="rId7"/>
-    <p:sldId id="607" r:id="rId8"/>
-    <p:sldId id="331" r:id="rId9"/>
-    <p:sldId id="592" r:id="rId10"/>
-    <p:sldId id="609" r:id="rId11"/>
-    <p:sldId id="610" r:id="rId12"/>
-    <p:sldId id="611" r:id="rId13"/>
-    <p:sldId id="613" r:id="rId14"/>
-    <p:sldId id="612" r:id="rId15"/>
-    <p:sldId id="272" r:id="rId16"/>
-    <p:sldId id="487" r:id="rId17"/>
-    <p:sldId id="273" r:id="rId18"/>
-    <p:sldId id="489" r:id="rId19"/>
-    <p:sldId id="275" r:id="rId20"/>
-    <p:sldId id="276" r:id="rId21"/>
+    <p:sldId id="323" r:id="rId4"/>
+    <p:sldId id="257" r:id="rId5"/>
+    <p:sldId id="274" r:id="rId6"/>
+    <p:sldId id="607" r:id="rId7"/>
+    <p:sldId id="331" r:id="rId8"/>
+    <p:sldId id="592" r:id="rId9"/>
+    <p:sldId id="609" r:id="rId10"/>
+    <p:sldId id="610" r:id="rId11"/>
+    <p:sldId id="611" r:id="rId12"/>
+    <p:sldId id="613" r:id="rId13"/>
+    <p:sldId id="612" r:id="rId14"/>
+    <p:sldId id="272" r:id="rId15"/>
+    <p:sldId id="487" r:id="rId16"/>
+    <p:sldId id="273" r:id="rId17"/>
+    <p:sldId id="489" r:id="rId18"/>
+    <p:sldId id="275" r:id="rId19"/>
+    <p:sldId id="276" r:id="rId20"/>
   </p:sldIdLst>
   <p:sldSz cx="12192000" cy="6858000"/>
   <p:notesSz cx="6858000" cy="9144000"/>
@@ -265,7 +264,7 @@
       <p15:sldGuideLst xmlns:p15="http://schemas.microsoft.com/office/powerpoint/2012/main"/>
     </p:ext>
     <p:ext uri="http://customooxmlschemas.google.com/">
-      <go:slidesCustomData xmlns="" xmlns:mc="http://schemas.openxmlformats.org/markup-compatibility/2006" xmlns:mv="urn:schemas-microsoft-com:mac:vml" xmlns:c="http://schemas.openxmlformats.org/drawingml/2006/chart" xmlns:dgm="http://schemas.openxmlformats.org/drawingml/2006/diagram" xmlns:o="urn:schemas-microsoft-com:office:office" xmlns:v="urn:schemas-microsoft-com:vml" xmlns:pvml="urn:schemas-microsoft-com:office:powerpoint" xmlns:com="http://schemas.openxmlformats.org/drawingml/2006/compatibility" xmlns:p14="http://schemas.microsoft.com/office/powerpoint/2010/main" xmlns:p15="http://schemas.microsoft.com/office/powerpoint/2012/main" xmlns:go="http://customooxmlschemas.google.com/" r:id="rId49" roundtripDataSignature="AMtx7mgWqGpmJnm2LhSO/E7EgiMMs26KqA=="/>
+      <go:slidesCustomData xmlns:go="http://customooxmlschemas.google.com/" xmlns:p15="http://schemas.microsoft.com/office/powerpoint/2012/main" xmlns:p14="http://schemas.microsoft.com/office/powerpoint/2010/main" xmlns:com="http://schemas.openxmlformats.org/drawingml/2006/compatibility" xmlns:pvml="urn:schemas-microsoft-com:office:powerpoint" xmlns:v="urn:schemas-microsoft-com:vml" xmlns:o="urn:schemas-microsoft-com:office:office" xmlns:dgm="http://schemas.openxmlformats.org/drawingml/2006/diagram" xmlns:c="http://schemas.openxmlformats.org/drawingml/2006/chart" xmlns:mv="urn:schemas-microsoft-com:mac:vml" xmlns:mc="http://schemas.openxmlformats.org/markup-compatibility/2006" xmlns="" r:id="rId49" roundtripDataSignature="AMtx7mgWqGpmJnm2LhSO/E7EgiMMs26KqA=="/>
     </p:ext>
   </p:extLst>
 </p:presentation>
@@ -14761,2201 +14760,6 @@
           <p:cNvGraphicFramePr>
             <a:graphicFrameLocks noGrp="1"/>
           </p:cNvGraphicFramePr>
-          <p:nvPr>
-            <p:extLst>
-              <p:ext uri="{D42A27DB-BD31-4B8C-83A1-F6EECF244321}">
-                <p14:modId xmlns:p14="http://schemas.microsoft.com/office/powerpoint/2010/main" val="2891490566"/>
-              </p:ext>
-            </p:extLst>
-          </p:nvPr>
-        </p:nvGraphicFramePr>
-        <p:xfrm>
-          <a:off x="5382865" y="1803689"/>
-          <a:ext cx="1654828" cy="4876800"/>
-        </p:xfrm>
-        <a:graphic>
-          <a:graphicData uri="http://schemas.openxmlformats.org/drawingml/2006/table">
-            <a:tbl>
-              <a:tblPr firstRow="1" bandRow="1">
-                <a:tableStyleId>{073A0DAA-6AF3-43AB-8588-CEC1D06C72B9}</a:tableStyleId>
-              </a:tblPr>
-              <a:tblGrid>
-                <a:gridCol w="827414">
-                  <a:extLst>
-                    <a:ext uri="{9D8B030D-6E8A-4147-A177-3AD203B41FA5}">
-                      <a16:colId xmlns:a16="http://schemas.microsoft.com/office/drawing/2014/main" val="1088238618"/>
-                    </a:ext>
-                  </a:extLst>
-                </a:gridCol>
-                <a:gridCol w="827414">
-                  <a:extLst>
-                    <a:ext uri="{9D8B030D-6E8A-4147-A177-3AD203B41FA5}">
-                      <a16:colId xmlns:a16="http://schemas.microsoft.com/office/drawing/2014/main" val="2545921369"/>
-                    </a:ext>
-                  </a:extLst>
-                </a:gridCol>
-              </a:tblGrid>
-              <a:tr h="258046">
-                <a:tc>
-                  <a:txBody>
-                    <a:bodyPr/>
-                    <a:lstStyle/>
-                    <a:p>
-                      <a:pPr algn="ctr"/>
-                      <a:r>
-                        <a:rPr lang="en-US" dirty="0"/>
-                        <a:t>ID</a:t>
-                      </a:r>
-                    </a:p>
-                  </a:txBody>
-                  <a:tcPr/>
-                </a:tc>
-                <a:tc>
-                  <a:txBody>
-                    <a:bodyPr/>
-                    <a:lstStyle/>
-                    <a:p>
-                      <a:pPr algn="ctr"/>
-                      <a:r>
-                        <a:rPr lang="en-US" dirty="0"/>
-                        <a:t>SCORE</a:t>
-                      </a:r>
-                    </a:p>
-                  </a:txBody>
-                  <a:tcPr/>
-                </a:tc>
-                <a:extLst>
-                  <a:ext uri="{0D108BD9-81ED-4DB2-BD59-A6C34878D82A}">
-                    <a16:rowId xmlns:a16="http://schemas.microsoft.com/office/drawing/2014/main" val="302251417"/>
-                  </a:ext>
-                </a:extLst>
-              </a:tr>
-              <a:tr h="258046">
-                <a:tc>
-                  <a:txBody>
-                    <a:bodyPr/>
-                    <a:lstStyle/>
-                    <a:p>
-                      <a:pPr algn="ctr"/>
-                      <a:r>
-                        <a:rPr lang="en-US" dirty="0"/>
-                        <a:t>27</a:t>
-                      </a:r>
-                    </a:p>
-                  </a:txBody>
-                  <a:tcPr/>
-                </a:tc>
-                <a:tc>
-                  <a:txBody>
-                    <a:bodyPr/>
-                    <a:lstStyle/>
-                    <a:p>
-                      <a:pPr algn="ctr"/>
-                      <a:r>
-                        <a:rPr lang="en-US" dirty="0"/>
-                        <a:t>0.95</a:t>
-                      </a:r>
-                    </a:p>
-                  </a:txBody>
-                  <a:tcPr/>
-                </a:tc>
-                <a:extLst>
-                  <a:ext uri="{0D108BD9-81ED-4DB2-BD59-A6C34878D82A}">
-                    <a16:rowId xmlns:a16="http://schemas.microsoft.com/office/drawing/2014/main" val="122529026"/>
-                  </a:ext>
-                </a:extLst>
-              </a:tr>
-              <a:tr h="258046">
-                <a:tc>
-                  <a:txBody>
-                    <a:bodyPr/>
-                    <a:lstStyle/>
-                    <a:p>
-                      <a:pPr algn="ctr"/>
-                      <a:r>
-                        <a:rPr lang="en-US" dirty="0"/>
-                        <a:t>13</a:t>
-                      </a:r>
-                    </a:p>
-                  </a:txBody>
-                  <a:tcPr/>
-                </a:tc>
-                <a:tc>
-                  <a:txBody>
-                    <a:bodyPr/>
-                    <a:lstStyle/>
-                    <a:p>
-                      <a:pPr algn="ctr"/>
-                      <a:r>
-                        <a:rPr lang="en-US" dirty="0"/>
-                        <a:t>0.93</a:t>
-                      </a:r>
-                    </a:p>
-                  </a:txBody>
-                  <a:tcPr/>
-                </a:tc>
-                <a:extLst>
-                  <a:ext uri="{0D108BD9-81ED-4DB2-BD59-A6C34878D82A}">
-                    <a16:rowId xmlns:a16="http://schemas.microsoft.com/office/drawing/2014/main" val="4025916763"/>
-                  </a:ext>
-                </a:extLst>
-              </a:tr>
-              <a:tr h="258046">
-                <a:tc>
-                  <a:txBody>
-                    <a:bodyPr/>
-                    <a:lstStyle/>
-                    <a:p>
-                      <a:pPr algn="ctr"/>
-                      <a:r>
-                        <a:rPr lang="en-US" dirty="0"/>
-                        <a:t>1</a:t>
-                      </a:r>
-                    </a:p>
-                  </a:txBody>
-                  <a:tcPr/>
-                </a:tc>
-                <a:tc>
-                  <a:txBody>
-                    <a:bodyPr/>
-                    <a:lstStyle/>
-                    <a:p>
-                      <a:pPr algn="ctr"/>
-                      <a:r>
-                        <a:rPr lang="en-US" dirty="0"/>
-                        <a:t>0.89</a:t>
-                      </a:r>
-                    </a:p>
-                  </a:txBody>
-                  <a:tcPr/>
-                </a:tc>
-                <a:extLst>
-                  <a:ext uri="{0D108BD9-81ED-4DB2-BD59-A6C34878D82A}">
-                    <a16:rowId xmlns:a16="http://schemas.microsoft.com/office/drawing/2014/main" val="2323964280"/>
-                  </a:ext>
-                </a:extLst>
-              </a:tr>
-              <a:tr h="258046">
-                <a:tc>
-                  <a:txBody>
-                    <a:bodyPr/>
-                    <a:lstStyle/>
-                    <a:p>
-                      <a:pPr algn="ctr"/>
-                      <a:r>
-                        <a:rPr lang="en-US" dirty="0"/>
-                        <a:t>93</a:t>
-                      </a:r>
-                    </a:p>
-                  </a:txBody>
-                  <a:tcPr/>
-                </a:tc>
-                <a:tc>
-                  <a:txBody>
-                    <a:bodyPr/>
-                    <a:lstStyle/>
-                    <a:p>
-                      <a:pPr algn="ctr"/>
-                      <a:r>
-                        <a:rPr lang="en-US" dirty="0"/>
-                        <a:t>0.89</a:t>
-                      </a:r>
-                    </a:p>
-                  </a:txBody>
-                  <a:tcPr/>
-                </a:tc>
-                <a:extLst>
-                  <a:ext uri="{0D108BD9-81ED-4DB2-BD59-A6C34878D82A}">
-                    <a16:rowId xmlns:a16="http://schemas.microsoft.com/office/drawing/2014/main" val="2948836163"/>
-                  </a:ext>
-                </a:extLst>
-              </a:tr>
-              <a:tr h="258046">
-                <a:tc>
-                  <a:txBody>
-                    <a:bodyPr/>
-                    <a:lstStyle/>
-                    <a:p>
-                      <a:pPr algn="ctr"/>
-                      <a:r>
-                        <a:rPr lang="en-US" dirty="0"/>
-                        <a:t>53</a:t>
-                      </a:r>
-                    </a:p>
-                  </a:txBody>
-                  <a:tcPr/>
-                </a:tc>
-                <a:tc>
-                  <a:txBody>
-                    <a:bodyPr/>
-                    <a:lstStyle/>
-                    <a:p>
-                      <a:pPr algn="ctr"/>
-                      <a:r>
-                        <a:rPr lang="en-US" dirty="0"/>
-                        <a:t>0.82</a:t>
-                      </a:r>
-                    </a:p>
-                  </a:txBody>
-                  <a:tcPr/>
-                </a:tc>
-                <a:extLst>
-                  <a:ext uri="{0D108BD9-81ED-4DB2-BD59-A6C34878D82A}">
-                    <a16:rowId xmlns:a16="http://schemas.microsoft.com/office/drawing/2014/main" val="1952042522"/>
-                  </a:ext>
-                </a:extLst>
-              </a:tr>
-              <a:tr h="258046">
-                <a:tc>
-                  <a:txBody>
-                    <a:bodyPr/>
-                    <a:lstStyle/>
-                    <a:p>
-                      <a:pPr algn="ctr"/>
-                      <a:r>
-                        <a:rPr lang="en-US" dirty="0"/>
-                        <a:t>23</a:t>
-                      </a:r>
-                    </a:p>
-                  </a:txBody>
-                  <a:tcPr/>
-                </a:tc>
-                <a:tc>
-                  <a:txBody>
-                    <a:bodyPr/>
-                    <a:lstStyle/>
-                    <a:p>
-                      <a:pPr algn="ctr"/>
-                      <a:r>
-                        <a:rPr lang="en-US" dirty="0"/>
-                        <a:t>0.75</a:t>
-                      </a:r>
-                    </a:p>
-                  </a:txBody>
-                  <a:tcPr/>
-                </a:tc>
-                <a:extLst>
-                  <a:ext uri="{0D108BD9-81ED-4DB2-BD59-A6C34878D82A}">
-                    <a16:rowId xmlns:a16="http://schemas.microsoft.com/office/drawing/2014/main" val="974555594"/>
-                  </a:ext>
-                </a:extLst>
-              </a:tr>
-              <a:tr h="258046">
-                <a:tc>
-                  <a:txBody>
-                    <a:bodyPr/>
-                    <a:lstStyle/>
-                    <a:p>
-                      <a:pPr algn="ctr"/>
-                      <a:r>
-                        <a:rPr lang="en-US" dirty="0"/>
-                        <a:t>59</a:t>
-                      </a:r>
-                    </a:p>
-                  </a:txBody>
-                  <a:tcPr/>
-                </a:tc>
-                <a:tc>
-                  <a:txBody>
-                    <a:bodyPr/>
-                    <a:lstStyle/>
-                    <a:p>
-                      <a:pPr algn="ctr"/>
-                      <a:r>
-                        <a:rPr lang="en-US" dirty="0"/>
-                        <a:t>0.72</a:t>
-                      </a:r>
-                    </a:p>
-                  </a:txBody>
-                  <a:tcPr/>
-                </a:tc>
-                <a:extLst>
-                  <a:ext uri="{0D108BD9-81ED-4DB2-BD59-A6C34878D82A}">
-                    <a16:rowId xmlns:a16="http://schemas.microsoft.com/office/drawing/2014/main" val="3832195445"/>
-                  </a:ext>
-                </a:extLst>
-              </a:tr>
-              <a:tr h="258046">
-                <a:tc>
-                  <a:txBody>
-                    <a:bodyPr/>
-                    <a:lstStyle/>
-                    <a:p>
-                      <a:pPr algn="ctr"/>
-                      <a:r>
-                        <a:rPr lang="en-US" dirty="0"/>
-                        <a:t>64</a:t>
-                      </a:r>
-                    </a:p>
-                  </a:txBody>
-                  <a:tcPr/>
-                </a:tc>
-                <a:tc>
-                  <a:txBody>
-                    <a:bodyPr/>
-                    <a:lstStyle/>
-                    <a:p>
-                      <a:pPr algn="ctr"/>
-                      <a:r>
-                        <a:rPr lang="en-US" dirty="0"/>
-                        <a:t>0.65</a:t>
-                      </a:r>
-                    </a:p>
-                  </a:txBody>
-                  <a:tcPr/>
-                </a:tc>
-                <a:extLst>
-                  <a:ext uri="{0D108BD9-81ED-4DB2-BD59-A6C34878D82A}">
-                    <a16:rowId xmlns:a16="http://schemas.microsoft.com/office/drawing/2014/main" val="1564902966"/>
-                  </a:ext>
-                </a:extLst>
-              </a:tr>
-              <a:tr h="258046">
-                <a:tc>
-                  <a:txBody>
-                    <a:bodyPr/>
-                    <a:lstStyle/>
-                    <a:p>
-                      <a:pPr algn="ctr"/>
-                      <a:r>
-                        <a:rPr lang="en-US" dirty="0"/>
-                        <a:t>20</a:t>
-                      </a:r>
-                    </a:p>
-                  </a:txBody>
-                  <a:tcPr/>
-                </a:tc>
-                <a:tc>
-                  <a:txBody>
-                    <a:bodyPr/>
-                    <a:lstStyle/>
-                    <a:p>
-                      <a:pPr algn="ctr"/>
-                      <a:r>
-                        <a:rPr lang="en-US" dirty="0"/>
-                        <a:t>0.61</a:t>
-                      </a:r>
-                    </a:p>
-                  </a:txBody>
-                  <a:tcPr/>
-                </a:tc>
-                <a:extLst>
-                  <a:ext uri="{0D108BD9-81ED-4DB2-BD59-A6C34878D82A}">
-                    <a16:rowId xmlns:a16="http://schemas.microsoft.com/office/drawing/2014/main" val="1650052668"/>
-                  </a:ext>
-                </a:extLst>
-              </a:tr>
-              <a:tr h="258046">
-                <a:tc>
-                  <a:txBody>
-                    <a:bodyPr/>
-                    <a:lstStyle/>
-                    <a:p>
-                      <a:pPr algn="ctr"/>
-                      <a:r>
-                        <a:rPr lang="en-US" dirty="0"/>
-                        <a:t>18</a:t>
-                      </a:r>
-                    </a:p>
-                  </a:txBody>
-                  <a:tcPr/>
-                </a:tc>
-                <a:tc>
-                  <a:txBody>
-                    <a:bodyPr/>
-                    <a:lstStyle/>
-                    <a:p>
-                      <a:pPr algn="ctr"/>
-                      <a:r>
-                        <a:rPr lang="en-US" dirty="0"/>
-                        <a:t>0.59</a:t>
-                      </a:r>
-                    </a:p>
-                  </a:txBody>
-                  <a:tcPr/>
-                </a:tc>
-                <a:extLst>
-                  <a:ext uri="{0D108BD9-81ED-4DB2-BD59-A6C34878D82A}">
-                    <a16:rowId xmlns:a16="http://schemas.microsoft.com/office/drawing/2014/main" val="1045450806"/>
-                  </a:ext>
-                </a:extLst>
-              </a:tr>
-              <a:tr h="258046">
-                <a:tc>
-                  <a:txBody>
-                    <a:bodyPr/>
-                    <a:lstStyle/>
-                    <a:p>
-                      <a:pPr algn="ctr"/>
-                      <a:r>
-                        <a:rPr lang="en-US" dirty="0"/>
-                        <a:t>46</a:t>
-                      </a:r>
-                    </a:p>
-                  </a:txBody>
-                  <a:tcPr/>
-                </a:tc>
-                <a:tc>
-                  <a:txBody>
-                    <a:bodyPr/>
-                    <a:lstStyle/>
-                    <a:p>
-                      <a:pPr algn="ctr"/>
-                      <a:r>
-                        <a:rPr lang="en-US" dirty="0"/>
-                        <a:t>0.52</a:t>
-                      </a:r>
-                    </a:p>
-                  </a:txBody>
-                  <a:tcPr/>
-                </a:tc>
-                <a:extLst>
-                  <a:ext uri="{0D108BD9-81ED-4DB2-BD59-A6C34878D82A}">
-                    <a16:rowId xmlns:a16="http://schemas.microsoft.com/office/drawing/2014/main" val="2499045432"/>
-                  </a:ext>
-                </a:extLst>
-              </a:tr>
-              <a:tr h="258046">
-                <a:tc>
-                  <a:txBody>
-                    <a:bodyPr/>
-                    <a:lstStyle/>
-                    <a:p>
-                      <a:pPr algn="ctr"/>
-                      <a:r>
-                        <a:rPr lang="en-US" dirty="0"/>
-                        <a:t>82</a:t>
-                      </a:r>
-                    </a:p>
-                  </a:txBody>
-                  <a:tcPr/>
-                </a:tc>
-                <a:tc>
-                  <a:txBody>
-                    <a:bodyPr/>
-                    <a:lstStyle/>
-                    <a:p>
-                      <a:pPr algn="ctr"/>
-                      <a:r>
-                        <a:rPr lang="en-US" dirty="0"/>
-                        <a:t>0.48</a:t>
-                      </a:r>
-                    </a:p>
-                  </a:txBody>
-                  <a:tcPr/>
-                </a:tc>
-                <a:extLst>
-                  <a:ext uri="{0D108BD9-81ED-4DB2-BD59-A6C34878D82A}">
-                    <a16:rowId xmlns:a16="http://schemas.microsoft.com/office/drawing/2014/main" val="4231666519"/>
-                  </a:ext>
-                </a:extLst>
-              </a:tr>
-              <a:tr h="258046">
-                <a:tc>
-                  <a:txBody>
-                    <a:bodyPr/>
-                    <a:lstStyle/>
-                    <a:p>
-                      <a:pPr algn="ctr"/>
-                      <a:r>
-                        <a:rPr lang="en-US" dirty="0"/>
-                        <a:t>49</a:t>
-                      </a:r>
-                    </a:p>
-                  </a:txBody>
-                  <a:tcPr/>
-                </a:tc>
-                <a:tc>
-                  <a:txBody>
-                    <a:bodyPr/>
-                    <a:lstStyle/>
-                    <a:p>
-                      <a:pPr algn="ctr"/>
-                      <a:r>
-                        <a:rPr lang="en-US" dirty="0"/>
-                        <a:t>0.37</a:t>
-                      </a:r>
-                    </a:p>
-                  </a:txBody>
-                  <a:tcPr/>
-                </a:tc>
-                <a:extLst>
-                  <a:ext uri="{0D108BD9-81ED-4DB2-BD59-A6C34878D82A}">
-                    <a16:rowId xmlns:a16="http://schemas.microsoft.com/office/drawing/2014/main" val="1155732854"/>
-                  </a:ext>
-                </a:extLst>
-              </a:tr>
-              <a:tr h="258046">
-                <a:tc>
-                  <a:txBody>
-                    <a:bodyPr/>
-                    <a:lstStyle/>
-                    <a:p>
-                      <a:pPr algn="ctr"/>
-                      <a:r>
-                        <a:rPr lang="en-US" dirty="0"/>
-                        <a:t>56</a:t>
-                      </a:r>
-                    </a:p>
-                  </a:txBody>
-                  <a:tcPr/>
-                </a:tc>
-                <a:tc>
-                  <a:txBody>
-                    <a:bodyPr/>
-                    <a:lstStyle/>
-                    <a:p>
-                      <a:pPr algn="ctr"/>
-                      <a:r>
-                        <a:rPr lang="en-US" dirty="0"/>
-                        <a:t>0.22</a:t>
-                      </a:r>
-                    </a:p>
-                  </a:txBody>
-                  <a:tcPr/>
-                </a:tc>
-                <a:extLst>
-                  <a:ext uri="{0D108BD9-81ED-4DB2-BD59-A6C34878D82A}">
-                    <a16:rowId xmlns:a16="http://schemas.microsoft.com/office/drawing/2014/main" val="2603839184"/>
-                  </a:ext>
-                </a:extLst>
-              </a:tr>
-              <a:tr h="258046">
-                <a:tc>
-                  <a:txBody>
-                    <a:bodyPr/>
-                    <a:lstStyle/>
-                    <a:p>
-                      <a:pPr algn="ctr"/>
-                      <a:r>
-                        <a:rPr lang="en-US" dirty="0"/>
-                        <a:t>17</a:t>
-                      </a:r>
-                    </a:p>
-                  </a:txBody>
-                  <a:tcPr/>
-                </a:tc>
-                <a:tc>
-                  <a:txBody>
-                    <a:bodyPr/>
-                    <a:lstStyle/>
-                    <a:p>
-                      <a:pPr algn="ctr"/>
-                      <a:r>
-                        <a:rPr lang="en-US" dirty="0"/>
-                        <a:t>0.12</a:t>
-                      </a:r>
-                    </a:p>
-                  </a:txBody>
-                  <a:tcPr/>
-                </a:tc>
-                <a:extLst>
-                  <a:ext uri="{0D108BD9-81ED-4DB2-BD59-A6C34878D82A}">
-                    <a16:rowId xmlns:a16="http://schemas.microsoft.com/office/drawing/2014/main" val="14563681"/>
-                  </a:ext>
-                </a:extLst>
-              </a:tr>
-            </a:tbl>
-          </a:graphicData>
-        </a:graphic>
-      </p:graphicFrame>
-      <p:sp>
-        <p:nvSpPr>
-          <p:cNvPr id="6" name="Right Arrow 5">
-            <a:extLst>
-              <a:ext uri="{FF2B5EF4-FFF2-40B4-BE49-F238E27FC236}">
-                <a16:creationId xmlns:a16="http://schemas.microsoft.com/office/drawing/2014/main" id="{9B6C0F7E-394D-C849-AEEA-57F9432B58C8}"/>
-              </a:ext>
-            </a:extLst>
-          </p:cNvPr>
-          <p:cNvSpPr/>
-          <p:nvPr/>
-        </p:nvSpPr>
-        <p:spPr>
-          <a:xfrm>
-            <a:off x="3454203" y="4622104"/>
-            <a:ext cx="1916392" cy="350729"/>
-          </a:xfrm>
-          <a:prstGeom prst="rightArrow">
-            <a:avLst/>
-          </a:prstGeom>
-          <a:solidFill>
-            <a:srgbClr val="0070C0"/>
-          </a:solidFill>
-          <a:ln>
-            <a:noFill/>
-          </a:ln>
-        </p:spPr>
-        <p:style>
-          <a:lnRef idx="2">
-            <a:schemeClr val="accent1">
-              <a:shade val="50000"/>
-            </a:schemeClr>
-          </a:lnRef>
-          <a:fillRef idx="1">
-            <a:schemeClr val="accent1"/>
-          </a:fillRef>
-          <a:effectRef idx="0">
-            <a:schemeClr val="accent1"/>
-          </a:effectRef>
-          <a:fontRef idx="minor">
-            <a:schemeClr val="lt1"/>
-          </a:fontRef>
-        </p:style>
-        <p:txBody>
-          <a:bodyPr rtlCol="0" anchor="ctr"/>
-          <a:lstStyle/>
-          <a:p>
-            <a:pPr algn="ctr"/>
-            <a:endParaRPr lang="en-US"/>
-          </a:p>
-        </p:txBody>
-      </p:sp>
-      <p:sp>
-        <p:nvSpPr>
-          <p:cNvPr id="40" name="TextBox 39">
-            <a:extLst>
-              <a:ext uri="{FF2B5EF4-FFF2-40B4-BE49-F238E27FC236}">
-                <a16:creationId xmlns:a16="http://schemas.microsoft.com/office/drawing/2014/main" id="{CD8EA7B6-012E-3340-9E87-E323487E7303}"/>
-              </a:ext>
-            </a:extLst>
-          </p:cNvPr>
-          <p:cNvSpPr txBox="1"/>
-          <p:nvPr/>
-        </p:nvSpPr>
-        <p:spPr>
-          <a:xfrm>
-            <a:off x="3696510" y="3272099"/>
-            <a:ext cx="1141659" cy="461665"/>
-          </a:xfrm>
-          <a:prstGeom prst="rect">
-            <a:avLst/>
-          </a:prstGeom>
-          <a:noFill/>
-        </p:spPr>
-        <p:txBody>
-          <a:bodyPr wrap="none" rtlCol="0">
-            <a:spAutoFit/>
-          </a:bodyPr>
-          <a:lstStyle/>
-          <a:p>
-            <a:r>
-              <a:rPr lang="en-US" sz="2400" dirty="0">
-                <a:latin typeface="Century Gothic" panose="020B0502020202020204" pitchFamily="34" charset="0"/>
-              </a:rPr>
-              <a:t>Model</a:t>
-            </a:r>
-          </a:p>
-        </p:txBody>
-      </p:sp>
-      <p:sp>
-        <p:nvSpPr>
-          <p:cNvPr id="41" name="TextBox 40">
-            <a:extLst>
-              <a:ext uri="{FF2B5EF4-FFF2-40B4-BE49-F238E27FC236}">
-                <a16:creationId xmlns:a16="http://schemas.microsoft.com/office/drawing/2014/main" id="{FE13169F-ADA2-914B-8C32-2AD6FA04C976}"/>
-              </a:ext>
-            </a:extLst>
-          </p:cNvPr>
-          <p:cNvSpPr txBox="1"/>
-          <p:nvPr/>
-        </p:nvSpPr>
-        <p:spPr>
-          <a:xfrm>
-            <a:off x="4955885" y="1187209"/>
-            <a:ext cx="2709396" cy="461665"/>
-          </a:xfrm>
-          <a:prstGeom prst="rect">
-            <a:avLst/>
-          </a:prstGeom>
-          <a:noFill/>
-        </p:spPr>
-        <p:txBody>
-          <a:bodyPr wrap="none" rtlCol="0">
-            <a:spAutoFit/>
-          </a:bodyPr>
-          <a:lstStyle/>
-          <a:p>
-            <a:r>
-              <a:rPr lang="en-US" sz="2400" dirty="0">
-                <a:latin typeface="Century Gothic" panose="020B0502020202020204" pitchFamily="34" charset="0"/>
-              </a:rPr>
-              <a:t>Return to Jail Risk</a:t>
-            </a:r>
-          </a:p>
-        </p:txBody>
-      </p:sp>
-      <p:sp>
-        <p:nvSpPr>
-          <p:cNvPr id="7" name="Rectangle 6">
-            <a:extLst>
-              <a:ext uri="{FF2B5EF4-FFF2-40B4-BE49-F238E27FC236}">
-                <a16:creationId xmlns:a16="http://schemas.microsoft.com/office/drawing/2014/main" id="{81BFFD78-6ACB-084C-8897-FB70032B66B3}"/>
-              </a:ext>
-            </a:extLst>
-          </p:cNvPr>
-          <p:cNvSpPr/>
-          <p:nvPr/>
-        </p:nvSpPr>
-        <p:spPr>
-          <a:xfrm>
-            <a:off x="5370595" y="2129425"/>
-            <a:ext cx="1667098" cy="1481455"/>
-          </a:xfrm>
-          <a:prstGeom prst="rect">
-            <a:avLst/>
-          </a:prstGeom>
-          <a:noFill/>
-          <a:ln w="76200">
-            <a:solidFill>
-              <a:srgbClr val="FFC000"/>
-            </a:solidFill>
-          </a:ln>
-        </p:spPr>
-        <p:style>
-          <a:lnRef idx="2">
-            <a:schemeClr val="accent1">
-              <a:shade val="50000"/>
-            </a:schemeClr>
-          </a:lnRef>
-          <a:fillRef idx="1">
-            <a:schemeClr val="accent1"/>
-          </a:fillRef>
-          <a:effectRef idx="0">
-            <a:schemeClr val="accent1"/>
-          </a:effectRef>
-          <a:fontRef idx="minor">
-            <a:schemeClr val="lt1"/>
-          </a:fontRef>
-        </p:style>
-        <p:txBody>
-          <a:bodyPr rtlCol="0" anchor="ctr"/>
-          <a:lstStyle/>
-          <a:p>
-            <a:pPr algn="ctr"/>
-            <a:endParaRPr lang="en-US"/>
-          </a:p>
-        </p:txBody>
-      </p:sp>
-      <p:sp>
-        <p:nvSpPr>
-          <p:cNvPr id="42" name="Right Arrow 41">
-            <a:extLst>
-              <a:ext uri="{FF2B5EF4-FFF2-40B4-BE49-F238E27FC236}">
-                <a16:creationId xmlns:a16="http://schemas.microsoft.com/office/drawing/2014/main" id="{B29C028E-CDA4-604B-9B8F-64BDD06881B5}"/>
-              </a:ext>
-            </a:extLst>
-          </p:cNvPr>
-          <p:cNvSpPr/>
-          <p:nvPr/>
-        </p:nvSpPr>
-        <p:spPr>
-          <a:xfrm>
-            <a:off x="7049963" y="2694787"/>
-            <a:ext cx="1943723" cy="350729"/>
-          </a:xfrm>
-          <a:prstGeom prst="rightArrow">
-            <a:avLst/>
-          </a:prstGeom>
-          <a:solidFill>
-            <a:srgbClr val="FFC000"/>
-          </a:solidFill>
-          <a:ln>
-            <a:noFill/>
-          </a:ln>
-        </p:spPr>
-        <p:style>
-          <a:lnRef idx="2">
-            <a:schemeClr val="accent1">
-              <a:shade val="50000"/>
-            </a:schemeClr>
-          </a:lnRef>
-          <a:fillRef idx="1">
-            <a:schemeClr val="accent1"/>
-          </a:fillRef>
-          <a:effectRef idx="0">
-            <a:schemeClr val="accent1"/>
-          </a:effectRef>
-          <a:fontRef idx="minor">
-            <a:schemeClr val="lt1"/>
-          </a:fontRef>
-        </p:style>
-        <p:txBody>
-          <a:bodyPr rtlCol="0" anchor="ctr"/>
-          <a:lstStyle/>
-          <a:p>
-            <a:pPr algn="ctr"/>
-            <a:endParaRPr lang="en-US"/>
-          </a:p>
-        </p:txBody>
-      </p:sp>
-      <p:sp>
-        <p:nvSpPr>
-          <p:cNvPr id="44" name="Google Shape;75;p10">
-            <a:extLst>
-              <a:ext uri="{FF2B5EF4-FFF2-40B4-BE49-F238E27FC236}">
-                <a16:creationId xmlns:a16="http://schemas.microsoft.com/office/drawing/2014/main" id="{80248251-D983-E945-852F-13ECC4C7A7A1}"/>
-              </a:ext>
-            </a:extLst>
-          </p:cNvPr>
-          <p:cNvSpPr/>
-          <p:nvPr/>
-        </p:nvSpPr>
-        <p:spPr>
-          <a:xfrm>
-            <a:off x="8993687" y="2293565"/>
-            <a:ext cx="1981242" cy="1153172"/>
-          </a:xfrm>
-          <a:prstGeom prst="rect">
-            <a:avLst/>
-          </a:prstGeom>
-          <a:solidFill>
-            <a:schemeClr val="lt2"/>
-          </a:solidFill>
-          <a:ln w="9525" cap="flat" cmpd="sng">
-            <a:solidFill>
-              <a:schemeClr val="dk2"/>
-            </a:solidFill>
-            <a:prstDash val="solid"/>
-            <a:round/>
-            <a:headEnd type="none" w="sm" len="sm"/>
-            <a:tailEnd type="none" w="sm" len="sm"/>
-          </a:ln>
-        </p:spPr>
-        <p:txBody>
-          <a:bodyPr spcFirstLastPara="1" wrap="square" lIns="121900" tIns="121900" rIns="121900" bIns="121900" anchor="ctr" anchorCtr="0">
-            <a:noAutofit/>
-          </a:bodyPr>
-          <a:lstStyle/>
-          <a:p>
-            <a:pPr algn="ctr"/>
-            <a:endParaRPr sz="1867" dirty="0">
-              <a:latin typeface="Century Gothic"/>
-              <a:ea typeface="Century Gothic"/>
-              <a:cs typeface="Century Gothic"/>
-              <a:sym typeface="Century Gothic"/>
-            </a:endParaRPr>
-          </a:p>
-        </p:txBody>
-      </p:sp>
-      <p:sp>
-        <p:nvSpPr>
-          <p:cNvPr id="45" name="TextBox 44">
-            <a:extLst>
-              <a:ext uri="{FF2B5EF4-FFF2-40B4-BE49-F238E27FC236}">
-                <a16:creationId xmlns:a16="http://schemas.microsoft.com/office/drawing/2014/main" id="{E4819DD2-A9C7-A543-9B48-E32CF949C9FE}"/>
-              </a:ext>
-            </a:extLst>
-          </p:cNvPr>
-          <p:cNvSpPr txBox="1"/>
-          <p:nvPr/>
-        </p:nvSpPr>
-        <p:spPr>
-          <a:xfrm>
-            <a:off x="9167417" y="2310364"/>
-            <a:ext cx="1633781" cy="1200329"/>
-          </a:xfrm>
-          <a:prstGeom prst="rect">
-            <a:avLst/>
-          </a:prstGeom>
-          <a:noFill/>
-        </p:spPr>
-        <p:txBody>
-          <a:bodyPr wrap="none" rtlCol="0">
-            <a:spAutoFit/>
-          </a:bodyPr>
-          <a:lstStyle/>
-          <a:p>
-            <a:pPr algn="ctr"/>
-            <a:r>
-              <a:rPr lang="en-US" sz="2400" dirty="0">
-                <a:latin typeface="Century Gothic" panose="020B0502020202020204" pitchFamily="34" charset="0"/>
-              </a:rPr>
-              <a:t>Mental</a:t>
-            </a:r>
-          </a:p>
-          <a:p>
-            <a:pPr algn="ctr"/>
-            <a:r>
-              <a:rPr lang="en-US" sz="2400" dirty="0">
-                <a:latin typeface="Century Gothic" panose="020B0502020202020204" pitchFamily="34" charset="0"/>
-              </a:rPr>
-              <a:t>Health</a:t>
-            </a:r>
-          </a:p>
-          <a:p>
-            <a:pPr algn="ctr"/>
-            <a:r>
-              <a:rPr lang="en-US" sz="2400" dirty="0">
-                <a:latin typeface="Century Gothic" panose="020B0502020202020204" pitchFamily="34" charset="0"/>
-              </a:rPr>
-              <a:t>Outreach</a:t>
-            </a:r>
-          </a:p>
-        </p:txBody>
-      </p:sp>
-      <p:sp>
-        <p:nvSpPr>
-          <p:cNvPr id="46" name="Google Shape;75;p10">
-            <a:extLst>
-              <a:ext uri="{FF2B5EF4-FFF2-40B4-BE49-F238E27FC236}">
-                <a16:creationId xmlns:a16="http://schemas.microsoft.com/office/drawing/2014/main" id="{162E5AA6-9B51-DD4C-9E71-D5D0C0DE7EEC}"/>
-              </a:ext>
-            </a:extLst>
-          </p:cNvPr>
-          <p:cNvSpPr/>
-          <p:nvPr/>
-        </p:nvSpPr>
-        <p:spPr>
-          <a:xfrm>
-            <a:off x="9020826" y="4644025"/>
-            <a:ext cx="1981242" cy="1153172"/>
-          </a:xfrm>
-          <a:prstGeom prst="rect">
-            <a:avLst/>
-          </a:prstGeom>
-          <a:solidFill>
-            <a:schemeClr val="lt2"/>
-          </a:solidFill>
-          <a:ln w="9525" cap="flat" cmpd="sng">
-            <a:solidFill>
-              <a:schemeClr val="dk2"/>
-            </a:solidFill>
-            <a:prstDash val="solid"/>
-            <a:round/>
-            <a:headEnd type="none" w="sm" len="sm"/>
-            <a:tailEnd type="none" w="sm" len="sm"/>
-          </a:ln>
-        </p:spPr>
-        <p:txBody>
-          <a:bodyPr spcFirstLastPara="1" wrap="square" lIns="121900" tIns="121900" rIns="121900" bIns="121900" anchor="ctr" anchorCtr="0">
-            <a:noAutofit/>
-          </a:bodyPr>
-          <a:lstStyle/>
-          <a:p>
-            <a:pPr algn="ctr"/>
-            <a:endParaRPr sz="1867" dirty="0">
-              <a:latin typeface="Century Gothic"/>
-              <a:ea typeface="Century Gothic"/>
-              <a:cs typeface="Century Gothic"/>
-              <a:sym typeface="Century Gothic"/>
-            </a:endParaRPr>
-          </a:p>
-        </p:txBody>
-      </p:sp>
-      <p:sp>
-        <p:nvSpPr>
-          <p:cNvPr id="47" name="TextBox 46">
-            <a:extLst>
-              <a:ext uri="{FF2B5EF4-FFF2-40B4-BE49-F238E27FC236}">
-                <a16:creationId xmlns:a16="http://schemas.microsoft.com/office/drawing/2014/main" id="{2153B0C9-A395-0D4E-9870-A399AAC450A3}"/>
-              </a:ext>
-            </a:extLst>
-          </p:cNvPr>
-          <p:cNvSpPr txBox="1"/>
-          <p:nvPr/>
-        </p:nvSpPr>
-        <p:spPr>
-          <a:xfrm>
-            <a:off x="9265200" y="4811209"/>
-            <a:ext cx="1535998" cy="830997"/>
-          </a:xfrm>
-          <a:prstGeom prst="rect">
-            <a:avLst/>
-          </a:prstGeom>
-          <a:noFill/>
-        </p:spPr>
-        <p:txBody>
-          <a:bodyPr wrap="none" rtlCol="0">
-            <a:spAutoFit/>
-          </a:bodyPr>
-          <a:lstStyle/>
-          <a:p>
-            <a:pPr algn="ctr"/>
-            <a:r>
-              <a:rPr lang="en-US" sz="2400" dirty="0">
-                <a:latin typeface="Century Gothic" panose="020B0502020202020204" pitchFamily="34" charset="0"/>
-              </a:rPr>
-              <a:t>Return to</a:t>
-            </a:r>
-          </a:p>
-          <a:p>
-            <a:pPr algn="ctr"/>
-            <a:r>
-              <a:rPr lang="en-US" sz="2400" dirty="0">
-                <a:latin typeface="Century Gothic" panose="020B0502020202020204" pitchFamily="34" charset="0"/>
-              </a:rPr>
-              <a:t>Jail</a:t>
-            </a:r>
-          </a:p>
-        </p:txBody>
-      </p:sp>
-      <p:sp>
-        <p:nvSpPr>
-          <p:cNvPr id="48" name="Right Arrow 47">
-            <a:extLst>
-              <a:ext uri="{FF2B5EF4-FFF2-40B4-BE49-F238E27FC236}">
-                <a16:creationId xmlns:a16="http://schemas.microsoft.com/office/drawing/2014/main" id="{703A189E-3971-8841-B588-03762A073818}"/>
-              </a:ext>
-            </a:extLst>
-          </p:cNvPr>
-          <p:cNvSpPr/>
-          <p:nvPr/>
-        </p:nvSpPr>
-        <p:spPr>
-          <a:xfrm rot="5400000">
-            <a:off x="9467615" y="3882766"/>
-            <a:ext cx="1033382" cy="350729"/>
-          </a:xfrm>
-          <a:prstGeom prst="rightArrow">
-            <a:avLst/>
-          </a:prstGeom>
-          <a:solidFill>
-            <a:schemeClr val="tx2">
-              <a:lumMod val="75000"/>
-            </a:schemeClr>
-          </a:solidFill>
-          <a:ln>
-            <a:noFill/>
-          </a:ln>
-        </p:spPr>
-        <p:style>
-          <a:lnRef idx="2">
-            <a:schemeClr val="accent1">
-              <a:shade val="50000"/>
-            </a:schemeClr>
-          </a:lnRef>
-          <a:fillRef idx="1">
-            <a:schemeClr val="accent1"/>
-          </a:fillRef>
-          <a:effectRef idx="0">
-            <a:schemeClr val="accent1"/>
-          </a:effectRef>
-          <a:fontRef idx="minor">
-            <a:schemeClr val="lt1"/>
-          </a:fontRef>
-        </p:style>
-        <p:txBody>
-          <a:bodyPr rtlCol="0" anchor="ctr"/>
-          <a:lstStyle/>
-          <a:p>
-            <a:pPr algn="ctr"/>
-            <a:endParaRPr lang="en-US"/>
-          </a:p>
-        </p:txBody>
-      </p:sp>
-      <p:sp>
-        <p:nvSpPr>
-          <p:cNvPr id="49" name="TextBox 48">
-            <a:extLst>
-              <a:ext uri="{FF2B5EF4-FFF2-40B4-BE49-F238E27FC236}">
-                <a16:creationId xmlns:a16="http://schemas.microsoft.com/office/drawing/2014/main" id="{C40228CA-82BC-764B-B936-59C954EB3F4A}"/>
-              </a:ext>
-            </a:extLst>
-          </p:cNvPr>
-          <p:cNvSpPr txBox="1"/>
-          <p:nvPr/>
-        </p:nvSpPr>
-        <p:spPr>
-          <a:xfrm>
-            <a:off x="9635492" y="3446737"/>
-            <a:ext cx="697627" cy="1015663"/>
-          </a:xfrm>
-          <a:prstGeom prst="rect">
-            <a:avLst/>
-          </a:prstGeom>
-          <a:noFill/>
-        </p:spPr>
-        <p:txBody>
-          <a:bodyPr wrap="none" rtlCol="0">
-            <a:spAutoFit/>
-          </a:bodyPr>
-          <a:lstStyle/>
-          <a:p>
-            <a:r>
-              <a:rPr lang="en-US" sz="6000" dirty="0">
-                <a:solidFill>
-                  <a:srgbClr val="FF0000"/>
-                </a:solidFill>
-              </a:rPr>
-              <a:t>X</a:t>
-            </a:r>
-          </a:p>
-        </p:txBody>
-      </p:sp>
-    </p:spTree>
-    <p:extLst>
-      <p:ext uri="{BB962C8B-B14F-4D97-AF65-F5344CB8AC3E}">
-        <p14:creationId xmlns:p14="http://schemas.microsoft.com/office/powerpoint/2010/main" val="701318457"/>
-      </p:ext>
-    </p:extLst>
-  </p:cSld>
-  <p:clrMapOvr>
-    <a:masterClrMapping/>
-  </p:clrMapOvr>
-</p:sld>
-</file>
-
-<file path=ppt/slides/slide11.xml><?xml version="1.0" encoding="utf-8"?>
-<p:sld xmlns:a="http://schemas.openxmlformats.org/drawingml/2006/main" xmlns:r="http://schemas.openxmlformats.org/officeDocument/2006/relationships" xmlns:p="http://schemas.openxmlformats.org/presentationml/2006/main">
-  <p:cSld>
-    <p:spTree>
-      <p:nvGrpSpPr>
-        <p:cNvPr id="1" name="Shape 1225"/>
-        <p:cNvGrpSpPr/>
-        <p:nvPr/>
-      </p:nvGrpSpPr>
-      <p:grpSpPr>
-        <a:xfrm>
-          <a:off x="0" y="0"/>
-          <a:ext cx="0" cy="0"/>
-          <a:chOff x="0" y="0"/>
-          <a:chExt cx="0" cy="0"/>
-        </a:xfrm>
-      </p:grpSpPr>
-      <p:sp>
-        <p:nvSpPr>
-          <p:cNvPr id="1226" name="Google Shape;1226;p142"/>
-          <p:cNvSpPr txBox="1">
-            <a:spLocks noGrp="1"/>
-          </p:cNvSpPr>
-          <p:nvPr>
-            <p:ph type="title"/>
-          </p:nvPr>
-        </p:nvSpPr>
-        <p:spPr>
-          <a:prstGeom prst="rect">
-            <a:avLst/>
-          </a:prstGeom>
-        </p:spPr>
-        <p:txBody>
-          <a:bodyPr spcFirstLastPara="1" wrap="square" lIns="121900" tIns="121900" rIns="121900" bIns="121900" anchor="ctr" anchorCtr="0">
-            <a:noAutofit/>
-          </a:bodyPr>
-          <a:lstStyle/>
-          <a:p>
-            <a:r>
-              <a:rPr lang="en-US" sz="3200" dirty="0"/>
-              <a:t>CASE STUDY: Mental Health and Incarceration</a:t>
-            </a:r>
-            <a:endParaRPr sz="3200" dirty="0"/>
-          </a:p>
-        </p:txBody>
-      </p:sp>
-      <p:sp>
-        <p:nvSpPr>
-          <p:cNvPr id="12" name="Google Shape;75;p10">
-            <a:extLst>
-              <a:ext uri="{FF2B5EF4-FFF2-40B4-BE49-F238E27FC236}">
-                <a16:creationId xmlns:a16="http://schemas.microsoft.com/office/drawing/2014/main" id="{8C379909-E112-AF40-AB06-F3DCE0D1D789}"/>
-              </a:ext>
-            </a:extLst>
-          </p:cNvPr>
-          <p:cNvSpPr/>
-          <p:nvPr/>
-        </p:nvSpPr>
-        <p:spPr>
-          <a:xfrm>
-            <a:off x="242315" y="1399344"/>
-            <a:ext cx="3352656" cy="4888721"/>
-          </a:xfrm>
-          <a:prstGeom prst="rect">
-            <a:avLst/>
-          </a:prstGeom>
-          <a:solidFill>
-            <a:schemeClr val="lt2"/>
-          </a:solidFill>
-          <a:ln w="9525" cap="flat" cmpd="sng">
-            <a:solidFill>
-              <a:schemeClr val="dk2"/>
-            </a:solidFill>
-            <a:prstDash val="solid"/>
-            <a:round/>
-            <a:headEnd type="none" w="sm" len="sm"/>
-            <a:tailEnd type="none" w="sm" len="sm"/>
-          </a:ln>
-        </p:spPr>
-        <p:txBody>
-          <a:bodyPr spcFirstLastPara="1" wrap="square" lIns="121900" tIns="121900" rIns="121900" bIns="121900" anchor="ctr" anchorCtr="0">
-            <a:noAutofit/>
-          </a:bodyPr>
-          <a:lstStyle/>
-          <a:p>
-            <a:pPr algn="ctr"/>
-            <a:endParaRPr sz="1867" dirty="0">
-              <a:latin typeface="Century Gothic"/>
-              <a:ea typeface="Century Gothic"/>
-              <a:cs typeface="Century Gothic"/>
-              <a:sym typeface="Century Gothic"/>
-            </a:endParaRPr>
-          </a:p>
-        </p:txBody>
-      </p:sp>
-      <p:sp>
-        <p:nvSpPr>
-          <p:cNvPr id="2" name="TextBox 1">
-            <a:extLst>
-              <a:ext uri="{FF2B5EF4-FFF2-40B4-BE49-F238E27FC236}">
-                <a16:creationId xmlns:a16="http://schemas.microsoft.com/office/drawing/2014/main" id="{624431EB-4D8A-1442-9803-AA95ADA5372B}"/>
-              </a:ext>
-            </a:extLst>
-          </p:cNvPr>
-          <p:cNvSpPr txBox="1"/>
-          <p:nvPr/>
-        </p:nvSpPr>
-        <p:spPr>
-          <a:xfrm>
-            <a:off x="415600" y="1479367"/>
-            <a:ext cx="2959465" cy="830997"/>
-          </a:xfrm>
-          <a:prstGeom prst="rect">
-            <a:avLst/>
-          </a:prstGeom>
-          <a:noFill/>
-        </p:spPr>
-        <p:txBody>
-          <a:bodyPr wrap="none" rtlCol="0">
-            <a:spAutoFit/>
-          </a:bodyPr>
-          <a:lstStyle/>
-          <a:p>
-            <a:r>
-              <a:rPr lang="en-US" sz="2400" dirty="0">
-                <a:latin typeface="Century Gothic" panose="020B0502020202020204" pitchFamily="34" charset="0"/>
-              </a:rPr>
-              <a:t>Released From Jail</a:t>
-            </a:r>
-          </a:p>
-          <a:p>
-            <a:r>
-              <a:rPr lang="en-US" sz="2400" dirty="0">
-                <a:latin typeface="Century Gothic" panose="020B0502020202020204" pitchFamily="34" charset="0"/>
-              </a:rPr>
-              <a:t>In Past 3 Years</a:t>
-            </a:r>
-          </a:p>
-        </p:txBody>
-      </p:sp>
-      <p:sp>
-        <p:nvSpPr>
-          <p:cNvPr id="14" name="Google Shape;75;p10">
-            <a:extLst>
-              <a:ext uri="{FF2B5EF4-FFF2-40B4-BE49-F238E27FC236}">
-                <a16:creationId xmlns:a16="http://schemas.microsoft.com/office/drawing/2014/main" id="{4DF198BD-39AA-964B-8EB5-FB1B260A34A5}"/>
-              </a:ext>
-            </a:extLst>
-          </p:cNvPr>
-          <p:cNvSpPr/>
-          <p:nvPr/>
-        </p:nvSpPr>
-        <p:spPr>
-          <a:xfrm>
-            <a:off x="789142" y="3429000"/>
-            <a:ext cx="2665062" cy="2734106"/>
-          </a:xfrm>
-          <a:prstGeom prst="rect">
-            <a:avLst/>
-          </a:prstGeom>
-          <a:solidFill>
-            <a:srgbClr val="0070C0"/>
-          </a:solidFill>
-          <a:ln w="9525" cap="flat" cmpd="sng">
-            <a:solidFill>
-              <a:schemeClr val="dk2"/>
-            </a:solidFill>
-            <a:prstDash val="solid"/>
-            <a:round/>
-            <a:headEnd type="none" w="sm" len="sm"/>
-            <a:tailEnd type="none" w="sm" len="sm"/>
-          </a:ln>
-        </p:spPr>
-        <p:txBody>
-          <a:bodyPr spcFirstLastPara="1" wrap="square" lIns="121900" tIns="121900" rIns="121900" bIns="121900" anchor="ctr" anchorCtr="0">
-            <a:noAutofit/>
-          </a:bodyPr>
-          <a:lstStyle/>
-          <a:p>
-            <a:pPr algn="ctr"/>
-            <a:endParaRPr sz="1867" dirty="0">
-              <a:latin typeface="Century Gothic"/>
-              <a:ea typeface="Century Gothic"/>
-              <a:cs typeface="Century Gothic"/>
-              <a:sym typeface="Century Gothic"/>
-            </a:endParaRPr>
-          </a:p>
-        </p:txBody>
-      </p:sp>
-      <p:sp>
-        <p:nvSpPr>
-          <p:cNvPr id="15" name="TextBox 14">
-            <a:extLst>
-              <a:ext uri="{FF2B5EF4-FFF2-40B4-BE49-F238E27FC236}">
-                <a16:creationId xmlns:a16="http://schemas.microsoft.com/office/drawing/2014/main" id="{3EE42FA2-6A12-0044-AA06-B868FCDE372D}"/>
-              </a:ext>
-            </a:extLst>
-          </p:cNvPr>
-          <p:cNvSpPr txBox="1"/>
-          <p:nvPr/>
-        </p:nvSpPr>
-        <p:spPr>
-          <a:xfrm>
-            <a:off x="890681" y="3610880"/>
-            <a:ext cx="2563522" cy="1200329"/>
-          </a:xfrm>
-          <a:prstGeom prst="rect">
-            <a:avLst/>
-          </a:prstGeom>
-          <a:noFill/>
-        </p:spPr>
-        <p:txBody>
-          <a:bodyPr wrap="none" rtlCol="0">
-            <a:spAutoFit/>
-          </a:bodyPr>
-          <a:lstStyle/>
-          <a:p>
-            <a:r>
-              <a:rPr lang="en-US" sz="2400" dirty="0">
-                <a:solidFill>
-                  <a:schemeClr val="bg1"/>
-                </a:solidFill>
-                <a:latin typeface="Century Gothic" panose="020B0502020202020204" pitchFamily="34" charset="0"/>
-              </a:rPr>
-              <a:t>…With History of</a:t>
-            </a:r>
-          </a:p>
-          <a:p>
-            <a:r>
-              <a:rPr lang="en-US" sz="2400" dirty="0">
-                <a:solidFill>
-                  <a:schemeClr val="bg1"/>
-                </a:solidFill>
-                <a:latin typeface="Century Gothic" panose="020B0502020202020204" pitchFamily="34" charset="0"/>
-              </a:rPr>
-              <a:t>Mental Health</a:t>
-            </a:r>
-          </a:p>
-          <a:p>
-            <a:r>
-              <a:rPr lang="en-US" sz="2400" dirty="0">
-                <a:solidFill>
-                  <a:schemeClr val="bg1"/>
-                </a:solidFill>
-                <a:latin typeface="Century Gothic" panose="020B0502020202020204" pitchFamily="34" charset="0"/>
-              </a:rPr>
-              <a:t>Needs</a:t>
-            </a:r>
-          </a:p>
-        </p:txBody>
-      </p:sp>
-      <p:grpSp>
-        <p:nvGrpSpPr>
-          <p:cNvPr id="16" name="Group 15">
-            <a:extLst>
-              <a:ext uri="{FF2B5EF4-FFF2-40B4-BE49-F238E27FC236}">
-                <a16:creationId xmlns:a16="http://schemas.microsoft.com/office/drawing/2014/main" id="{893B8E00-7081-1F47-9553-568F65765633}"/>
-              </a:ext>
-            </a:extLst>
-          </p:cNvPr>
-          <p:cNvGrpSpPr/>
-          <p:nvPr/>
-        </p:nvGrpSpPr>
-        <p:grpSpPr>
-          <a:xfrm>
-            <a:off x="3857489" y="3829293"/>
-            <a:ext cx="860597" cy="763501"/>
-            <a:chOff x="4389120" y="2462784"/>
-            <a:chExt cx="1706830" cy="1514258"/>
-          </a:xfrm>
-        </p:grpSpPr>
-        <p:sp>
-          <p:nvSpPr>
-            <p:cNvPr id="17" name="Oval 16">
-              <a:extLst>
-                <a:ext uri="{FF2B5EF4-FFF2-40B4-BE49-F238E27FC236}">
-                  <a16:creationId xmlns:a16="http://schemas.microsoft.com/office/drawing/2014/main" id="{F71938DB-AC52-2A4F-903C-9A0F093EEAA8}"/>
-                </a:ext>
-              </a:extLst>
-            </p:cNvPr>
-            <p:cNvSpPr/>
-            <p:nvPr/>
-          </p:nvSpPr>
-          <p:spPr>
-            <a:xfrm>
-              <a:off x="4389120" y="2462784"/>
-              <a:ext cx="402336" cy="402336"/>
-            </a:xfrm>
-            <a:prstGeom prst="ellipse">
-              <a:avLst/>
-            </a:prstGeom>
-            <a:solidFill>
-              <a:schemeClr val="bg2"/>
-            </a:solidFill>
-            <a:ln w="9525">
-              <a:solidFill>
-                <a:schemeClr val="tx1"/>
-              </a:solidFill>
-            </a:ln>
-          </p:spPr>
-          <p:style>
-            <a:lnRef idx="2">
-              <a:schemeClr val="accent1">
-                <a:shade val="50000"/>
-              </a:schemeClr>
-            </a:lnRef>
-            <a:fillRef idx="1">
-              <a:schemeClr val="accent1"/>
-            </a:fillRef>
-            <a:effectRef idx="0">
-              <a:schemeClr val="accent1"/>
-            </a:effectRef>
-            <a:fontRef idx="minor">
-              <a:schemeClr val="lt1"/>
-            </a:fontRef>
-          </p:style>
-          <p:txBody>
-            <a:bodyPr rtlCol="0" anchor="ctr"/>
-            <a:lstStyle/>
-            <a:p>
-              <a:pPr algn="ctr"/>
-              <a:endParaRPr lang="en-US"/>
-            </a:p>
-          </p:txBody>
-        </p:sp>
-        <p:sp>
-          <p:nvSpPr>
-            <p:cNvPr id="18" name="Oval 17">
-              <a:extLst>
-                <a:ext uri="{FF2B5EF4-FFF2-40B4-BE49-F238E27FC236}">
-                  <a16:creationId xmlns:a16="http://schemas.microsoft.com/office/drawing/2014/main" id="{443EB63D-67D3-4E45-B65B-3AE6C37117B7}"/>
-                </a:ext>
-              </a:extLst>
-            </p:cNvPr>
-            <p:cNvSpPr/>
-            <p:nvPr/>
-          </p:nvSpPr>
-          <p:spPr>
-            <a:xfrm>
-              <a:off x="4389120" y="3018745"/>
-              <a:ext cx="402336" cy="402336"/>
-            </a:xfrm>
-            <a:prstGeom prst="ellipse">
-              <a:avLst/>
-            </a:prstGeom>
-            <a:solidFill>
-              <a:schemeClr val="bg2"/>
-            </a:solidFill>
-            <a:ln w="9525">
-              <a:solidFill>
-                <a:schemeClr val="tx1"/>
-              </a:solidFill>
-            </a:ln>
-          </p:spPr>
-          <p:style>
-            <a:lnRef idx="2">
-              <a:schemeClr val="accent1">
-                <a:shade val="50000"/>
-              </a:schemeClr>
-            </a:lnRef>
-            <a:fillRef idx="1">
-              <a:schemeClr val="accent1"/>
-            </a:fillRef>
-            <a:effectRef idx="0">
-              <a:schemeClr val="accent1"/>
-            </a:effectRef>
-            <a:fontRef idx="minor">
-              <a:schemeClr val="lt1"/>
-            </a:fontRef>
-          </p:style>
-          <p:txBody>
-            <a:bodyPr rtlCol="0" anchor="ctr"/>
-            <a:lstStyle/>
-            <a:p>
-              <a:pPr algn="ctr"/>
-              <a:endParaRPr lang="en-US"/>
-            </a:p>
-          </p:txBody>
-        </p:sp>
-        <p:sp>
-          <p:nvSpPr>
-            <p:cNvPr id="19" name="Oval 18">
-              <a:extLst>
-                <a:ext uri="{FF2B5EF4-FFF2-40B4-BE49-F238E27FC236}">
-                  <a16:creationId xmlns:a16="http://schemas.microsoft.com/office/drawing/2014/main" id="{B868292F-40CE-8846-909D-8E042F9E7876}"/>
-                </a:ext>
-              </a:extLst>
-            </p:cNvPr>
-            <p:cNvSpPr/>
-            <p:nvPr/>
-          </p:nvSpPr>
-          <p:spPr>
-            <a:xfrm>
-              <a:off x="4389120" y="3574706"/>
-              <a:ext cx="402336" cy="402336"/>
-            </a:xfrm>
-            <a:prstGeom prst="ellipse">
-              <a:avLst/>
-            </a:prstGeom>
-            <a:solidFill>
-              <a:schemeClr val="bg2"/>
-            </a:solidFill>
-            <a:ln w="9525">
-              <a:solidFill>
-                <a:schemeClr val="tx1"/>
-              </a:solidFill>
-            </a:ln>
-          </p:spPr>
-          <p:style>
-            <a:lnRef idx="2">
-              <a:schemeClr val="accent1">
-                <a:shade val="50000"/>
-              </a:schemeClr>
-            </a:lnRef>
-            <a:fillRef idx="1">
-              <a:schemeClr val="accent1"/>
-            </a:fillRef>
-            <a:effectRef idx="0">
-              <a:schemeClr val="accent1"/>
-            </a:effectRef>
-            <a:fontRef idx="minor">
-              <a:schemeClr val="lt1"/>
-            </a:fontRef>
-          </p:style>
-          <p:txBody>
-            <a:bodyPr rtlCol="0" anchor="ctr"/>
-            <a:lstStyle/>
-            <a:p>
-              <a:pPr algn="ctr"/>
-              <a:endParaRPr lang="en-US"/>
-            </a:p>
-          </p:txBody>
-        </p:sp>
-        <p:sp>
-          <p:nvSpPr>
-            <p:cNvPr id="20" name="Oval 19">
-              <a:extLst>
-                <a:ext uri="{FF2B5EF4-FFF2-40B4-BE49-F238E27FC236}">
-                  <a16:creationId xmlns:a16="http://schemas.microsoft.com/office/drawing/2014/main" id="{87CBACA9-7504-BE46-A082-FA1F0DB3991A}"/>
-                </a:ext>
-              </a:extLst>
-            </p:cNvPr>
-            <p:cNvSpPr/>
-            <p:nvPr/>
-          </p:nvSpPr>
-          <p:spPr>
-            <a:xfrm>
-              <a:off x="5029200" y="2768809"/>
-              <a:ext cx="402336" cy="402336"/>
-            </a:xfrm>
-            <a:prstGeom prst="ellipse">
-              <a:avLst/>
-            </a:prstGeom>
-            <a:solidFill>
-              <a:schemeClr val="bg2"/>
-            </a:solidFill>
-            <a:ln w="9525">
-              <a:solidFill>
-                <a:schemeClr val="tx1"/>
-              </a:solidFill>
-            </a:ln>
-          </p:spPr>
-          <p:style>
-            <a:lnRef idx="2">
-              <a:schemeClr val="accent1">
-                <a:shade val="50000"/>
-              </a:schemeClr>
-            </a:lnRef>
-            <a:fillRef idx="1">
-              <a:schemeClr val="accent1"/>
-            </a:fillRef>
-            <a:effectRef idx="0">
-              <a:schemeClr val="accent1"/>
-            </a:effectRef>
-            <a:fontRef idx="minor">
-              <a:schemeClr val="lt1"/>
-            </a:fontRef>
-          </p:style>
-          <p:txBody>
-            <a:bodyPr rtlCol="0" anchor="ctr"/>
-            <a:lstStyle/>
-            <a:p>
-              <a:pPr algn="ctr"/>
-              <a:endParaRPr lang="en-US"/>
-            </a:p>
-          </p:txBody>
-        </p:sp>
-        <p:sp>
-          <p:nvSpPr>
-            <p:cNvPr id="25" name="Oval 24">
-              <a:extLst>
-                <a:ext uri="{FF2B5EF4-FFF2-40B4-BE49-F238E27FC236}">
-                  <a16:creationId xmlns:a16="http://schemas.microsoft.com/office/drawing/2014/main" id="{7E7DE2BA-187D-4144-BCB9-4822657FE213}"/>
-                </a:ext>
-              </a:extLst>
-            </p:cNvPr>
-            <p:cNvSpPr/>
-            <p:nvPr/>
-          </p:nvSpPr>
-          <p:spPr>
-            <a:xfrm>
-              <a:off x="5029200" y="3350379"/>
-              <a:ext cx="402336" cy="402336"/>
-            </a:xfrm>
-            <a:prstGeom prst="ellipse">
-              <a:avLst/>
-            </a:prstGeom>
-            <a:solidFill>
-              <a:schemeClr val="bg2"/>
-            </a:solidFill>
-            <a:ln w="9525">
-              <a:solidFill>
-                <a:schemeClr val="tx1"/>
-              </a:solidFill>
-            </a:ln>
-          </p:spPr>
-          <p:style>
-            <a:lnRef idx="2">
-              <a:schemeClr val="accent1">
-                <a:shade val="50000"/>
-              </a:schemeClr>
-            </a:lnRef>
-            <a:fillRef idx="1">
-              <a:schemeClr val="accent1"/>
-            </a:fillRef>
-            <a:effectRef idx="0">
-              <a:schemeClr val="accent1"/>
-            </a:effectRef>
-            <a:fontRef idx="minor">
-              <a:schemeClr val="lt1"/>
-            </a:fontRef>
-          </p:style>
-          <p:txBody>
-            <a:bodyPr rtlCol="0" anchor="ctr"/>
-            <a:lstStyle/>
-            <a:p>
-              <a:pPr algn="ctr"/>
-              <a:endParaRPr lang="en-US"/>
-            </a:p>
-          </p:txBody>
-        </p:sp>
-        <p:sp>
-          <p:nvSpPr>
-            <p:cNvPr id="28" name="Oval 27">
-              <a:extLst>
-                <a:ext uri="{FF2B5EF4-FFF2-40B4-BE49-F238E27FC236}">
-                  <a16:creationId xmlns:a16="http://schemas.microsoft.com/office/drawing/2014/main" id="{1A7BFEE9-9AB5-0E4D-ACF5-9DFA5671C333}"/>
-                </a:ext>
-              </a:extLst>
-            </p:cNvPr>
-            <p:cNvSpPr/>
-            <p:nvPr/>
-          </p:nvSpPr>
-          <p:spPr>
-            <a:xfrm>
-              <a:off x="5693614" y="2757135"/>
-              <a:ext cx="402336" cy="402336"/>
-            </a:xfrm>
-            <a:prstGeom prst="ellipse">
-              <a:avLst/>
-            </a:prstGeom>
-            <a:solidFill>
-              <a:schemeClr val="bg2"/>
-            </a:solidFill>
-            <a:ln w="9525">
-              <a:solidFill>
-                <a:schemeClr val="tx1"/>
-              </a:solidFill>
-            </a:ln>
-          </p:spPr>
-          <p:style>
-            <a:lnRef idx="2">
-              <a:schemeClr val="accent1">
-                <a:shade val="50000"/>
-              </a:schemeClr>
-            </a:lnRef>
-            <a:fillRef idx="1">
-              <a:schemeClr val="accent1"/>
-            </a:fillRef>
-            <a:effectRef idx="0">
-              <a:schemeClr val="accent1"/>
-            </a:effectRef>
-            <a:fontRef idx="minor">
-              <a:schemeClr val="lt1"/>
-            </a:fontRef>
-          </p:style>
-          <p:txBody>
-            <a:bodyPr rtlCol="0" anchor="ctr"/>
-            <a:lstStyle/>
-            <a:p>
-              <a:pPr algn="ctr"/>
-              <a:endParaRPr lang="en-US"/>
-            </a:p>
-          </p:txBody>
-        </p:sp>
-        <p:sp>
-          <p:nvSpPr>
-            <p:cNvPr id="29" name="Oval 28">
-              <a:extLst>
-                <a:ext uri="{FF2B5EF4-FFF2-40B4-BE49-F238E27FC236}">
-                  <a16:creationId xmlns:a16="http://schemas.microsoft.com/office/drawing/2014/main" id="{C6B3BF28-ABC9-CB4E-8050-B49E9B365028}"/>
-                </a:ext>
-              </a:extLst>
-            </p:cNvPr>
-            <p:cNvSpPr/>
-            <p:nvPr/>
-          </p:nvSpPr>
-          <p:spPr>
-            <a:xfrm>
-              <a:off x="5669280" y="3338187"/>
-              <a:ext cx="402336" cy="402336"/>
-            </a:xfrm>
-            <a:prstGeom prst="ellipse">
-              <a:avLst/>
-            </a:prstGeom>
-            <a:solidFill>
-              <a:schemeClr val="bg2"/>
-            </a:solidFill>
-            <a:ln w="9525">
-              <a:solidFill>
-                <a:schemeClr val="tx1"/>
-              </a:solidFill>
-            </a:ln>
-          </p:spPr>
-          <p:style>
-            <a:lnRef idx="2">
-              <a:schemeClr val="accent1">
-                <a:shade val="50000"/>
-              </a:schemeClr>
-            </a:lnRef>
-            <a:fillRef idx="1">
-              <a:schemeClr val="accent1"/>
-            </a:fillRef>
-            <a:effectRef idx="0">
-              <a:schemeClr val="accent1"/>
-            </a:effectRef>
-            <a:fontRef idx="minor">
-              <a:schemeClr val="lt1"/>
-            </a:fontRef>
-          </p:style>
-          <p:txBody>
-            <a:bodyPr rtlCol="0" anchor="ctr"/>
-            <a:lstStyle/>
-            <a:p>
-              <a:pPr algn="ctr"/>
-              <a:endParaRPr lang="en-US"/>
-            </a:p>
-          </p:txBody>
-        </p:sp>
-        <p:cxnSp>
-          <p:nvCxnSpPr>
-            <p:cNvPr id="30" name="Straight Connector 29">
-              <a:extLst>
-                <a:ext uri="{FF2B5EF4-FFF2-40B4-BE49-F238E27FC236}">
-                  <a16:creationId xmlns:a16="http://schemas.microsoft.com/office/drawing/2014/main" id="{8472FECF-6CFC-334F-BE08-5E927AAD8527}"/>
-                </a:ext>
-              </a:extLst>
-            </p:cNvPr>
-            <p:cNvCxnSpPr>
-              <a:stCxn id="17" idx="6"/>
-              <a:endCxn id="20" idx="2"/>
-            </p:cNvCxnSpPr>
-            <p:nvPr/>
-          </p:nvCxnSpPr>
-          <p:spPr>
-            <a:xfrm>
-              <a:off x="4791456" y="2663952"/>
-              <a:ext cx="237744" cy="306025"/>
-            </a:xfrm>
-            <a:prstGeom prst="line">
-              <a:avLst/>
-            </a:prstGeom>
-            <a:ln w="28575"/>
-          </p:spPr>
-          <p:style>
-            <a:lnRef idx="1">
-              <a:schemeClr val="dk1"/>
-            </a:lnRef>
-            <a:fillRef idx="0">
-              <a:schemeClr val="dk1"/>
-            </a:fillRef>
-            <a:effectRef idx="0">
-              <a:schemeClr val="dk1"/>
-            </a:effectRef>
-            <a:fontRef idx="minor">
-              <a:schemeClr val="tx1"/>
-            </a:fontRef>
-          </p:style>
-        </p:cxnSp>
-        <p:cxnSp>
-          <p:nvCxnSpPr>
-            <p:cNvPr id="31" name="Straight Connector 30">
-              <a:extLst>
-                <a:ext uri="{FF2B5EF4-FFF2-40B4-BE49-F238E27FC236}">
-                  <a16:creationId xmlns:a16="http://schemas.microsoft.com/office/drawing/2014/main" id="{FE2C2F4C-E9DD-E64A-8D0A-73CC3AEBD025}"/>
-                </a:ext>
-              </a:extLst>
-            </p:cNvPr>
-            <p:cNvCxnSpPr>
-              <a:cxnSpLocks/>
-              <a:stCxn id="17" idx="6"/>
-            </p:cNvCxnSpPr>
-            <p:nvPr/>
-          </p:nvCxnSpPr>
-          <p:spPr>
-            <a:xfrm>
-              <a:off x="4791456" y="2663952"/>
-              <a:ext cx="237744" cy="861986"/>
-            </a:xfrm>
-            <a:prstGeom prst="line">
-              <a:avLst/>
-            </a:prstGeom>
-            <a:ln w="28575"/>
-          </p:spPr>
-          <p:style>
-            <a:lnRef idx="1">
-              <a:schemeClr val="dk1"/>
-            </a:lnRef>
-            <a:fillRef idx="0">
-              <a:schemeClr val="dk1"/>
-            </a:fillRef>
-            <a:effectRef idx="0">
-              <a:schemeClr val="dk1"/>
-            </a:effectRef>
-            <a:fontRef idx="minor">
-              <a:schemeClr val="tx1"/>
-            </a:fontRef>
-          </p:style>
-        </p:cxnSp>
-        <p:cxnSp>
-          <p:nvCxnSpPr>
-            <p:cNvPr id="32" name="Straight Connector 31">
-              <a:extLst>
-                <a:ext uri="{FF2B5EF4-FFF2-40B4-BE49-F238E27FC236}">
-                  <a16:creationId xmlns:a16="http://schemas.microsoft.com/office/drawing/2014/main" id="{409DE789-770A-774A-9861-6E413217C2BC}"/>
-                </a:ext>
-              </a:extLst>
-            </p:cNvPr>
-            <p:cNvCxnSpPr>
-              <a:cxnSpLocks/>
-              <a:stCxn id="18" idx="6"/>
-              <a:endCxn id="20" idx="2"/>
-            </p:cNvCxnSpPr>
-            <p:nvPr/>
-          </p:nvCxnSpPr>
-          <p:spPr>
-            <a:xfrm flipV="1">
-              <a:off x="4791456" y="2969977"/>
-              <a:ext cx="237744" cy="249936"/>
-            </a:xfrm>
-            <a:prstGeom prst="line">
-              <a:avLst/>
-            </a:prstGeom>
-            <a:ln w="28575"/>
-          </p:spPr>
-          <p:style>
-            <a:lnRef idx="1">
-              <a:schemeClr val="dk1"/>
-            </a:lnRef>
-            <a:fillRef idx="0">
-              <a:schemeClr val="dk1"/>
-            </a:fillRef>
-            <a:effectRef idx="0">
-              <a:schemeClr val="dk1"/>
-            </a:effectRef>
-            <a:fontRef idx="minor">
-              <a:schemeClr val="tx1"/>
-            </a:fontRef>
-          </p:style>
-        </p:cxnSp>
-        <p:cxnSp>
-          <p:nvCxnSpPr>
-            <p:cNvPr id="33" name="Straight Connector 32">
-              <a:extLst>
-                <a:ext uri="{FF2B5EF4-FFF2-40B4-BE49-F238E27FC236}">
-                  <a16:creationId xmlns:a16="http://schemas.microsoft.com/office/drawing/2014/main" id="{70E7FF1A-B3F7-F844-B958-D27F45E1DC2D}"/>
-                </a:ext>
-              </a:extLst>
-            </p:cNvPr>
-            <p:cNvCxnSpPr/>
-            <p:nvPr/>
-          </p:nvCxnSpPr>
-          <p:spPr>
-            <a:xfrm>
-              <a:off x="4794479" y="3244297"/>
-              <a:ext cx="237744" cy="306025"/>
-            </a:xfrm>
-            <a:prstGeom prst="line">
-              <a:avLst/>
-            </a:prstGeom>
-            <a:ln w="28575"/>
-          </p:spPr>
-          <p:style>
-            <a:lnRef idx="1">
-              <a:schemeClr val="dk1"/>
-            </a:lnRef>
-            <a:fillRef idx="0">
-              <a:schemeClr val="dk1"/>
-            </a:fillRef>
-            <a:effectRef idx="0">
-              <a:schemeClr val="dk1"/>
-            </a:effectRef>
-            <a:fontRef idx="minor">
-              <a:schemeClr val="tx1"/>
-            </a:fontRef>
-          </p:style>
-        </p:cxnSp>
-        <p:cxnSp>
-          <p:nvCxnSpPr>
-            <p:cNvPr id="34" name="Straight Connector 33">
-              <a:extLst>
-                <a:ext uri="{FF2B5EF4-FFF2-40B4-BE49-F238E27FC236}">
-                  <a16:creationId xmlns:a16="http://schemas.microsoft.com/office/drawing/2014/main" id="{CC5E2131-B1EE-BC43-AF0F-76A74F8C8107}"/>
-                </a:ext>
-              </a:extLst>
-            </p:cNvPr>
-            <p:cNvCxnSpPr>
-              <a:cxnSpLocks/>
-              <a:endCxn id="20" idx="2"/>
-            </p:cNvCxnSpPr>
-            <p:nvPr/>
-          </p:nvCxnSpPr>
-          <p:spPr>
-            <a:xfrm flipV="1">
-              <a:off x="4791456" y="2969977"/>
-              <a:ext cx="237744" cy="805897"/>
-            </a:xfrm>
-            <a:prstGeom prst="line">
-              <a:avLst/>
-            </a:prstGeom>
-            <a:ln w="28575"/>
-          </p:spPr>
-          <p:style>
-            <a:lnRef idx="1">
-              <a:schemeClr val="dk1"/>
-            </a:lnRef>
-            <a:fillRef idx="0">
-              <a:schemeClr val="dk1"/>
-            </a:fillRef>
-            <a:effectRef idx="0">
-              <a:schemeClr val="dk1"/>
-            </a:effectRef>
-            <a:fontRef idx="minor">
-              <a:schemeClr val="tx1"/>
-            </a:fontRef>
-          </p:style>
-        </p:cxnSp>
-        <p:cxnSp>
-          <p:nvCxnSpPr>
-            <p:cNvPr id="35" name="Straight Connector 34">
-              <a:extLst>
-                <a:ext uri="{FF2B5EF4-FFF2-40B4-BE49-F238E27FC236}">
-                  <a16:creationId xmlns:a16="http://schemas.microsoft.com/office/drawing/2014/main" id="{2DBFED98-B6FA-8B4E-876D-F52C114E6024}"/>
-                </a:ext>
-              </a:extLst>
-            </p:cNvPr>
-            <p:cNvCxnSpPr>
-              <a:cxnSpLocks/>
-              <a:endCxn id="25" idx="2"/>
-            </p:cNvCxnSpPr>
-            <p:nvPr/>
-          </p:nvCxnSpPr>
-          <p:spPr>
-            <a:xfrm flipV="1">
-              <a:off x="4791456" y="3551547"/>
-              <a:ext cx="237744" cy="224327"/>
-            </a:xfrm>
-            <a:prstGeom prst="line">
-              <a:avLst/>
-            </a:prstGeom>
-            <a:ln w="28575"/>
-          </p:spPr>
-          <p:style>
-            <a:lnRef idx="1">
-              <a:schemeClr val="dk1"/>
-            </a:lnRef>
-            <a:fillRef idx="0">
-              <a:schemeClr val="dk1"/>
-            </a:fillRef>
-            <a:effectRef idx="0">
-              <a:schemeClr val="dk1"/>
-            </a:effectRef>
-            <a:fontRef idx="minor">
-              <a:schemeClr val="tx1"/>
-            </a:fontRef>
-          </p:style>
-        </p:cxnSp>
-        <p:cxnSp>
-          <p:nvCxnSpPr>
-            <p:cNvPr id="36" name="Straight Connector 35">
-              <a:extLst>
-                <a:ext uri="{FF2B5EF4-FFF2-40B4-BE49-F238E27FC236}">
-                  <a16:creationId xmlns:a16="http://schemas.microsoft.com/office/drawing/2014/main" id="{791D79EA-EDB5-EB44-BFE1-4E1378E764D2}"/>
-                </a:ext>
-              </a:extLst>
-            </p:cNvPr>
-            <p:cNvCxnSpPr>
-              <a:cxnSpLocks/>
-              <a:endCxn id="28" idx="2"/>
-            </p:cNvCxnSpPr>
-            <p:nvPr/>
-          </p:nvCxnSpPr>
-          <p:spPr>
-            <a:xfrm flipV="1">
-              <a:off x="5431536" y="2958303"/>
-              <a:ext cx="262078" cy="33010"/>
-            </a:xfrm>
-            <a:prstGeom prst="line">
-              <a:avLst/>
-            </a:prstGeom>
-            <a:ln w="28575"/>
-          </p:spPr>
-          <p:style>
-            <a:lnRef idx="1">
-              <a:schemeClr val="dk1"/>
-            </a:lnRef>
-            <a:fillRef idx="0">
-              <a:schemeClr val="dk1"/>
-            </a:fillRef>
-            <a:effectRef idx="0">
-              <a:schemeClr val="dk1"/>
-            </a:effectRef>
-            <a:fontRef idx="minor">
-              <a:schemeClr val="tx1"/>
-            </a:fontRef>
-          </p:style>
-        </p:cxnSp>
-        <p:cxnSp>
-          <p:nvCxnSpPr>
-            <p:cNvPr id="37" name="Straight Connector 36">
-              <a:extLst>
-                <a:ext uri="{FF2B5EF4-FFF2-40B4-BE49-F238E27FC236}">
-                  <a16:creationId xmlns:a16="http://schemas.microsoft.com/office/drawing/2014/main" id="{AC8D7F98-F828-4749-89A9-70A2687F9B2D}"/>
-                </a:ext>
-              </a:extLst>
-            </p:cNvPr>
-            <p:cNvCxnSpPr>
-              <a:cxnSpLocks/>
-              <a:endCxn id="29" idx="2"/>
-            </p:cNvCxnSpPr>
-            <p:nvPr/>
-          </p:nvCxnSpPr>
-          <p:spPr>
-            <a:xfrm>
-              <a:off x="5431536" y="3023616"/>
-              <a:ext cx="237744" cy="515739"/>
-            </a:xfrm>
-            <a:prstGeom prst="line">
-              <a:avLst/>
-            </a:prstGeom>
-            <a:ln w="28575"/>
-          </p:spPr>
-          <p:style>
-            <a:lnRef idx="1">
-              <a:schemeClr val="dk1"/>
-            </a:lnRef>
-            <a:fillRef idx="0">
-              <a:schemeClr val="dk1"/>
-            </a:fillRef>
-            <a:effectRef idx="0">
-              <a:schemeClr val="dk1"/>
-            </a:effectRef>
-            <a:fontRef idx="minor">
-              <a:schemeClr val="tx1"/>
-            </a:fontRef>
-          </p:style>
-        </p:cxnSp>
-        <p:cxnSp>
-          <p:nvCxnSpPr>
-            <p:cNvPr id="38" name="Straight Connector 37">
-              <a:extLst>
-                <a:ext uri="{FF2B5EF4-FFF2-40B4-BE49-F238E27FC236}">
-                  <a16:creationId xmlns:a16="http://schemas.microsoft.com/office/drawing/2014/main" id="{CCAA8FC4-6819-0342-9A83-42B280E06237}"/>
-                </a:ext>
-              </a:extLst>
-            </p:cNvPr>
-            <p:cNvCxnSpPr>
-              <a:cxnSpLocks/>
-              <a:endCxn id="28" idx="2"/>
-            </p:cNvCxnSpPr>
-            <p:nvPr/>
-          </p:nvCxnSpPr>
-          <p:spPr>
-            <a:xfrm flipV="1">
-              <a:off x="5428513" y="2958303"/>
-              <a:ext cx="265101" cy="589598"/>
-            </a:xfrm>
-            <a:prstGeom prst="line">
-              <a:avLst/>
-            </a:prstGeom>
-            <a:ln w="28575"/>
-          </p:spPr>
-          <p:style>
-            <a:lnRef idx="1">
-              <a:schemeClr val="dk1"/>
-            </a:lnRef>
-            <a:fillRef idx="0">
-              <a:schemeClr val="dk1"/>
-            </a:fillRef>
-            <a:effectRef idx="0">
-              <a:schemeClr val="dk1"/>
-            </a:effectRef>
-            <a:fontRef idx="minor">
-              <a:schemeClr val="tx1"/>
-            </a:fontRef>
-          </p:style>
-        </p:cxnSp>
-        <p:cxnSp>
-          <p:nvCxnSpPr>
-            <p:cNvPr id="39" name="Straight Connector 38">
-              <a:extLst>
-                <a:ext uri="{FF2B5EF4-FFF2-40B4-BE49-F238E27FC236}">
-                  <a16:creationId xmlns:a16="http://schemas.microsoft.com/office/drawing/2014/main" id="{9DB29A49-FD36-804C-B626-ECEBE343A946}"/>
-                </a:ext>
-              </a:extLst>
-            </p:cNvPr>
-            <p:cNvCxnSpPr>
-              <a:cxnSpLocks/>
-              <a:endCxn id="29" idx="2"/>
-            </p:cNvCxnSpPr>
-            <p:nvPr/>
-          </p:nvCxnSpPr>
-          <p:spPr>
-            <a:xfrm>
-              <a:off x="5431536" y="3510697"/>
-              <a:ext cx="237744" cy="28658"/>
-            </a:xfrm>
-            <a:prstGeom prst="line">
-              <a:avLst/>
-            </a:prstGeom>
-            <a:ln w="28575"/>
-          </p:spPr>
-          <p:style>
-            <a:lnRef idx="1">
-              <a:schemeClr val="dk1"/>
-            </a:lnRef>
-            <a:fillRef idx="0">
-              <a:schemeClr val="dk1"/>
-            </a:fillRef>
-            <a:effectRef idx="0">
-              <a:schemeClr val="dk1"/>
-            </a:effectRef>
-            <a:fontRef idx="minor">
-              <a:schemeClr val="tx1"/>
-            </a:fontRef>
-          </p:style>
-        </p:cxnSp>
-      </p:grpSp>
-      <p:graphicFrame>
-        <p:nvGraphicFramePr>
-          <p:cNvPr id="5" name="Table 5">
-            <a:extLst>
-              <a:ext uri="{FF2B5EF4-FFF2-40B4-BE49-F238E27FC236}">
-                <a16:creationId xmlns:a16="http://schemas.microsoft.com/office/drawing/2014/main" id="{77FEABA3-487B-1046-962E-19F31B5554DD}"/>
-              </a:ext>
-            </a:extLst>
-          </p:cNvPr>
-          <p:cNvGraphicFramePr>
-            <a:graphicFrameLocks noGrp="1"/>
-          </p:cNvGraphicFramePr>
           <p:nvPr/>
         </p:nvGraphicFramePr>
         <p:xfrm>
@@ -18185,7 +15989,7 @@
 </p:sld>
 </file>
 
-<file path=ppt/slides/slide12.xml><?xml version="1.0" encoding="utf-8"?>
+<file path=ppt/slides/slide11.xml><?xml version="1.0" encoding="utf-8"?>
 <p:sld xmlns:a="http://schemas.openxmlformats.org/drawingml/2006/main" xmlns:r="http://schemas.openxmlformats.org/officeDocument/2006/relationships" xmlns:p="http://schemas.openxmlformats.org/presentationml/2006/main">
   <p:cSld>
     <p:spTree>
@@ -18245,7 +16049,7 @@
 </p:sld>
 </file>
 
-<file path=ppt/slides/slide13.xml><?xml version="1.0" encoding="utf-8"?>
+<file path=ppt/slides/slide12.xml><?xml version="1.0" encoding="utf-8"?>
 <p:sld xmlns:a="http://schemas.openxmlformats.org/drawingml/2006/main" xmlns:r="http://schemas.openxmlformats.org/officeDocument/2006/relationships" xmlns:p="http://schemas.openxmlformats.org/presentationml/2006/main">
   <p:cSld>
     <p:spTree>
@@ -18334,7 +16138,7 @@
 </p:sld>
 </file>
 
-<file path=ppt/slides/slide14.xml><?xml version="1.0" encoding="utf-8"?>
+<file path=ppt/slides/slide13.xml><?xml version="1.0" encoding="utf-8"?>
 <p:sld xmlns:a="http://schemas.openxmlformats.org/drawingml/2006/main" xmlns:r="http://schemas.openxmlformats.org/officeDocument/2006/relationships" xmlns:p="http://schemas.openxmlformats.org/presentationml/2006/main">
   <p:cSld>
     <p:spTree>
@@ -18431,7 +16235,7 @@
 </p:sld>
 </file>
 
-<file path=ppt/slides/slide15.xml><?xml version="1.0" encoding="utf-8"?>
+<file path=ppt/slides/slide14.xml><?xml version="1.0" encoding="utf-8"?>
 <p:sld xmlns:a="http://schemas.openxmlformats.org/drawingml/2006/main" xmlns:r="http://schemas.openxmlformats.org/officeDocument/2006/relationships" xmlns:p="http://schemas.openxmlformats.org/presentationml/2006/main">
   <p:cSld>
     <p:spTree>
@@ -18737,7 +16541,7 @@
 </p:sld>
 </file>
 
-<file path=ppt/slides/slide16.xml><?xml version="1.0" encoding="utf-8"?>
+<file path=ppt/slides/slide15.xml><?xml version="1.0" encoding="utf-8"?>
 <p:sld xmlns:a="http://schemas.openxmlformats.org/drawingml/2006/main" xmlns:r="http://schemas.openxmlformats.org/officeDocument/2006/relationships" xmlns:p="http://schemas.openxmlformats.org/presentationml/2006/main">
   <p:cSld>
     <p:spTree>
@@ -19124,7 +16928,7 @@
 </p:sld>
 </file>
 
-<file path=ppt/slides/slide17.xml><?xml version="1.0" encoding="utf-8"?>
+<file path=ppt/slides/slide16.xml><?xml version="1.0" encoding="utf-8"?>
 <p:sld xmlns:a="http://schemas.openxmlformats.org/drawingml/2006/main" xmlns:r="http://schemas.openxmlformats.org/officeDocument/2006/relationships" xmlns:p="http://schemas.openxmlformats.org/presentationml/2006/main">
   <p:cSld>
     <p:spTree>
@@ -19393,7 +17197,7 @@
 </p:sld>
 </file>
 
-<file path=ppt/slides/slide18.xml><?xml version="1.0" encoding="utf-8"?>
+<file path=ppt/slides/slide17.xml><?xml version="1.0" encoding="utf-8"?>
 <p:sld xmlns:a="http://schemas.openxmlformats.org/drawingml/2006/main" xmlns:r="http://schemas.openxmlformats.org/officeDocument/2006/relationships" xmlns:p="http://schemas.openxmlformats.org/presentationml/2006/main">
   <p:cSld>
     <p:spTree>
@@ -19697,7 +17501,7 @@
 </p:sld>
 </file>
 
-<file path=ppt/slides/slide19.xml><?xml version="1.0" encoding="utf-8"?>
+<file path=ppt/slides/slide18.xml><?xml version="1.0" encoding="utf-8"?>
 <p:sld xmlns:a="http://schemas.openxmlformats.org/drawingml/2006/main" xmlns:r="http://schemas.openxmlformats.org/officeDocument/2006/relationships" xmlns:p="http://schemas.openxmlformats.org/presentationml/2006/main">
   <p:cSld>
     <p:spTree>
@@ -20263,6 +18067,178 @@
 </p:sld>
 </file>
 
+<file path=ppt/slides/slide19.xml><?xml version="1.0" encoding="utf-8"?>
+<p:sld xmlns:a="http://schemas.openxmlformats.org/drawingml/2006/main" xmlns:r="http://schemas.openxmlformats.org/officeDocument/2006/relationships" xmlns:p="http://schemas.openxmlformats.org/presentationml/2006/main">
+  <p:cSld>
+    <p:spTree>
+      <p:nvGrpSpPr>
+        <p:cNvPr id="1" name="Shape 269"/>
+        <p:cNvGrpSpPr/>
+        <p:nvPr/>
+      </p:nvGrpSpPr>
+      <p:grpSpPr>
+        <a:xfrm>
+          <a:off x="0" y="0"/>
+          <a:ext cx="0" cy="0"/>
+          <a:chOff x="0" y="0"/>
+          <a:chExt cx="0" cy="0"/>
+        </a:xfrm>
+      </p:grpSpPr>
+      <p:sp>
+        <p:nvSpPr>
+          <p:cNvPr id="270" name="Google Shape;270;p38"/>
+          <p:cNvSpPr txBox="1">
+            <a:spLocks noGrp="1"/>
+          </p:cNvSpPr>
+          <p:nvPr>
+            <p:ph type="title"/>
+          </p:nvPr>
+        </p:nvSpPr>
+        <p:spPr>
+          <a:prstGeom prst="rect">
+            <a:avLst/>
+          </a:prstGeom>
+          <a:noFill/>
+          <a:ln>
+            <a:noFill/>
+          </a:ln>
+        </p:spPr>
+        <p:txBody>
+          <a:bodyPr spcFirstLastPara="1" wrap="square" lIns="121900" tIns="121900" rIns="121900" bIns="121900" anchor="t" anchorCtr="0">
+            <a:noAutofit/>
+          </a:bodyPr>
+          <a:lstStyle/>
+          <a:p>
+            <a:pPr marL="0" lvl="0" indent="0" algn="l" rtl="0">
+              <a:lnSpc>
+                <a:spcPct val="100000"/>
+              </a:lnSpc>
+              <a:spcBef>
+                <a:spcPts val="0"/>
+              </a:spcBef>
+              <a:spcAft>
+                <a:spcPts val="0"/>
+              </a:spcAft>
+              <a:buClr>
+                <a:srgbClr val="FFFFFF"/>
+              </a:buClr>
+              <a:buSzPts val="3700"/>
+              <a:buNone/>
+            </a:pPr>
+            <a:r>
+              <a:rPr lang="en-US" sz="2400"/>
+              <a:t>How many [students, inspections, projects] should we include in our trial?</a:t>
+            </a:r>
+            <a:endParaRPr/>
+          </a:p>
+        </p:txBody>
+      </p:sp>
+      <p:sp>
+        <p:nvSpPr>
+          <p:cNvPr id="2" name="Text Placeholder 1">
+            <a:extLst>
+              <a:ext uri="{FF2B5EF4-FFF2-40B4-BE49-F238E27FC236}">
+                <a16:creationId xmlns:a16="http://schemas.microsoft.com/office/drawing/2014/main" id="{C8C2FB7B-F091-354D-AB4F-45D5E6CEE4FE}"/>
+              </a:ext>
+            </a:extLst>
+          </p:cNvPr>
+          <p:cNvSpPr>
+            <a:spLocks noGrp="1"/>
+          </p:cNvSpPr>
+          <p:nvPr>
+            <p:ph type="body" idx="1"/>
+          </p:nvPr>
+        </p:nvSpPr>
+        <p:spPr/>
+        <p:txBody>
+          <a:bodyPr/>
+          <a:lstStyle/>
+          <a:p>
+            <a:r>
+              <a:rPr lang="en-US" dirty="0"/>
+              <a:t>Doing a trial over </a:t>
+            </a:r>
+            <a:r>
+              <a:rPr lang="en-US" dirty="0">
+                <a:solidFill>
+                  <a:srgbClr val="FF0000"/>
+                </a:solidFill>
+              </a:rPr>
+              <a:t>[y] years </a:t>
+            </a:r>
+            <a:r>
+              <a:rPr lang="en-US" dirty="0"/>
+              <a:t>with </a:t>
+            </a:r>
+            <a:r>
+              <a:rPr lang="en-US" dirty="0">
+                <a:solidFill>
+                  <a:srgbClr val="FF0000"/>
+                </a:solidFill>
+              </a:rPr>
+              <a:t>[n</a:t>
+            </a:r>
+            <a:r>
+              <a:rPr lang="en-US">
+                <a:solidFill>
+                  <a:srgbClr val="FF0000"/>
+                </a:solidFill>
+              </a:rPr>
+              <a:t>] projects </a:t>
+            </a:r>
+            <a:r>
+              <a:rPr lang="en-US" dirty="0"/>
+              <a:t>every week will give us a </a:t>
+            </a:r>
+            <a:r>
+              <a:rPr lang="en-US" dirty="0">
+                <a:solidFill>
+                  <a:srgbClr val="FF0000"/>
+                </a:solidFill>
+              </a:rPr>
+              <a:t>[p%] chance </a:t>
+            </a:r>
+            <a:r>
+              <a:rPr lang="en-US" dirty="0"/>
+              <a:t>to detect an </a:t>
+            </a:r>
+            <a:r>
+              <a:rPr lang="en-US" dirty="0">
+                <a:solidFill>
+                  <a:srgbClr val="FF0000"/>
+                </a:solidFill>
+              </a:rPr>
+              <a:t>[e%] increase </a:t>
+            </a:r>
+            <a:r>
+              <a:rPr lang="en-US" dirty="0"/>
+              <a:t>in [outcome] with a </a:t>
+            </a:r>
+            <a:r>
+              <a:rPr lang="en-US" dirty="0">
+                <a:solidFill>
+                  <a:srgbClr val="FF0000"/>
+                </a:solidFill>
+              </a:rPr>
+              <a:t>statistical significance of [s%]</a:t>
+            </a:r>
+          </a:p>
+          <a:p>
+            <a:pPr marL="76200" indent="0">
+              <a:buNone/>
+            </a:pPr>
+            <a:endParaRPr lang="en-US" dirty="0"/>
+          </a:p>
+        </p:txBody>
+      </p:sp>
+    </p:spTree>
+  </p:cSld>
+  <p:clrMapOvr>
+    <a:masterClrMapping/>
+  </p:clrMapOvr>
+</p:sld>
+</file>
+
 <file path=ppt/slides/slide2.xml><?xml version="1.0" encoding="utf-8"?>
 <p:sld xmlns:a="http://schemas.openxmlformats.org/drawingml/2006/main" xmlns:r="http://schemas.openxmlformats.org/officeDocument/2006/relationships" xmlns:p="http://schemas.openxmlformats.org/presentationml/2006/main">
   <p:cSld>
@@ -20388,304 +18364,7 @@
 </p:sld>
 </file>
 
-<file path=ppt/slides/slide20.xml><?xml version="1.0" encoding="utf-8"?>
-<p:sld xmlns:a="http://schemas.openxmlformats.org/drawingml/2006/main" xmlns:r="http://schemas.openxmlformats.org/officeDocument/2006/relationships" xmlns:p="http://schemas.openxmlformats.org/presentationml/2006/main">
-  <p:cSld>
-    <p:spTree>
-      <p:nvGrpSpPr>
-        <p:cNvPr id="1" name="Shape 269"/>
-        <p:cNvGrpSpPr/>
-        <p:nvPr/>
-      </p:nvGrpSpPr>
-      <p:grpSpPr>
-        <a:xfrm>
-          <a:off x="0" y="0"/>
-          <a:ext cx="0" cy="0"/>
-          <a:chOff x="0" y="0"/>
-          <a:chExt cx="0" cy="0"/>
-        </a:xfrm>
-      </p:grpSpPr>
-      <p:sp>
-        <p:nvSpPr>
-          <p:cNvPr id="270" name="Google Shape;270;p38"/>
-          <p:cNvSpPr txBox="1">
-            <a:spLocks noGrp="1"/>
-          </p:cNvSpPr>
-          <p:nvPr>
-            <p:ph type="title"/>
-          </p:nvPr>
-        </p:nvSpPr>
-        <p:spPr>
-          <a:prstGeom prst="rect">
-            <a:avLst/>
-          </a:prstGeom>
-          <a:noFill/>
-          <a:ln>
-            <a:noFill/>
-          </a:ln>
-        </p:spPr>
-        <p:txBody>
-          <a:bodyPr spcFirstLastPara="1" wrap="square" lIns="121900" tIns="121900" rIns="121900" bIns="121900" anchor="t" anchorCtr="0">
-            <a:noAutofit/>
-          </a:bodyPr>
-          <a:lstStyle/>
-          <a:p>
-            <a:pPr marL="0" lvl="0" indent="0" algn="l" rtl="0">
-              <a:lnSpc>
-                <a:spcPct val="100000"/>
-              </a:lnSpc>
-              <a:spcBef>
-                <a:spcPts val="0"/>
-              </a:spcBef>
-              <a:spcAft>
-                <a:spcPts val="0"/>
-              </a:spcAft>
-              <a:buClr>
-                <a:srgbClr val="FFFFFF"/>
-              </a:buClr>
-              <a:buSzPts val="3700"/>
-              <a:buNone/>
-            </a:pPr>
-            <a:r>
-              <a:rPr lang="en-US" sz="2400"/>
-              <a:t>How many [students, inspections, projects] should we include in our trial?</a:t>
-            </a:r>
-            <a:endParaRPr/>
-          </a:p>
-        </p:txBody>
-      </p:sp>
-      <p:sp>
-        <p:nvSpPr>
-          <p:cNvPr id="2" name="Text Placeholder 1">
-            <a:extLst>
-              <a:ext uri="{FF2B5EF4-FFF2-40B4-BE49-F238E27FC236}">
-                <a16:creationId xmlns:a16="http://schemas.microsoft.com/office/drawing/2014/main" id="{C8C2FB7B-F091-354D-AB4F-45D5E6CEE4FE}"/>
-              </a:ext>
-            </a:extLst>
-          </p:cNvPr>
-          <p:cNvSpPr>
-            <a:spLocks noGrp="1"/>
-          </p:cNvSpPr>
-          <p:nvPr>
-            <p:ph type="body" idx="1"/>
-          </p:nvPr>
-        </p:nvSpPr>
-        <p:spPr/>
-        <p:txBody>
-          <a:bodyPr/>
-          <a:lstStyle/>
-          <a:p>
-            <a:r>
-              <a:rPr lang="en-US" dirty="0"/>
-              <a:t>Doing a trial over </a:t>
-            </a:r>
-            <a:r>
-              <a:rPr lang="en-US" dirty="0">
-                <a:solidFill>
-                  <a:srgbClr val="FF0000"/>
-                </a:solidFill>
-              </a:rPr>
-              <a:t>[y] years </a:t>
-            </a:r>
-            <a:r>
-              <a:rPr lang="en-US" dirty="0"/>
-              <a:t>with </a:t>
-            </a:r>
-            <a:r>
-              <a:rPr lang="en-US" dirty="0">
-                <a:solidFill>
-                  <a:srgbClr val="FF0000"/>
-                </a:solidFill>
-              </a:rPr>
-              <a:t>[n] students </a:t>
-            </a:r>
-            <a:r>
-              <a:rPr lang="en-US" dirty="0"/>
-              <a:t>every year will give us a </a:t>
-            </a:r>
-            <a:r>
-              <a:rPr lang="en-US" dirty="0">
-                <a:solidFill>
-                  <a:srgbClr val="FF0000"/>
-                </a:solidFill>
-              </a:rPr>
-              <a:t>[p%] chance </a:t>
-            </a:r>
-            <a:r>
-              <a:rPr lang="en-US" dirty="0"/>
-              <a:t>to detect an </a:t>
-            </a:r>
-            <a:r>
-              <a:rPr lang="en-US" dirty="0">
-                <a:solidFill>
-                  <a:srgbClr val="FF0000"/>
-                </a:solidFill>
-              </a:rPr>
-              <a:t>[e%] increase </a:t>
-            </a:r>
-            <a:r>
-              <a:rPr lang="en-US" dirty="0"/>
-              <a:t>in [outcome] with a </a:t>
-            </a:r>
-            <a:r>
-              <a:rPr lang="en-US" dirty="0">
-                <a:solidFill>
-                  <a:srgbClr val="FF0000"/>
-                </a:solidFill>
-              </a:rPr>
-              <a:t>statistical significance of [s%]</a:t>
-            </a:r>
-          </a:p>
-          <a:p>
-            <a:pPr marL="76200" indent="0">
-              <a:buNone/>
-            </a:pPr>
-            <a:endParaRPr lang="en-US" dirty="0"/>
-          </a:p>
-        </p:txBody>
-      </p:sp>
-    </p:spTree>
-  </p:cSld>
-  <p:clrMapOvr>
-    <a:masterClrMapping/>
-  </p:clrMapOvr>
-</p:sld>
-</file>
-
 <file path=ppt/slides/slide3.xml><?xml version="1.0" encoding="utf-8"?>
-<p:sld xmlns:a="http://schemas.openxmlformats.org/drawingml/2006/main" xmlns:r="http://schemas.openxmlformats.org/officeDocument/2006/relationships" xmlns:p="http://schemas.openxmlformats.org/presentationml/2006/main">
-  <p:cSld>
-    <p:spTree>
-      <p:nvGrpSpPr>
-        <p:cNvPr id="1" name=""/>
-        <p:cNvGrpSpPr/>
-        <p:nvPr/>
-      </p:nvGrpSpPr>
-      <p:grpSpPr>
-        <a:xfrm>
-          <a:off x="0" y="0"/>
-          <a:ext cx="0" cy="0"/>
-          <a:chOff x="0" y="0"/>
-          <a:chExt cx="0" cy="0"/>
-        </a:xfrm>
-      </p:grpSpPr>
-      <p:sp>
-        <p:nvSpPr>
-          <p:cNvPr id="4" name="Rectangle 3">
-            <a:extLst>
-              <a:ext uri="{FF2B5EF4-FFF2-40B4-BE49-F238E27FC236}">
-                <a16:creationId xmlns:a16="http://schemas.microsoft.com/office/drawing/2014/main" id="{368D15A7-3146-CC4E-9BB7-36C100B2CAF2}"/>
-              </a:ext>
-            </a:extLst>
-          </p:cNvPr>
-          <p:cNvSpPr/>
-          <p:nvPr/>
-        </p:nvSpPr>
-        <p:spPr>
-          <a:xfrm>
-            <a:off x="0" y="0"/>
-            <a:ext cx="12192000" cy="6858000"/>
-          </a:xfrm>
-          <a:prstGeom prst="rect">
-            <a:avLst/>
-          </a:prstGeom>
-          <a:solidFill>
-            <a:srgbClr val="A61B00"/>
-          </a:solidFill>
-          <a:ln>
-            <a:solidFill>
-              <a:srgbClr val="A61B00"/>
-            </a:solidFill>
-          </a:ln>
-        </p:spPr>
-        <p:style>
-          <a:lnRef idx="2">
-            <a:schemeClr val="accent1">
-              <a:shade val="50000"/>
-            </a:schemeClr>
-          </a:lnRef>
-          <a:fillRef idx="1">
-            <a:schemeClr val="accent1"/>
-          </a:fillRef>
-          <a:effectRef idx="0">
-            <a:schemeClr val="accent1"/>
-          </a:effectRef>
-          <a:fontRef idx="minor">
-            <a:schemeClr val="lt1"/>
-          </a:fontRef>
-        </p:style>
-        <p:txBody>
-          <a:bodyPr rtlCol="0" anchor="ctr"/>
-          <a:lstStyle/>
-          <a:p>
-            <a:pPr algn="ctr"/>
-            <a:endParaRPr lang="en-US" dirty="0"/>
-          </a:p>
-        </p:txBody>
-      </p:sp>
-      <p:sp>
-        <p:nvSpPr>
-          <p:cNvPr id="5" name="TextBox 4">
-            <a:extLst>
-              <a:ext uri="{FF2B5EF4-FFF2-40B4-BE49-F238E27FC236}">
-                <a16:creationId xmlns:a16="http://schemas.microsoft.com/office/drawing/2014/main" id="{638BBB62-1E7B-C641-8352-7C61F8A883C7}"/>
-              </a:ext>
-            </a:extLst>
-          </p:cNvPr>
-          <p:cNvSpPr txBox="1"/>
-          <p:nvPr/>
-        </p:nvSpPr>
-        <p:spPr>
-          <a:xfrm>
-            <a:off x="322728" y="398033"/>
-            <a:ext cx="8025205" cy="2123658"/>
-          </a:xfrm>
-          <a:prstGeom prst="rect">
-            <a:avLst/>
-          </a:prstGeom>
-          <a:noFill/>
-        </p:spPr>
-        <p:txBody>
-          <a:bodyPr wrap="square" rtlCol="0">
-            <a:spAutoFit/>
-          </a:bodyPr>
-          <a:lstStyle/>
-          <a:p>
-            <a:r>
-              <a:rPr lang="en-US" sz="6600" dirty="0">
-                <a:solidFill>
-                  <a:schemeClr val="bg1"/>
-                </a:solidFill>
-              </a:rPr>
-              <a:t>Recap:</a:t>
-            </a:r>
-          </a:p>
-          <a:p>
-            <a:r>
-              <a:rPr lang="en-US" sz="6600" dirty="0">
-                <a:solidFill>
-                  <a:schemeClr val="bg1"/>
-                </a:solidFill>
-              </a:rPr>
-              <a:t>Bias and Fairness</a:t>
-            </a:r>
-          </a:p>
-        </p:txBody>
-      </p:sp>
-    </p:spTree>
-    <p:extLst>
-      <p:ext uri="{BB962C8B-B14F-4D97-AF65-F5344CB8AC3E}">
-        <p14:creationId xmlns:p14="http://schemas.microsoft.com/office/powerpoint/2010/main" val="1375491216"/>
-      </p:ext>
-    </p:extLst>
-  </p:cSld>
-  <p:clrMapOvr>
-    <a:masterClrMapping/>
-  </p:clrMapOvr>
-</p:sld>
-</file>
-
-<file path=ppt/slides/slide4.xml><?xml version="1.0" encoding="utf-8"?>
 <p:sld xmlns:a="http://schemas.openxmlformats.org/drawingml/2006/main" xmlns:r="http://schemas.openxmlformats.org/officeDocument/2006/relationships" xmlns:p="http://schemas.openxmlformats.org/presentationml/2006/main">
   <p:cSld>
     <p:spTree>
@@ -20814,7 +18493,7 @@
 </p:sld>
 </file>
 
-<file path=ppt/slides/slide5.xml><?xml version="1.0" encoding="utf-8"?>
+<file path=ppt/slides/slide4.xml><?xml version="1.0" encoding="utf-8"?>
 <p:sld xmlns:a="http://schemas.openxmlformats.org/drawingml/2006/main" xmlns:r="http://schemas.openxmlformats.org/officeDocument/2006/relationships" xmlns:p="http://schemas.openxmlformats.org/presentationml/2006/main">
   <p:cSld>
     <p:spTree>
@@ -21110,7 +18789,7 @@
 </p:sld>
 </file>
 
-<file path=ppt/slides/slide6.xml><?xml version="1.0" encoding="utf-8"?>
+<file path=ppt/slides/slide5.xml><?xml version="1.0" encoding="utf-8"?>
 <p:sld xmlns:a="http://schemas.openxmlformats.org/drawingml/2006/main" xmlns:r="http://schemas.openxmlformats.org/officeDocument/2006/relationships" xmlns:p="http://schemas.openxmlformats.org/presentationml/2006/main">
   <p:cSld>
     <p:spTree>
@@ -21188,7 +18867,7 @@
 </p:sld>
 </file>
 
-<file path=ppt/slides/slide7.xml><?xml version="1.0" encoding="utf-8"?>
+<file path=ppt/slides/slide6.xml><?xml version="1.0" encoding="utf-8"?>
 <p:sld xmlns:a="http://schemas.openxmlformats.org/drawingml/2006/main" xmlns:r="http://schemas.openxmlformats.org/officeDocument/2006/relationships" xmlns:p="http://schemas.openxmlformats.org/presentationml/2006/main">
   <p:cSld>
     <p:spTree>
@@ -21792,7 +19471,7 @@
 </p:sld>
 </file>
 
-<file path=ppt/slides/slide8.xml><?xml version="1.0" encoding="utf-8"?>
+<file path=ppt/slides/slide7.xml><?xml version="1.0" encoding="utf-8"?>
 <p:sld xmlns:a="http://schemas.openxmlformats.org/drawingml/2006/main" xmlns:r="http://schemas.openxmlformats.org/officeDocument/2006/relationships" xmlns:p="http://schemas.openxmlformats.org/presentationml/2006/main">
   <p:cSld>
     <p:spTree>
@@ -22268,7 +19947,7 @@
 </p:sld>
 </file>
 
-<file path=ppt/slides/slide9.xml><?xml version="1.0" encoding="utf-8"?>
+<file path=ppt/slides/slide8.xml><?xml version="1.0" encoding="utf-8"?>
 <p:sld xmlns:a="http://schemas.openxmlformats.org/drawingml/2006/main" xmlns:r="http://schemas.openxmlformats.org/officeDocument/2006/relationships" xmlns:p="http://schemas.openxmlformats.org/presentationml/2006/main">
   <p:cSld>
     <p:spTree>
@@ -22789,6 +20468,2201 @@
     <p:extLst>
       <p:ext uri="{BB962C8B-B14F-4D97-AF65-F5344CB8AC3E}">
         <p14:creationId xmlns:p14="http://schemas.microsoft.com/office/powerpoint/2010/main" val="4255188078"/>
+      </p:ext>
+    </p:extLst>
+  </p:cSld>
+  <p:clrMapOvr>
+    <a:masterClrMapping/>
+  </p:clrMapOvr>
+</p:sld>
+</file>
+
+<file path=ppt/slides/slide9.xml><?xml version="1.0" encoding="utf-8"?>
+<p:sld xmlns:a="http://schemas.openxmlformats.org/drawingml/2006/main" xmlns:r="http://schemas.openxmlformats.org/officeDocument/2006/relationships" xmlns:p="http://schemas.openxmlformats.org/presentationml/2006/main">
+  <p:cSld>
+    <p:spTree>
+      <p:nvGrpSpPr>
+        <p:cNvPr id="1" name="Shape 1225"/>
+        <p:cNvGrpSpPr/>
+        <p:nvPr/>
+      </p:nvGrpSpPr>
+      <p:grpSpPr>
+        <a:xfrm>
+          <a:off x="0" y="0"/>
+          <a:ext cx="0" cy="0"/>
+          <a:chOff x="0" y="0"/>
+          <a:chExt cx="0" cy="0"/>
+        </a:xfrm>
+      </p:grpSpPr>
+      <p:sp>
+        <p:nvSpPr>
+          <p:cNvPr id="1226" name="Google Shape;1226;p142"/>
+          <p:cNvSpPr txBox="1">
+            <a:spLocks noGrp="1"/>
+          </p:cNvSpPr>
+          <p:nvPr>
+            <p:ph type="title"/>
+          </p:nvPr>
+        </p:nvSpPr>
+        <p:spPr>
+          <a:prstGeom prst="rect">
+            <a:avLst/>
+          </a:prstGeom>
+        </p:spPr>
+        <p:txBody>
+          <a:bodyPr spcFirstLastPara="1" wrap="square" lIns="121900" tIns="121900" rIns="121900" bIns="121900" anchor="ctr" anchorCtr="0">
+            <a:noAutofit/>
+          </a:bodyPr>
+          <a:lstStyle/>
+          <a:p>
+            <a:r>
+              <a:rPr lang="en-US" sz="3200" dirty="0"/>
+              <a:t>CASE STUDY: Mental Health and Incarceration</a:t>
+            </a:r>
+            <a:endParaRPr sz="3200" dirty="0"/>
+          </a:p>
+        </p:txBody>
+      </p:sp>
+      <p:sp>
+        <p:nvSpPr>
+          <p:cNvPr id="12" name="Google Shape;75;p10">
+            <a:extLst>
+              <a:ext uri="{FF2B5EF4-FFF2-40B4-BE49-F238E27FC236}">
+                <a16:creationId xmlns:a16="http://schemas.microsoft.com/office/drawing/2014/main" id="{8C379909-E112-AF40-AB06-F3DCE0D1D789}"/>
+              </a:ext>
+            </a:extLst>
+          </p:cNvPr>
+          <p:cNvSpPr/>
+          <p:nvPr/>
+        </p:nvSpPr>
+        <p:spPr>
+          <a:xfrm>
+            <a:off x="242315" y="1399344"/>
+            <a:ext cx="3352656" cy="4888721"/>
+          </a:xfrm>
+          <a:prstGeom prst="rect">
+            <a:avLst/>
+          </a:prstGeom>
+          <a:solidFill>
+            <a:schemeClr val="lt2"/>
+          </a:solidFill>
+          <a:ln w="9525" cap="flat" cmpd="sng">
+            <a:solidFill>
+              <a:schemeClr val="dk2"/>
+            </a:solidFill>
+            <a:prstDash val="solid"/>
+            <a:round/>
+            <a:headEnd type="none" w="sm" len="sm"/>
+            <a:tailEnd type="none" w="sm" len="sm"/>
+          </a:ln>
+        </p:spPr>
+        <p:txBody>
+          <a:bodyPr spcFirstLastPara="1" wrap="square" lIns="121900" tIns="121900" rIns="121900" bIns="121900" anchor="ctr" anchorCtr="0">
+            <a:noAutofit/>
+          </a:bodyPr>
+          <a:lstStyle/>
+          <a:p>
+            <a:pPr algn="ctr"/>
+            <a:endParaRPr sz="1867" dirty="0">
+              <a:latin typeface="Century Gothic"/>
+              <a:ea typeface="Century Gothic"/>
+              <a:cs typeface="Century Gothic"/>
+              <a:sym typeface="Century Gothic"/>
+            </a:endParaRPr>
+          </a:p>
+        </p:txBody>
+      </p:sp>
+      <p:sp>
+        <p:nvSpPr>
+          <p:cNvPr id="2" name="TextBox 1">
+            <a:extLst>
+              <a:ext uri="{FF2B5EF4-FFF2-40B4-BE49-F238E27FC236}">
+                <a16:creationId xmlns:a16="http://schemas.microsoft.com/office/drawing/2014/main" id="{624431EB-4D8A-1442-9803-AA95ADA5372B}"/>
+              </a:ext>
+            </a:extLst>
+          </p:cNvPr>
+          <p:cNvSpPr txBox="1"/>
+          <p:nvPr/>
+        </p:nvSpPr>
+        <p:spPr>
+          <a:xfrm>
+            <a:off x="415600" y="1479367"/>
+            <a:ext cx="2959465" cy="830997"/>
+          </a:xfrm>
+          <a:prstGeom prst="rect">
+            <a:avLst/>
+          </a:prstGeom>
+          <a:noFill/>
+        </p:spPr>
+        <p:txBody>
+          <a:bodyPr wrap="none" rtlCol="0">
+            <a:spAutoFit/>
+          </a:bodyPr>
+          <a:lstStyle/>
+          <a:p>
+            <a:r>
+              <a:rPr lang="en-US" sz="2400" dirty="0">
+                <a:latin typeface="Century Gothic" panose="020B0502020202020204" pitchFamily="34" charset="0"/>
+              </a:rPr>
+              <a:t>Released From Jail</a:t>
+            </a:r>
+          </a:p>
+          <a:p>
+            <a:r>
+              <a:rPr lang="en-US" sz="2400" dirty="0">
+                <a:latin typeface="Century Gothic" panose="020B0502020202020204" pitchFamily="34" charset="0"/>
+              </a:rPr>
+              <a:t>In Past 3 Years</a:t>
+            </a:r>
+          </a:p>
+        </p:txBody>
+      </p:sp>
+      <p:sp>
+        <p:nvSpPr>
+          <p:cNvPr id="14" name="Google Shape;75;p10">
+            <a:extLst>
+              <a:ext uri="{FF2B5EF4-FFF2-40B4-BE49-F238E27FC236}">
+                <a16:creationId xmlns:a16="http://schemas.microsoft.com/office/drawing/2014/main" id="{4DF198BD-39AA-964B-8EB5-FB1B260A34A5}"/>
+              </a:ext>
+            </a:extLst>
+          </p:cNvPr>
+          <p:cNvSpPr/>
+          <p:nvPr/>
+        </p:nvSpPr>
+        <p:spPr>
+          <a:xfrm>
+            <a:off x="789142" y="3429000"/>
+            <a:ext cx="2665062" cy="2734106"/>
+          </a:xfrm>
+          <a:prstGeom prst="rect">
+            <a:avLst/>
+          </a:prstGeom>
+          <a:solidFill>
+            <a:srgbClr val="0070C0"/>
+          </a:solidFill>
+          <a:ln w="9525" cap="flat" cmpd="sng">
+            <a:solidFill>
+              <a:schemeClr val="dk2"/>
+            </a:solidFill>
+            <a:prstDash val="solid"/>
+            <a:round/>
+            <a:headEnd type="none" w="sm" len="sm"/>
+            <a:tailEnd type="none" w="sm" len="sm"/>
+          </a:ln>
+        </p:spPr>
+        <p:txBody>
+          <a:bodyPr spcFirstLastPara="1" wrap="square" lIns="121900" tIns="121900" rIns="121900" bIns="121900" anchor="ctr" anchorCtr="0">
+            <a:noAutofit/>
+          </a:bodyPr>
+          <a:lstStyle/>
+          <a:p>
+            <a:pPr algn="ctr"/>
+            <a:endParaRPr sz="1867" dirty="0">
+              <a:latin typeface="Century Gothic"/>
+              <a:ea typeface="Century Gothic"/>
+              <a:cs typeface="Century Gothic"/>
+              <a:sym typeface="Century Gothic"/>
+            </a:endParaRPr>
+          </a:p>
+        </p:txBody>
+      </p:sp>
+      <p:sp>
+        <p:nvSpPr>
+          <p:cNvPr id="15" name="TextBox 14">
+            <a:extLst>
+              <a:ext uri="{FF2B5EF4-FFF2-40B4-BE49-F238E27FC236}">
+                <a16:creationId xmlns:a16="http://schemas.microsoft.com/office/drawing/2014/main" id="{3EE42FA2-6A12-0044-AA06-B868FCDE372D}"/>
+              </a:ext>
+            </a:extLst>
+          </p:cNvPr>
+          <p:cNvSpPr txBox="1"/>
+          <p:nvPr/>
+        </p:nvSpPr>
+        <p:spPr>
+          <a:xfrm>
+            <a:off x="890681" y="3610880"/>
+            <a:ext cx="2563522" cy="1200329"/>
+          </a:xfrm>
+          <a:prstGeom prst="rect">
+            <a:avLst/>
+          </a:prstGeom>
+          <a:noFill/>
+        </p:spPr>
+        <p:txBody>
+          <a:bodyPr wrap="none" rtlCol="0">
+            <a:spAutoFit/>
+          </a:bodyPr>
+          <a:lstStyle/>
+          <a:p>
+            <a:r>
+              <a:rPr lang="en-US" sz="2400" dirty="0">
+                <a:solidFill>
+                  <a:schemeClr val="bg1"/>
+                </a:solidFill>
+                <a:latin typeface="Century Gothic" panose="020B0502020202020204" pitchFamily="34" charset="0"/>
+              </a:rPr>
+              <a:t>…With History of</a:t>
+            </a:r>
+          </a:p>
+          <a:p>
+            <a:r>
+              <a:rPr lang="en-US" sz="2400" dirty="0">
+                <a:solidFill>
+                  <a:schemeClr val="bg1"/>
+                </a:solidFill>
+                <a:latin typeface="Century Gothic" panose="020B0502020202020204" pitchFamily="34" charset="0"/>
+              </a:rPr>
+              <a:t>Mental Health</a:t>
+            </a:r>
+          </a:p>
+          <a:p>
+            <a:r>
+              <a:rPr lang="en-US" sz="2400" dirty="0">
+                <a:solidFill>
+                  <a:schemeClr val="bg1"/>
+                </a:solidFill>
+                <a:latin typeface="Century Gothic" panose="020B0502020202020204" pitchFamily="34" charset="0"/>
+              </a:rPr>
+              <a:t>Needs</a:t>
+            </a:r>
+          </a:p>
+        </p:txBody>
+      </p:sp>
+      <p:grpSp>
+        <p:nvGrpSpPr>
+          <p:cNvPr id="16" name="Group 15">
+            <a:extLst>
+              <a:ext uri="{FF2B5EF4-FFF2-40B4-BE49-F238E27FC236}">
+                <a16:creationId xmlns:a16="http://schemas.microsoft.com/office/drawing/2014/main" id="{893B8E00-7081-1F47-9553-568F65765633}"/>
+              </a:ext>
+            </a:extLst>
+          </p:cNvPr>
+          <p:cNvGrpSpPr/>
+          <p:nvPr/>
+        </p:nvGrpSpPr>
+        <p:grpSpPr>
+          <a:xfrm>
+            <a:off x="3857489" y="3829293"/>
+            <a:ext cx="860597" cy="763501"/>
+            <a:chOff x="4389120" y="2462784"/>
+            <a:chExt cx="1706830" cy="1514258"/>
+          </a:xfrm>
+        </p:grpSpPr>
+        <p:sp>
+          <p:nvSpPr>
+            <p:cNvPr id="17" name="Oval 16">
+              <a:extLst>
+                <a:ext uri="{FF2B5EF4-FFF2-40B4-BE49-F238E27FC236}">
+                  <a16:creationId xmlns:a16="http://schemas.microsoft.com/office/drawing/2014/main" id="{F71938DB-AC52-2A4F-903C-9A0F093EEAA8}"/>
+                </a:ext>
+              </a:extLst>
+            </p:cNvPr>
+            <p:cNvSpPr/>
+            <p:nvPr/>
+          </p:nvSpPr>
+          <p:spPr>
+            <a:xfrm>
+              <a:off x="4389120" y="2462784"/>
+              <a:ext cx="402336" cy="402336"/>
+            </a:xfrm>
+            <a:prstGeom prst="ellipse">
+              <a:avLst/>
+            </a:prstGeom>
+            <a:solidFill>
+              <a:schemeClr val="bg2"/>
+            </a:solidFill>
+            <a:ln w="9525">
+              <a:solidFill>
+                <a:schemeClr val="tx1"/>
+              </a:solidFill>
+            </a:ln>
+          </p:spPr>
+          <p:style>
+            <a:lnRef idx="2">
+              <a:schemeClr val="accent1">
+                <a:shade val="50000"/>
+              </a:schemeClr>
+            </a:lnRef>
+            <a:fillRef idx="1">
+              <a:schemeClr val="accent1"/>
+            </a:fillRef>
+            <a:effectRef idx="0">
+              <a:schemeClr val="accent1"/>
+            </a:effectRef>
+            <a:fontRef idx="minor">
+              <a:schemeClr val="lt1"/>
+            </a:fontRef>
+          </p:style>
+          <p:txBody>
+            <a:bodyPr rtlCol="0" anchor="ctr"/>
+            <a:lstStyle/>
+            <a:p>
+              <a:pPr algn="ctr"/>
+              <a:endParaRPr lang="en-US"/>
+            </a:p>
+          </p:txBody>
+        </p:sp>
+        <p:sp>
+          <p:nvSpPr>
+            <p:cNvPr id="18" name="Oval 17">
+              <a:extLst>
+                <a:ext uri="{FF2B5EF4-FFF2-40B4-BE49-F238E27FC236}">
+                  <a16:creationId xmlns:a16="http://schemas.microsoft.com/office/drawing/2014/main" id="{443EB63D-67D3-4E45-B65B-3AE6C37117B7}"/>
+                </a:ext>
+              </a:extLst>
+            </p:cNvPr>
+            <p:cNvSpPr/>
+            <p:nvPr/>
+          </p:nvSpPr>
+          <p:spPr>
+            <a:xfrm>
+              <a:off x="4389120" y="3018745"/>
+              <a:ext cx="402336" cy="402336"/>
+            </a:xfrm>
+            <a:prstGeom prst="ellipse">
+              <a:avLst/>
+            </a:prstGeom>
+            <a:solidFill>
+              <a:schemeClr val="bg2"/>
+            </a:solidFill>
+            <a:ln w="9525">
+              <a:solidFill>
+                <a:schemeClr val="tx1"/>
+              </a:solidFill>
+            </a:ln>
+          </p:spPr>
+          <p:style>
+            <a:lnRef idx="2">
+              <a:schemeClr val="accent1">
+                <a:shade val="50000"/>
+              </a:schemeClr>
+            </a:lnRef>
+            <a:fillRef idx="1">
+              <a:schemeClr val="accent1"/>
+            </a:fillRef>
+            <a:effectRef idx="0">
+              <a:schemeClr val="accent1"/>
+            </a:effectRef>
+            <a:fontRef idx="minor">
+              <a:schemeClr val="lt1"/>
+            </a:fontRef>
+          </p:style>
+          <p:txBody>
+            <a:bodyPr rtlCol="0" anchor="ctr"/>
+            <a:lstStyle/>
+            <a:p>
+              <a:pPr algn="ctr"/>
+              <a:endParaRPr lang="en-US"/>
+            </a:p>
+          </p:txBody>
+        </p:sp>
+        <p:sp>
+          <p:nvSpPr>
+            <p:cNvPr id="19" name="Oval 18">
+              <a:extLst>
+                <a:ext uri="{FF2B5EF4-FFF2-40B4-BE49-F238E27FC236}">
+                  <a16:creationId xmlns:a16="http://schemas.microsoft.com/office/drawing/2014/main" id="{B868292F-40CE-8846-909D-8E042F9E7876}"/>
+                </a:ext>
+              </a:extLst>
+            </p:cNvPr>
+            <p:cNvSpPr/>
+            <p:nvPr/>
+          </p:nvSpPr>
+          <p:spPr>
+            <a:xfrm>
+              <a:off x="4389120" y="3574706"/>
+              <a:ext cx="402336" cy="402336"/>
+            </a:xfrm>
+            <a:prstGeom prst="ellipse">
+              <a:avLst/>
+            </a:prstGeom>
+            <a:solidFill>
+              <a:schemeClr val="bg2"/>
+            </a:solidFill>
+            <a:ln w="9525">
+              <a:solidFill>
+                <a:schemeClr val="tx1"/>
+              </a:solidFill>
+            </a:ln>
+          </p:spPr>
+          <p:style>
+            <a:lnRef idx="2">
+              <a:schemeClr val="accent1">
+                <a:shade val="50000"/>
+              </a:schemeClr>
+            </a:lnRef>
+            <a:fillRef idx="1">
+              <a:schemeClr val="accent1"/>
+            </a:fillRef>
+            <a:effectRef idx="0">
+              <a:schemeClr val="accent1"/>
+            </a:effectRef>
+            <a:fontRef idx="minor">
+              <a:schemeClr val="lt1"/>
+            </a:fontRef>
+          </p:style>
+          <p:txBody>
+            <a:bodyPr rtlCol="0" anchor="ctr"/>
+            <a:lstStyle/>
+            <a:p>
+              <a:pPr algn="ctr"/>
+              <a:endParaRPr lang="en-US"/>
+            </a:p>
+          </p:txBody>
+        </p:sp>
+        <p:sp>
+          <p:nvSpPr>
+            <p:cNvPr id="20" name="Oval 19">
+              <a:extLst>
+                <a:ext uri="{FF2B5EF4-FFF2-40B4-BE49-F238E27FC236}">
+                  <a16:creationId xmlns:a16="http://schemas.microsoft.com/office/drawing/2014/main" id="{87CBACA9-7504-BE46-A082-FA1F0DB3991A}"/>
+                </a:ext>
+              </a:extLst>
+            </p:cNvPr>
+            <p:cNvSpPr/>
+            <p:nvPr/>
+          </p:nvSpPr>
+          <p:spPr>
+            <a:xfrm>
+              <a:off x="5029200" y="2768809"/>
+              <a:ext cx="402336" cy="402336"/>
+            </a:xfrm>
+            <a:prstGeom prst="ellipse">
+              <a:avLst/>
+            </a:prstGeom>
+            <a:solidFill>
+              <a:schemeClr val="bg2"/>
+            </a:solidFill>
+            <a:ln w="9525">
+              <a:solidFill>
+                <a:schemeClr val="tx1"/>
+              </a:solidFill>
+            </a:ln>
+          </p:spPr>
+          <p:style>
+            <a:lnRef idx="2">
+              <a:schemeClr val="accent1">
+                <a:shade val="50000"/>
+              </a:schemeClr>
+            </a:lnRef>
+            <a:fillRef idx="1">
+              <a:schemeClr val="accent1"/>
+            </a:fillRef>
+            <a:effectRef idx="0">
+              <a:schemeClr val="accent1"/>
+            </a:effectRef>
+            <a:fontRef idx="minor">
+              <a:schemeClr val="lt1"/>
+            </a:fontRef>
+          </p:style>
+          <p:txBody>
+            <a:bodyPr rtlCol="0" anchor="ctr"/>
+            <a:lstStyle/>
+            <a:p>
+              <a:pPr algn="ctr"/>
+              <a:endParaRPr lang="en-US"/>
+            </a:p>
+          </p:txBody>
+        </p:sp>
+        <p:sp>
+          <p:nvSpPr>
+            <p:cNvPr id="25" name="Oval 24">
+              <a:extLst>
+                <a:ext uri="{FF2B5EF4-FFF2-40B4-BE49-F238E27FC236}">
+                  <a16:creationId xmlns:a16="http://schemas.microsoft.com/office/drawing/2014/main" id="{7E7DE2BA-187D-4144-BCB9-4822657FE213}"/>
+                </a:ext>
+              </a:extLst>
+            </p:cNvPr>
+            <p:cNvSpPr/>
+            <p:nvPr/>
+          </p:nvSpPr>
+          <p:spPr>
+            <a:xfrm>
+              <a:off x="5029200" y="3350379"/>
+              <a:ext cx="402336" cy="402336"/>
+            </a:xfrm>
+            <a:prstGeom prst="ellipse">
+              <a:avLst/>
+            </a:prstGeom>
+            <a:solidFill>
+              <a:schemeClr val="bg2"/>
+            </a:solidFill>
+            <a:ln w="9525">
+              <a:solidFill>
+                <a:schemeClr val="tx1"/>
+              </a:solidFill>
+            </a:ln>
+          </p:spPr>
+          <p:style>
+            <a:lnRef idx="2">
+              <a:schemeClr val="accent1">
+                <a:shade val="50000"/>
+              </a:schemeClr>
+            </a:lnRef>
+            <a:fillRef idx="1">
+              <a:schemeClr val="accent1"/>
+            </a:fillRef>
+            <a:effectRef idx="0">
+              <a:schemeClr val="accent1"/>
+            </a:effectRef>
+            <a:fontRef idx="minor">
+              <a:schemeClr val="lt1"/>
+            </a:fontRef>
+          </p:style>
+          <p:txBody>
+            <a:bodyPr rtlCol="0" anchor="ctr"/>
+            <a:lstStyle/>
+            <a:p>
+              <a:pPr algn="ctr"/>
+              <a:endParaRPr lang="en-US"/>
+            </a:p>
+          </p:txBody>
+        </p:sp>
+        <p:sp>
+          <p:nvSpPr>
+            <p:cNvPr id="28" name="Oval 27">
+              <a:extLst>
+                <a:ext uri="{FF2B5EF4-FFF2-40B4-BE49-F238E27FC236}">
+                  <a16:creationId xmlns:a16="http://schemas.microsoft.com/office/drawing/2014/main" id="{1A7BFEE9-9AB5-0E4D-ACF5-9DFA5671C333}"/>
+                </a:ext>
+              </a:extLst>
+            </p:cNvPr>
+            <p:cNvSpPr/>
+            <p:nvPr/>
+          </p:nvSpPr>
+          <p:spPr>
+            <a:xfrm>
+              <a:off x="5693614" y="2757135"/>
+              <a:ext cx="402336" cy="402336"/>
+            </a:xfrm>
+            <a:prstGeom prst="ellipse">
+              <a:avLst/>
+            </a:prstGeom>
+            <a:solidFill>
+              <a:schemeClr val="bg2"/>
+            </a:solidFill>
+            <a:ln w="9525">
+              <a:solidFill>
+                <a:schemeClr val="tx1"/>
+              </a:solidFill>
+            </a:ln>
+          </p:spPr>
+          <p:style>
+            <a:lnRef idx="2">
+              <a:schemeClr val="accent1">
+                <a:shade val="50000"/>
+              </a:schemeClr>
+            </a:lnRef>
+            <a:fillRef idx="1">
+              <a:schemeClr val="accent1"/>
+            </a:fillRef>
+            <a:effectRef idx="0">
+              <a:schemeClr val="accent1"/>
+            </a:effectRef>
+            <a:fontRef idx="minor">
+              <a:schemeClr val="lt1"/>
+            </a:fontRef>
+          </p:style>
+          <p:txBody>
+            <a:bodyPr rtlCol="0" anchor="ctr"/>
+            <a:lstStyle/>
+            <a:p>
+              <a:pPr algn="ctr"/>
+              <a:endParaRPr lang="en-US"/>
+            </a:p>
+          </p:txBody>
+        </p:sp>
+        <p:sp>
+          <p:nvSpPr>
+            <p:cNvPr id="29" name="Oval 28">
+              <a:extLst>
+                <a:ext uri="{FF2B5EF4-FFF2-40B4-BE49-F238E27FC236}">
+                  <a16:creationId xmlns:a16="http://schemas.microsoft.com/office/drawing/2014/main" id="{C6B3BF28-ABC9-CB4E-8050-B49E9B365028}"/>
+                </a:ext>
+              </a:extLst>
+            </p:cNvPr>
+            <p:cNvSpPr/>
+            <p:nvPr/>
+          </p:nvSpPr>
+          <p:spPr>
+            <a:xfrm>
+              <a:off x="5669280" y="3338187"/>
+              <a:ext cx="402336" cy="402336"/>
+            </a:xfrm>
+            <a:prstGeom prst="ellipse">
+              <a:avLst/>
+            </a:prstGeom>
+            <a:solidFill>
+              <a:schemeClr val="bg2"/>
+            </a:solidFill>
+            <a:ln w="9525">
+              <a:solidFill>
+                <a:schemeClr val="tx1"/>
+              </a:solidFill>
+            </a:ln>
+          </p:spPr>
+          <p:style>
+            <a:lnRef idx="2">
+              <a:schemeClr val="accent1">
+                <a:shade val="50000"/>
+              </a:schemeClr>
+            </a:lnRef>
+            <a:fillRef idx="1">
+              <a:schemeClr val="accent1"/>
+            </a:fillRef>
+            <a:effectRef idx="0">
+              <a:schemeClr val="accent1"/>
+            </a:effectRef>
+            <a:fontRef idx="minor">
+              <a:schemeClr val="lt1"/>
+            </a:fontRef>
+          </p:style>
+          <p:txBody>
+            <a:bodyPr rtlCol="0" anchor="ctr"/>
+            <a:lstStyle/>
+            <a:p>
+              <a:pPr algn="ctr"/>
+              <a:endParaRPr lang="en-US"/>
+            </a:p>
+          </p:txBody>
+        </p:sp>
+        <p:cxnSp>
+          <p:nvCxnSpPr>
+            <p:cNvPr id="30" name="Straight Connector 29">
+              <a:extLst>
+                <a:ext uri="{FF2B5EF4-FFF2-40B4-BE49-F238E27FC236}">
+                  <a16:creationId xmlns:a16="http://schemas.microsoft.com/office/drawing/2014/main" id="{8472FECF-6CFC-334F-BE08-5E927AAD8527}"/>
+                </a:ext>
+              </a:extLst>
+            </p:cNvPr>
+            <p:cNvCxnSpPr>
+              <a:stCxn id="17" idx="6"/>
+              <a:endCxn id="20" idx="2"/>
+            </p:cNvCxnSpPr>
+            <p:nvPr/>
+          </p:nvCxnSpPr>
+          <p:spPr>
+            <a:xfrm>
+              <a:off x="4791456" y="2663952"/>
+              <a:ext cx="237744" cy="306025"/>
+            </a:xfrm>
+            <a:prstGeom prst="line">
+              <a:avLst/>
+            </a:prstGeom>
+            <a:ln w="28575"/>
+          </p:spPr>
+          <p:style>
+            <a:lnRef idx="1">
+              <a:schemeClr val="dk1"/>
+            </a:lnRef>
+            <a:fillRef idx="0">
+              <a:schemeClr val="dk1"/>
+            </a:fillRef>
+            <a:effectRef idx="0">
+              <a:schemeClr val="dk1"/>
+            </a:effectRef>
+            <a:fontRef idx="minor">
+              <a:schemeClr val="tx1"/>
+            </a:fontRef>
+          </p:style>
+        </p:cxnSp>
+        <p:cxnSp>
+          <p:nvCxnSpPr>
+            <p:cNvPr id="31" name="Straight Connector 30">
+              <a:extLst>
+                <a:ext uri="{FF2B5EF4-FFF2-40B4-BE49-F238E27FC236}">
+                  <a16:creationId xmlns:a16="http://schemas.microsoft.com/office/drawing/2014/main" id="{FE2C2F4C-E9DD-E64A-8D0A-73CC3AEBD025}"/>
+                </a:ext>
+              </a:extLst>
+            </p:cNvPr>
+            <p:cNvCxnSpPr>
+              <a:cxnSpLocks/>
+              <a:stCxn id="17" idx="6"/>
+            </p:cNvCxnSpPr>
+            <p:nvPr/>
+          </p:nvCxnSpPr>
+          <p:spPr>
+            <a:xfrm>
+              <a:off x="4791456" y="2663952"/>
+              <a:ext cx="237744" cy="861986"/>
+            </a:xfrm>
+            <a:prstGeom prst="line">
+              <a:avLst/>
+            </a:prstGeom>
+            <a:ln w="28575"/>
+          </p:spPr>
+          <p:style>
+            <a:lnRef idx="1">
+              <a:schemeClr val="dk1"/>
+            </a:lnRef>
+            <a:fillRef idx="0">
+              <a:schemeClr val="dk1"/>
+            </a:fillRef>
+            <a:effectRef idx="0">
+              <a:schemeClr val="dk1"/>
+            </a:effectRef>
+            <a:fontRef idx="minor">
+              <a:schemeClr val="tx1"/>
+            </a:fontRef>
+          </p:style>
+        </p:cxnSp>
+        <p:cxnSp>
+          <p:nvCxnSpPr>
+            <p:cNvPr id="32" name="Straight Connector 31">
+              <a:extLst>
+                <a:ext uri="{FF2B5EF4-FFF2-40B4-BE49-F238E27FC236}">
+                  <a16:creationId xmlns:a16="http://schemas.microsoft.com/office/drawing/2014/main" id="{409DE789-770A-774A-9861-6E413217C2BC}"/>
+                </a:ext>
+              </a:extLst>
+            </p:cNvPr>
+            <p:cNvCxnSpPr>
+              <a:cxnSpLocks/>
+              <a:stCxn id="18" idx="6"/>
+              <a:endCxn id="20" idx="2"/>
+            </p:cNvCxnSpPr>
+            <p:nvPr/>
+          </p:nvCxnSpPr>
+          <p:spPr>
+            <a:xfrm flipV="1">
+              <a:off x="4791456" y="2969977"/>
+              <a:ext cx="237744" cy="249936"/>
+            </a:xfrm>
+            <a:prstGeom prst="line">
+              <a:avLst/>
+            </a:prstGeom>
+            <a:ln w="28575"/>
+          </p:spPr>
+          <p:style>
+            <a:lnRef idx="1">
+              <a:schemeClr val="dk1"/>
+            </a:lnRef>
+            <a:fillRef idx="0">
+              <a:schemeClr val="dk1"/>
+            </a:fillRef>
+            <a:effectRef idx="0">
+              <a:schemeClr val="dk1"/>
+            </a:effectRef>
+            <a:fontRef idx="minor">
+              <a:schemeClr val="tx1"/>
+            </a:fontRef>
+          </p:style>
+        </p:cxnSp>
+        <p:cxnSp>
+          <p:nvCxnSpPr>
+            <p:cNvPr id="33" name="Straight Connector 32">
+              <a:extLst>
+                <a:ext uri="{FF2B5EF4-FFF2-40B4-BE49-F238E27FC236}">
+                  <a16:creationId xmlns:a16="http://schemas.microsoft.com/office/drawing/2014/main" id="{70E7FF1A-B3F7-F844-B958-D27F45E1DC2D}"/>
+                </a:ext>
+              </a:extLst>
+            </p:cNvPr>
+            <p:cNvCxnSpPr/>
+            <p:nvPr/>
+          </p:nvCxnSpPr>
+          <p:spPr>
+            <a:xfrm>
+              <a:off x="4794479" y="3244297"/>
+              <a:ext cx="237744" cy="306025"/>
+            </a:xfrm>
+            <a:prstGeom prst="line">
+              <a:avLst/>
+            </a:prstGeom>
+            <a:ln w="28575"/>
+          </p:spPr>
+          <p:style>
+            <a:lnRef idx="1">
+              <a:schemeClr val="dk1"/>
+            </a:lnRef>
+            <a:fillRef idx="0">
+              <a:schemeClr val="dk1"/>
+            </a:fillRef>
+            <a:effectRef idx="0">
+              <a:schemeClr val="dk1"/>
+            </a:effectRef>
+            <a:fontRef idx="minor">
+              <a:schemeClr val="tx1"/>
+            </a:fontRef>
+          </p:style>
+        </p:cxnSp>
+        <p:cxnSp>
+          <p:nvCxnSpPr>
+            <p:cNvPr id="34" name="Straight Connector 33">
+              <a:extLst>
+                <a:ext uri="{FF2B5EF4-FFF2-40B4-BE49-F238E27FC236}">
+                  <a16:creationId xmlns:a16="http://schemas.microsoft.com/office/drawing/2014/main" id="{CC5E2131-B1EE-BC43-AF0F-76A74F8C8107}"/>
+                </a:ext>
+              </a:extLst>
+            </p:cNvPr>
+            <p:cNvCxnSpPr>
+              <a:cxnSpLocks/>
+              <a:endCxn id="20" idx="2"/>
+            </p:cNvCxnSpPr>
+            <p:nvPr/>
+          </p:nvCxnSpPr>
+          <p:spPr>
+            <a:xfrm flipV="1">
+              <a:off x="4791456" y="2969977"/>
+              <a:ext cx="237744" cy="805897"/>
+            </a:xfrm>
+            <a:prstGeom prst="line">
+              <a:avLst/>
+            </a:prstGeom>
+            <a:ln w="28575"/>
+          </p:spPr>
+          <p:style>
+            <a:lnRef idx="1">
+              <a:schemeClr val="dk1"/>
+            </a:lnRef>
+            <a:fillRef idx="0">
+              <a:schemeClr val="dk1"/>
+            </a:fillRef>
+            <a:effectRef idx="0">
+              <a:schemeClr val="dk1"/>
+            </a:effectRef>
+            <a:fontRef idx="minor">
+              <a:schemeClr val="tx1"/>
+            </a:fontRef>
+          </p:style>
+        </p:cxnSp>
+        <p:cxnSp>
+          <p:nvCxnSpPr>
+            <p:cNvPr id="35" name="Straight Connector 34">
+              <a:extLst>
+                <a:ext uri="{FF2B5EF4-FFF2-40B4-BE49-F238E27FC236}">
+                  <a16:creationId xmlns:a16="http://schemas.microsoft.com/office/drawing/2014/main" id="{2DBFED98-B6FA-8B4E-876D-F52C114E6024}"/>
+                </a:ext>
+              </a:extLst>
+            </p:cNvPr>
+            <p:cNvCxnSpPr>
+              <a:cxnSpLocks/>
+              <a:endCxn id="25" idx="2"/>
+            </p:cNvCxnSpPr>
+            <p:nvPr/>
+          </p:nvCxnSpPr>
+          <p:spPr>
+            <a:xfrm flipV="1">
+              <a:off x="4791456" y="3551547"/>
+              <a:ext cx="237744" cy="224327"/>
+            </a:xfrm>
+            <a:prstGeom prst="line">
+              <a:avLst/>
+            </a:prstGeom>
+            <a:ln w="28575"/>
+          </p:spPr>
+          <p:style>
+            <a:lnRef idx="1">
+              <a:schemeClr val="dk1"/>
+            </a:lnRef>
+            <a:fillRef idx="0">
+              <a:schemeClr val="dk1"/>
+            </a:fillRef>
+            <a:effectRef idx="0">
+              <a:schemeClr val="dk1"/>
+            </a:effectRef>
+            <a:fontRef idx="minor">
+              <a:schemeClr val="tx1"/>
+            </a:fontRef>
+          </p:style>
+        </p:cxnSp>
+        <p:cxnSp>
+          <p:nvCxnSpPr>
+            <p:cNvPr id="36" name="Straight Connector 35">
+              <a:extLst>
+                <a:ext uri="{FF2B5EF4-FFF2-40B4-BE49-F238E27FC236}">
+                  <a16:creationId xmlns:a16="http://schemas.microsoft.com/office/drawing/2014/main" id="{791D79EA-EDB5-EB44-BFE1-4E1378E764D2}"/>
+                </a:ext>
+              </a:extLst>
+            </p:cNvPr>
+            <p:cNvCxnSpPr>
+              <a:cxnSpLocks/>
+              <a:endCxn id="28" idx="2"/>
+            </p:cNvCxnSpPr>
+            <p:nvPr/>
+          </p:nvCxnSpPr>
+          <p:spPr>
+            <a:xfrm flipV="1">
+              <a:off x="5431536" y="2958303"/>
+              <a:ext cx="262078" cy="33010"/>
+            </a:xfrm>
+            <a:prstGeom prst="line">
+              <a:avLst/>
+            </a:prstGeom>
+            <a:ln w="28575"/>
+          </p:spPr>
+          <p:style>
+            <a:lnRef idx="1">
+              <a:schemeClr val="dk1"/>
+            </a:lnRef>
+            <a:fillRef idx="0">
+              <a:schemeClr val="dk1"/>
+            </a:fillRef>
+            <a:effectRef idx="0">
+              <a:schemeClr val="dk1"/>
+            </a:effectRef>
+            <a:fontRef idx="minor">
+              <a:schemeClr val="tx1"/>
+            </a:fontRef>
+          </p:style>
+        </p:cxnSp>
+        <p:cxnSp>
+          <p:nvCxnSpPr>
+            <p:cNvPr id="37" name="Straight Connector 36">
+              <a:extLst>
+                <a:ext uri="{FF2B5EF4-FFF2-40B4-BE49-F238E27FC236}">
+                  <a16:creationId xmlns:a16="http://schemas.microsoft.com/office/drawing/2014/main" id="{AC8D7F98-F828-4749-89A9-70A2687F9B2D}"/>
+                </a:ext>
+              </a:extLst>
+            </p:cNvPr>
+            <p:cNvCxnSpPr>
+              <a:cxnSpLocks/>
+              <a:endCxn id="29" idx="2"/>
+            </p:cNvCxnSpPr>
+            <p:nvPr/>
+          </p:nvCxnSpPr>
+          <p:spPr>
+            <a:xfrm>
+              <a:off x="5431536" y="3023616"/>
+              <a:ext cx="237744" cy="515739"/>
+            </a:xfrm>
+            <a:prstGeom prst="line">
+              <a:avLst/>
+            </a:prstGeom>
+            <a:ln w="28575"/>
+          </p:spPr>
+          <p:style>
+            <a:lnRef idx="1">
+              <a:schemeClr val="dk1"/>
+            </a:lnRef>
+            <a:fillRef idx="0">
+              <a:schemeClr val="dk1"/>
+            </a:fillRef>
+            <a:effectRef idx="0">
+              <a:schemeClr val="dk1"/>
+            </a:effectRef>
+            <a:fontRef idx="minor">
+              <a:schemeClr val="tx1"/>
+            </a:fontRef>
+          </p:style>
+        </p:cxnSp>
+        <p:cxnSp>
+          <p:nvCxnSpPr>
+            <p:cNvPr id="38" name="Straight Connector 37">
+              <a:extLst>
+                <a:ext uri="{FF2B5EF4-FFF2-40B4-BE49-F238E27FC236}">
+                  <a16:creationId xmlns:a16="http://schemas.microsoft.com/office/drawing/2014/main" id="{CCAA8FC4-6819-0342-9A83-42B280E06237}"/>
+                </a:ext>
+              </a:extLst>
+            </p:cNvPr>
+            <p:cNvCxnSpPr>
+              <a:cxnSpLocks/>
+              <a:endCxn id="28" idx="2"/>
+            </p:cNvCxnSpPr>
+            <p:nvPr/>
+          </p:nvCxnSpPr>
+          <p:spPr>
+            <a:xfrm flipV="1">
+              <a:off x="5428513" y="2958303"/>
+              <a:ext cx="265101" cy="589598"/>
+            </a:xfrm>
+            <a:prstGeom prst="line">
+              <a:avLst/>
+            </a:prstGeom>
+            <a:ln w="28575"/>
+          </p:spPr>
+          <p:style>
+            <a:lnRef idx="1">
+              <a:schemeClr val="dk1"/>
+            </a:lnRef>
+            <a:fillRef idx="0">
+              <a:schemeClr val="dk1"/>
+            </a:fillRef>
+            <a:effectRef idx="0">
+              <a:schemeClr val="dk1"/>
+            </a:effectRef>
+            <a:fontRef idx="minor">
+              <a:schemeClr val="tx1"/>
+            </a:fontRef>
+          </p:style>
+        </p:cxnSp>
+        <p:cxnSp>
+          <p:nvCxnSpPr>
+            <p:cNvPr id="39" name="Straight Connector 38">
+              <a:extLst>
+                <a:ext uri="{FF2B5EF4-FFF2-40B4-BE49-F238E27FC236}">
+                  <a16:creationId xmlns:a16="http://schemas.microsoft.com/office/drawing/2014/main" id="{9DB29A49-FD36-804C-B626-ECEBE343A946}"/>
+                </a:ext>
+              </a:extLst>
+            </p:cNvPr>
+            <p:cNvCxnSpPr>
+              <a:cxnSpLocks/>
+              <a:endCxn id="29" idx="2"/>
+            </p:cNvCxnSpPr>
+            <p:nvPr/>
+          </p:nvCxnSpPr>
+          <p:spPr>
+            <a:xfrm>
+              <a:off x="5431536" y="3510697"/>
+              <a:ext cx="237744" cy="28658"/>
+            </a:xfrm>
+            <a:prstGeom prst="line">
+              <a:avLst/>
+            </a:prstGeom>
+            <a:ln w="28575"/>
+          </p:spPr>
+          <p:style>
+            <a:lnRef idx="1">
+              <a:schemeClr val="dk1"/>
+            </a:lnRef>
+            <a:fillRef idx="0">
+              <a:schemeClr val="dk1"/>
+            </a:fillRef>
+            <a:effectRef idx="0">
+              <a:schemeClr val="dk1"/>
+            </a:effectRef>
+            <a:fontRef idx="minor">
+              <a:schemeClr val="tx1"/>
+            </a:fontRef>
+          </p:style>
+        </p:cxnSp>
+      </p:grpSp>
+      <p:graphicFrame>
+        <p:nvGraphicFramePr>
+          <p:cNvPr id="5" name="Table 5">
+            <a:extLst>
+              <a:ext uri="{FF2B5EF4-FFF2-40B4-BE49-F238E27FC236}">
+                <a16:creationId xmlns:a16="http://schemas.microsoft.com/office/drawing/2014/main" id="{77FEABA3-487B-1046-962E-19F31B5554DD}"/>
+              </a:ext>
+            </a:extLst>
+          </p:cNvPr>
+          <p:cNvGraphicFramePr>
+            <a:graphicFrameLocks noGrp="1"/>
+          </p:cNvGraphicFramePr>
+          <p:nvPr>
+            <p:extLst>
+              <p:ext uri="{D42A27DB-BD31-4B8C-83A1-F6EECF244321}">
+                <p14:modId xmlns:p14="http://schemas.microsoft.com/office/powerpoint/2010/main" val="2891490566"/>
+              </p:ext>
+            </p:extLst>
+          </p:nvPr>
+        </p:nvGraphicFramePr>
+        <p:xfrm>
+          <a:off x="5382865" y="1803689"/>
+          <a:ext cx="1654828" cy="4876800"/>
+        </p:xfrm>
+        <a:graphic>
+          <a:graphicData uri="http://schemas.openxmlformats.org/drawingml/2006/table">
+            <a:tbl>
+              <a:tblPr firstRow="1" bandRow="1">
+                <a:tableStyleId>{073A0DAA-6AF3-43AB-8588-CEC1D06C72B9}</a:tableStyleId>
+              </a:tblPr>
+              <a:tblGrid>
+                <a:gridCol w="827414">
+                  <a:extLst>
+                    <a:ext uri="{9D8B030D-6E8A-4147-A177-3AD203B41FA5}">
+                      <a16:colId xmlns:a16="http://schemas.microsoft.com/office/drawing/2014/main" val="1088238618"/>
+                    </a:ext>
+                  </a:extLst>
+                </a:gridCol>
+                <a:gridCol w="827414">
+                  <a:extLst>
+                    <a:ext uri="{9D8B030D-6E8A-4147-A177-3AD203B41FA5}">
+                      <a16:colId xmlns:a16="http://schemas.microsoft.com/office/drawing/2014/main" val="2545921369"/>
+                    </a:ext>
+                  </a:extLst>
+                </a:gridCol>
+              </a:tblGrid>
+              <a:tr h="258046">
+                <a:tc>
+                  <a:txBody>
+                    <a:bodyPr/>
+                    <a:lstStyle/>
+                    <a:p>
+                      <a:pPr algn="ctr"/>
+                      <a:r>
+                        <a:rPr lang="en-US" dirty="0"/>
+                        <a:t>ID</a:t>
+                      </a:r>
+                    </a:p>
+                  </a:txBody>
+                  <a:tcPr/>
+                </a:tc>
+                <a:tc>
+                  <a:txBody>
+                    <a:bodyPr/>
+                    <a:lstStyle/>
+                    <a:p>
+                      <a:pPr algn="ctr"/>
+                      <a:r>
+                        <a:rPr lang="en-US" dirty="0"/>
+                        <a:t>SCORE</a:t>
+                      </a:r>
+                    </a:p>
+                  </a:txBody>
+                  <a:tcPr/>
+                </a:tc>
+                <a:extLst>
+                  <a:ext uri="{0D108BD9-81ED-4DB2-BD59-A6C34878D82A}">
+                    <a16:rowId xmlns:a16="http://schemas.microsoft.com/office/drawing/2014/main" val="302251417"/>
+                  </a:ext>
+                </a:extLst>
+              </a:tr>
+              <a:tr h="258046">
+                <a:tc>
+                  <a:txBody>
+                    <a:bodyPr/>
+                    <a:lstStyle/>
+                    <a:p>
+                      <a:pPr algn="ctr"/>
+                      <a:r>
+                        <a:rPr lang="en-US" dirty="0"/>
+                        <a:t>27</a:t>
+                      </a:r>
+                    </a:p>
+                  </a:txBody>
+                  <a:tcPr/>
+                </a:tc>
+                <a:tc>
+                  <a:txBody>
+                    <a:bodyPr/>
+                    <a:lstStyle/>
+                    <a:p>
+                      <a:pPr algn="ctr"/>
+                      <a:r>
+                        <a:rPr lang="en-US" dirty="0"/>
+                        <a:t>0.95</a:t>
+                      </a:r>
+                    </a:p>
+                  </a:txBody>
+                  <a:tcPr/>
+                </a:tc>
+                <a:extLst>
+                  <a:ext uri="{0D108BD9-81ED-4DB2-BD59-A6C34878D82A}">
+                    <a16:rowId xmlns:a16="http://schemas.microsoft.com/office/drawing/2014/main" val="122529026"/>
+                  </a:ext>
+                </a:extLst>
+              </a:tr>
+              <a:tr h="258046">
+                <a:tc>
+                  <a:txBody>
+                    <a:bodyPr/>
+                    <a:lstStyle/>
+                    <a:p>
+                      <a:pPr algn="ctr"/>
+                      <a:r>
+                        <a:rPr lang="en-US" dirty="0"/>
+                        <a:t>13</a:t>
+                      </a:r>
+                    </a:p>
+                  </a:txBody>
+                  <a:tcPr/>
+                </a:tc>
+                <a:tc>
+                  <a:txBody>
+                    <a:bodyPr/>
+                    <a:lstStyle/>
+                    <a:p>
+                      <a:pPr algn="ctr"/>
+                      <a:r>
+                        <a:rPr lang="en-US" dirty="0"/>
+                        <a:t>0.93</a:t>
+                      </a:r>
+                    </a:p>
+                  </a:txBody>
+                  <a:tcPr/>
+                </a:tc>
+                <a:extLst>
+                  <a:ext uri="{0D108BD9-81ED-4DB2-BD59-A6C34878D82A}">
+                    <a16:rowId xmlns:a16="http://schemas.microsoft.com/office/drawing/2014/main" val="4025916763"/>
+                  </a:ext>
+                </a:extLst>
+              </a:tr>
+              <a:tr h="258046">
+                <a:tc>
+                  <a:txBody>
+                    <a:bodyPr/>
+                    <a:lstStyle/>
+                    <a:p>
+                      <a:pPr algn="ctr"/>
+                      <a:r>
+                        <a:rPr lang="en-US" dirty="0"/>
+                        <a:t>1</a:t>
+                      </a:r>
+                    </a:p>
+                  </a:txBody>
+                  <a:tcPr/>
+                </a:tc>
+                <a:tc>
+                  <a:txBody>
+                    <a:bodyPr/>
+                    <a:lstStyle/>
+                    <a:p>
+                      <a:pPr algn="ctr"/>
+                      <a:r>
+                        <a:rPr lang="en-US" dirty="0"/>
+                        <a:t>0.89</a:t>
+                      </a:r>
+                    </a:p>
+                  </a:txBody>
+                  <a:tcPr/>
+                </a:tc>
+                <a:extLst>
+                  <a:ext uri="{0D108BD9-81ED-4DB2-BD59-A6C34878D82A}">
+                    <a16:rowId xmlns:a16="http://schemas.microsoft.com/office/drawing/2014/main" val="2323964280"/>
+                  </a:ext>
+                </a:extLst>
+              </a:tr>
+              <a:tr h="258046">
+                <a:tc>
+                  <a:txBody>
+                    <a:bodyPr/>
+                    <a:lstStyle/>
+                    <a:p>
+                      <a:pPr algn="ctr"/>
+                      <a:r>
+                        <a:rPr lang="en-US" dirty="0"/>
+                        <a:t>93</a:t>
+                      </a:r>
+                    </a:p>
+                  </a:txBody>
+                  <a:tcPr/>
+                </a:tc>
+                <a:tc>
+                  <a:txBody>
+                    <a:bodyPr/>
+                    <a:lstStyle/>
+                    <a:p>
+                      <a:pPr algn="ctr"/>
+                      <a:r>
+                        <a:rPr lang="en-US" dirty="0"/>
+                        <a:t>0.89</a:t>
+                      </a:r>
+                    </a:p>
+                  </a:txBody>
+                  <a:tcPr/>
+                </a:tc>
+                <a:extLst>
+                  <a:ext uri="{0D108BD9-81ED-4DB2-BD59-A6C34878D82A}">
+                    <a16:rowId xmlns:a16="http://schemas.microsoft.com/office/drawing/2014/main" val="2948836163"/>
+                  </a:ext>
+                </a:extLst>
+              </a:tr>
+              <a:tr h="258046">
+                <a:tc>
+                  <a:txBody>
+                    <a:bodyPr/>
+                    <a:lstStyle/>
+                    <a:p>
+                      <a:pPr algn="ctr"/>
+                      <a:r>
+                        <a:rPr lang="en-US" dirty="0"/>
+                        <a:t>53</a:t>
+                      </a:r>
+                    </a:p>
+                  </a:txBody>
+                  <a:tcPr/>
+                </a:tc>
+                <a:tc>
+                  <a:txBody>
+                    <a:bodyPr/>
+                    <a:lstStyle/>
+                    <a:p>
+                      <a:pPr algn="ctr"/>
+                      <a:r>
+                        <a:rPr lang="en-US" dirty="0"/>
+                        <a:t>0.82</a:t>
+                      </a:r>
+                    </a:p>
+                  </a:txBody>
+                  <a:tcPr/>
+                </a:tc>
+                <a:extLst>
+                  <a:ext uri="{0D108BD9-81ED-4DB2-BD59-A6C34878D82A}">
+                    <a16:rowId xmlns:a16="http://schemas.microsoft.com/office/drawing/2014/main" val="1952042522"/>
+                  </a:ext>
+                </a:extLst>
+              </a:tr>
+              <a:tr h="258046">
+                <a:tc>
+                  <a:txBody>
+                    <a:bodyPr/>
+                    <a:lstStyle/>
+                    <a:p>
+                      <a:pPr algn="ctr"/>
+                      <a:r>
+                        <a:rPr lang="en-US" dirty="0"/>
+                        <a:t>23</a:t>
+                      </a:r>
+                    </a:p>
+                  </a:txBody>
+                  <a:tcPr/>
+                </a:tc>
+                <a:tc>
+                  <a:txBody>
+                    <a:bodyPr/>
+                    <a:lstStyle/>
+                    <a:p>
+                      <a:pPr algn="ctr"/>
+                      <a:r>
+                        <a:rPr lang="en-US" dirty="0"/>
+                        <a:t>0.75</a:t>
+                      </a:r>
+                    </a:p>
+                  </a:txBody>
+                  <a:tcPr/>
+                </a:tc>
+                <a:extLst>
+                  <a:ext uri="{0D108BD9-81ED-4DB2-BD59-A6C34878D82A}">
+                    <a16:rowId xmlns:a16="http://schemas.microsoft.com/office/drawing/2014/main" val="974555594"/>
+                  </a:ext>
+                </a:extLst>
+              </a:tr>
+              <a:tr h="258046">
+                <a:tc>
+                  <a:txBody>
+                    <a:bodyPr/>
+                    <a:lstStyle/>
+                    <a:p>
+                      <a:pPr algn="ctr"/>
+                      <a:r>
+                        <a:rPr lang="en-US" dirty="0"/>
+                        <a:t>59</a:t>
+                      </a:r>
+                    </a:p>
+                  </a:txBody>
+                  <a:tcPr/>
+                </a:tc>
+                <a:tc>
+                  <a:txBody>
+                    <a:bodyPr/>
+                    <a:lstStyle/>
+                    <a:p>
+                      <a:pPr algn="ctr"/>
+                      <a:r>
+                        <a:rPr lang="en-US" dirty="0"/>
+                        <a:t>0.72</a:t>
+                      </a:r>
+                    </a:p>
+                  </a:txBody>
+                  <a:tcPr/>
+                </a:tc>
+                <a:extLst>
+                  <a:ext uri="{0D108BD9-81ED-4DB2-BD59-A6C34878D82A}">
+                    <a16:rowId xmlns:a16="http://schemas.microsoft.com/office/drawing/2014/main" val="3832195445"/>
+                  </a:ext>
+                </a:extLst>
+              </a:tr>
+              <a:tr h="258046">
+                <a:tc>
+                  <a:txBody>
+                    <a:bodyPr/>
+                    <a:lstStyle/>
+                    <a:p>
+                      <a:pPr algn="ctr"/>
+                      <a:r>
+                        <a:rPr lang="en-US" dirty="0"/>
+                        <a:t>64</a:t>
+                      </a:r>
+                    </a:p>
+                  </a:txBody>
+                  <a:tcPr/>
+                </a:tc>
+                <a:tc>
+                  <a:txBody>
+                    <a:bodyPr/>
+                    <a:lstStyle/>
+                    <a:p>
+                      <a:pPr algn="ctr"/>
+                      <a:r>
+                        <a:rPr lang="en-US" dirty="0"/>
+                        <a:t>0.65</a:t>
+                      </a:r>
+                    </a:p>
+                  </a:txBody>
+                  <a:tcPr/>
+                </a:tc>
+                <a:extLst>
+                  <a:ext uri="{0D108BD9-81ED-4DB2-BD59-A6C34878D82A}">
+                    <a16:rowId xmlns:a16="http://schemas.microsoft.com/office/drawing/2014/main" val="1564902966"/>
+                  </a:ext>
+                </a:extLst>
+              </a:tr>
+              <a:tr h="258046">
+                <a:tc>
+                  <a:txBody>
+                    <a:bodyPr/>
+                    <a:lstStyle/>
+                    <a:p>
+                      <a:pPr algn="ctr"/>
+                      <a:r>
+                        <a:rPr lang="en-US" dirty="0"/>
+                        <a:t>20</a:t>
+                      </a:r>
+                    </a:p>
+                  </a:txBody>
+                  <a:tcPr/>
+                </a:tc>
+                <a:tc>
+                  <a:txBody>
+                    <a:bodyPr/>
+                    <a:lstStyle/>
+                    <a:p>
+                      <a:pPr algn="ctr"/>
+                      <a:r>
+                        <a:rPr lang="en-US" dirty="0"/>
+                        <a:t>0.61</a:t>
+                      </a:r>
+                    </a:p>
+                  </a:txBody>
+                  <a:tcPr/>
+                </a:tc>
+                <a:extLst>
+                  <a:ext uri="{0D108BD9-81ED-4DB2-BD59-A6C34878D82A}">
+                    <a16:rowId xmlns:a16="http://schemas.microsoft.com/office/drawing/2014/main" val="1650052668"/>
+                  </a:ext>
+                </a:extLst>
+              </a:tr>
+              <a:tr h="258046">
+                <a:tc>
+                  <a:txBody>
+                    <a:bodyPr/>
+                    <a:lstStyle/>
+                    <a:p>
+                      <a:pPr algn="ctr"/>
+                      <a:r>
+                        <a:rPr lang="en-US" dirty="0"/>
+                        <a:t>18</a:t>
+                      </a:r>
+                    </a:p>
+                  </a:txBody>
+                  <a:tcPr/>
+                </a:tc>
+                <a:tc>
+                  <a:txBody>
+                    <a:bodyPr/>
+                    <a:lstStyle/>
+                    <a:p>
+                      <a:pPr algn="ctr"/>
+                      <a:r>
+                        <a:rPr lang="en-US" dirty="0"/>
+                        <a:t>0.59</a:t>
+                      </a:r>
+                    </a:p>
+                  </a:txBody>
+                  <a:tcPr/>
+                </a:tc>
+                <a:extLst>
+                  <a:ext uri="{0D108BD9-81ED-4DB2-BD59-A6C34878D82A}">
+                    <a16:rowId xmlns:a16="http://schemas.microsoft.com/office/drawing/2014/main" val="1045450806"/>
+                  </a:ext>
+                </a:extLst>
+              </a:tr>
+              <a:tr h="258046">
+                <a:tc>
+                  <a:txBody>
+                    <a:bodyPr/>
+                    <a:lstStyle/>
+                    <a:p>
+                      <a:pPr algn="ctr"/>
+                      <a:r>
+                        <a:rPr lang="en-US" dirty="0"/>
+                        <a:t>46</a:t>
+                      </a:r>
+                    </a:p>
+                  </a:txBody>
+                  <a:tcPr/>
+                </a:tc>
+                <a:tc>
+                  <a:txBody>
+                    <a:bodyPr/>
+                    <a:lstStyle/>
+                    <a:p>
+                      <a:pPr algn="ctr"/>
+                      <a:r>
+                        <a:rPr lang="en-US" dirty="0"/>
+                        <a:t>0.52</a:t>
+                      </a:r>
+                    </a:p>
+                  </a:txBody>
+                  <a:tcPr/>
+                </a:tc>
+                <a:extLst>
+                  <a:ext uri="{0D108BD9-81ED-4DB2-BD59-A6C34878D82A}">
+                    <a16:rowId xmlns:a16="http://schemas.microsoft.com/office/drawing/2014/main" val="2499045432"/>
+                  </a:ext>
+                </a:extLst>
+              </a:tr>
+              <a:tr h="258046">
+                <a:tc>
+                  <a:txBody>
+                    <a:bodyPr/>
+                    <a:lstStyle/>
+                    <a:p>
+                      <a:pPr algn="ctr"/>
+                      <a:r>
+                        <a:rPr lang="en-US" dirty="0"/>
+                        <a:t>82</a:t>
+                      </a:r>
+                    </a:p>
+                  </a:txBody>
+                  <a:tcPr/>
+                </a:tc>
+                <a:tc>
+                  <a:txBody>
+                    <a:bodyPr/>
+                    <a:lstStyle/>
+                    <a:p>
+                      <a:pPr algn="ctr"/>
+                      <a:r>
+                        <a:rPr lang="en-US" dirty="0"/>
+                        <a:t>0.48</a:t>
+                      </a:r>
+                    </a:p>
+                  </a:txBody>
+                  <a:tcPr/>
+                </a:tc>
+                <a:extLst>
+                  <a:ext uri="{0D108BD9-81ED-4DB2-BD59-A6C34878D82A}">
+                    <a16:rowId xmlns:a16="http://schemas.microsoft.com/office/drawing/2014/main" val="4231666519"/>
+                  </a:ext>
+                </a:extLst>
+              </a:tr>
+              <a:tr h="258046">
+                <a:tc>
+                  <a:txBody>
+                    <a:bodyPr/>
+                    <a:lstStyle/>
+                    <a:p>
+                      <a:pPr algn="ctr"/>
+                      <a:r>
+                        <a:rPr lang="en-US" dirty="0"/>
+                        <a:t>49</a:t>
+                      </a:r>
+                    </a:p>
+                  </a:txBody>
+                  <a:tcPr/>
+                </a:tc>
+                <a:tc>
+                  <a:txBody>
+                    <a:bodyPr/>
+                    <a:lstStyle/>
+                    <a:p>
+                      <a:pPr algn="ctr"/>
+                      <a:r>
+                        <a:rPr lang="en-US" dirty="0"/>
+                        <a:t>0.37</a:t>
+                      </a:r>
+                    </a:p>
+                  </a:txBody>
+                  <a:tcPr/>
+                </a:tc>
+                <a:extLst>
+                  <a:ext uri="{0D108BD9-81ED-4DB2-BD59-A6C34878D82A}">
+                    <a16:rowId xmlns:a16="http://schemas.microsoft.com/office/drawing/2014/main" val="1155732854"/>
+                  </a:ext>
+                </a:extLst>
+              </a:tr>
+              <a:tr h="258046">
+                <a:tc>
+                  <a:txBody>
+                    <a:bodyPr/>
+                    <a:lstStyle/>
+                    <a:p>
+                      <a:pPr algn="ctr"/>
+                      <a:r>
+                        <a:rPr lang="en-US" dirty="0"/>
+                        <a:t>56</a:t>
+                      </a:r>
+                    </a:p>
+                  </a:txBody>
+                  <a:tcPr/>
+                </a:tc>
+                <a:tc>
+                  <a:txBody>
+                    <a:bodyPr/>
+                    <a:lstStyle/>
+                    <a:p>
+                      <a:pPr algn="ctr"/>
+                      <a:r>
+                        <a:rPr lang="en-US" dirty="0"/>
+                        <a:t>0.22</a:t>
+                      </a:r>
+                    </a:p>
+                  </a:txBody>
+                  <a:tcPr/>
+                </a:tc>
+                <a:extLst>
+                  <a:ext uri="{0D108BD9-81ED-4DB2-BD59-A6C34878D82A}">
+                    <a16:rowId xmlns:a16="http://schemas.microsoft.com/office/drawing/2014/main" val="2603839184"/>
+                  </a:ext>
+                </a:extLst>
+              </a:tr>
+              <a:tr h="258046">
+                <a:tc>
+                  <a:txBody>
+                    <a:bodyPr/>
+                    <a:lstStyle/>
+                    <a:p>
+                      <a:pPr algn="ctr"/>
+                      <a:r>
+                        <a:rPr lang="en-US" dirty="0"/>
+                        <a:t>17</a:t>
+                      </a:r>
+                    </a:p>
+                  </a:txBody>
+                  <a:tcPr/>
+                </a:tc>
+                <a:tc>
+                  <a:txBody>
+                    <a:bodyPr/>
+                    <a:lstStyle/>
+                    <a:p>
+                      <a:pPr algn="ctr"/>
+                      <a:r>
+                        <a:rPr lang="en-US" dirty="0"/>
+                        <a:t>0.12</a:t>
+                      </a:r>
+                    </a:p>
+                  </a:txBody>
+                  <a:tcPr/>
+                </a:tc>
+                <a:extLst>
+                  <a:ext uri="{0D108BD9-81ED-4DB2-BD59-A6C34878D82A}">
+                    <a16:rowId xmlns:a16="http://schemas.microsoft.com/office/drawing/2014/main" val="14563681"/>
+                  </a:ext>
+                </a:extLst>
+              </a:tr>
+            </a:tbl>
+          </a:graphicData>
+        </a:graphic>
+      </p:graphicFrame>
+      <p:sp>
+        <p:nvSpPr>
+          <p:cNvPr id="6" name="Right Arrow 5">
+            <a:extLst>
+              <a:ext uri="{FF2B5EF4-FFF2-40B4-BE49-F238E27FC236}">
+                <a16:creationId xmlns:a16="http://schemas.microsoft.com/office/drawing/2014/main" id="{9B6C0F7E-394D-C849-AEEA-57F9432B58C8}"/>
+              </a:ext>
+            </a:extLst>
+          </p:cNvPr>
+          <p:cNvSpPr/>
+          <p:nvPr/>
+        </p:nvSpPr>
+        <p:spPr>
+          <a:xfrm>
+            <a:off x="3454203" y="4622104"/>
+            <a:ext cx="1916392" cy="350729"/>
+          </a:xfrm>
+          <a:prstGeom prst="rightArrow">
+            <a:avLst/>
+          </a:prstGeom>
+          <a:solidFill>
+            <a:srgbClr val="0070C0"/>
+          </a:solidFill>
+          <a:ln>
+            <a:noFill/>
+          </a:ln>
+        </p:spPr>
+        <p:style>
+          <a:lnRef idx="2">
+            <a:schemeClr val="accent1">
+              <a:shade val="50000"/>
+            </a:schemeClr>
+          </a:lnRef>
+          <a:fillRef idx="1">
+            <a:schemeClr val="accent1"/>
+          </a:fillRef>
+          <a:effectRef idx="0">
+            <a:schemeClr val="accent1"/>
+          </a:effectRef>
+          <a:fontRef idx="minor">
+            <a:schemeClr val="lt1"/>
+          </a:fontRef>
+        </p:style>
+        <p:txBody>
+          <a:bodyPr rtlCol="0" anchor="ctr"/>
+          <a:lstStyle/>
+          <a:p>
+            <a:pPr algn="ctr"/>
+            <a:endParaRPr lang="en-US"/>
+          </a:p>
+        </p:txBody>
+      </p:sp>
+      <p:sp>
+        <p:nvSpPr>
+          <p:cNvPr id="40" name="TextBox 39">
+            <a:extLst>
+              <a:ext uri="{FF2B5EF4-FFF2-40B4-BE49-F238E27FC236}">
+                <a16:creationId xmlns:a16="http://schemas.microsoft.com/office/drawing/2014/main" id="{CD8EA7B6-012E-3340-9E87-E323487E7303}"/>
+              </a:ext>
+            </a:extLst>
+          </p:cNvPr>
+          <p:cNvSpPr txBox="1"/>
+          <p:nvPr/>
+        </p:nvSpPr>
+        <p:spPr>
+          <a:xfrm>
+            <a:off x="3696510" y="3272099"/>
+            <a:ext cx="1141659" cy="461665"/>
+          </a:xfrm>
+          <a:prstGeom prst="rect">
+            <a:avLst/>
+          </a:prstGeom>
+          <a:noFill/>
+        </p:spPr>
+        <p:txBody>
+          <a:bodyPr wrap="none" rtlCol="0">
+            <a:spAutoFit/>
+          </a:bodyPr>
+          <a:lstStyle/>
+          <a:p>
+            <a:r>
+              <a:rPr lang="en-US" sz="2400" dirty="0">
+                <a:latin typeface="Century Gothic" panose="020B0502020202020204" pitchFamily="34" charset="0"/>
+              </a:rPr>
+              <a:t>Model</a:t>
+            </a:r>
+          </a:p>
+        </p:txBody>
+      </p:sp>
+      <p:sp>
+        <p:nvSpPr>
+          <p:cNvPr id="41" name="TextBox 40">
+            <a:extLst>
+              <a:ext uri="{FF2B5EF4-FFF2-40B4-BE49-F238E27FC236}">
+                <a16:creationId xmlns:a16="http://schemas.microsoft.com/office/drawing/2014/main" id="{FE13169F-ADA2-914B-8C32-2AD6FA04C976}"/>
+              </a:ext>
+            </a:extLst>
+          </p:cNvPr>
+          <p:cNvSpPr txBox="1"/>
+          <p:nvPr/>
+        </p:nvSpPr>
+        <p:spPr>
+          <a:xfrm>
+            <a:off x="4955885" y="1187209"/>
+            <a:ext cx="2709396" cy="461665"/>
+          </a:xfrm>
+          <a:prstGeom prst="rect">
+            <a:avLst/>
+          </a:prstGeom>
+          <a:noFill/>
+        </p:spPr>
+        <p:txBody>
+          <a:bodyPr wrap="none" rtlCol="0">
+            <a:spAutoFit/>
+          </a:bodyPr>
+          <a:lstStyle/>
+          <a:p>
+            <a:r>
+              <a:rPr lang="en-US" sz="2400" dirty="0">
+                <a:latin typeface="Century Gothic" panose="020B0502020202020204" pitchFamily="34" charset="0"/>
+              </a:rPr>
+              <a:t>Return to Jail Risk</a:t>
+            </a:r>
+          </a:p>
+        </p:txBody>
+      </p:sp>
+      <p:sp>
+        <p:nvSpPr>
+          <p:cNvPr id="7" name="Rectangle 6">
+            <a:extLst>
+              <a:ext uri="{FF2B5EF4-FFF2-40B4-BE49-F238E27FC236}">
+                <a16:creationId xmlns:a16="http://schemas.microsoft.com/office/drawing/2014/main" id="{81BFFD78-6ACB-084C-8897-FB70032B66B3}"/>
+              </a:ext>
+            </a:extLst>
+          </p:cNvPr>
+          <p:cNvSpPr/>
+          <p:nvPr/>
+        </p:nvSpPr>
+        <p:spPr>
+          <a:xfrm>
+            <a:off x="5370595" y="2129425"/>
+            <a:ext cx="1667098" cy="1481455"/>
+          </a:xfrm>
+          <a:prstGeom prst="rect">
+            <a:avLst/>
+          </a:prstGeom>
+          <a:noFill/>
+          <a:ln w="76200">
+            <a:solidFill>
+              <a:srgbClr val="FFC000"/>
+            </a:solidFill>
+          </a:ln>
+        </p:spPr>
+        <p:style>
+          <a:lnRef idx="2">
+            <a:schemeClr val="accent1">
+              <a:shade val="50000"/>
+            </a:schemeClr>
+          </a:lnRef>
+          <a:fillRef idx="1">
+            <a:schemeClr val="accent1"/>
+          </a:fillRef>
+          <a:effectRef idx="0">
+            <a:schemeClr val="accent1"/>
+          </a:effectRef>
+          <a:fontRef idx="minor">
+            <a:schemeClr val="lt1"/>
+          </a:fontRef>
+        </p:style>
+        <p:txBody>
+          <a:bodyPr rtlCol="0" anchor="ctr"/>
+          <a:lstStyle/>
+          <a:p>
+            <a:pPr algn="ctr"/>
+            <a:endParaRPr lang="en-US"/>
+          </a:p>
+        </p:txBody>
+      </p:sp>
+      <p:sp>
+        <p:nvSpPr>
+          <p:cNvPr id="42" name="Right Arrow 41">
+            <a:extLst>
+              <a:ext uri="{FF2B5EF4-FFF2-40B4-BE49-F238E27FC236}">
+                <a16:creationId xmlns:a16="http://schemas.microsoft.com/office/drawing/2014/main" id="{B29C028E-CDA4-604B-9B8F-64BDD06881B5}"/>
+              </a:ext>
+            </a:extLst>
+          </p:cNvPr>
+          <p:cNvSpPr/>
+          <p:nvPr/>
+        </p:nvSpPr>
+        <p:spPr>
+          <a:xfrm>
+            <a:off x="7049963" y="2694787"/>
+            <a:ext cx="1943723" cy="350729"/>
+          </a:xfrm>
+          <a:prstGeom prst="rightArrow">
+            <a:avLst/>
+          </a:prstGeom>
+          <a:solidFill>
+            <a:srgbClr val="FFC000"/>
+          </a:solidFill>
+          <a:ln>
+            <a:noFill/>
+          </a:ln>
+        </p:spPr>
+        <p:style>
+          <a:lnRef idx="2">
+            <a:schemeClr val="accent1">
+              <a:shade val="50000"/>
+            </a:schemeClr>
+          </a:lnRef>
+          <a:fillRef idx="1">
+            <a:schemeClr val="accent1"/>
+          </a:fillRef>
+          <a:effectRef idx="0">
+            <a:schemeClr val="accent1"/>
+          </a:effectRef>
+          <a:fontRef idx="minor">
+            <a:schemeClr val="lt1"/>
+          </a:fontRef>
+        </p:style>
+        <p:txBody>
+          <a:bodyPr rtlCol="0" anchor="ctr"/>
+          <a:lstStyle/>
+          <a:p>
+            <a:pPr algn="ctr"/>
+            <a:endParaRPr lang="en-US"/>
+          </a:p>
+        </p:txBody>
+      </p:sp>
+      <p:sp>
+        <p:nvSpPr>
+          <p:cNvPr id="44" name="Google Shape;75;p10">
+            <a:extLst>
+              <a:ext uri="{FF2B5EF4-FFF2-40B4-BE49-F238E27FC236}">
+                <a16:creationId xmlns:a16="http://schemas.microsoft.com/office/drawing/2014/main" id="{80248251-D983-E945-852F-13ECC4C7A7A1}"/>
+              </a:ext>
+            </a:extLst>
+          </p:cNvPr>
+          <p:cNvSpPr/>
+          <p:nvPr/>
+        </p:nvSpPr>
+        <p:spPr>
+          <a:xfrm>
+            <a:off x="8993687" y="2293565"/>
+            <a:ext cx="1981242" cy="1153172"/>
+          </a:xfrm>
+          <a:prstGeom prst="rect">
+            <a:avLst/>
+          </a:prstGeom>
+          <a:solidFill>
+            <a:schemeClr val="lt2"/>
+          </a:solidFill>
+          <a:ln w="9525" cap="flat" cmpd="sng">
+            <a:solidFill>
+              <a:schemeClr val="dk2"/>
+            </a:solidFill>
+            <a:prstDash val="solid"/>
+            <a:round/>
+            <a:headEnd type="none" w="sm" len="sm"/>
+            <a:tailEnd type="none" w="sm" len="sm"/>
+          </a:ln>
+        </p:spPr>
+        <p:txBody>
+          <a:bodyPr spcFirstLastPara="1" wrap="square" lIns="121900" tIns="121900" rIns="121900" bIns="121900" anchor="ctr" anchorCtr="0">
+            <a:noAutofit/>
+          </a:bodyPr>
+          <a:lstStyle/>
+          <a:p>
+            <a:pPr algn="ctr"/>
+            <a:endParaRPr sz="1867" dirty="0">
+              <a:latin typeface="Century Gothic"/>
+              <a:ea typeface="Century Gothic"/>
+              <a:cs typeface="Century Gothic"/>
+              <a:sym typeface="Century Gothic"/>
+            </a:endParaRPr>
+          </a:p>
+        </p:txBody>
+      </p:sp>
+      <p:sp>
+        <p:nvSpPr>
+          <p:cNvPr id="45" name="TextBox 44">
+            <a:extLst>
+              <a:ext uri="{FF2B5EF4-FFF2-40B4-BE49-F238E27FC236}">
+                <a16:creationId xmlns:a16="http://schemas.microsoft.com/office/drawing/2014/main" id="{E4819DD2-A9C7-A543-9B48-E32CF949C9FE}"/>
+              </a:ext>
+            </a:extLst>
+          </p:cNvPr>
+          <p:cNvSpPr txBox="1"/>
+          <p:nvPr/>
+        </p:nvSpPr>
+        <p:spPr>
+          <a:xfrm>
+            <a:off x="9167417" y="2310364"/>
+            <a:ext cx="1633781" cy="1200329"/>
+          </a:xfrm>
+          <a:prstGeom prst="rect">
+            <a:avLst/>
+          </a:prstGeom>
+          <a:noFill/>
+        </p:spPr>
+        <p:txBody>
+          <a:bodyPr wrap="none" rtlCol="0">
+            <a:spAutoFit/>
+          </a:bodyPr>
+          <a:lstStyle/>
+          <a:p>
+            <a:pPr algn="ctr"/>
+            <a:r>
+              <a:rPr lang="en-US" sz="2400" dirty="0">
+                <a:latin typeface="Century Gothic" panose="020B0502020202020204" pitchFamily="34" charset="0"/>
+              </a:rPr>
+              <a:t>Mental</a:t>
+            </a:r>
+          </a:p>
+          <a:p>
+            <a:pPr algn="ctr"/>
+            <a:r>
+              <a:rPr lang="en-US" sz="2400" dirty="0">
+                <a:latin typeface="Century Gothic" panose="020B0502020202020204" pitchFamily="34" charset="0"/>
+              </a:rPr>
+              <a:t>Health</a:t>
+            </a:r>
+          </a:p>
+          <a:p>
+            <a:pPr algn="ctr"/>
+            <a:r>
+              <a:rPr lang="en-US" sz="2400" dirty="0">
+                <a:latin typeface="Century Gothic" panose="020B0502020202020204" pitchFamily="34" charset="0"/>
+              </a:rPr>
+              <a:t>Outreach</a:t>
+            </a:r>
+          </a:p>
+        </p:txBody>
+      </p:sp>
+      <p:sp>
+        <p:nvSpPr>
+          <p:cNvPr id="46" name="Google Shape;75;p10">
+            <a:extLst>
+              <a:ext uri="{FF2B5EF4-FFF2-40B4-BE49-F238E27FC236}">
+                <a16:creationId xmlns:a16="http://schemas.microsoft.com/office/drawing/2014/main" id="{162E5AA6-9B51-DD4C-9E71-D5D0C0DE7EEC}"/>
+              </a:ext>
+            </a:extLst>
+          </p:cNvPr>
+          <p:cNvSpPr/>
+          <p:nvPr/>
+        </p:nvSpPr>
+        <p:spPr>
+          <a:xfrm>
+            <a:off x="9020826" y="4644025"/>
+            <a:ext cx="1981242" cy="1153172"/>
+          </a:xfrm>
+          <a:prstGeom prst="rect">
+            <a:avLst/>
+          </a:prstGeom>
+          <a:solidFill>
+            <a:schemeClr val="lt2"/>
+          </a:solidFill>
+          <a:ln w="9525" cap="flat" cmpd="sng">
+            <a:solidFill>
+              <a:schemeClr val="dk2"/>
+            </a:solidFill>
+            <a:prstDash val="solid"/>
+            <a:round/>
+            <a:headEnd type="none" w="sm" len="sm"/>
+            <a:tailEnd type="none" w="sm" len="sm"/>
+          </a:ln>
+        </p:spPr>
+        <p:txBody>
+          <a:bodyPr spcFirstLastPara="1" wrap="square" lIns="121900" tIns="121900" rIns="121900" bIns="121900" anchor="ctr" anchorCtr="0">
+            <a:noAutofit/>
+          </a:bodyPr>
+          <a:lstStyle/>
+          <a:p>
+            <a:pPr algn="ctr"/>
+            <a:endParaRPr sz="1867" dirty="0">
+              <a:latin typeface="Century Gothic"/>
+              <a:ea typeface="Century Gothic"/>
+              <a:cs typeface="Century Gothic"/>
+              <a:sym typeface="Century Gothic"/>
+            </a:endParaRPr>
+          </a:p>
+        </p:txBody>
+      </p:sp>
+      <p:sp>
+        <p:nvSpPr>
+          <p:cNvPr id="47" name="TextBox 46">
+            <a:extLst>
+              <a:ext uri="{FF2B5EF4-FFF2-40B4-BE49-F238E27FC236}">
+                <a16:creationId xmlns:a16="http://schemas.microsoft.com/office/drawing/2014/main" id="{2153B0C9-A395-0D4E-9870-A399AAC450A3}"/>
+              </a:ext>
+            </a:extLst>
+          </p:cNvPr>
+          <p:cNvSpPr txBox="1"/>
+          <p:nvPr/>
+        </p:nvSpPr>
+        <p:spPr>
+          <a:xfrm>
+            <a:off x="9265200" y="4811209"/>
+            <a:ext cx="1535998" cy="830997"/>
+          </a:xfrm>
+          <a:prstGeom prst="rect">
+            <a:avLst/>
+          </a:prstGeom>
+          <a:noFill/>
+        </p:spPr>
+        <p:txBody>
+          <a:bodyPr wrap="none" rtlCol="0">
+            <a:spAutoFit/>
+          </a:bodyPr>
+          <a:lstStyle/>
+          <a:p>
+            <a:pPr algn="ctr"/>
+            <a:r>
+              <a:rPr lang="en-US" sz="2400" dirty="0">
+                <a:latin typeface="Century Gothic" panose="020B0502020202020204" pitchFamily="34" charset="0"/>
+              </a:rPr>
+              <a:t>Return to</a:t>
+            </a:r>
+          </a:p>
+          <a:p>
+            <a:pPr algn="ctr"/>
+            <a:r>
+              <a:rPr lang="en-US" sz="2400" dirty="0">
+                <a:latin typeface="Century Gothic" panose="020B0502020202020204" pitchFamily="34" charset="0"/>
+              </a:rPr>
+              <a:t>Jail</a:t>
+            </a:r>
+          </a:p>
+        </p:txBody>
+      </p:sp>
+      <p:sp>
+        <p:nvSpPr>
+          <p:cNvPr id="48" name="Right Arrow 47">
+            <a:extLst>
+              <a:ext uri="{FF2B5EF4-FFF2-40B4-BE49-F238E27FC236}">
+                <a16:creationId xmlns:a16="http://schemas.microsoft.com/office/drawing/2014/main" id="{703A189E-3971-8841-B588-03762A073818}"/>
+              </a:ext>
+            </a:extLst>
+          </p:cNvPr>
+          <p:cNvSpPr/>
+          <p:nvPr/>
+        </p:nvSpPr>
+        <p:spPr>
+          <a:xfrm rot="5400000">
+            <a:off x="9467615" y="3882766"/>
+            <a:ext cx="1033382" cy="350729"/>
+          </a:xfrm>
+          <a:prstGeom prst="rightArrow">
+            <a:avLst/>
+          </a:prstGeom>
+          <a:solidFill>
+            <a:schemeClr val="tx2">
+              <a:lumMod val="75000"/>
+            </a:schemeClr>
+          </a:solidFill>
+          <a:ln>
+            <a:noFill/>
+          </a:ln>
+        </p:spPr>
+        <p:style>
+          <a:lnRef idx="2">
+            <a:schemeClr val="accent1">
+              <a:shade val="50000"/>
+            </a:schemeClr>
+          </a:lnRef>
+          <a:fillRef idx="1">
+            <a:schemeClr val="accent1"/>
+          </a:fillRef>
+          <a:effectRef idx="0">
+            <a:schemeClr val="accent1"/>
+          </a:effectRef>
+          <a:fontRef idx="minor">
+            <a:schemeClr val="lt1"/>
+          </a:fontRef>
+        </p:style>
+        <p:txBody>
+          <a:bodyPr rtlCol="0" anchor="ctr"/>
+          <a:lstStyle/>
+          <a:p>
+            <a:pPr algn="ctr"/>
+            <a:endParaRPr lang="en-US"/>
+          </a:p>
+        </p:txBody>
+      </p:sp>
+      <p:sp>
+        <p:nvSpPr>
+          <p:cNvPr id="49" name="TextBox 48">
+            <a:extLst>
+              <a:ext uri="{FF2B5EF4-FFF2-40B4-BE49-F238E27FC236}">
+                <a16:creationId xmlns:a16="http://schemas.microsoft.com/office/drawing/2014/main" id="{C40228CA-82BC-764B-B936-59C954EB3F4A}"/>
+              </a:ext>
+            </a:extLst>
+          </p:cNvPr>
+          <p:cNvSpPr txBox="1"/>
+          <p:nvPr/>
+        </p:nvSpPr>
+        <p:spPr>
+          <a:xfrm>
+            <a:off x="9635492" y="3446737"/>
+            <a:ext cx="697627" cy="1015663"/>
+          </a:xfrm>
+          <a:prstGeom prst="rect">
+            <a:avLst/>
+          </a:prstGeom>
+          <a:noFill/>
+        </p:spPr>
+        <p:txBody>
+          <a:bodyPr wrap="none" rtlCol="0">
+            <a:spAutoFit/>
+          </a:bodyPr>
+          <a:lstStyle/>
+          <a:p>
+            <a:r>
+              <a:rPr lang="en-US" sz="6000" dirty="0">
+                <a:solidFill>
+                  <a:srgbClr val="FF0000"/>
+                </a:solidFill>
+              </a:rPr>
+              <a:t>X</a:t>
+            </a:r>
+          </a:p>
+        </p:txBody>
+      </p:sp>
+    </p:spTree>
+    <p:extLst>
+      <p:ext uri="{BB962C8B-B14F-4D97-AF65-F5344CB8AC3E}">
+        <p14:creationId xmlns:p14="http://schemas.microsoft.com/office/powerpoint/2010/main" val="701318457"/>
       </p:ext>
     </p:extLst>
   </p:cSld>

--- a/Lectures/Lecture20-FieldValidation.pptx
+++ b/Lectures/Lecture20-FieldValidation.pptx
@@ -5,31 +5,38 @@
     <p:sldMasterId id="2147483648" r:id="rId1"/>
   </p:sldMasterIdLst>
   <p:notesMasterIdLst>
-    <p:notesMasterId r:id="rId21"/>
+    <p:notesMasterId r:id="rId25"/>
   </p:notesMasterIdLst>
   <p:sldIdLst>
     <p:sldId id="256" r:id="rId2"/>
     <p:sldId id="604" r:id="rId3"/>
     <p:sldId id="323" r:id="rId4"/>
-    <p:sldId id="257" r:id="rId5"/>
-    <p:sldId id="274" r:id="rId6"/>
-    <p:sldId id="607" r:id="rId7"/>
-    <p:sldId id="331" r:id="rId8"/>
-    <p:sldId id="592" r:id="rId9"/>
-    <p:sldId id="609" r:id="rId10"/>
-    <p:sldId id="610" r:id="rId11"/>
-    <p:sldId id="611" r:id="rId12"/>
-    <p:sldId id="613" r:id="rId13"/>
-    <p:sldId id="612" r:id="rId14"/>
-    <p:sldId id="272" r:id="rId15"/>
-    <p:sldId id="487" r:id="rId16"/>
-    <p:sldId id="273" r:id="rId17"/>
-    <p:sldId id="489" r:id="rId18"/>
-    <p:sldId id="275" r:id="rId19"/>
-    <p:sldId id="276" r:id="rId20"/>
+    <p:sldId id="618" r:id="rId5"/>
+    <p:sldId id="614" r:id="rId6"/>
+    <p:sldId id="616" r:id="rId7"/>
+    <p:sldId id="607" r:id="rId8"/>
+    <p:sldId id="331" r:id="rId9"/>
+    <p:sldId id="592" r:id="rId10"/>
+    <p:sldId id="609" r:id="rId11"/>
+    <p:sldId id="610" r:id="rId12"/>
+    <p:sldId id="611" r:id="rId13"/>
+    <p:sldId id="613" r:id="rId14"/>
+    <p:sldId id="612" r:id="rId15"/>
+    <p:sldId id="619" r:id="rId16"/>
+    <p:sldId id="272" r:id="rId17"/>
+    <p:sldId id="487" r:id="rId18"/>
+    <p:sldId id="273" r:id="rId19"/>
+    <p:sldId id="489" r:id="rId20"/>
+    <p:sldId id="275" r:id="rId21"/>
+    <p:sldId id="276" r:id="rId22"/>
+    <p:sldId id="615" r:id="rId23"/>
+    <p:sldId id="617" r:id="rId24"/>
   </p:sldIdLst>
   <p:sldSz cx="12192000" cy="6858000"/>
   <p:notesSz cx="6858000" cy="9144000"/>
+  <p:custDataLst>
+    <p:tags r:id="rId26"/>
+  </p:custDataLst>
   <p:defaultTextStyle>
     <a:defPPr marR="0" lvl="0" algn="l" rtl="0">
       <a:lnSpc>
@@ -264,7 +271,7 @@
       <p15:sldGuideLst xmlns:p15="http://schemas.microsoft.com/office/powerpoint/2012/main"/>
     </p:ext>
     <p:ext uri="http://customooxmlschemas.google.com/">
-      <go:slidesCustomData xmlns:go="http://customooxmlschemas.google.com/" xmlns:p15="http://schemas.microsoft.com/office/powerpoint/2012/main" xmlns:p14="http://schemas.microsoft.com/office/powerpoint/2010/main" xmlns:com="http://schemas.openxmlformats.org/drawingml/2006/compatibility" xmlns:pvml="urn:schemas-microsoft-com:office:powerpoint" xmlns:v="urn:schemas-microsoft-com:vml" xmlns:o="urn:schemas-microsoft-com:office:office" xmlns:dgm="http://schemas.openxmlformats.org/drawingml/2006/diagram" xmlns:c="http://schemas.openxmlformats.org/drawingml/2006/chart" xmlns:mv="urn:schemas-microsoft-com:mac:vml" xmlns:mc="http://schemas.openxmlformats.org/markup-compatibility/2006" xmlns="" r:id="rId49" roundtripDataSignature="AMtx7mgWqGpmJnm2LhSO/E7EgiMMs26KqA=="/>
+      <go:slidesCustomData xmlns="" xmlns:mc="http://schemas.openxmlformats.org/markup-compatibility/2006" xmlns:mv="urn:schemas-microsoft-com:mac:vml" xmlns:c="http://schemas.openxmlformats.org/drawingml/2006/chart" xmlns:dgm="http://schemas.openxmlformats.org/drawingml/2006/diagram" xmlns:o="urn:schemas-microsoft-com:office:office" xmlns:v="urn:schemas-microsoft-com:vml" xmlns:pvml="urn:schemas-microsoft-com:office:powerpoint" xmlns:com="http://schemas.openxmlformats.org/drawingml/2006/compatibility" xmlns:p14="http://schemas.microsoft.com/office/powerpoint/2010/main" xmlns:p15="http://schemas.microsoft.com/office/powerpoint/2012/main" xmlns:go="http://customooxmlschemas.google.com/" r:id="rId49" roundtripDataSignature="AMtx7mgWqGpmJnm2LhSO/E7EgiMMs26KqA=="/>
     </p:ext>
   </p:extLst>
 </p:presentation>
@@ -6855,7 +6862,7 @@
   <p:cSld>
     <p:spTree>
       <p:nvGrpSpPr>
-        <p:cNvPr id="1" name="Shape 1222"/>
+        <p:cNvPr id="1" name="Shape 242"/>
         <p:cNvGrpSpPr/>
         <p:nvPr/>
       </p:nvGrpSpPr>
@@ -6869,7 +6876,45 @@
       </p:grpSpPr>
       <p:sp>
         <p:nvSpPr>
-          <p:cNvPr id="1223" name="Google Shape;1223;g5b0c8fd486_0_967:notes"/>
+          <p:cNvPr id="243" name="Google Shape;243;p34:notes"/>
+          <p:cNvSpPr txBox="1">
+            <a:spLocks noGrp="1"/>
+          </p:cNvSpPr>
+          <p:nvPr>
+            <p:ph type="body" idx="1"/>
+          </p:nvPr>
+        </p:nvSpPr>
+        <p:spPr>
+          <a:xfrm>
+            <a:off x="685800" y="4400550"/>
+            <a:ext cx="5486400" cy="3600450"/>
+          </a:xfrm>
+          <a:prstGeom prst="rect">
+            <a:avLst/>
+          </a:prstGeom>
+        </p:spPr>
+        <p:txBody>
+          <a:bodyPr spcFirstLastPara="1" wrap="square" lIns="91425" tIns="45700" rIns="91425" bIns="45700" anchor="t" anchorCtr="0">
+            <a:noAutofit/>
+          </a:bodyPr>
+          <a:lstStyle/>
+          <a:p>
+            <a:pPr marL="0" lvl="0" indent="0" algn="l" rtl="0">
+              <a:spcBef>
+                <a:spcPts val="0"/>
+              </a:spcBef>
+              <a:spcAft>
+                <a:spcPts val="0"/>
+              </a:spcAft>
+              <a:buNone/>
+            </a:pPr>
+            <a:endParaRPr/>
+          </a:p>
+        </p:txBody>
+      </p:sp>
+      <p:sp>
+        <p:nvSpPr>
+          <p:cNvPr id="244" name="Google Shape;244;p34:notes"/>
           <p:cNvSpPr>
             <a:spLocks noGrp="1" noRot="1" noChangeAspect="1"/>
           </p:cNvSpPr>
@@ -6879,8 +6924,8 @@
         </p:nvSpPr>
         <p:spPr>
           <a:xfrm>
-            <a:off x="381000" y="685800"/>
-            <a:ext cx="6096000" cy="3429000"/>
+            <a:off x="685800" y="1143000"/>
+            <a:ext cx="5486400" cy="3086100"/>
           </a:xfrm>
           <a:custGeom>
             <a:avLst/>
@@ -6908,9 +6953,151 @@
           </a:custGeom>
         </p:spPr>
       </p:sp>
+    </p:spTree>
+  </p:cSld>
+  <p:clrMapOvr>
+    <a:masterClrMapping/>
+  </p:clrMapOvr>
+</p:notes>
+</file>
+
+<file path=ppt/notesSlides/notesSlide11.xml><?xml version="1.0" encoding="utf-8"?>
+<p:notes xmlns:a="http://schemas.openxmlformats.org/drawingml/2006/main" xmlns:r="http://schemas.openxmlformats.org/officeDocument/2006/relationships" xmlns:p="http://schemas.openxmlformats.org/presentationml/2006/main">
+  <p:cSld>
+    <p:spTree>
+      <p:nvGrpSpPr>
+        <p:cNvPr id="1" name=""/>
+        <p:cNvGrpSpPr/>
+        <p:nvPr/>
+      </p:nvGrpSpPr>
+      <p:grpSpPr>
+        <a:xfrm>
+          <a:off x="0" y="0"/>
+          <a:ext cx="0" cy="0"/>
+          <a:chOff x="0" y="0"/>
+          <a:chExt cx="0" cy="0"/>
+        </a:xfrm>
+      </p:grpSpPr>
       <p:sp>
         <p:nvSpPr>
-          <p:cNvPr id="1224" name="Google Shape;1224;g5b0c8fd486_0_967:notes"/>
+          <p:cNvPr id="2" name="Slide Image Placeholder 1"/>
+          <p:cNvSpPr>
+            <a:spLocks noGrp="1" noRot="1" noChangeAspect="1"/>
+          </p:cNvSpPr>
+          <p:nvPr>
+            <p:ph type="sldImg"/>
+          </p:nvPr>
+        </p:nvSpPr>
+        <p:spPr/>
+      </p:sp>
+      <p:sp>
+        <p:nvSpPr>
+          <p:cNvPr id="3" name="Notes Placeholder 2"/>
+          <p:cNvSpPr>
+            <a:spLocks noGrp="1"/>
+          </p:cNvSpPr>
+          <p:nvPr>
+            <p:ph type="body" idx="1"/>
+          </p:nvPr>
+        </p:nvSpPr>
+        <p:spPr/>
+        <p:txBody>
+          <a:bodyPr/>
+          <a:lstStyle/>
+          <a:p>
+            <a:endParaRPr lang="en-US" dirty="0"/>
+          </a:p>
+        </p:txBody>
+      </p:sp>
+      <p:sp>
+        <p:nvSpPr>
+          <p:cNvPr id="4" name="Slide Number Placeholder 3"/>
+          <p:cNvSpPr>
+            <a:spLocks noGrp="1"/>
+          </p:cNvSpPr>
+          <p:nvPr>
+            <p:ph type="sldNum" idx="12"/>
+          </p:nvPr>
+        </p:nvSpPr>
+        <p:spPr/>
+        <p:txBody>
+          <a:bodyPr/>
+          <a:lstStyle/>
+          <a:p>
+            <a:pPr marL="0" marR="0" lvl="0" indent="0" algn="r" rtl="0">
+              <a:lnSpc>
+                <a:spcPct val="100000"/>
+              </a:lnSpc>
+              <a:spcBef>
+                <a:spcPts val="0"/>
+              </a:spcBef>
+              <a:spcAft>
+                <a:spcPts val="0"/>
+              </a:spcAft>
+              <a:buClr>
+                <a:srgbClr val="000000"/>
+              </a:buClr>
+              <a:buSzPts val="1200"/>
+              <a:buFont typeface="Arial"/>
+              <a:buNone/>
+            </a:pPr>
+            <a:fld id="{00000000-1234-1234-1234-123412341234}" type="slidenum">
+              <a:rPr lang="en-US" sz="1200" b="0" i="0" u="none" strike="noStrike" cap="none" smtClean="0">
+                <a:solidFill>
+                  <a:schemeClr val="dk1"/>
+                </a:solidFill>
+                <a:latin typeface="Calibri"/>
+                <a:ea typeface="Calibri"/>
+                <a:cs typeface="Calibri"/>
+                <a:sym typeface="Calibri"/>
+              </a:rPr>
+              <a:t>17</a:t>
+            </a:fld>
+            <a:endParaRPr lang="en-US" sz="1200" b="0" i="0" u="none" strike="noStrike" cap="none">
+              <a:solidFill>
+                <a:schemeClr val="dk1"/>
+              </a:solidFill>
+              <a:latin typeface="Calibri"/>
+              <a:ea typeface="Calibri"/>
+              <a:cs typeface="Calibri"/>
+              <a:sym typeface="Calibri"/>
+            </a:endParaRPr>
+          </a:p>
+        </p:txBody>
+      </p:sp>
+    </p:spTree>
+    <p:extLst>
+      <p:ext uri="{BB962C8B-B14F-4D97-AF65-F5344CB8AC3E}">
+        <p14:creationId xmlns:p14="http://schemas.microsoft.com/office/powerpoint/2010/main" val="3538237433"/>
+      </p:ext>
+    </p:extLst>
+  </p:cSld>
+  <p:clrMapOvr>
+    <a:masterClrMapping/>
+  </p:clrMapOvr>
+</p:notes>
+</file>
+
+<file path=ppt/notesSlides/notesSlide12.xml><?xml version="1.0" encoding="utf-8"?>
+<p:notes xmlns:a="http://schemas.openxmlformats.org/drawingml/2006/main" xmlns:r="http://schemas.openxmlformats.org/officeDocument/2006/relationships" xmlns:p="http://schemas.openxmlformats.org/presentationml/2006/main" showMasterSp="0" showMasterPhAnim="0">
+  <p:cSld>
+    <p:spTree>
+      <p:nvGrpSpPr>
+        <p:cNvPr id="1" name="Shape 248"/>
+        <p:cNvGrpSpPr/>
+        <p:nvPr/>
+      </p:nvGrpSpPr>
+      <p:grpSpPr>
+        <a:xfrm>
+          <a:off x="0" y="0"/>
+          <a:ext cx="0" cy="0"/>
+          <a:chOff x="0" y="0"/>
+          <a:chExt cx="0" cy="0"/>
+        </a:xfrm>
+      </p:grpSpPr>
+      <p:sp>
+        <p:nvSpPr>
+          <p:cNvPr id="249" name="Google Shape;249;p35:notes"/>
           <p:cNvSpPr txBox="1">
             <a:spLocks noGrp="1"/>
           </p:cNvSpPr>
@@ -6920,15 +7107,15 @@
         </p:nvSpPr>
         <p:spPr>
           <a:xfrm>
-            <a:off x="685800" y="4343400"/>
-            <a:ext cx="5486400" cy="4114800"/>
+            <a:off x="685800" y="4400550"/>
+            <a:ext cx="5486400" cy="3600450"/>
           </a:xfrm>
           <a:prstGeom prst="rect">
             <a:avLst/>
           </a:prstGeom>
         </p:spPr>
         <p:txBody>
-          <a:bodyPr spcFirstLastPara="1" wrap="square" lIns="91425" tIns="91425" rIns="91425" bIns="91425" anchor="t" anchorCtr="0">
+          <a:bodyPr spcFirstLastPara="1" wrap="square" lIns="91425" tIns="45700" rIns="91425" bIns="45700" anchor="t" anchorCtr="0">
             <a:noAutofit/>
           </a:bodyPr>
           <a:lstStyle/>
@@ -6946,10 +7133,155 @@
           </a:p>
         </p:txBody>
       </p:sp>
+      <p:sp>
+        <p:nvSpPr>
+          <p:cNvPr id="250" name="Google Shape;250;p35:notes"/>
+          <p:cNvSpPr>
+            <a:spLocks noGrp="1" noRot="1" noChangeAspect="1"/>
+          </p:cNvSpPr>
+          <p:nvPr>
+            <p:ph type="sldImg" idx="2"/>
+          </p:nvPr>
+        </p:nvSpPr>
+        <p:spPr>
+          <a:xfrm>
+            <a:off x="685800" y="1143000"/>
+            <a:ext cx="5486400" cy="3086100"/>
+          </a:xfrm>
+          <a:custGeom>
+            <a:avLst/>
+            <a:gdLst/>
+            <a:ahLst/>
+            <a:cxnLst/>
+            <a:rect l="l" t="t" r="r" b="b"/>
+            <a:pathLst>
+              <a:path w="120000" h="120000" extrusionOk="0">
+                <a:moveTo>
+                  <a:pt x="0" y="0"/>
+                </a:moveTo>
+                <a:lnTo>
+                  <a:pt x="120000" y="0"/>
+                </a:lnTo>
+                <a:lnTo>
+                  <a:pt x="120000" y="120000"/>
+                </a:lnTo>
+                <a:lnTo>
+                  <a:pt x="0" y="120000"/>
+                </a:lnTo>
+                <a:close/>
+              </a:path>
+            </a:pathLst>
+          </a:custGeom>
+        </p:spPr>
+      </p:sp>
+    </p:spTree>
+  </p:cSld>
+  <p:clrMapOvr>
+    <a:masterClrMapping/>
+  </p:clrMapOvr>
+</p:notes>
+</file>
+
+<file path=ppt/notesSlides/notesSlide13.xml><?xml version="1.0" encoding="utf-8"?>
+<p:notes xmlns:a="http://schemas.openxmlformats.org/drawingml/2006/main" xmlns:r="http://schemas.openxmlformats.org/officeDocument/2006/relationships" xmlns:p="http://schemas.openxmlformats.org/presentationml/2006/main" showMasterSp="0" showMasterPhAnim="0">
+  <p:cSld>
+    <p:spTree>
+      <p:nvGrpSpPr>
+        <p:cNvPr id="1" name="Shape 254"/>
+        <p:cNvGrpSpPr/>
+        <p:nvPr/>
+      </p:nvGrpSpPr>
+      <p:grpSpPr>
+        <a:xfrm>
+          <a:off x="0" y="0"/>
+          <a:ext cx="0" cy="0"/>
+          <a:chOff x="0" y="0"/>
+          <a:chExt cx="0" cy="0"/>
+        </a:xfrm>
+      </p:grpSpPr>
+      <p:sp>
+        <p:nvSpPr>
+          <p:cNvPr id="255" name="Google Shape;255;p36:notes"/>
+          <p:cNvSpPr txBox="1">
+            <a:spLocks noGrp="1"/>
+          </p:cNvSpPr>
+          <p:nvPr>
+            <p:ph type="body" idx="1"/>
+          </p:nvPr>
+        </p:nvSpPr>
+        <p:spPr>
+          <a:xfrm>
+            <a:off x="685800" y="4400550"/>
+            <a:ext cx="5486400" cy="3600450"/>
+          </a:xfrm>
+          <a:prstGeom prst="rect">
+            <a:avLst/>
+          </a:prstGeom>
+        </p:spPr>
+        <p:txBody>
+          <a:bodyPr spcFirstLastPara="1" wrap="square" lIns="91425" tIns="45700" rIns="91425" bIns="45700" anchor="t" anchorCtr="0">
+            <a:noAutofit/>
+          </a:bodyPr>
+          <a:lstStyle/>
+          <a:p>
+            <a:pPr marL="0" lvl="0" indent="0" algn="l" rtl="0">
+              <a:spcBef>
+                <a:spcPts val="0"/>
+              </a:spcBef>
+              <a:spcAft>
+                <a:spcPts val="0"/>
+              </a:spcAft>
+              <a:buNone/>
+            </a:pPr>
+            <a:endParaRPr/>
+          </a:p>
+        </p:txBody>
+      </p:sp>
+      <p:sp>
+        <p:nvSpPr>
+          <p:cNvPr id="256" name="Google Shape;256;p36:notes"/>
+          <p:cNvSpPr>
+            <a:spLocks noGrp="1" noRot="1" noChangeAspect="1"/>
+          </p:cNvSpPr>
+          <p:nvPr>
+            <p:ph type="sldImg" idx="2"/>
+          </p:nvPr>
+        </p:nvSpPr>
+        <p:spPr>
+          <a:xfrm>
+            <a:off x="685800" y="1143000"/>
+            <a:ext cx="5486400" cy="3086100"/>
+          </a:xfrm>
+          <a:custGeom>
+            <a:avLst/>
+            <a:gdLst/>
+            <a:ahLst/>
+            <a:cxnLst/>
+            <a:rect l="l" t="t" r="r" b="b"/>
+            <a:pathLst>
+              <a:path w="120000" h="120000" extrusionOk="0">
+                <a:moveTo>
+                  <a:pt x="0" y="0"/>
+                </a:moveTo>
+                <a:lnTo>
+                  <a:pt x="120000" y="0"/>
+                </a:lnTo>
+                <a:lnTo>
+                  <a:pt x="120000" y="120000"/>
+                </a:lnTo>
+                <a:lnTo>
+                  <a:pt x="0" y="120000"/>
+                </a:lnTo>
+                <a:close/>
+              </a:path>
+            </a:pathLst>
+          </a:custGeom>
+        </p:spPr>
+      </p:sp>
     </p:spTree>
     <p:extLst>
       <p:ext uri="{BB962C8B-B14F-4D97-AF65-F5344CB8AC3E}">
-        <p14:creationId xmlns:p14="http://schemas.microsoft.com/office/powerpoint/2010/main" val="343103832"/>
+        <p14:creationId xmlns:p14="http://schemas.microsoft.com/office/powerpoint/2010/main" val="1409244745"/>
       </p:ext>
     </p:extLst>
   </p:cSld>
@@ -6959,7 +7291,324 @@
 </p:notes>
 </file>
 
-<file path=ppt/notesSlides/notesSlide11.xml><?xml version="1.0" encoding="utf-8"?>
+<file path=ppt/notesSlides/notesSlide14.xml><?xml version="1.0" encoding="utf-8"?>
+<p:notes xmlns:a="http://schemas.openxmlformats.org/drawingml/2006/main" xmlns:r="http://schemas.openxmlformats.org/officeDocument/2006/relationships" xmlns:p="http://schemas.openxmlformats.org/presentationml/2006/main" showMasterSp="0" showMasterPhAnim="0">
+  <p:cSld>
+    <p:spTree>
+      <p:nvGrpSpPr>
+        <p:cNvPr id="1" name="Shape 260"/>
+        <p:cNvGrpSpPr/>
+        <p:nvPr/>
+      </p:nvGrpSpPr>
+      <p:grpSpPr>
+        <a:xfrm>
+          <a:off x="0" y="0"/>
+          <a:ext cx="0" cy="0"/>
+          <a:chOff x="0" y="0"/>
+          <a:chExt cx="0" cy="0"/>
+        </a:xfrm>
+      </p:grpSpPr>
+      <p:sp>
+        <p:nvSpPr>
+          <p:cNvPr id="261" name="Google Shape;261;p37:notes"/>
+          <p:cNvSpPr txBox="1">
+            <a:spLocks noGrp="1"/>
+          </p:cNvSpPr>
+          <p:nvPr>
+            <p:ph type="body" idx="1"/>
+          </p:nvPr>
+        </p:nvSpPr>
+        <p:spPr>
+          <a:xfrm>
+            <a:off x="685800" y="4400550"/>
+            <a:ext cx="5486400" cy="3600450"/>
+          </a:xfrm>
+          <a:prstGeom prst="rect">
+            <a:avLst/>
+          </a:prstGeom>
+        </p:spPr>
+        <p:txBody>
+          <a:bodyPr spcFirstLastPara="1" wrap="square" lIns="91425" tIns="45700" rIns="91425" bIns="45700" anchor="t" anchorCtr="0">
+            <a:noAutofit/>
+          </a:bodyPr>
+          <a:lstStyle/>
+          <a:p>
+            <a:pPr marL="0" lvl="0" indent="0" algn="l" rtl="0">
+              <a:spcBef>
+                <a:spcPts val="0"/>
+              </a:spcBef>
+              <a:spcAft>
+                <a:spcPts val="0"/>
+              </a:spcAft>
+              <a:buNone/>
+            </a:pPr>
+            <a:endParaRPr/>
+          </a:p>
+        </p:txBody>
+      </p:sp>
+      <p:sp>
+        <p:nvSpPr>
+          <p:cNvPr id="262" name="Google Shape;262;p37:notes"/>
+          <p:cNvSpPr>
+            <a:spLocks noGrp="1" noRot="1" noChangeAspect="1"/>
+          </p:cNvSpPr>
+          <p:nvPr>
+            <p:ph type="sldImg" idx="2"/>
+          </p:nvPr>
+        </p:nvSpPr>
+        <p:spPr>
+          <a:xfrm>
+            <a:off x="685800" y="1143000"/>
+            <a:ext cx="5486400" cy="3086100"/>
+          </a:xfrm>
+          <a:custGeom>
+            <a:avLst/>
+            <a:gdLst/>
+            <a:ahLst/>
+            <a:cxnLst/>
+            <a:rect l="l" t="t" r="r" b="b"/>
+            <a:pathLst>
+              <a:path w="120000" h="120000" extrusionOk="0">
+                <a:moveTo>
+                  <a:pt x="0" y="0"/>
+                </a:moveTo>
+                <a:lnTo>
+                  <a:pt x="120000" y="0"/>
+                </a:lnTo>
+                <a:lnTo>
+                  <a:pt x="120000" y="120000"/>
+                </a:lnTo>
+                <a:lnTo>
+                  <a:pt x="0" y="120000"/>
+                </a:lnTo>
+                <a:close/>
+              </a:path>
+            </a:pathLst>
+          </a:custGeom>
+        </p:spPr>
+      </p:sp>
+    </p:spTree>
+  </p:cSld>
+  <p:clrMapOvr>
+    <a:masterClrMapping/>
+  </p:clrMapOvr>
+</p:notes>
+</file>
+
+<file path=ppt/notesSlides/notesSlide15.xml><?xml version="1.0" encoding="utf-8"?>
+<p:notes xmlns:a="http://schemas.openxmlformats.org/drawingml/2006/main" xmlns:r="http://schemas.openxmlformats.org/officeDocument/2006/relationships" xmlns:p="http://schemas.openxmlformats.org/presentationml/2006/main" showMasterSp="0" showMasterPhAnim="0">
+  <p:cSld>
+    <p:spTree>
+      <p:nvGrpSpPr>
+        <p:cNvPr id="1" name="Shape 266"/>
+        <p:cNvGrpSpPr/>
+        <p:nvPr/>
+      </p:nvGrpSpPr>
+      <p:grpSpPr>
+        <a:xfrm>
+          <a:off x="0" y="0"/>
+          <a:ext cx="0" cy="0"/>
+          <a:chOff x="0" y="0"/>
+          <a:chExt cx="0" cy="0"/>
+        </a:xfrm>
+      </p:grpSpPr>
+      <p:sp>
+        <p:nvSpPr>
+          <p:cNvPr id="267" name="Google Shape;267;p38:notes"/>
+          <p:cNvSpPr txBox="1">
+            <a:spLocks noGrp="1"/>
+          </p:cNvSpPr>
+          <p:nvPr>
+            <p:ph type="body" idx="1"/>
+          </p:nvPr>
+        </p:nvSpPr>
+        <p:spPr>
+          <a:xfrm>
+            <a:off x="685800" y="4400550"/>
+            <a:ext cx="5486400" cy="3600450"/>
+          </a:xfrm>
+          <a:prstGeom prst="rect">
+            <a:avLst/>
+          </a:prstGeom>
+        </p:spPr>
+        <p:txBody>
+          <a:bodyPr spcFirstLastPara="1" wrap="square" lIns="91425" tIns="45700" rIns="91425" bIns="45700" anchor="t" anchorCtr="0">
+            <a:noAutofit/>
+          </a:bodyPr>
+          <a:lstStyle/>
+          <a:p>
+            <a:pPr marL="0" lvl="0" indent="0" algn="l" rtl="0">
+              <a:spcBef>
+                <a:spcPts val="0"/>
+              </a:spcBef>
+              <a:spcAft>
+                <a:spcPts val="0"/>
+              </a:spcAft>
+              <a:buNone/>
+            </a:pPr>
+            <a:endParaRPr/>
+          </a:p>
+        </p:txBody>
+      </p:sp>
+      <p:sp>
+        <p:nvSpPr>
+          <p:cNvPr id="268" name="Google Shape;268;p38:notes"/>
+          <p:cNvSpPr>
+            <a:spLocks noGrp="1" noRot="1" noChangeAspect="1"/>
+          </p:cNvSpPr>
+          <p:nvPr>
+            <p:ph type="sldImg" idx="2"/>
+          </p:nvPr>
+        </p:nvSpPr>
+        <p:spPr>
+          <a:xfrm>
+            <a:off x="685800" y="1143000"/>
+            <a:ext cx="5486400" cy="3086100"/>
+          </a:xfrm>
+          <a:custGeom>
+            <a:avLst/>
+            <a:gdLst/>
+            <a:ahLst/>
+            <a:cxnLst/>
+            <a:rect l="l" t="t" r="r" b="b"/>
+            <a:pathLst>
+              <a:path w="120000" h="120000" extrusionOk="0">
+                <a:moveTo>
+                  <a:pt x="0" y="0"/>
+                </a:moveTo>
+                <a:lnTo>
+                  <a:pt x="120000" y="0"/>
+                </a:lnTo>
+                <a:lnTo>
+                  <a:pt x="120000" y="120000"/>
+                </a:lnTo>
+                <a:lnTo>
+                  <a:pt x="0" y="120000"/>
+                </a:lnTo>
+                <a:close/>
+              </a:path>
+            </a:pathLst>
+          </a:custGeom>
+        </p:spPr>
+      </p:sp>
+    </p:spTree>
+  </p:cSld>
+  <p:clrMapOvr>
+    <a:masterClrMapping/>
+  </p:clrMapOvr>
+</p:notes>
+</file>
+
+<file path=ppt/notesSlides/notesSlide2.xml><?xml version="1.0" encoding="utf-8"?>
+<p:notes xmlns:a="http://schemas.openxmlformats.org/drawingml/2006/main" xmlns:r="http://schemas.openxmlformats.org/officeDocument/2006/relationships" xmlns:p="http://schemas.openxmlformats.org/presentationml/2006/main" showMasterSp="0" showMasterPhAnim="0">
+  <p:cSld>
+    <p:spTree>
+      <p:nvGrpSpPr>
+        <p:cNvPr id="1" name="Shape 254"/>
+        <p:cNvGrpSpPr/>
+        <p:nvPr/>
+      </p:nvGrpSpPr>
+      <p:grpSpPr>
+        <a:xfrm>
+          <a:off x="0" y="0"/>
+          <a:ext cx="0" cy="0"/>
+          <a:chOff x="0" y="0"/>
+          <a:chExt cx="0" cy="0"/>
+        </a:xfrm>
+      </p:grpSpPr>
+      <p:sp>
+        <p:nvSpPr>
+          <p:cNvPr id="255" name="Google Shape;255;p36:notes"/>
+          <p:cNvSpPr txBox="1">
+            <a:spLocks noGrp="1"/>
+          </p:cNvSpPr>
+          <p:nvPr>
+            <p:ph type="body" idx="1"/>
+          </p:nvPr>
+        </p:nvSpPr>
+        <p:spPr>
+          <a:xfrm>
+            <a:off x="685800" y="4400550"/>
+            <a:ext cx="5486400" cy="3600450"/>
+          </a:xfrm>
+          <a:prstGeom prst="rect">
+            <a:avLst/>
+          </a:prstGeom>
+        </p:spPr>
+        <p:txBody>
+          <a:bodyPr spcFirstLastPara="1" wrap="square" lIns="91425" tIns="45700" rIns="91425" bIns="45700" anchor="t" anchorCtr="0">
+            <a:noAutofit/>
+          </a:bodyPr>
+          <a:lstStyle/>
+          <a:p>
+            <a:pPr marL="0" lvl="0" indent="0" algn="l" rtl="0">
+              <a:spcBef>
+                <a:spcPts val="0"/>
+              </a:spcBef>
+              <a:spcAft>
+                <a:spcPts val="0"/>
+              </a:spcAft>
+              <a:buNone/>
+            </a:pPr>
+            <a:endParaRPr/>
+          </a:p>
+        </p:txBody>
+      </p:sp>
+      <p:sp>
+        <p:nvSpPr>
+          <p:cNvPr id="256" name="Google Shape;256;p36:notes"/>
+          <p:cNvSpPr>
+            <a:spLocks noGrp="1" noRot="1" noChangeAspect="1"/>
+          </p:cNvSpPr>
+          <p:nvPr>
+            <p:ph type="sldImg" idx="2"/>
+          </p:nvPr>
+        </p:nvSpPr>
+        <p:spPr>
+          <a:xfrm>
+            <a:off x="685800" y="1143000"/>
+            <a:ext cx="5486400" cy="3086100"/>
+          </a:xfrm>
+          <a:custGeom>
+            <a:avLst/>
+            <a:gdLst/>
+            <a:ahLst/>
+            <a:cxnLst/>
+            <a:rect l="l" t="t" r="r" b="b"/>
+            <a:pathLst>
+              <a:path w="120000" h="120000" extrusionOk="0">
+                <a:moveTo>
+                  <a:pt x="0" y="0"/>
+                </a:moveTo>
+                <a:lnTo>
+                  <a:pt x="120000" y="0"/>
+                </a:lnTo>
+                <a:lnTo>
+                  <a:pt x="120000" y="120000"/>
+                </a:lnTo>
+                <a:lnTo>
+                  <a:pt x="0" y="120000"/>
+                </a:lnTo>
+                <a:close/>
+              </a:path>
+            </a:pathLst>
+          </a:custGeom>
+        </p:spPr>
+      </p:sp>
+    </p:spTree>
+    <p:extLst>
+      <p:ext uri="{BB962C8B-B14F-4D97-AF65-F5344CB8AC3E}">
+        <p14:creationId xmlns:p14="http://schemas.microsoft.com/office/powerpoint/2010/main" val="1048021393"/>
+      </p:ext>
+    </p:extLst>
+  </p:cSld>
+  <p:clrMapOvr>
+    <a:masterClrMapping/>
+  </p:clrMapOvr>
+</p:notes>
+</file>
+
+<file path=ppt/notesSlides/notesSlide3.xml><?xml version="1.0" encoding="utf-8"?>
 <p:notes xmlns:a="http://schemas.openxmlformats.org/drawingml/2006/main" xmlns:r="http://schemas.openxmlformats.org/officeDocument/2006/relationships" xmlns:p="http://schemas.openxmlformats.org/presentationml/2006/main" showMasterSp="0" showMasterPhAnim="0">
   <p:cSld>
     <p:spTree>
@@ -7058,7 +7707,7 @@
     </p:spTree>
     <p:extLst>
       <p:ext uri="{BB962C8B-B14F-4D97-AF65-F5344CB8AC3E}">
-        <p14:creationId xmlns:p14="http://schemas.microsoft.com/office/powerpoint/2010/main" val="2485728360"/>
+        <p14:creationId xmlns:p14="http://schemas.microsoft.com/office/powerpoint/2010/main" val="2285806410"/>
       </p:ext>
     </p:extLst>
   </p:cSld>
@@ -7068,12 +7717,12 @@
 </p:notes>
 </file>
 
-<file path=ppt/notesSlides/notesSlide12.xml><?xml version="1.0" encoding="utf-8"?>
+<file path=ppt/notesSlides/notesSlide4.xml><?xml version="1.0" encoding="utf-8"?>
 <p:notes xmlns:a="http://schemas.openxmlformats.org/drawingml/2006/main" xmlns:r="http://schemas.openxmlformats.org/officeDocument/2006/relationships" xmlns:p="http://schemas.openxmlformats.org/presentationml/2006/main" showMasterSp="0" showMasterPhAnim="0">
   <p:cSld>
     <p:spTree>
       <p:nvGrpSpPr>
-        <p:cNvPr id="1" name="Shape 242"/>
+        <p:cNvPr id="1" name="Shape 1222"/>
         <p:cNvGrpSpPr/>
         <p:nvPr/>
       </p:nvGrpSpPr>
@@ -7087,45 +7736,7 @@
       </p:grpSpPr>
       <p:sp>
         <p:nvSpPr>
-          <p:cNvPr id="243" name="Google Shape;243;p34:notes"/>
-          <p:cNvSpPr txBox="1">
-            <a:spLocks noGrp="1"/>
-          </p:cNvSpPr>
-          <p:nvPr>
-            <p:ph type="body" idx="1"/>
-          </p:nvPr>
-        </p:nvSpPr>
-        <p:spPr>
-          <a:xfrm>
-            <a:off x="685800" y="4400550"/>
-            <a:ext cx="5486400" cy="3600450"/>
-          </a:xfrm>
-          <a:prstGeom prst="rect">
-            <a:avLst/>
-          </a:prstGeom>
-        </p:spPr>
-        <p:txBody>
-          <a:bodyPr spcFirstLastPara="1" wrap="square" lIns="91425" tIns="45700" rIns="91425" bIns="45700" anchor="t" anchorCtr="0">
-            <a:noAutofit/>
-          </a:bodyPr>
-          <a:lstStyle/>
-          <a:p>
-            <a:pPr marL="0" lvl="0" indent="0" algn="l" rtl="0">
-              <a:spcBef>
-                <a:spcPts val="0"/>
-              </a:spcBef>
-              <a:spcAft>
-                <a:spcPts val="0"/>
-              </a:spcAft>
-              <a:buNone/>
-            </a:pPr>
-            <a:endParaRPr/>
-          </a:p>
-        </p:txBody>
-      </p:sp>
-      <p:sp>
-        <p:nvSpPr>
-          <p:cNvPr id="244" name="Google Shape;244;p34:notes"/>
+          <p:cNvPr id="1223" name="Google Shape;1223;g5b0c8fd486_0_967:notes"/>
           <p:cNvSpPr>
             <a:spLocks noGrp="1" noRot="1" noChangeAspect="1"/>
           </p:cNvSpPr>
@@ -7135,8 +7746,8 @@
         </p:nvSpPr>
         <p:spPr>
           <a:xfrm>
-            <a:off x="685800" y="1143000"/>
-            <a:ext cx="5486400" cy="3086100"/>
+            <a:off x="381000" y="685800"/>
+            <a:ext cx="6096000" cy="3429000"/>
           </a:xfrm>
           <a:custGeom>
             <a:avLst/>
@@ -7164,34 +7775,9 @@
           </a:custGeom>
         </p:spPr>
       </p:sp>
-    </p:spTree>
-  </p:cSld>
-  <p:clrMapOvr>
-    <a:masterClrMapping/>
-  </p:clrMapOvr>
-</p:notes>
-</file>
-
-<file path=ppt/notesSlides/notesSlide13.xml><?xml version="1.0" encoding="utf-8"?>
-<p:notes xmlns:a="http://schemas.openxmlformats.org/drawingml/2006/main" xmlns:r="http://schemas.openxmlformats.org/officeDocument/2006/relationships" xmlns:p="http://schemas.openxmlformats.org/presentationml/2006/main" showMasterSp="0" showMasterPhAnim="0">
-  <p:cSld>
-    <p:spTree>
-      <p:nvGrpSpPr>
-        <p:cNvPr id="1" name="Shape 248"/>
-        <p:cNvGrpSpPr/>
-        <p:nvPr/>
-      </p:nvGrpSpPr>
-      <p:grpSpPr>
-        <a:xfrm>
-          <a:off x="0" y="0"/>
-          <a:ext cx="0" cy="0"/>
-          <a:chOff x="0" y="0"/>
-          <a:chExt cx="0" cy="0"/>
-        </a:xfrm>
-      </p:grpSpPr>
       <p:sp>
         <p:nvSpPr>
-          <p:cNvPr id="249" name="Google Shape;249;p35:notes"/>
+          <p:cNvPr id="1224" name="Google Shape;1224;g5b0c8fd486_0_967:notes"/>
           <p:cNvSpPr txBox="1">
             <a:spLocks noGrp="1"/>
           </p:cNvSpPr>
@@ -7201,15 +7787,15 @@
         </p:nvSpPr>
         <p:spPr>
           <a:xfrm>
-            <a:off x="685800" y="4400550"/>
-            <a:ext cx="5486400" cy="3600450"/>
+            <a:off x="685800" y="4343400"/>
+            <a:ext cx="5486400" cy="4114800"/>
           </a:xfrm>
           <a:prstGeom prst="rect">
             <a:avLst/>
           </a:prstGeom>
         </p:spPr>
         <p:txBody>
-          <a:bodyPr spcFirstLastPara="1" wrap="square" lIns="91425" tIns="45700" rIns="91425" bIns="45700" anchor="t" anchorCtr="0">
+          <a:bodyPr spcFirstLastPara="1" wrap="square" lIns="91425" tIns="91425" rIns="91425" bIns="91425" anchor="t" anchorCtr="0">
             <a:noAutofit/>
           </a:bodyPr>
           <a:lstStyle/>
@@ -7227,680 +7813,10 @@
           </a:p>
         </p:txBody>
       </p:sp>
-      <p:sp>
-        <p:nvSpPr>
-          <p:cNvPr id="250" name="Google Shape;250;p35:notes"/>
-          <p:cNvSpPr>
-            <a:spLocks noGrp="1" noRot="1" noChangeAspect="1"/>
-          </p:cNvSpPr>
-          <p:nvPr>
-            <p:ph type="sldImg" idx="2"/>
-          </p:nvPr>
-        </p:nvSpPr>
-        <p:spPr>
-          <a:xfrm>
-            <a:off x="685800" y="1143000"/>
-            <a:ext cx="5486400" cy="3086100"/>
-          </a:xfrm>
-          <a:custGeom>
-            <a:avLst/>
-            <a:gdLst/>
-            <a:ahLst/>
-            <a:cxnLst/>
-            <a:rect l="l" t="t" r="r" b="b"/>
-            <a:pathLst>
-              <a:path w="120000" h="120000" extrusionOk="0">
-                <a:moveTo>
-                  <a:pt x="0" y="0"/>
-                </a:moveTo>
-                <a:lnTo>
-                  <a:pt x="120000" y="0"/>
-                </a:lnTo>
-                <a:lnTo>
-                  <a:pt x="120000" y="120000"/>
-                </a:lnTo>
-                <a:lnTo>
-                  <a:pt x="0" y="120000"/>
-                </a:lnTo>
-                <a:close/>
-              </a:path>
-            </a:pathLst>
-          </a:custGeom>
-        </p:spPr>
-      </p:sp>
-    </p:spTree>
-  </p:cSld>
-  <p:clrMapOvr>
-    <a:masterClrMapping/>
-  </p:clrMapOvr>
-</p:notes>
-</file>
-
-<file path=ppt/notesSlides/notesSlide14.xml><?xml version="1.0" encoding="utf-8"?>
-<p:notes xmlns:a="http://schemas.openxmlformats.org/drawingml/2006/main" xmlns:r="http://schemas.openxmlformats.org/officeDocument/2006/relationships" xmlns:p="http://schemas.openxmlformats.org/presentationml/2006/main" showMasterSp="0" showMasterPhAnim="0">
-  <p:cSld>
-    <p:spTree>
-      <p:nvGrpSpPr>
-        <p:cNvPr id="1" name="Shape 254"/>
-        <p:cNvGrpSpPr/>
-        <p:nvPr/>
-      </p:nvGrpSpPr>
-      <p:grpSpPr>
-        <a:xfrm>
-          <a:off x="0" y="0"/>
-          <a:ext cx="0" cy="0"/>
-          <a:chOff x="0" y="0"/>
-          <a:chExt cx="0" cy="0"/>
-        </a:xfrm>
-      </p:grpSpPr>
-      <p:sp>
-        <p:nvSpPr>
-          <p:cNvPr id="255" name="Google Shape;255;p36:notes"/>
-          <p:cNvSpPr txBox="1">
-            <a:spLocks noGrp="1"/>
-          </p:cNvSpPr>
-          <p:nvPr>
-            <p:ph type="body" idx="1"/>
-          </p:nvPr>
-        </p:nvSpPr>
-        <p:spPr>
-          <a:xfrm>
-            <a:off x="685800" y="4400550"/>
-            <a:ext cx="5486400" cy="3600450"/>
-          </a:xfrm>
-          <a:prstGeom prst="rect">
-            <a:avLst/>
-          </a:prstGeom>
-        </p:spPr>
-        <p:txBody>
-          <a:bodyPr spcFirstLastPara="1" wrap="square" lIns="91425" tIns="45700" rIns="91425" bIns="45700" anchor="t" anchorCtr="0">
-            <a:noAutofit/>
-          </a:bodyPr>
-          <a:lstStyle/>
-          <a:p>
-            <a:pPr marL="0" lvl="0" indent="0" algn="l" rtl="0">
-              <a:spcBef>
-                <a:spcPts val="0"/>
-              </a:spcBef>
-              <a:spcAft>
-                <a:spcPts val="0"/>
-              </a:spcAft>
-              <a:buNone/>
-            </a:pPr>
-            <a:endParaRPr/>
-          </a:p>
-        </p:txBody>
-      </p:sp>
-      <p:sp>
-        <p:nvSpPr>
-          <p:cNvPr id="256" name="Google Shape;256;p36:notes"/>
-          <p:cNvSpPr>
-            <a:spLocks noGrp="1" noRot="1" noChangeAspect="1"/>
-          </p:cNvSpPr>
-          <p:nvPr>
-            <p:ph type="sldImg" idx="2"/>
-          </p:nvPr>
-        </p:nvSpPr>
-        <p:spPr>
-          <a:xfrm>
-            <a:off x="685800" y="1143000"/>
-            <a:ext cx="5486400" cy="3086100"/>
-          </a:xfrm>
-          <a:custGeom>
-            <a:avLst/>
-            <a:gdLst/>
-            <a:ahLst/>
-            <a:cxnLst/>
-            <a:rect l="l" t="t" r="r" b="b"/>
-            <a:pathLst>
-              <a:path w="120000" h="120000" extrusionOk="0">
-                <a:moveTo>
-                  <a:pt x="0" y="0"/>
-                </a:moveTo>
-                <a:lnTo>
-                  <a:pt x="120000" y="0"/>
-                </a:lnTo>
-                <a:lnTo>
-                  <a:pt x="120000" y="120000"/>
-                </a:lnTo>
-                <a:lnTo>
-                  <a:pt x="0" y="120000"/>
-                </a:lnTo>
-                <a:close/>
-              </a:path>
-            </a:pathLst>
-          </a:custGeom>
-        </p:spPr>
-      </p:sp>
     </p:spTree>
     <p:extLst>
       <p:ext uri="{BB962C8B-B14F-4D97-AF65-F5344CB8AC3E}">
-        <p14:creationId xmlns:p14="http://schemas.microsoft.com/office/powerpoint/2010/main" val="1409244745"/>
-      </p:ext>
-    </p:extLst>
-  </p:cSld>
-  <p:clrMapOvr>
-    <a:masterClrMapping/>
-  </p:clrMapOvr>
-</p:notes>
-</file>
-
-<file path=ppt/notesSlides/notesSlide15.xml><?xml version="1.0" encoding="utf-8"?>
-<p:notes xmlns:a="http://schemas.openxmlformats.org/drawingml/2006/main" xmlns:r="http://schemas.openxmlformats.org/officeDocument/2006/relationships" xmlns:p="http://schemas.openxmlformats.org/presentationml/2006/main" showMasterSp="0" showMasterPhAnim="0">
-  <p:cSld>
-    <p:spTree>
-      <p:nvGrpSpPr>
-        <p:cNvPr id="1" name="Shape 260"/>
-        <p:cNvGrpSpPr/>
-        <p:nvPr/>
-      </p:nvGrpSpPr>
-      <p:grpSpPr>
-        <a:xfrm>
-          <a:off x="0" y="0"/>
-          <a:ext cx="0" cy="0"/>
-          <a:chOff x="0" y="0"/>
-          <a:chExt cx="0" cy="0"/>
-        </a:xfrm>
-      </p:grpSpPr>
-      <p:sp>
-        <p:nvSpPr>
-          <p:cNvPr id="261" name="Google Shape;261;p37:notes"/>
-          <p:cNvSpPr txBox="1">
-            <a:spLocks noGrp="1"/>
-          </p:cNvSpPr>
-          <p:nvPr>
-            <p:ph type="body" idx="1"/>
-          </p:nvPr>
-        </p:nvSpPr>
-        <p:spPr>
-          <a:xfrm>
-            <a:off x="685800" y="4400550"/>
-            <a:ext cx="5486400" cy="3600450"/>
-          </a:xfrm>
-          <a:prstGeom prst="rect">
-            <a:avLst/>
-          </a:prstGeom>
-        </p:spPr>
-        <p:txBody>
-          <a:bodyPr spcFirstLastPara="1" wrap="square" lIns="91425" tIns="45700" rIns="91425" bIns="45700" anchor="t" anchorCtr="0">
-            <a:noAutofit/>
-          </a:bodyPr>
-          <a:lstStyle/>
-          <a:p>
-            <a:pPr marL="0" lvl="0" indent="0" algn="l" rtl="0">
-              <a:spcBef>
-                <a:spcPts val="0"/>
-              </a:spcBef>
-              <a:spcAft>
-                <a:spcPts val="0"/>
-              </a:spcAft>
-              <a:buNone/>
-            </a:pPr>
-            <a:endParaRPr/>
-          </a:p>
-        </p:txBody>
-      </p:sp>
-      <p:sp>
-        <p:nvSpPr>
-          <p:cNvPr id="262" name="Google Shape;262;p37:notes"/>
-          <p:cNvSpPr>
-            <a:spLocks noGrp="1" noRot="1" noChangeAspect="1"/>
-          </p:cNvSpPr>
-          <p:nvPr>
-            <p:ph type="sldImg" idx="2"/>
-          </p:nvPr>
-        </p:nvSpPr>
-        <p:spPr>
-          <a:xfrm>
-            <a:off x="685800" y="1143000"/>
-            <a:ext cx="5486400" cy="3086100"/>
-          </a:xfrm>
-          <a:custGeom>
-            <a:avLst/>
-            <a:gdLst/>
-            <a:ahLst/>
-            <a:cxnLst/>
-            <a:rect l="l" t="t" r="r" b="b"/>
-            <a:pathLst>
-              <a:path w="120000" h="120000" extrusionOk="0">
-                <a:moveTo>
-                  <a:pt x="0" y="0"/>
-                </a:moveTo>
-                <a:lnTo>
-                  <a:pt x="120000" y="0"/>
-                </a:lnTo>
-                <a:lnTo>
-                  <a:pt x="120000" y="120000"/>
-                </a:lnTo>
-                <a:lnTo>
-                  <a:pt x="0" y="120000"/>
-                </a:lnTo>
-                <a:close/>
-              </a:path>
-            </a:pathLst>
-          </a:custGeom>
-        </p:spPr>
-      </p:sp>
-    </p:spTree>
-  </p:cSld>
-  <p:clrMapOvr>
-    <a:masterClrMapping/>
-  </p:clrMapOvr>
-</p:notes>
-</file>
-
-<file path=ppt/notesSlides/notesSlide16.xml><?xml version="1.0" encoding="utf-8"?>
-<p:notes xmlns:a="http://schemas.openxmlformats.org/drawingml/2006/main" xmlns:r="http://schemas.openxmlformats.org/officeDocument/2006/relationships" xmlns:p="http://schemas.openxmlformats.org/presentationml/2006/main" showMasterSp="0" showMasterPhAnim="0">
-  <p:cSld>
-    <p:spTree>
-      <p:nvGrpSpPr>
-        <p:cNvPr id="1" name="Shape 266"/>
-        <p:cNvGrpSpPr/>
-        <p:nvPr/>
-      </p:nvGrpSpPr>
-      <p:grpSpPr>
-        <a:xfrm>
-          <a:off x="0" y="0"/>
-          <a:ext cx="0" cy="0"/>
-          <a:chOff x="0" y="0"/>
-          <a:chExt cx="0" cy="0"/>
-        </a:xfrm>
-      </p:grpSpPr>
-      <p:sp>
-        <p:nvSpPr>
-          <p:cNvPr id="267" name="Google Shape;267;p38:notes"/>
-          <p:cNvSpPr txBox="1">
-            <a:spLocks noGrp="1"/>
-          </p:cNvSpPr>
-          <p:nvPr>
-            <p:ph type="body" idx="1"/>
-          </p:nvPr>
-        </p:nvSpPr>
-        <p:spPr>
-          <a:xfrm>
-            <a:off x="685800" y="4400550"/>
-            <a:ext cx="5486400" cy="3600450"/>
-          </a:xfrm>
-          <a:prstGeom prst="rect">
-            <a:avLst/>
-          </a:prstGeom>
-        </p:spPr>
-        <p:txBody>
-          <a:bodyPr spcFirstLastPara="1" wrap="square" lIns="91425" tIns="45700" rIns="91425" bIns="45700" anchor="t" anchorCtr="0">
-            <a:noAutofit/>
-          </a:bodyPr>
-          <a:lstStyle/>
-          <a:p>
-            <a:pPr marL="0" lvl="0" indent="0" algn="l" rtl="0">
-              <a:spcBef>
-                <a:spcPts val="0"/>
-              </a:spcBef>
-              <a:spcAft>
-                <a:spcPts val="0"/>
-              </a:spcAft>
-              <a:buNone/>
-            </a:pPr>
-            <a:endParaRPr/>
-          </a:p>
-        </p:txBody>
-      </p:sp>
-      <p:sp>
-        <p:nvSpPr>
-          <p:cNvPr id="268" name="Google Shape;268;p38:notes"/>
-          <p:cNvSpPr>
-            <a:spLocks noGrp="1" noRot="1" noChangeAspect="1"/>
-          </p:cNvSpPr>
-          <p:nvPr>
-            <p:ph type="sldImg" idx="2"/>
-          </p:nvPr>
-        </p:nvSpPr>
-        <p:spPr>
-          <a:xfrm>
-            <a:off x="685800" y="1143000"/>
-            <a:ext cx="5486400" cy="3086100"/>
-          </a:xfrm>
-          <a:custGeom>
-            <a:avLst/>
-            <a:gdLst/>
-            <a:ahLst/>
-            <a:cxnLst/>
-            <a:rect l="l" t="t" r="r" b="b"/>
-            <a:pathLst>
-              <a:path w="120000" h="120000" extrusionOk="0">
-                <a:moveTo>
-                  <a:pt x="0" y="0"/>
-                </a:moveTo>
-                <a:lnTo>
-                  <a:pt x="120000" y="0"/>
-                </a:lnTo>
-                <a:lnTo>
-                  <a:pt x="120000" y="120000"/>
-                </a:lnTo>
-                <a:lnTo>
-                  <a:pt x="0" y="120000"/>
-                </a:lnTo>
-                <a:close/>
-              </a:path>
-            </a:pathLst>
-          </a:custGeom>
-        </p:spPr>
-      </p:sp>
-    </p:spTree>
-  </p:cSld>
-  <p:clrMapOvr>
-    <a:masterClrMapping/>
-  </p:clrMapOvr>
-</p:notes>
-</file>
-
-<file path=ppt/notesSlides/notesSlide2.xml><?xml version="1.0" encoding="utf-8"?>
-<p:notes xmlns:a="http://schemas.openxmlformats.org/drawingml/2006/main" xmlns:r="http://schemas.openxmlformats.org/officeDocument/2006/relationships" xmlns:p="http://schemas.openxmlformats.org/presentationml/2006/main" showMasterSp="0" showMasterPhAnim="0">
-  <p:cSld>
-    <p:spTree>
-      <p:nvGrpSpPr>
-        <p:cNvPr id="1" name="Shape 44"/>
-        <p:cNvGrpSpPr/>
-        <p:nvPr/>
-      </p:nvGrpSpPr>
-      <p:grpSpPr>
-        <a:xfrm>
-          <a:off x="0" y="0"/>
-          <a:ext cx="0" cy="0"/>
-          <a:chOff x="0" y="0"/>
-          <a:chExt cx="0" cy="0"/>
-        </a:xfrm>
-      </p:grpSpPr>
-      <p:sp>
-        <p:nvSpPr>
-          <p:cNvPr id="45" name="Google Shape;45;p21:notes"/>
-          <p:cNvSpPr txBox="1">
-            <a:spLocks noGrp="1"/>
-          </p:cNvSpPr>
-          <p:nvPr>
-            <p:ph type="body" idx="1"/>
-          </p:nvPr>
-        </p:nvSpPr>
-        <p:spPr>
-          <a:xfrm>
-            <a:off x="685800" y="4400550"/>
-            <a:ext cx="5486400" cy="3600450"/>
-          </a:xfrm>
-          <a:prstGeom prst="rect">
-            <a:avLst/>
-          </a:prstGeom>
-        </p:spPr>
-        <p:txBody>
-          <a:bodyPr spcFirstLastPara="1" wrap="square" lIns="91425" tIns="45700" rIns="91425" bIns="45700" anchor="t" anchorCtr="0">
-            <a:noAutofit/>
-          </a:bodyPr>
-          <a:lstStyle/>
-          <a:p>
-            <a:pPr marL="0" lvl="0" indent="0" algn="l" rtl="0">
-              <a:spcBef>
-                <a:spcPts val="0"/>
-              </a:spcBef>
-              <a:spcAft>
-                <a:spcPts val="0"/>
-              </a:spcAft>
-              <a:buNone/>
-            </a:pPr>
-            <a:endParaRPr/>
-          </a:p>
-        </p:txBody>
-      </p:sp>
-      <p:sp>
-        <p:nvSpPr>
-          <p:cNvPr id="46" name="Google Shape;46;p21:notes"/>
-          <p:cNvSpPr>
-            <a:spLocks noGrp="1" noRot="1" noChangeAspect="1"/>
-          </p:cNvSpPr>
-          <p:nvPr>
-            <p:ph type="sldImg" idx="2"/>
-          </p:nvPr>
-        </p:nvSpPr>
-        <p:spPr>
-          <a:xfrm>
-            <a:off x="685800" y="1143000"/>
-            <a:ext cx="5486400" cy="3086100"/>
-          </a:xfrm>
-          <a:custGeom>
-            <a:avLst/>
-            <a:gdLst/>
-            <a:ahLst/>
-            <a:cxnLst/>
-            <a:rect l="l" t="t" r="r" b="b"/>
-            <a:pathLst>
-              <a:path w="120000" h="120000" extrusionOk="0">
-                <a:moveTo>
-                  <a:pt x="0" y="0"/>
-                </a:moveTo>
-                <a:lnTo>
-                  <a:pt x="120000" y="0"/>
-                </a:lnTo>
-                <a:lnTo>
-                  <a:pt x="120000" y="120000"/>
-                </a:lnTo>
-                <a:lnTo>
-                  <a:pt x="0" y="120000"/>
-                </a:lnTo>
-                <a:close/>
-              </a:path>
-            </a:pathLst>
-          </a:custGeom>
-        </p:spPr>
-      </p:sp>
-    </p:spTree>
-  </p:cSld>
-  <p:clrMapOvr>
-    <a:masterClrMapping/>
-  </p:clrMapOvr>
-</p:notes>
-</file>
-
-<file path=ppt/notesSlides/notesSlide3.xml><?xml version="1.0" encoding="utf-8"?>
-<p:notes xmlns:a="http://schemas.openxmlformats.org/drawingml/2006/main" xmlns:r="http://schemas.openxmlformats.org/officeDocument/2006/relationships" xmlns:p="http://schemas.openxmlformats.org/presentationml/2006/main" showMasterSp="0" showMasterPhAnim="0">
-  <p:cSld>
-    <p:spTree>
-      <p:nvGrpSpPr>
-        <p:cNvPr id="1" name="Shape 254"/>
-        <p:cNvGrpSpPr/>
-        <p:nvPr/>
-      </p:nvGrpSpPr>
-      <p:grpSpPr>
-        <a:xfrm>
-          <a:off x="0" y="0"/>
-          <a:ext cx="0" cy="0"/>
-          <a:chOff x="0" y="0"/>
-          <a:chExt cx="0" cy="0"/>
-        </a:xfrm>
-      </p:grpSpPr>
-      <p:sp>
-        <p:nvSpPr>
-          <p:cNvPr id="255" name="Google Shape;255;p36:notes"/>
-          <p:cNvSpPr txBox="1">
-            <a:spLocks noGrp="1"/>
-          </p:cNvSpPr>
-          <p:nvPr>
-            <p:ph type="body" idx="1"/>
-          </p:nvPr>
-        </p:nvSpPr>
-        <p:spPr>
-          <a:xfrm>
-            <a:off x="685800" y="4400550"/>
-            <a:ext cx="5486400" cy="3600450"/>
-          </a:xfrm>
-          <a:prstGeom prst="rect">
-            <a:avLst/>
-          </a:prstGeom>
-        </p:spPr>
-        <p:txBody>
-          <a:bodyPr spcFirstLastPara="1" wrap="square" lIns="91425" tIns="45700" rIns="91425" bIns="45700" anchor="t" anchorCtr="0">
-            <a:noAutofit/>
-          </a:bodyPr>
-          <a:lstStyle/>
-          <a:p>
-            <a:pPr marL="0" lvl="0" indent="0" algn="l" rtl="0">
-              <a:spcBef>
-                <a:spcPts val="0"/>
-              </a:spcBef>
-              <a:spcAft>
-                <a:spcPts val="0"/>
-              </a:spcAft>
-              <a:buNone/>
-            </a:pPr>
-            <a:endParaRPr/>
-          </a:p>
-        </p:txBody>
-      </p:sp>
-      <p:sp>
-        <p:nvSpPr>
-          <p:cNvPr id="256" name="Google Shape;256;p36:notes"/>
-          <p:cNvSpPr>
-            <a:spLocks noGrp="1" noRot="1" noChangeAspect="1"/>
-          </p:cNvSpPr>
-          <p:nvPr>
-            <p:ph type="sldImg" idx="2"/>
-          </p:nvPr>
-        </p:nvSpPr>
-        <p:spPr>
-          <a:xfrm>
-            <a:off x="685800" y="1143000"/>
-            <a:ext cx="5486400" cy="3086100"/>
-          </a:xfrm>
-          <a:custGeom>
-            <a:avLst/>
-            <a:gdLst/>
-            <a:ahLst/>
-            <a:cxnLst/>
-            <a:rect l="l" t="t" r="r" b="b"/>
-            <a:pathLst>
-              <a:path w="120000" h="120000" extrusionOk="0">
-                <a:moveTo>
-                  <a:pt x="0" y="0"/>
-                </a:moveTo>
-                <a:lnTo>
-                  <a:pt x="120000" y="0"/>
-                </a:lnTo>
-                <a:lnTo>
-                  <a:pt x="120000" y="120000"/>
-                </a:lnTo>
-                <a:lnTo>
-                  <a:pt x="0" y="120000"/>
-                </a:lnTo>
-                <a:close/>
-              </a:path>
-            </a:pathLst>
-          </a:custGeom>
-        </p:spPr>
-      </p:sp>
-    </p:spTree>
-  </p:cSld>
-  <p:clrMapOvr>
-    <a:masterClrMapping/>
-  </p:clrMapOvr>
-</p:notes>
-</file>
-
-<file path=ppt/notesSlides/notesSlide4.xml><?xml version="1.0" encoding="utf-8"?>
-<p:notes xmlns:a="http://schemas.openxmlformats.org/drawingml/2006/main" xmlns:r="http://schemas.openxmlformats.org/officeDocument/2006/relationships" xmlns:p="http://schemas.openxmlformats.org/presentationml/2006/main" showMasterSp="0" showMasterPhAnim="0">
-  <p:cSld>
-    <p:spTree>
-      <p:nvGrpSpPr>
-        <p:cNvPr id="1" name="Shape 254"/>
-        <p:cNvGrpSpPr/>
-        <p:nvPr/>
-      </p:nvGrpSpPr>
-      <p:grpSpPr>
-        <a:xfrm>
-          <a:off x="0" y="0"/>
-          <a:ext cx="0" cy="0"/>
-          <a:chOff x="0" y="0"/>
-          <a:chExt cx="0" cy="0"/>
-        </a:xfrm>
-      </p:grpSpPr>
-      <p:sp>
-        <p:nvSpPr>
-          <p:cNvPr id="255" name="Google Shape;255;p36:notes"/>
-          <p:cNvSpPr txBox="1">
-            <a:spLocks noGrp="1"/>
-          </p:cNvSpPr>
-          <p:nvPr>
-            <p:ph type="body" idx="1"/>
-          </p:nvPr>
-        </p:nvSpPr>
-        <p:spPr>
-          <a:xfrm>
-            <a:off x="685800" y="4400550"/>
-            <a:ext cx="5486400" cy="3600450"/>
-          </a:xfrm>
-          <a:prstGeom prst="rect">
-            <a:avLst/>
-          </a:prstGeom>
-        </p:spPr>
-        <p:txBody>
-          <a:bodyPr spcFirstLastPara="1" wrap="square" lIns="91425" tIns="45700" rIns="91425" bIns="45700" anchor="t" anchorCtr="0">
-            <a:noAutofit/>
-          </a:bodyPr>
-          <a:lstStyle/>
-          <a:p>
-            <a:pPr marL="0" lvl="0" indent="0" algn="l" rtl="0">
-              <a:spcBef>
-                <a:spcPts val="0"/>
-              </a:spcBef>
-              <a:spcAft>
-                <a:spcPts val="0"/>
-              </a:spcAft>
-              <a:buNone/>
-            </a:pPr>
-            <a:endParaRPr/>
-          </a:p>
-        </p:txBody>
-      </p:sp>
-      <p:sp>
-        <p:nvSpPr>
-          <p:cNvPr id="256" name="Google Shape;256;p36:notes"/>
-          <p:cNvSpPr>
-            <a:spLocks noGrp="1" noRot="1" noChangeAspect="1"/>
-          </p:cNvSpPr>
-          <p:nvPr>
-            <p:ph type="sldImg" idx="2"/>
-          </p:nvPr>
-        </p:nvSpPr>
-        <p:spPr>
-          <a:xfrm>
-            <a:off x="685800" y="1143000"/>
-            <a:ext cx="5486400" cy="3086100"/>
-          </a:xfrm>
-          <a:custGeom>
-            <a:avLst/>
-            <a:gdLst/>
-            <a:ahLst/>
-            <a:cxnLst/>
-            <a:rect l="l" t="t" r="r" b="b"/>
-            <a:pathLst>
-              <a:path w="120000" h="120000" extrusionOk="0">
-                <a:moveTo>
-                  <a:pt x="0" y="0"/>
-                </a:moveTo>
-                <a:lnTo>
-                  <a:pt x="120000" y="0"/>
-                </a:lnTo>
-                <a:lnTo>
-                  <a:pt x="120000" y="120000"/>
-                </a:lnTo>
-                <a:lnTo>
-                  <a:pt x="0" y="120000"/>
-                </a:lnTo>
-                <a:close/>
-              </a:path>
-            </a:pathLst>
-          </a:custGeom>
-        </p:spPr>
-      </p:sp>
-    </p:spTree>
-    <p:extLst>
-      <p:ext uri="{BB962C8B-B14F-4D97-AF65-F5344CB8AC3E}">
-        <p14:creationId xmlns:p14="http://schemas.microsoft.com/office/powerpoint/2010/main" val="1048021393"/>
+        <p14:creationId xmlns:p14="http://schemas.microsoft.com/office/powerpoint/2010/main" val="935025798"/>
       </p:ext>
     </p:extLst>
   </p:cSld>
@@ -8009,7 +7925,7 @@
     </p:spTree>
     <p:extLst>
       <p:ext uri="{BB962C8B-B14F-4D97-AF65-F5344CB8AC3E}">
-        <p14:creationId xmlns:p14="http://schemas.microsoft.com/office/powerpoint/2010/main" val="2285806410"/>
+        <p14:creationId xmlns:p14="http://schemas.microsoft.com/office/powerpoint/2010/main" val="634231143"/>
       </p:ext>
     </p:extLst>
   </p:cSld>
@@ -8118,7 +8034,7 @@
     </p:spTree>
     <p:extLst>
       <p:ext uri="{BB962C8B-B14F-4D97-AF65-F5344CB8AC3E}">
-        <p14:creationId xmlns:p14="http://schemas.microsoft.com/office/powerpoint/2010/main" val="935025798"/>
+        <p14:creationId xmlns:p14="http://schemas.microsoft.com/office/powerpoint/2010/main" val="1326784957"/>
       </p:ext>
     </p:extLst>
   </p:cSld>
@@ -8227,7 +8143,7 @@
     </p:spTree>
     <p:extLst>
       <p:ext uri="{BB962C8B-B14F-4D97-AF65-F5344CB8AC3E}">
-        <p14:creationId xmlns:p14="http://schemas.microsoft.com/office/powerpoint/2010/main" val="634231143"/>
+        <p14:creationId xmlns:p14="http://schemas.microsoft.com/office/powerpoint/2010/main" val="1867815353"/>
       </p:ext>
     </p:extLst>
   </p:cSld>
@@ -8336,7 +8252,7 @@
     </p:spTree>
     <p:extLst>
       <p:ext uri="{BB962C8B-B14F-4D97-AF65-F5344CB8AC3E}">
-        <p14:creationId xmlns:p14="http://schemas.microsoft.com/office/powerpoint/2010/main" val="1326784957"/>
+        <p14:creationId xmlns:p14="http://schemas.microsoft.com/office/powerpoint/2010/main" val="343103832"/>
       </p:ext>
     </p:extLst>
   </p:cSld>
@@ -8445,7 +8361,7 @@
     </p:spTree>
     <p:extLst>
       <p:ext uri="{BB962C8B-B14F-4D97-AF65-F5344CB8AC3E}">
-        <p14:creationId xmlns:p14="http://schemas.microsoft.com/office/powerpoint/2010/main" val="1867815353"/>
+        <p14:creationId xmlns:p14="http://schemas.microsoft.com/office/powerpoint/2010/main" val="2485728360"/>
       </p:ext>
     </p:extLst>
   </p:cSld>
@@ -13496,7 +13412,7 @@
               <a:buFont typeface="Arial"/>
               <a:buNone/>
             </a:pPr>
-            <a:endParaRPr sz="3200" b="0" i="0" u="none" strike="noStrike" cap="none">
+            <a:endParaRPr sz="3200" b="0" i="0" u="none" strike="noStrike" cap="none" dirty="0">
               <a:solidFill>
                 <a:srgbClr val="000000"/>
               </a:solidFill>
@@ -13524,7 +13440,7 @@
               <a:buFont typeface="Arial"/>
               <a:buNone/>
             </a:pPr>
-            <a:endParaRPr sz="3200" b="0" i="0" u="none" strike="noStrike" cap="none">
+            <a:endParaRPr sz="3200" b="0" i="0" u="none" strike="noStrike" cap="none" dirty="0">
               <a:solidFill>
                 <a:srgbClr val="000000"/>
               </a:solidFill>
@@ -13548,7 +13464,7 @@
               <a:buNone/>
             </a:pPr>
             <a:r>
-              <a:rPr lang="en-US" sz="4400" b="0" i="0" u="none" strike="noStrike" cap="none">
+              <a:rPr lang="en-US" sz="4400" b="0" i="0" u="none" strike="noStrike" cap="none" dirty="0">
                 <a:solidFill>
                   <a:srgbClr val="000000"/>
                 </a:solidFill>
@@ -13557,9 +13473,9 @@
                 <a:cs typeface="Arial"/>
                 <a:sym typeface="Arial"/>
               </a:rPr>
-              <a:t>Causal Inference and ML Experiments</a:t>
+              <a:t>Evaluating ML Systems through Randomized Controlled Trials (RCTs)</a:t>
             </a:r>
-            <a:endParaRPr sz="3200" b="0" i="0" u="none" strike="noStrike" cap="none">
+            <a:endParaRPr sz="3200" b="0" i="0" u="none" strike="noStrike" cap="none" dirty="0">
               <a:solidFill>
                 <a:srgbClr val="000000"/>
               </a:solidFill>
@@ -13587,7 +13503,7 @@
               <a:buFont typeface="Arial"/>
               <a:buNone/>
             </a:pPr>
-            <a:endParaRPr sz="3200" b="0" i="0" u="none" strike="noStrike" cap="none">
+            <a:endParaRPr sz="3200" b="0" i="0" u="none" strike="noStrike" cap="none" dirty="0">
               <a:solidFill>
                 <a:srgbClr val="000000"/>
               </a:solidFill>
@@ -13642,7 +13558,7 @@
               <a:buNone/>
             </a:pPr>
             <a:r>
-              <a:rPr lang="en-US" sz="2800" b="0" i="0" u="none" strike="noStrike" cap="none">
+              <a:rPr lang="en-US" sz="2800" b="0" i="0" u="none" strike="noStrike" cap="none" dirty="0">
                 <a:solidFill>
                   <a:srgbClr val="595959"/>
                 </a:solidFill>
@@ -13651,9 +13567,9 @@
                 <a:cs typeface="Arial"/>
                 <a:sym typeface="Arial"/>
               </a:rPr>
-              <a:t>Rayid Ghani and Kit Rodolfa</a:t>
+              <a:t>Rayid Ghani</a:t>
             </a:r>
-            <a:endParaRPr sz="2800" b="0" i="0" u="none" strike="noStrike" cap="none">
+            <a:endParaRPr sz="2800" b="0" i="0" u="none" strike="noStrike" cap="none" dirty="0">
               <a:solidFill>
                 <a:srgbClr val="595959"/>
               </a:solidFill>
@@ -13701,6 +13617,2201 @@
 </file>
 
 <file path=ppt/slides/slide10.xml><?xml version="1.0" encoding="utf-8"?>
+<p:sld xmlns:a="http://schemas.openxmlformats.org/drawingml/2006/main" xmlns:r="http://schemas.openxmlformats.org/officeDocument/2006/relationships" xmlns:p="http://schemas.openxmlformats.org/presentationml/2006/main">
+  <p:cSld>
+    <p:spTree>
+      <p:nvGrpSpPr>
+        <p:cNvPr id="1" name="Shape 1225"/>
+        <p:cNvGrpSpPr/>
+        <p:nvPr/>
+      </p:nvGrpSpPr>
+      <p:grpSpPr>
+        <a:xfrm>
+          <a:off x="0" y="0"/>
+          <a:ext cx="0" cy="0"/>
+          <a:chOff x="0" y="0"/>
+          <a:chExt cx="0" cy="0"/>
+        </a:xfrm>
+      </p:grpSpPr>
+      <p:sp>
+        <p:nvSpPr>
+          <p:cNvPr id="1226" name="Google Shape;1226;p142"/>
+          <p:cNvSpPr txBox="1">
+            <a:spLocks noGrp="1"/>
+          </p:cNvSpPr>
+          <p:nvPr>
+            <p:ph type="title"/>
+          </p:nvPr>
+        </p:nvSpPr>
+        <p:spPr>
+          <a:prstGeom prst="rect">
+            <a:avLst/>
+          </a:prstGeom>
+        </p:spPr>
+        <p:txBody>
+          <a:bodyPr spcFirstLastPara="1" wrap="square" lIns="121900" tIns="121900" rIns="121900" bIns="121900" anchor="ctr" anchorCtr="0">
+            <a:noAutofit/>
+          </a:bodyPr>
+          <a:lstStyle/>
+          <a:p>
+            <a:r>
+              <a:rPr lang="en-US" sz="3200" dirty="0"/>
+              <a:t>CASE STUDY: Mental Health and Incarceration</a:t>
+            </a:r>
+            <a:endParaRPr sz="3200" dirty="0"/>
+          </a:p>
+        </p:txBody>
+      </p:sp>
+      <p:sp>
+        <p:nvSpPr>
+          <p:cNvPr id="12" name="Google Shape;75;p10">
+            <a:extLst>
+              <a:ext uri="{FF2B5EF4-FFF2-40B4-BE49-F238E27FC236}">
+                <a16:creationId xmlns:a16="http://schemas.microsoft.com/office/drawing/2014/main" id="{8C379909-E112-AF40-AB06-F3DCE0D1D789}"/>
+              </a:ext>
+            </a:extLst>
+          </p:cNvPr>
+          <p:cNvSpPr/>
+          <p:nvPr/>
+        </p:nvSpPr>
+        <p:spPr>
+          <a:xfrm>
+            <a:off x="242315" y="1399344"/>
+            <a:ext cx="3352656" cy="4888721"/>
+          </a:xfrm>
+          <a:prstGeom prst="rect">
+            <a:avLst/>
+          </a:prstGeom>
+          <a:solidFill>
+            <a:schemeClr val="lt2"/>
+          </a:solidFill>
+          <a:ln w="9525" cap="flat" cmpd="sng">
+            <a:solidFill>
+              <a:schemeClr val="dk2"/>
+            </a:solidFill>
+            <a:prstDash val="solid"/>
+            <a:round/>
+            <a:headEnd type="none" w="sm" len="sm"/>
+            <a:tailEnd type="none" w="sm" len="sm"/>
+          </a:ln>
+        </p:spPr>
+        <p:txBody>
+          <a:bodyPr spcFirstLastPara="1" wrap="square" lIns="121900" tIns="121900" rIns="121900" bIns="121900" anchor="ctr" anchorCtr="0">
+            <a:noAutofit/>
+          </a:bodyPr>
+          <a:lstStyle/>
+          <a:p>
+            <a:pPr algn="ctr"/>
+            <a:endParaRPr sz="1867" dirty="0">
+              <a:latin typeface="Century Gothic"/>
+              <a:ea typeface="Century Gothic"/>
+              <a:cs typeface="Century Gothic"/>
+              <a:sym typeface="Century Gothic"/>
+            </a:endParaRPr>
+          </a:p>
+        </p:txBody>
+      </p:sp>
+      <p:sp>
+        <p:nvSpPr>
+          <p:cNvPr id="2" name="TextBox 1">
+            <a:extLst>
+              <a:ext uri="{FF2B5EF4-FFF2-40B4-BE49-F238E27FC236}">
+                <a16:creationId xmlns:a16="http://schemas.microsoft.com/office/drawing/2014/main" id="{624431EB-4D8A-1442-9803-AA95ADA5372B}"/>
+              </a:ext>
+            </a:extLst>
+          </p:cNvPr>
+          <p:cNvSpPr txBox="1"/>
+          <p:nvPr/>
+        </p:nvSpPr>
+        <p:spPr>
+          <a:xfrm>
+            <a:off x="415600" y="1479367"/>
+            <a:ext cx="2959465" cy="830997"/>
+          </a:xfrm>
+          <a:prstGeom prst="rect">
+            <a:avLst/>
+          </a:prstGeom>
+          <a:noFill/>
+        </p:spPr>
+        <p:txBody>
+          <a:bodyPr wrap="none" rtlCol="0">
+            <a:spAutoFit/>
+          </a:bodyPr>
+          <a:lstStyle/>
+          <a:p>
+            <a:r>
+              <a:rPr lang="en-US" sz="2400" dirty="0">
+                <a:latin typeface="Century Gothic" panose="020B0502020202020204" pitchFamily="34" charset="0"/>
+              </a:rPr>
+              <a:t>Released From Jail</a:t>
+            </a:r>
+          </a:p>
+          <a:p>
+            <a:r>
+              <a:rPr lang="en-US" sz="2400" dirty="0">
+                <a:latin typeface="Century Gothic" panose="020B0502020202020204" pitchFamily="34" charset="0"/>
+              </a:rPr>
+              <a:t>In Past 3 Years</a:t>
+            </a:r>
+          </a:p>
+        </p:txBody>
+      </p:sp>
+      <p:sp>
+        <p:nvSpPr>
+          <p:cNvPr id="14" name="Google Shape;75;p10">
+            <a:extLst>
+              <a:ext uri="{FF2B5EF4-FFF2-40B4-BE49-F238E27FC236}">
+                <a16:creationId xmlns:a16="http://schemas.microsoft.com/office/drawing/2014/main" id="{4DF198BD-39AA-964B-8EB5-FB1B260A34A5}"/>
+              </a:ext>
+            </a:extLst>
+          </p:cNvPr>
+          <p:cNvSpPr/>
+          <p:nvPr/>
+        </p:nvSpPr>
+        <p:spPr>
+          <a:xfrm>
+            <a:off x="789142" y="3429000"/>
+            <a:ext cx="2665062" cy="2734106"/>
+          </a:xfrm>
+          <a:prstGeom prst="rect">
+            <a:avLst/>
+          </a:prstGeom>
+          <a:solidFill>
+            <a:srgbClr val="0070C0"/>
+          </a:solidFill>
+          <a:ln w="9525" cap="flat" cmpd="sng">
+            <a:solidFill>
+              <a:schemeClr val="dk2"/>
+            </a:solidFill>
+            <a:prstDash val="solid"/>
+            <a:round/>
+            <a:headEnd type="none" w="sm" len="sm"/>
+            <a:tailEnd type="none" w="sm" len="sm"/>
+          </a:ln>
+        </p:spPr>
+        <p:txBody>
+          <a:bodyPr spcFirstLastPara="1" wrap="square" lIns="121900" tIns="121900" rIns="121900" bIns="121900" anchor="ctr" anchorCtr="0">
+            <a:noAutofit/>
+          </a:bodyPr>
+          <a:lstStyle/>
+          <a:p>
+            <a:pPr algn="ctr"/>
+            <a:endParaRPr sz="1867" dirty="0">
+              <a:latin typeface="Century Gothic"/>
+              <a:ea typeface="Century Gothic"/>
+              <a:cs typeface="Century Gothic"/>
+              <a:sym typeface="Century Gothic"/>
+            </a:endParaRPr>
+          </a:p>
+        </p:txBody>
+      </p:sp>
+      <p:sp>
+        <p:nvSpPr>
+          <p:cNvPr id="15" name="TextBox 14">
+            <a:extLst>
+              <a:ext uri="{FF2B5EF4-FFF2-40B4-BE49-F238E27FC236}">
+                <a16:creationId xmlns:a16="http://schemas.microsoft.com/office/drawing/2014/main" id="{3EE42FA2-6A12-0044-AA06-B868FCDE372D}"/>
+              </a:ext>
+            </a:extLst>
+          </p:cNvPr>
+          <p:cNvSpPr txBox="1"/>
+          <p:nvPr/>
+        </p:nvSpPr>
+        <p:spPr>
+          <a:xfrm>
+            <a:off x="890681" y="3610880"/>
+            <a:ext cx="2563522" cy="1200329"/>
+          </a:xfrm>
+          <a:prstGeom prst="rect">
+            <a:avLst/>
+          </a:prstGeom>
+          <a:noFill/>
+        </p:spPr>
+        <p:txBody>
+          <a:bodyPr wrap="none" rtlCol="0">
+            <a:spAutoFit/>
+          </a:bodyPr>
+          <a:lstStyle/>
+          <a:p>
+            <a:r>
+              <a:rPr lang="en-US" sz="2400" dirty="0">
+                <a:solidFill>
+                  <a:schemeClr val="bg1"/>
+                </a:solidFill>
+                <a:latin typeface="Century Gothic" panose="020B0502020202020204" pitchFamily="34" charset="0"/>
+              </a:rPr>
+              <a:t>…With History of</a:t>
+            </a:r>
+          </a:p>
+          <a:p>
+            <a:r>
+              <a:rPr lang="en-US" sz="2400" dirty="0">
+                <a:solidFill>
+                  <a:schemeClr val="bg1"/>
+                </a:solidFill>
+                <a:latin typeface="Century Gothic" panose="020B0502020202020204" pitchFamily="34" charset="0"/>
+              </a:rPr>
+              <a:t>Mental Health</a:t>
+            </a:r>
+          </a:p>
+          <a:p>
+            <a:r>
+              <a:rPr lang="en-US" sz="2400" dirty="0">
+                <a:solidFill>
+                  <a:schemeClr val="bg1"/>
+                </a:solidFill>
+                <a:latin typeface="Century Gothic" panose="020B0502020202020204" pitchFamily="34" charset="0"/>
+              </a:rPr>
+              <a:t>Needs</a:t>
+            </a:r>
+          </a:p>
+        </p:txBody>
+      </p:sp>
+      <p:grpSp>
+        <p:nvGrpSpPr>
+          <p:cNvPr id="16" name="Group 15">
+            <a:extLst>
+              <a:ext uri="{FF2B5EF4-FFF2-40B4-BE49-F238E27FC236}">
+                <a16:creationId xmlns:a16="http://schemas.microsoft.com/office/drawing/2014/main" id="{893B8E00-7081-1F47-9553-568F65765633}"/>
+              </a:ext>
+            </a:extLst>
+          </p:cNvPr>
+          <p:cNvGrpSpPr/>
+          <p:nvPr/>
+        </p:nvGrpSpPr>
+        <p:grpSpPr>
+          <a:xfrm>
+            <a:off x="3857489" y="3829293"/>
+            <a:ext cx="860597" cy="763501"/>
+            <a:chOff x="4389120" y="2462784"/>
+            <a:chExt cx="1706830" cy="1514258"/>
+          </a:xfrm>
+        </p:grpSpPr>
+        <p:sp>
+          <p:nvSpPr>
+            <p:cNvPr id="17" name="Oval 16">
+              <a:extLst>
+                <a:ext uri="{FF2B5EF4-FFF2-40B4-BE49-F238E27FC236}">
+                  <a16:creationId xmlns:a16="http://schemas.microsoft.com/office/drawing/2014/main" id="{F71938DB-AC52-2A4F-903C-9A0F093EEAA8}"/>
+                </a:ext>
+              </a:extLst>
+            </p:cNvPr>
+            <p:cNvSpPr/>
+            <p:nvPr/>
+          </p:nvSpPr>
+          <p:spPr>
+            <a:xfrm>
+              <a:off x="4389120" y="2462784"/>
+              <a:ext cx="402336" cy="402336"/>
+            </a:xfrm>
+            <a:prstGeom prst="ellipse">
+              <a:avLst/>
+            </a:prstGeom>
+            <a:solidFill>
+              <a:schemeClr val="bg2"/>
+            </a:solidFill>
+            <a:ln w="9525">
+              <a:solidFill>
+                <a:schemeClr val="tx1"/>
+              </a:solidFill>
+            </a:ln>
+          </p:spPr>
+          <p:style>
+            <a:lnRef idx="2">
+              <a:schemeClr val="accent1">
+                <a:shade val="50000"/>
+              </a:schemeClr>
+            </a:lnRef>
+            <a:fillRef idx="1">
+              <a:schemeClr val="accent1"/>
+            </a:fillRef>
+            <a:effectRef idx="0">
+              <a:schemeClr val="accent1"/>
+            </a:effectRef>
+            <a:fontRef idx="minor">
+              <a:schemeClr val="lt1"/>
+            </a:fontRef>
+          </p:style>
+          <p:txBody>
+            <a:bodyPr rtlCol="0" anchor="ctr"/>
+            <a:lstStyle/>
+            <a:p>
+              <a:pPr algn="ctr"/>
+              <a:endParaRPr lang="en-US"/>
+            </a:p>
+          </p:txBody>
+        </p:sp>
+        <p:sp>
+          <p:nvSpPr>
+            <p:cNvPr id="18" name="Oval 17">
+              <a:extLst>
+                <a:ext uri="{FF2B5EF4-FFF2-40B4-BE49-F238E27FC236}">
+                  <a16:creationId xmlns:a16="http://schemas.microsoft.com/office/drawing/2014/main" id="{443EB63D-67D3-4E45-B65B-3AE6C37117B7}"/>
+                </a:ext>
+              </a:extLst>
+            </p:cNvPr>
+            <p:cNvSpPr/>
+            <p:nvPr/>
+          </p:nvSpPr>
+          <p:spPr>
+            <a:xfrm>
+              <a:off x="4389120" y="3018745"/>
+              <a:ext cx="402336" cy="402336"/>
+            </a:xfrm>
+            <a:prstGeom prst="ellipse">
+              <a:avLst/>
+            </a:prstGeom>
+            <a:solidFill>
+              <a:schemeClr val="bg2"/>
+            </a:solidFill>
+            <a:ln w="9525">
+              <a:solidFill>
+                <a:schemeClr val="tx1"/>
+              </a:solidFill>
+            </a:ln>
+          </p:spPr>
+          <p:style>
+            <a:lnRef idx="2">
+              <a:schemeClr val="accent1">
+                <a:shade val="50000"/>
+              </a:schemeClr>
+            </a:lnRef>
+            <a:fillRef idx="1">
+              <a:schemeClr val="accent1"/>
+            </a:fillRef>
+            <a:effectRef idx="0">
+              <a:schemeClr val="accent1"/>
+            </a:effectRef>
+            <a:fontRef idx="minor">
+              <a:schemeClr val="lt1"/>
+            </a:fontRef>
+          </p:style>
+          <p:txBody>
+            <a:bodyPr rtlCol="0" anchor="ctr"/>
+            <a:lstStyle/>
+            <a:p>
+              <a:pPr algn="ctr"/>
+              <a:endParaRPr lang="en-US"/>
+            </a:p>
+          </p:txBody>
+        </p:sp>
+        <p:sp>
+          <p:nvSpPr>
+            <p:cNvPr id="19" name="Oval 18">
+              <a:extLst>
+                <a:ext uri="{FF2B5EF4-FFF2-40B4-BE49-F238E27FC236}">
+                  <a16:creationId xmlns:a16="http://schemas.microsoft.com/office/drawing/2014/main" id="{B868292F-40CE-8846-909D-8E042F9E7876}"/>
+                </a:ext>
+              </a:extLst>
+            </p:cNvPr>
+            <p:cNvSpPr/>
+            <p:nvPr/>
+          </p:nvSpPr>
+          <p:spPr>
+            <a:xfrm>
+              <a:off x="4389120" y="3574706"/>
+              <a:ext cx="402336" cy="402336"/>
+            </a:xfrm>
+            <a:prstGeom prst="ellipse">
+              <a:avLst/>
+            </a:prstGeom>
+            <a:solidFill>
+              <a:schemeClr val="bg2"/>
+            </a:solidFill>
+            <a:ln w="9525">
+              <a:solidFill>
+                <a:schemeClr val="tx1"/>
+              </a:solidFill>
+            </a:ln>
+          </p:spPr>
+          <p:style>
+            <a:lnRef idx="2">
+              <a:schemeClr val="accent1">
+                <a:shade val="50000"/>
+              </a:schemeClr>
+            </a:lnRef>
+            <a:fillRef idx="1">
+              <a:schemeClr val="accent1"/>
+            </a:fillRef>
+            <a:effectRef idx="0">
+              <a:schemeClr val="accent1"/>
+            </a:effectRef>
+            <a:fontRef idx="minor">
+              <a:schemeClr val="lt1"/>
+            </a:fontRef>
+          </p:style>
+          <p:txBody>
+            <a:bodyPr rtlCol="0" anchor="ctr"/>
+            <a:lstStyle/>
+            <a:p>
+              <a:pPr algn="ctr"/>
+              <a:endParaRPr lang="en-US"/>
+            </a:p>
+          </p:txBody>
+        </p:sp>
+        <p:sp>
+          <p:nvSpPr>
+            <p:cNvPr id="20" name="Oval 19">
+              <a:extLst>
+                <a:ext uri="{FF2B5EF4-FFF2-40B4-BE49-F238E27FC236}">
+                  <a16:creationId xmlns:a16="http://schemas.microsoft.com/office/drawing/2014/main" id="{87CBACA9-7504-BE46-A082-FA1F0DB3991A}"/>
+                </a:ext>
+              </a:extLst>
+            </p:cNvPr>
+            <p:cNvSpPr/>
+            <p:nvPr/>
+          </p:nvSpPr>
+          <p:spPr>
+            <a:xfrm>
+              <a:off x="5029200" y="2768809"/>
+              <a:ext cx="402336" cy="402336"/>
+            </a:xfrm>
+            <a:prstGeom prst="ellipse">
+              <a:avLst/>
+            </a:prstGeom>
+            <a:solidFill>
+              <a:schemeClr val="bg2"/>
+            </a:solidFill>
+            <a:ln w="9525">
+              <a:solidFill>
+                <a:schemeClr val="tx1"/>
+              </a:solidFill>
+            </a:ln>
+          </p:spPr>
+          <p:style>
+            <a:lnRef idx="2">
+              <a:schemeClr val="accent1">
+                <a:shade val="50000"/>
+              </a:schemeClr>
+            </a:lnRef>
+            <a:fillRef idx="1">
+              <a:schemeClr val="accent1"/>
+            </a:fillRef>
+            <a:effectRef idx="0">
+              <a:schemeClr val="accent1"/>
+            </a:effectRef>
+            <a:fontRef idx="minor">
+              <a:schemeClr val="lt1"/>
+            </a:fontRef>
+          </p:style>
+          <p:txBody>
+            <a:bodyPr rtlCol="0" anchor="ctr"/>
+            <a:lstStyle/>
+            <a:p>
+              <a:pPr algn="ctr"/>
+              <a:endParaRPr lang="en-US"/>
+            </a:p>
+          </p:txBody>
+        </p:sp>
+        <p:sp>
+          <p:nvSpPr>
+            <p:cNvPr id="25" name="Oval 24">
+              <a:extLst>
+                <a:ext uri="{FF2B5EF4-FFF2-40B4-BE49-F238E27FC236}">
+                  <a16:creationId xmlns:a16="http://schemas.microsoft.com/office/drawing/2014/main" id="{7E7DE2BA-187D-4144-BCB9-4822657FE213}"/>
+                </a:ext>
+              </a:extLst>
+            </p:cNvPr>
+            <p:cNvSpPr/>
+            <p:nvPr/>
+          </p:nvSpPr>
+          <p:spPr>
+            <a:xfrm>
+              <a:off x="5029200" y="3350379"/>
+              <a:ext cx="402336" cy="402336"/>
+            </a:xfrm>
+            <a:prstGeom prst="ellipse">
+              <a:avLst/>
+            </a:prstGeom>
+            <a:solidFill>
+              <a:schemeClr val="bg2"/>
+            </a:solidFill>
+            <a:ln w="9525">
+              <a:solidFill>
+                <a:schemeClr val="tx1"/>
+              </a:solidFill>
+            </a:ln>
+          </p:spPr>
+          <p:style>
+            <a:lnRef idx="2">
+              <a:schemeClr val="accent1">
+                <a:shade val="50000"/>
+              </a:schemeClr>
+            </a:lnRef>
+            <a:fillRef idx="1">
+              <a:schemeClr val="accent1"/>
+            </a:fillRef>
+            <a:effectRef idx="0">
+              <a:schemeClr val="accent1"/>
+            </a:effectRef>
+            <a:fontRef idx="minor">
+              <a:schemeClr val="lt1"/>
+            </a:fontRef>
+          </p:style>
+          <p:txBody>
+            <a:bodyPr rtlCol="0" anchor="ctr"/>
+            <a:lstStyle/>
+            <a:p>
+              <a:pPr algn="ctr"/>
+              <a:endParaRPr lang="en-US"/>
+            </a:p>
+          </p:txBody>
+        </p:sp>
+        <p:sp>
+          <p:nvSpPr>
+            <p:cNvPr id="28" name="Oval 27">
+              <a:extLst>
+                <a:ext uri="{FF2B5EF4-FFF2-40B4-BE49-F238E27FC236}">
+                  <a16:creationId xmlns:a16="http://schemas.microsoft.com/office/drawing/2014/main" id="{1A7BFEE9-9AB5-0E4D-ACF5-9DFA5671C333}"/>
+                </a:ext>
+              </a:extLst>
+            </p:cNvPr>
+            <p:cNvSpPr/>
+            <p:nvPr/>
+          </p:nvSpPr>
+          <p:spPr>
+            <a:xfrm>
+              <a:off x="5693614" y="2757135"/>
+              <a:ext cx="402336" cy="402336"/>
+            </a:xfrm>
+            <a:prstGeom prst="ellipse">
+              <a:avLst/>
+            </a:prstGeom>
+            <a:solidFill>
+              <a:schemeClr val="bg2"/>
+            </a:solidFill>
+            <a:ln w="9525">
+              <a:solidFill>
+                <a:schemeClr val="tx1"/>
+              </a:solidFill>
+            </a:ln>
+          </p:spPr>
+          <p:style>
+            <a:lnRef idx="2">
+              <a:schemeClr val="accent1">
+                <a:shade val="50000"/>
+              </a:schemeClr>
+            </a:lnRef>
+            <a:fillRef idx="1">
+              <a:schemeClr val="accent1"/>
+            </a:fillRef>
+            <a:effectRef idx="0">
+              <a:schemeClr val="accent1"/>
+            </a:effectRef>
+            <a:fontRef idx="minor">
+              <a:schemeClr val="lt1"/>
+            </a:fontRef>
+          </p:style>
+          <p:txBody>
+            <a:bodyPr rtlCol="0" anchor="ctr"/>
+            <a:lstStyle/>
+            <a:p>
+              <a:pPr algn="ctr"/>
+              <a:endParaRPr lang="en-US"/>
+            </a:p>
+          </p:txBody>
+        </p:sp>
+        <p:sp>
+          <p:nvSpPr>
+            <p:cNvPr id="29" name="Oval 28">
+              <a:extLst>
+                <a:ext uri="{FF2B5EF4-FFF2-40B4-BE49-F238E27FC236}">
+                  <a16:creationId xmlns:a16="http://schemas.microsoft.com/office/drawing/2014/main" id="{C6B3BF28-ABC9-CB4E-8050-B49E9B365028}"/>
+                </a:ext>
+              </a:extLst>
+            </p:cNvPr>
+            <p:cNvSpPr/>
+            <p:nvPr/>
+          </p:nvSpPr>
+          <p:spPr>
+            <a:xfrm>
+              <a:off x="5669280" y="3338187"/>
+              <a:ext cx="402336" cy="402336"/>
+            </a:xfrm>
+            <a:prstGeom prst="ellipse">
+              <a:avLst/>
+            </a:prstGeom>
+            <a:solidFill>
+              <a:schemeClr val="bg2"/>
+            </a:solidFill>
+            <a:ln w="9525">
+              <a:solidFill>
+                <a:schemeClr val="tx1"/>
+              </a:solidFill>
+            </a:ln>
+          </p:spPr>
+          <p:style>
+            <a:lnRef idx="2">
+              <a:schemeClr val="accent1">
+                <a:shade val="50000"/>
+              </a:schemeClr>
+            </a:lnRef>
+            <a:fillRef idx="1">
+              <a:schemeClr val="accent1"/>
+            </a:fillRef>
+            <a:effectRef idx="0">
+              <a:schemeClr val="accent1"/>
+            </a:effectRef>
+            <a:fontRef idx="minor">
+              <a:schemeClr val="lt1"/>
+            </a:fontRef>
+          </p:style>
+          <p:txBody>
+            <a:bodyPr rtlCol="0" anchor="ctr"/>
+            <a:lstStyle/>
+            <a:p>
+              <a:pPr algn="ctr"/>
+              <a:endParaRPr lang="en-US"/>
+            </a:p>
+          </p:txBody>
+        </p:sp>
+        <p:cxnSp>
+          <p:nvCxnSpPr>
+            <p:cNvPr id="30" name="Straight Connector 29">
+              <a:extLst>
+                <a:ext uri="{FF2B5EF4-FFF2-40B4-BE49-F238E27FC236}">
+                  <a16:creationId xmlns:a16="http://schemas.microsoft.com/office/drawing/2014/main" id="{8472FECF-6CFC-334F-BE08-5E927AAD8527}"/>
+                </a:ext>
+              </a:extLst>
+            </p:cNvPr>
+            <p:cNvCxnSpPr>
+              <a:stCxn id="17" idx="6"/>
+              <a:endCxn id="20" idx="2"/>
+            </p:cNvCxnSpPr>
+            <p:nvPr/>
+          </p:nvCxnSpPr>
+          <p:spPr>
+            <a:xfrm>
+              <a:off x="4791456" y="2663952"/>
+              <a:ext cx="237744" cy="306025"/>
+            </a:xfrm>
+            <a:prstGeom prst="line">
+              <a:avLst/>
+            </a:prstGeom>
+            <a:ln w="28575"/>
+          </p:spPr>
+          <p:style>
+            <a:lnRef idx="1">
+              <a:schemeClr val="dk1"/>
+            </a:lnRef>
+            <a:fillRef idx="0">
+              <a:schemeClr val="dk1"/>
+            </a:fillRef>
+            <a:effectRef idx="0">
+              <a:schemeClr val="dk1"/>
+            </a:effectRef>
+            <a:fontRef idx="minor">
+              <a:schemeClr val="tx1"/>
+            </a:fontRef>
+          </p:style>
+        </p:cxnSp>
+        <p:cxnSp>
+          <p:nvCxnSpPr>
+            <p:cNvPr id="31" name="Straight Connector 30">
+              <a:extLst>
+                <a:ext uri="{FF2B5EF4-FFF2-40B4-BE49-F238E27FC236}">
+                  <a16:creationId xmlns:a16="http://schemas.microsoft.com/office/drawing/2014/main" id="{FE2C2F4C-E9DD-E64A-8D0A-73CC3AEBD025}"/>
+                </a:ext>
+              </a:extLst>
+            </p:cNvPr>
+            <p:cNvCxnSpPr>
+              <a:cxnSpLocks/>
+              <a:stCxn id="17" idx="6"/>
+            </p:cNvCxnSpPr>
+            <p:nvPr/>
+          </p:nvCxnSpPr>
+          <p:spPr>
+            <a:xfrm>
+              <a:off x="4791456" y="2663952"/>
+              <a:ext cx="237744" cy="861986"/>
+            </a:xfrm>
+            <a:prstGeom prst="line">
+              <a:avLst/>
+            </a:prstGeom>
+            <a:ln w="28575"/>
+          </p:spPr>
+          <p:style>
+            <a:lnRef idx="1">
+              <a:schemeClr val="dk1"/>
+            </a:lnRef>
+            <a:fillRef idx="0">
+              <a:schemeClr val="dk1"/>
+            </a:fillRef>
+            <a:effectRef idx="0">
+              <a:schemeClr val="dk1"/>
+            </a:effectRef>
+            <a:fontRef idx="minor">
+              <a:schemeClr val="tx1"/>
+            </a:fontRef>
+          </p:style>
+        </p:cxnSp>
+        <p:cxnSp>
+          <p:nvCxnSpPr>
+            <p:cNvPr id="32" name="Straight Connector 31">
+              <a:extLst>
+                <a:ext uri="{FF2B5EF4-FFF2-40B4-BE49-F238E27FC236}">
+                  <a16:creationId xmlns:a16="http://schemas.microsoft.com/office/drawing/2014/main" id="{409DE789-770A-774A-9861-6E413217C2BC}"/>
+                </a:ext>
+              </a:extLst>
+            </p:cNvPr>
+            <p:cNvCxnSpPr>
+              <a:cxnSpLocks/>
+              <a:stCxn id="18" idx="6"/>
+              <a:endCxn id="20" idx="2"/>
+            </p:cNvCxnSpPr>
+            <p:nvPr/>
+          </p:nvCxnSpPr>
+          <p:spPr>
+            <a:xfrm flipV="1">
+              <a:off x="4791456" y="2969977"/>
+              <a:ext cx="237744" cy="249936"/>
+            </a:xfrm>
+            <a:prstGeom prst="line">
+              <a:avLst/>
+            </a:prstGeom>
+            <a:ln w="28575"/>
+          </p:spPr>
+          <p:style>
+            <a:lnRef idx="1">
+              <a:schemeClr val="dk1"/>
+            </a:lnRef>
+            <a:fillRef idx="0">
+              <a:schemeClr val="dk1"/>
+            </a:fillRef>
+            <a:effectRef idx="0">
+              <a:schemeClr val="dk1"/>
+            </a:effectRef>
+            <a:fontRef idx="minor">
+              <a:schemeClr val="tx1"/>
+            </a:fontRef>
+          </p:style>
+        </p:cxnSp>
+        <p:cxnSp>
+          <p:nvCxnSpPr>
+            <p:cNvPr id="33" name="Straight Connector 32">
+              <a:extLst>
+                <a:ext uri="{FF2B5EF4-FFF2-40B4-BE49-F238E27FC236}">
+                  <a16:creationId xmlns:a16="http://schemas.microsoft.com/office/drawing/2014/main" id="{70E7FF1A-B3F7-F844-B958-D27F45E1DC2D}"/>
+                </a:ext>
+              </a:extLst>
+            </p:cNvPr>
+            <p:cNvCxnSpPr/>
+            <p:nvPr/>
+          </p:nvCxnSpPr>
+          <p:spPr>
+            <a:xfrm>
+              <a:off x="4794479" y="3244297"/>
+              <a:ext cx="237744" cy="306025"/>
+            </a:xfrm>
+            <a:prstGeom prst="line">
+              <a:avLst/>
+            </a:prstGeom>
+            <a:ln w="28575"/>
+          </p:spPr>
+          <p:style>
+            <a:lnRef idx="1">
+              <a:schemeClr val="dk1"/>
+            </a:lnRef>
+            <a:fillRef idx="0">
+              <a:schemeClr val="dk1"/>
+            </a:fillRef>
+            <a:effectRef idx="0">
+              <a:schemeClr val="dk1"/>
+            </a:effectRef>
+            <a:fontRef idx="minor">
+              <a:schemeClr val="tx1"/>
+            </a:fontRef>
+          </p:style>
+        </p:cxnSp>
+        <p:cxnSp>
+          <p:nvCxnSpPr>
+            <p:cNvPr id="34" name="Straight Connector 33">
+              <a:extLst>
+                <a:ext uri="{FF2B5EF4-FFF2-40B4-BE49-F238E27FC236}">
+                  <a16:creationId xmlns:a16="http://schemas.microsoft.com/office/drawing/2014/main" id="{CC5E2131-B1EE-BC43-AF0F-76A74F8C8107}"/>
+                </a:ext>
+              </a:extLst>
+            </p:cNvPr>
+            <p:cNvCxnSpPr>
+              <a:cxnSpLocks/>
+              <a:endCxn id="20" idx="2"/>
+            </p:cNvCxnSpPr>
+            <p:nvPr/>
+          </p:nvCxnSpPr>
+          <p:spPr>
+            <a:xfrm flipV="1">
+              <a:off x="4791456" y="2969977"/>
+              <a:ext cx="237744" cy="805897"/>
+            </a:xfrm>
+            <a:prstGeom prst="line">
+              <a:avLst/>
+            </a:prstGeom>
+            <a:ln w="28575"/>
+          </p:spPr>
+          <p:style>
+            <a:lnRef idx="1">
+              <a:schemeClr val="dk1"/>
+            </a:lnRef>
+            <a:fillRef idx="0">
+              <a:schemeClr val="dk1"/>
+            </a:fillRef>
+            <a:effectRef idx="0">
+              <a:schemeClr val="dk1"/>
+            </a:effectRef>
+            <a:fontRef idx="minor">
+              <a:schemeClr val="tx1"/>
+            </a:fontRef>
+          </p:style>
+        </p:cxnSp>
+        <p:cxnSp>
+          <p:nvCxnSpPr>
+            <p:cNvPr id="35" name="Straight Connector 34">
+              <a:extLst>
+                <a:ext uri="{FF2B5EF4-FFF2-40B4-BE49-F238E27FC236}">
+                  <a16:creationId xmlns:a16="http://schemas.microsoft.com/office/drawing/2014/main" id="{2DBFED98-B6FA-8B4E-876D-F52C114E6024}"/>
+                </a:ext>
+              </a:extLst>
+            </p:cNvPr>
+            <p:cNvCxnSpPr>
+              <a:cxnSpLocks/>
+              <a:endCxn id="25" idx="2"/>
+            </p:cNvCxnSpPr>
+            <p:nvPr/>
+          </p:nvCxnSpPr>
+          <p:spPr>
+            <a:xfrm flipV="1">
+              <a:off x="4791456" y="3551547"/>
+              <a:ext cx="237744" cy="224327"/>
+            </a:xfrm>
+            <a:prstGeom prst="line">
+              <a:avLst/>
+            </a:prstGeom>
+            <a:ln w="28575"/>
+          </p:spPr>
+          <p:style>
+            <a:lnRef idx="1">
+              <a:schemeClr val="dk1"/>
+            </a:lnRef>
+            <a:fillRef idx="0">
+              <a:schemeClr val="dk1"/>
+            </a:fillRef>
+            <a:effectRef idx="0">
+              <a:schemeClr val="dk1"/>
+            </a:effectRef>
+            <a:fontRef idx="minor">
+              <a:schemeClr val="tx1"/>
+            </a:fontRef>
+          </p:style>
+        </p:cxnSp>
+        <p:cxnSp>
+          <p:nvCxnSpPr>
+            <p:cNvPr id="36" name="Straight Connector 35">
+              <a:extLst>
+                <a:ext uri="{FF2B5EF4-FFF2-40B4-BE49-F238E27FC236}">
+                  <a16:creationId xmlns:a16="http://schemas.microsoft.com/office/drawing/2014/main" id="{791D79EA-EDB5-EB44-BFE1-4E1378E764D2}"/>
+                </a:ext>
+              </a:extLst>
+            </p:cNvPr>
+            <p:cNvCxnSpPr>
+              <a:cxnSpLocks/>
+              <a:endCxn id="28" idx="2"/>
+            </p:cNvCxnSpPr>
+            <p:nvPr/>
+          </p:nvCxnSpPr>
+          <p:spPr>
+            <a:xfrm flipV="1">
+              <a:off x="5431536" y="2958303"/>
+              <a:ext cx="262078" cy="33010"/>
+            </a:xfrm>
+            <a:prstGeom prst="line">
+              <a:avLst/>
+            </a:prstGeom>
+            <a:ln w="28575"/>
+          </p:spPr>
+          <p:style>
+            <a:lnRef idx="1">
+              <a:schemeClr val="dk1"/>
+            </a:lnRef>
+            <a:fillRef idx="0">
+              <a:schemeClr val="dk1"/>
+            </a:fillRef>
+            <a:effectRef idx="0">
+              <a:schemeClr val="dk1"/>
+            </a:effectRef>
+            <a:fontRef idx="minor">
+              <a:schemeClr val="tx1"/>
+            </a:fontRef>
+          </p:style>
+        </p:cxnSp>
+        <p:cxnSp>
+          <p:nvCxnSpPr>
+            <p:cNvPr id="37" name="Straight Connector 36">
+              <a:extLst>
+                <a:ext uri="{FF2B5EF4-FFF2-40B4-BE49-F238E27FC236}">
+                  <a16:creationId xmlns:a16="http://schemas.microsoft.com/office/drawing/2014/main" id="{AC8D7F98-F828-4749-89A9-70A2687F9B2D}"/>
+                </a:ext>
+              </a:extLst>
+            </p:cNvPr>
+            <p:cNvCxnSpPr>
+              <a:cxnSpLocks/>
+              <a:endCxn id="29" idx="2"/>
+            </p:cNvCxnSpPr>
+            <p:nvPr/>
+          </p:nvCxnSpPr>
+          <p:spPr>
+            <a:xfrm>
+              <a:off x="5431536" y="3023616"/>
+              <a:ext cx="237744" cy="515739"/>
+            </a:xfrm>
+            <a:prstGeom prst="line">
+              <a:avLst/>
+            </a:prstGeom>
+            <a:ln w="28575"/>
+          </p:spPr>
+          <p:style>
+            <a:lnRef idx="1">
+              <a:schemeClr val="dk1"/>
+            </a:lnRef>
+            <a:fillRef idx="0">
+              <a:schemeClr val="dk1"/>
+            </a:fillRef>
+            <a:effectRef idx="0">
+              <a:schemeClr val="dk1"/>
+            </a:effectRef>
+            <a:fontRef idx="minor">
+              <a:schemeClr val="tx1"/>
+            </a:fontRef>
+          </p:style>
+        </p:cxnSp>
+        <p:cxnSp>
+          <p:nvCxnSpPr>
+            <p:cNvPr id="38" name="Straight Connector 37">
+              <a:extLst>
+                <a:ext uri="{FF2B5EF4-FFF2-40B4-BE49-F238E27FC236}">
+                  <a16:creationId xmlns:a16="http://schemas.microsoft.com/office/drawing/2014/main" id="{CCAA8FC4-6819-0342-9A83-42B280E06237}"/>
+                </a:ext>
+              </a:extLst>
+            </p:cNvPr>
+            <p:cNvCxnSpPr>
+              <a:cxnSpLocks/>
+              <a:endCxn id="28" idx="2"/>
+            </p:cNvCxnSpPr>
+            <p:nvPr/>
+          </p:nvCxnSpPr>
+          <p:spPr>
+            <a:xfrm flipV="1">
+              <a:off x="5428513" y="2958303"/>
+              <a:ext cx="265101" cy="589598"/>
+            </a:xfrm>
+            <a:prstGeom prst="line">
+              <a:avLst/>
+            </a:prstGeom>
+            <a:ln w="28575"/>
+          </p:spPr>
+          <p:style>
+            <a:lnRef idx="1">
+              <a:schemeClr val="dk1"/>
+            </a:lnRef>
+            <a:fillRef idx="0">
+              <a:schemeClr val="dk1"/>
+            </a:fillRef>
+            <a:effectRef idx="0">
+              <a:schemeClr val="dk1"/>
+            </a:effectRef>
+            <a:fontRef idx="minor">
+              <a:schemeClr val="tx1"/>
+            </a:fontRef>
+          </p:style>
+        </p:cxnSp>
+        <p:cxnSp>
+          <p:nvCxnSpPr>
+            <p:cNvPr id="39" name="Straight Connector 38">
+              <a:extLst>
+                <a:ext uri="{FF2B5EF4-FFF2-40B4-BE49-F238E27FC236}">
+                  <a16:creationId xmlns:a16="http://schemas.microsoft.com/office/drawing/2014/main" id="{9DB29A49-FD36-804C-B626-ECEBE343A946}"/>
+                </a:ext>
+              </a:extLst>
+            </p:cNvPr>
+            <p:cNvCxnSpPr>
+              <a:cxnSpLocks/>
+              <a:endCxn id="29" idx="2"/>
+            </p:cNvCxnSpPr>
+            <p:nvPr/>
+          </p:nvCxnSpPr>
+          <p:spPr>
+            <a:xfrm>
+              <a:off x="5431536" y="3510697"/>
+              <a:ext cx="237744" cy="28658"/>
+            </a:xfrm>
+            <a:prstGeom prst="line">
+              <a:avLst/>
+            </a:prstGeom>
+            <a:ln w="28575"/>
+          </p:spPr>
+          <p:style>
+            <a:lnRef idx="1">
+              <a:schemeClr val="dk1"/>
+            </a:lnRef>
+            <a:fillRef idx="0">
+              <a:schemeClr val="dk1"/>
+            </a:fillRef>
+            <a:effectRef idx="0">
+              <a:schemeClr val="dk1"/>
+            </a:effectRef>
+            <a:fontRef idx="minor">
+              <a:schemeClr val="tx1"/>
+            </a:fontRef>
+          </p:style>
+        </p:cxnSp>
+      </p:grpSp>
+      <p:graphicFrame>
+        <p:nvGraphicFramePr>
+          <p:cNvPr id="5" name="Table 5">
+            <a:extLst>
+              <a:ext uri="{FF2B5EF4-FFF2-40B4-BE49-F238E27FC236}">
+                <a16:creationId xmlns:a16="http://schemas.microsoft.com/office/drawing/2014/main" id="{77FEABA3-487B-1046-962E-19F31B5554DD}"/>
+              </a:ext>
+            </a:extLst>
+          </p:cNvPr>
+          <p:cNvGraphicFramePr>
+            <a:graphicFrameLocks noGrp="1"/>
+          </p:cNvGraphicFramePr>
+          <p:nvPr>
+            <p:extLst>
+              <p:ext uri="{D42A27DB-BD31-4B8C-83A1-F6EECF244321}">
+                <p14:modId xmlns:p14="http://schemas.microsoft.com/office/powerpoint/2010/main" val="2891490566"/>
+              </p:ext>
+            </p:extLst>
+          </p:nvPr>
+        </p:nvGraphicFramePr>
+        <p:xfrm>
+          <a:off x="5382865" y="1803689"/>
+          <a:ext cx="1654828" cy="4876800"/>
+        </p:xfrm>
+        <a:graphic>
+          <a:graphicData uri="http://schemas.openxmlformats.org/drawingml/2006/table">
+            <a:tbl>
+              <a:tblPr firstRow="1" bandRow="1">
+                <a:tableStyleId>{073A0DAA-6AF3-43AB-8588-CEC1D06C72B9}</a:tableStyleId>
+              </a:tblPr>
+              <a:tblGrid>
+                <a:gridCol w="827414">
+                  <a:extLst>
+                    <a:ext uri="{9D8B030D-6E8A-4147-A177-3AD203B41FA5}">
+                      <a16:colId xmlns:a16="http://schemas.microsoft.com/office/drawing/2014/main" val="1088238618"/>
+                    </a:ext>
+                  </a:extLst>
+                </a:gridCol>
+                <a:gridCol w="827414">
+                  <a:extLst>
+                    <a:ext uri="{9D8B030D-6E8A-4147-A177-3AD203B41FA5}">
+                      <a16:colId xmlns:a16="http://schemas.microsoft.com/office/drawing/2014/main" val="2545921369"/>
+                    </a:ext>
+                  </a:extLst>
+                </a:gridCol>
+              </a:tblGrid>
+              <a:tr h="258046">
+                <a:tc>
+                  <a:txBody>
+                    <a:bodyPr/>
+                    <a:lstStyle/>
+                    <a:p>
+                      <a:pPr algn="ctr"/>
+                      <a:r>
+                        <a:rPr lang="en-US" dirty="0"/>
+                        <a:t>ID</a:t>
+                      </a:r>
+                    </a:p>
+                  </a:txBody>
+                  <a:tcPr/>
+                </a:tc>
+                <a:tc>
+                  <a:txBody>
+                    <a:bodyPr/>
+                    <a:lstStyle/>
+                    <a:p>
+                      <a:pPr algn="ctr"/>
+                      <a:r>
+                        <a:rPr lang="en-US" dirty="0"/>
+                        <a:t>SCORE</a:t>
+                      </a:r>
+                    </a:p>
+                  </a:txBody>
+                  <a:tcPr/>
+                </a:tc>
+                <a:extLst>
+                  <a:ext uri="{0D108BD9-81ED-4DB2-BD59-A6C34878D82A}">
+                    <a16:rowId xmlns:a16="http://schemas.microsoft.com/office/drawing/2014/main" val="302251417"/>
+                  </a:ext>
+                </a:extLst>
+              </a:tr>
+              <a:tr h="258046">
+                <a:tc>
+                  <a:txBody>
+                    <a:bodyPr/>
+                    <a:lstStyle/>
+                    <a:p>
+                      <a:pPr algn="ctr"/>
+                      <a:r>
+                        <a:rPr lang="en-US" dirty="0"/>
+                        <a:t>27</a:t>
+                      </a:r>
+                    </a:p>
+                  </a:txBody>
+                  <a:tcPr/>
+                </a:tc>
+                <a:tc>
+                  <a:txBody>
+                    <a:bodyPr/>
+                    <a:lstStyle/>
+                    <a:p>
+                      <a:pPr algn="ctr"/>
+                      <a:r>
+                        <a:rPr lang="en-US" dirty="0"/>
+                        <a:t>0.95</a:t>
+                      </a:r>
+                    </a:p>
+                  </a:txBody>
+                  <a:tcPr/>
+                </a:tc>
+                <a:extLst>
+                  <a:ext uri="{0D108BD9-81ED-4DB2-BD59-A6C34878D82A}">
+                    <a16:rowId xmlns:a16="http://schemas.microsoft.com/office/drawing/2014/main" val="122529026"/>
+                  </a:ext>
+                </a:extLst>
+              </a:tr>
+              <a:tr h="258046">
+                <a:tc>
+                  <a:txBody>
+                    <a:bodyPr/>
+                    <a:lstStyle/>
+                    <a:p>
+                      <a:pPr algn="ctr"/>
+                      <a:r>
+                        <a:rPr lang="en-US" dirty="0"/>
+                        <a:t>13</a:t>
+                      </a:r>
+                    </a:p>
+                  </a:txBody>
+                  <a:tcPr/>
+                </a:tc>
+                <a:tc>
+                  <a:txBody>
+                    <a:bodyPr/>
+                    <a:lstStyle/>
+                    <a:p>
+                      <a:pPr algn="ctr"/>
+                      <a:r>
+                        <a:rPr lang="en-US" dirty="0"/>
+                        <a:t>0.93</a:t>
+                      </a:r>
+                    </a:p>
+                  </a:txBody>
+                  <a:tcPr/>
+                </a:tc>
+                <a:extLst>
+                  <a:ext uri="{0D108BD9-81ED-4DB2-BD59-A6C34878D82A}">
+                    <a16:rowId xmlns:a16="http://schemas.microsoft.com/office/drawing/2014/main" val="4025916763"/>
+                  </a:ext>
+                </a:extLst>
+              </a:tr>
+              <a:tr h="258046">
+                <a:tc>
+                  <a:txBody>
+                    <a:bodyPr/>
+                    <a:lstStyle/>
+                    <a:p>
+                      <a:pPr algn="ctr"/>
+                      <a:r>
+                        <a:rPr lang="en-US" dirty="0"/>
+                        <a:t>1</a:t>
+                      </a:r>
+                    </a:p>
+                  </a:txBody>
+                  <a:tcPr/>
+                </a:tc>
+                <a:tc>
+                  <a:txBody>
+                    <a:bodyPr/>
+                    <a:lstStyle/>
+                    <a:p>
+                      <a:pPr algn="ctr"/>
+                      <a:r>
+                        <a:rPr lang="en-US" dirty="0"/>
+                        <a:t>0.89</a:t>
+                      </a:r>
+                    </a:p>
+                  </a:txBody>
+                  <a:tcPr/>
+                </a:tc>
+                <a:extLst>
+                  <a:ext uri="{0D108BD9-81ED-4DB2-BD59-A6C34878D82A}">
+                    <a16:rowId xmlns:a16="http://schemas.microsoft.com/office/drawing/2014/main" val="2323964280"/>
+                  </a:ext>
+                </a:extLst>
+              </a:tr>
+              <a:tr h="258046">
+                <a:tc>
+                  <a:txBody>
+                    <a:bodyPr/>
+                    <a:lstStyle/>
+                    <a:p>
+                      <a:pPr algn="ctr"/>
+                      <a:r>
+                        <a:rPr lang="en-US" dirty="0"/>
+                        <a:t>93</a:t>
+                      </a:r>
+                    </a:p>
+                  </a:txBody>
+                  <a:tcPr/>
+                </a:tc>
+                <a:tc>
+                  <a:txBody>
+                    <a:bodyPr/>
+                    <a:lstStyle/>
+                    <a:p>
+                      <a:pPr algn="ctr"/>
+                      <a:r>
+                        <a:rPr lang="en-US" dirty="0"/>
+                        <a:t>0.89</a:t>
+                      </a:r>
+                    </a:p>
+                  </a:txBody>
+                  <a:tcPr/>
+                </a:tc>
+                <a:extLst>
+                  <a:ext uri="{0D108BD9-81ED-4DB2-BD59-A6C34878D82A}">
+                    <a16:rowId xmlns:a16="http://schemas.microsoft.com/office/drawing/2014/main" val="2948836163"/>
+                  </a:ext>
+                </a:extLst>
+              </a:tr>
+              <a:tr h="258046">
+                <a:tc>
+                  <a:txBody>
+                    <a:bodyPr/>
+                    <a:lstStyle/>
+                    <a:p>
+                      <a:pPr algn="ctr"/>
+                      <a:r>
+                        <a:rPr lang="en-US" dirty="0"/>
+                        <a:t>53</a:t>
+                      </a:r>
+                    </a:p>
+                  </a:txBody>
+                  <a:tcPr/>
+                </a:tc>
+                <a:tc>
+                  <a:txBody>
+                    <a:bodyPr/>
+                    <a:lstStyle/>
+                    <a:p>
+                      <a:pPr algn="ctr"/>
+                      <a:r>
+                        <a:rPr lang="en-US" dirty="0"/>
+                        <a:t>0.82</a:t>
+                      </a:r>
+                    </a:p>
+                  </a:txBody>
+                  <a:tcPr/>
+                </a:tc>
+                <a:extLst>
+                  <a:ext uri="{0D108BD9-81ED-4DB2-BD59-A6C34878D82A}">
+                    <a16:rowId xmlns:a16="http://schemas.microsoft.com/office/drawing/2014/main" val="1952042522"/>
+                  </a:ext>
+                </a:extLst>
+              </a:tr>
+              <a:tr h="258046">
+                <a:tc>
+                  <a:txBody>
+                    <a:bodyPr/>
+                    <a:lstStyle/>
+                    <a:p>
+                      <a:pPr algn="ctr"/>
+                      <a:r>
+                        <a:rPr lang="en-US" dirty="0"/>
+                        <a:t>23</a:t>
+                      </a:r>
+                    </a:p>
+                  </a:txBody>
+                  <a:tcPr/>
+                </a:tc>
+                <a:tc>
+                  <a:txBody>
+                    <a:bodyPr/>
+                    <a:lstStyle/>
+                    <a:p>
+                      <a:pPr algn="ctr"/>
+                      <a:r>
+                        <a:rPr lang="en-US" dirty="0"/>
+                        <a:t>0.75</a:t>
+                      </a:r>
+                    </a:p>
+                  </a:txBody>
+                  <a:tcPr/>
+                </a:tc>
+                <a:extLst>
+                  <a:ext uri="{0D108BD9-81ED-4DB2-BD59-A6C34878D82A}">
+                    <a16:rowId xmlns:a16="http://schemas.microsoft.com/office/drawing/2014/main" val="974555594"/>
+                  </a:ext>
+                </a:extLst>
+              </a:tr>
+              <a:tr h="258046">
+                <a:tc>
+                  <a:txBody>
+                    <a:bodyPr/>
+                    <a:lstStyle/>
+                    <a:p>
+                      <a:pPr algn="ctr"/>
+                      <a:r>
+                        <a:rPr lang="en-US" dirty="0"/>
+                        <a:t>59</a:t>
+                      </a:r>
+                    </a:p>
+                  </a:txBody>
+                  <a:tcPr/>
+                </a:tc>
+                <a:tc>
+                  <a:txBody>
+                    <a:bodyPr/>
+                    <a:lstStyle/>
+                    <a:p>
+                      <a:pPr algn="ctr"/>
+                      <a:r>
+                        <a:rPr lang="en-US" dirty="0"/>
+                        <a:t>0.72</a:t>
+                      </a:r>
+                    </a:p>
+                  </a:txBody>
+                  <a:tcPr/>
+                </a:tc>
+                <a:extLst>
+                  <a:ext uri="{0D108BD9-81ED-4DB2-BD59-A6C34878D82A}">
+                    <a16:rowId xmlns:a16="http://schemas.microsoft.com/office/drawing/2014/main" val="3832195445"/>
+                  </a:ext>
+                </a:extLst>
+              </a:tr>
+              <a:tr h="258046">
+                <a:tc>
+                  <a:txBody>
+                    <a:bodyPr/>
+                    <a:lstStyle/>
+                    <a:p>
+                      <a:pPr algn="ctr"/>
+                      <a:r>
+                        <a:rPr lang="en-US" dirty="0"/>
+                        <a:t>64</a:t>
+                      </a:r>
+                    </a:p>
+                  </a:txBody>
+                  <a:tcPr/>
+                </a:tc>
+                <a:tc>
+                  <a:txBody>
+                    <a:bodyPr/>
+                    <a:lstStyle/>
+                    <a:p>
+                      <a:pPr algn="ctr"/>
+                      <a:r>
+                        <a:rPr lang="en-US" dirty="0"/>
+                        <a:t>0.65</a:t>
+                      </a:r>
+                    </a:p>
+                  </a:txBody>
+                  <a:tcPr/>
+                </a:tc>
+                <a:extLst>
+                  <a:ext uri="{0D108BD9-81ED-4DB2-BD59-A6C34878D82A}">
+                    <a16:rowId xmlns:a16="http://schemas.microsoft.com/office/drawing/2014/main" val="1564902966"/>
+                  </a:ext>
+                </a:extLst>
+              </a:tr>
+              <a:tr h="258046">
+                <a:tc>
+                  <a:txBody>
+                    <a:bodyPr/>
+                    <a:lstStyle/>
+                    <a:p>
+                      <a:pPr algn="ctr"/>
+                      <a:r>
+                        <a:rPr lang="en-US" dirty="0"/>
+                        <a:t>20</a:t>
+                      </a:r>
+                    </a:p>
+                  </a:txBody>
+                  <a:tcPr/>
+                </a:tc>
+                <a:tc>
+                  <a:txBody>
+                    <a:bodyPr/>
+                    <a:lstStyle/>
+                    <a:p>
+                      <a:pPr algn="ctr"/>
+                      <a:r>
+                        <a:rPr lang="en-US" dirty="0"/>
+                        <a:t>0.61</a:t>
+                      </a:r>
+                    </a:p>
+                  </a:txBody>
+                  <a:tcPr/>
+                </a:tc>
+                <a:extLst>
+                  <a:ext uri="{0D108BD9-81ED-4DB2-BD59-A6C34878D82A}">
+                    <a16:rowId xmlns:a16="http://schemas.microsoft.com/office/drawing/2014/main" val="1650052668"/>
+                  </a:ext>
+                </a:extLst>
+              </a:tr>
+              <a:tr h="258046">
+                <a:tc>
+                  <a:txBody>
+                    <a:bodyPr/>
+                    <a:lstStyle/>
+                    <a:p>
+                      <a:pPr algn="ctr"/>
+                      <a:r>
+                        <a:rPr lang="en-US" dirty="0"/>
+                        <a:t>18</a:t>
+                      </a:r>
+                    </a:p>
+                  </a:txBody>
+                  <a:tcPr/>
+                </a:tc>
+                <a:tc>
+                  <a:txBody>
+                    <a:bodyPr/>
+                    <a:lstStyle/>
+                    <a:p>
+                      <a:pPr algn="ctr"/>
+                      <a:r>
+                        <a:rPr lang="en-US" dirty="0"/>
+                        <a:t>0.59</a:t>
+                      </a:r>
+                    </a:p>
+                  </a:txBody>
+                  <a:tcPr/>
+                </a:tc>
+                <a:extLst>
+                  <a:ext uri="{0D108BD9-81ED-4DB2-BD59-A6C34878D82A}">
+                    <a16:rowId xmlns:a16="http://schemas.microsoft.com/office/drawing/2014/main" val="1045450806"/>
+                  </a:ext>
+                </a:extLst>
+              </a:tr>
+              <a:tr h="258046">
+                <a:tc>
+                  <a:txBody>
+                    <a:bodyPr/>
+                    <a:lstStyle/>
+                    <a:p>
+                      <a:pPr algn="ctr"/>
+                      <a:r>
+                        <a:rPr lang="en-US" dirty="0"/>
+                        <a:t>46</a:t>
+                      </a:r>
+                    </a:p>
+                  </a:txBody>
+                  <a:tcPr/>
+                </a:tc>
+                <a:tc>
+                  <a:txBody>
+                    <a:bodyPr/>
+                    <a:lstStyle/>
+                    <a:p>
+                      <a:pPr algn="ctr"/>
+                      <a:r>
+                        <a:rPr lang="en-US" dirty="0"/>
+                        <a:t>0.52</a:t>
+                      </a:r>
+                    </a:p>
+                  </a:txBody>
+                  <a:tcPr/>
+                </a:tc>
+                <a:extLst>
+                  <a:ext uri="{0D108BD9-81ED-4DB2-BD59-A6C34878D82A}">
+                    <a16:rowId xmlns:a16="http://schemas.microsoft.com/office/drawing/2014/main" val="2499045432"/>
+                  </a:ext>
+                </a:extLst>
+              </a:tr>
+              <a:tr h="258046">
+                <a:tc>
+                  <a:txBody>
+                    <a:bodyPr/>
+                    <a:lstStyle/>
+                    <a:p>
+                      <a:pPr algn="ctr"/>
+                      <a:r>
+                        <a:rPr lang="en-US" dirty="0"/>
+                        <a:t>82</a:t>
+                      </a:r>
+                    </a:p>
+                  </a:txBody>
+                  <a:tcPr/>
+                </a:tc>
+                <a:tc>
+                  <a:txBody>
+                    <a:bodyPr/>
+                    <a:lstStyle/>
+                    <a:p>
+                      <a:pPr algn="ctr"/>
+                      <a:r>
+                        <a:rPr lang="en-US" dirty="0"/>
+                        <a:t>0.48</a:t>
+                      </a:r>
+                    </a:p>
+                  </a:txBody>
+                  <a:tcPr/>
+                </a:tc>
+                <a:extLst>
+                  <a:ext uri="{0D108BD9-81ED-4DB2-BD59-A6C34878D82A}">
+                    <a16:rowId xmlns:a16="http://schemas.microsoft.com/office/drawing/2014/main" val="4231666519"/>
+                  </a:ext>
+                </a:extLst>
+              </a:tr>
+              <a:tr h="258046">
+                <a:tc>
+                  <a:txBody>
+                    <a:bodyPr/>
+                    <a:lstStyle/>
+                    <a:p>
+                      <a:pPr algn="ctr"/>
+                      <a:r>
+                        <a:rPr lang="en-US" dirty="0"/>
+                        <a:t>49</a:t>
+                      </a:r>
+                    </a:p>
+                  </a:txBody>
+                  <a:tcPr/>
+                </a:tc>
+                <a:tc>
+                  <a:txBody>
+                    <a:bodyPr/>
+                    <a:lstStyle/>
+                    <a:p>
+                      <a:pPr algn="ctr"/>
+                      <a:r>
+                        <a:rPr lang="en-US" dirty="0"/>
+                        <a:t>0.37</a:t>
+                      </a:r>
+                    </a:p>
+                  </a:txBody>
+                  <a:tcPr/>
+                </a:tc>
+                <a:extLst>
+                  <a:ext uri="{0D108BD9-81ED-4DB2-BD59-A6C34878D82A}">
+                    <a16:rowId xmlns:a16="http://schemas.microsoft.com/office/drawing/2014/main" val="1155732854"/>
+                  </a:ext>
+                </a:extLst>
+              </a:tr>
+              <a:tr h="258046">
+                <a:tc>
+                  <a:txBody>
+                    <a:bodyPr/>
+                    <a:lstStyle/>
+                    <a:p>
+                      <a:pPr algn="ctr"/>
+                      <a:r>
+                        <a:rPr lang="en-US" dirty="0"/>
+                        <a:t>56</a:t>
+                      </a:r>
+                    </a:p>
+                  </a:txBody>
+                  <a:tcPr/>
+                </a:tc>
+                <a:tc>
+                  <a:txBody>
+                    <a:bodyPr/>
+                    <a:lstStyle/>
+                    <a:p>
+                      <a:pPr algn="ctr"/>
+                      <a:r>
+                        <a:rPr lang="en-US" dirty="0"/>
+                        <a:t>0.22</a:t>
+                      </a:r>
+                    </a:p>
+                  </a:txBody>
+                  <a:tcPr/>
+                </a:tc>
+                <a:extLst>
+                  <a:ext uri="{0D108BD9-81ED-4DB2-BD59-A6C34878D82A}">
+                    <a16:rowId xmlns:a16="http://schemas.microsoft.com/office/drawing/2014/main" val="2603839184"/>
+                  </a:ext>
+                </a:extLst>
+              </a:tr>
+              <a:tr h="258046">
+                <a:tc>
+                  <a:txBody>
+                    <a:bodyPr/>
+                    <a:lstStyle/>
+                    <a:p>
+                      <a:pPr algn="ctr"/>
+                      <a:r>
+                        <a:rPr lang="en-US" dirty="0"/>
+                        <a:t>17</a:t>
+                      </a:r>
+                    </a:p>
+                  </a:txBody>
+                  <a:tcPr/>
+                </a:tc>
+                <a:tc>
+                  <a:txBody>
+                    <a:bodyPr/>
+                    <a:lstStyle/>
+                    <a:p>
+                      <a:pPr algn="ctr"/>
+                      <a:r>
+                        <a:rPr lang="en-US" dirty="0"/>
+                        <a:t>0.12</a:t>
+                      </a:r>
+                    </a:p>
+                  </a:txBody>
+                  <a:tcPr/>
+                </a:tc>
+                <a:extLst>
+                  <a:ext uri="{0D108BD9-81ED-4DB2-BD59-A6C34878D82A}">
+                    <a16:rowId xmlns:a16="http://schemas.microsoft.com/office/drawing/2014/main" val="14563681"/>
+                  </a:ext>
+                </a:extLst>
+              </a:tr>
+            </a:tbl>
+          </a:graphicData>
+        </a:graphic>
+      </p:graphicFrame>
+      <p:sp>
+        <p:nvSpPr>
+          <p:cNvPr id="6" name="Right Arrow 5">
+            <a:extLst>
+              <a:ext uri="{FF2B5EF4-FFF2-40B4-BE49-F238E27FC236}">
+                <a16:creationId xmlns:a16="http://schemas.microsoft.com/office/drawing/2014/main" id="{9B6C0F7E-394D-C849-AEEA-57F9432B58C8}"/>
+              </a:ext>
+            </a:extLst>
+          </p:cNvPr>
+          <p:cNvSpPr/>
+          <p:nvPr/>
+        </p:nvSpPr>
+        <p:spPr>
+          <a:xfrm>
+            <a:off x="3454203" y="4622104"/>
+            <a:ext cx="1916392" cy="350729"/>
+          </a:xfrm>
+          <a:prstGeom prst="rightArrow">
+            <a:avLst/>
+          </a:prstGeom>
+          <a:solidFill>
+            <a:srgbClr val="0070C0"/>
+          </a:solidFill>
+          <a:ln>
+            <a:noFill/>
+          </a:ln>
+        </p:spPr>
+        <p:style>
+          <a:lnRef idx="2">
+            <a:schemeClr val="accent1">
+              <a:shade val="50000"/>
+            </a:schemeClr>
+          </a:lnRef>
+          <a:fillRef idx="1">
+            <a:schemeClr val="accent1"/>
+          </a:fillRef>
+          <a:effectRef idx="0">
+            <a:schemeClr val="accent1"/>
+          </a:effectRef>
+          <a:fontRef idx="minor">
+            <a:schemeClr val="lt1"/>
+          </a:fontRef>
+        </p:style>
+        <p:txBody>
+          <a:bodyPr rtlCol="0" anchor="ctr"/>
+          <a:lstStyle/>
+          <a:p>
+            <a:pPr algn="ctr"/>
+            <a:endParaRPr lang="en-US"/>
+          </a:p>
+        </p:txBody>
+      </p:sp>
+      <p:sp>
+        <p:nvSpPr>
+          <p:cNvPr id="40" name="TextBox 39">
+            <a:extLst>
+              <a:ext uri="{FF2B5EF4-FFF2-40B4-BE49-F238E27FC236}">
+                <a16:creationId xmlns:a16="http://schemas.microsoft.com/office/drawing/2014/main" id="{CD8EA7B6-012E-3340-9E87-E323487E7303}"/>
+              </a:ext>
+            </a:extLst>
+          </p:cNvPr>
+          <p:cNvSpPr txBox="1"/>
+          <p:nvPr/>
+        </p:nvSpPr>
+        <p:spPr>
+          <a:xfrm>
+            <a:off x="3696510" y="3272099"/>
+            <a:ext cx="1141659" cy="461665"/>
+          </a:xfrm>
+          <a:prstGeom prst="rect">
+            <a:avLst/>
+          </a:prstGeom>
+          <a:noFill/>
+        </p:spPr>
+        <p:txBody>
+          <a:bodyPr wrap="none" rtlCol="0">
+            <a:spAutoFit/>
+          </a:bodyPr>
+          <a:lstStyle/>
+          <a:p>
+            <a:r>
+              <a:rPr lang="en-US" sz="2400" dirty="0">
+                <a:latin typeface="Century Gothic" panose="020B0502020202020204" pitchFamily="34" charset="0"/>
+              </a:rPr>
+              <a:t>Model</a:t>
+            </a:r>
+          </a:p>
+        </p:txBody>
+      </p:sp>
+      <p:sp>
+        <p:nvSpPr>
+          <p:cNvPr id="41" name="TextBox 40">
+            <a:extLst>
+              <a:ext uri="{FF2B5EF4-FFF2-40B4-BE49-F238E27FC236}">
+                <a16:creationId xmlns:a16="http://schemas.microsoft.com/office/drawing/2014/main" id="{FE13169F-ADA2-914B-8C32-2AD6FA04C976}"/>
+              </a:ext>
+            </a:extLst>
+          </p:cNvPr>
+          <p:cNvSpPr txBox="1"/>
+          <p:nvPr/>
+        </p:nvSpPr>
+        <p:spPr>
+          <a:xfrm>
+            <a:off x="4955885" y="1187209"/>
+            <a:ext cx="2709396" cy="461665"/>
+          </a:xfrm>
+          <a:prstGeom prst="rect">
+            <a:avLst/>
+          </a:prstGeom>
+          <a:noFill/>
+        </p:spPr>
+        <p:txBody>
+          <a:bodyPr wrap="none" rtlCol="0">
+            <a:spAutoFit/>
+          </a:bodyPr>
+          <a:lstStyle/>
+          <a:p>
+            <a:r>
+              <a:rPr lang="en-US" sz="2400" dirty="0">
+                <a:latin typeface="Century Gothic" panose="020B0502020202020204" pitchFamily="34" charset="0"/>
+              </a:rPr>
+              <a:t>Return to Jail Risk</a:t>
+            </a:r>
+          </a:p>
+        </p:txBody>
+      </p:sp>
+      <p:sp>
+        <p:nvSpPr>
+          <p:cNvPr id="7" name="Rectangle 6">
+            <a:extLst>
+              <a:ext uri="{FF2B5EF4-FFF2-40B4-BE49-F238E27FC236}">
+                <a16:creationId xmlns:a16="http://schemas.microsoft.com/office/drawing/2014/main" id="{81BFFD78-6ACB-084C-8897-FB70032B66B3}"/>
+              </a:ext>
+            </a:extLst>
+          </p:cNvPr>
+          <p:cNvSpPr/>
+          <p:nvPr/>
+        </p:nvSpPr>
+        <p:spPr>
+          <a:xfrm>
+            <a:off x="5370595" y="2129425"/>
+            <a:ext cx="1667098" cy="1481455"/>
+          </a:xfrm>
+          <a:prstGeom prst="rect">
+            <a:avLst/>
+          </a:prstGeom>
+          <a:noFill/>
+          <a:ln w="76200">
+            <a:solidFill>
+              <a:srgbClr val="FFC000"/>
+            </a:solidFill>
+          </a:ln>
+        </p:spPr>
+        <p:style>
+          <a:lnRef idx="2">
+            <a:schemeClr val="accent1">
+              <a:shade val="50000"/>
+            </a:schemeClr>
+          </a:lnRef>
+          <a:fillRef idx="1">
+            <a:schemeClr val="accent1"/>
+          </a:fillRef>
+          <a:effectRef idx="0">
+            <a:schemeClr val="accent1"/>
+          </a:effectRef>
+          <a:fontRef idx="minor">
+            <a:schemeClr val="lt1"/>
+          </a:fontRef>
+        </p:style>
+        <p:txBody>
+          <a:bodyPr rtlCol="0" anchor="ctr"/>
+          <a:lstStyle/>
+          <a:p>
+            <a:pPr algn="ctr"/>
+            <a:endParaRPr lang="en-US"/>
+          </a:p>
+        </p:txBody>
+      </p:sp>
+      <p:sp>
+        <p:nvSpPr>
+          <p:cNvPr id="42" name="Right Arrow 41">
+            <a:extLst>
+              <a:ext uri="{FF2B5EF4-FFF2-40B4-BE49-F238E27FC236}">
+                <a16:creationId xmlns:a16="http://schemas.microsoft.com/office/drawing/2014/main" id="{B29C028E-CDA4-604B-9B8F-64BDD06881B5}"/>
+              </a:ext>
+            </a:extLst>
+          </p:cNvPr>
+          <p:cNvSpPr/>
+          <p:nvPr/>
+        </p:nvSpPr>
+        <p:spPr>
+          <a:xfrm>
+            <a:off x="7049963" y="2694787"/>
+            <a:ext cx="1943723" cy="350729"/>
+          </a:xfrm>
+          <a:prstGeom prst="rightArrow">
+            <a:avLst/>
+          </a:prstGeom>
+          <a:solidFill>
+            <a:srgbClr val="FFC000"/>
+          </a:solidFill>
+          <a:ln>
+            <a:noFill/>
+          </a:ln>
+        </p:spPr>
+        <p:style>
+          <a:lnRef idx="2">
+            <a:schemeClr val="accent1">
+              <a:shade val="50000"/>
+            </a:schemeClr>
+          </a:lnRef>
+          <a:fillRef idx="1">
+            <a:schemeClr val="accent1"/>
+          </a:fillRef>
+          <a:effectRef idx="0">
+            <a:schemeClr val="accent1"/>
+          </a:effectRef>
+          <a:fontRef idx="minor">
+            <a:schemeClr val="lt1"/>
+          </a:fontRef>
+        </p:style>
+        <p:txBody>
+          <a:bodyPr rtlCol="0" anchor="ctr"/>
+          <a:lstStyle/>
+          <a:p>
+            <a:pPr algn="ctr"/>
+            <a:endParaRPr lang="en-US"/>
+          </a:p>
+        </p:txBody>
+      </p:sp>
+      <p:sp>
+        <p:nvSpPr>
+          <p:cNvPr id="44" name="Google Shape;75;p10">
+            <a:extLst>
+              <a:ext uri="{FF2B5EF4-FFF2-40B4-BE49-F238E27FC236}">
+                <a16:creationId xmlns:a16="http://schemas.microsoft.com/office/drawing/2014/main" id="{80248251-D983-E945-852F-13ECC4C7A7A1}"/>
+              </a:ext>
+            </a:extLst>
+          </p:cNvPr>
+          <p:cNvSpPr/>
+          <p:nvPr/>
+        </p:nvSpPr>
+        <p:spPr>
+          <a:xfrm>
+            <a:off x="8993687" y="2293565"/>
+            <a:ext cx="1981242" cy="1153172"/>
+          </a:xfrm>
+          <a:prstGeom prst="rect">
+            <a:avLst/>
+          </a:prstGeom>
+          <a:solidFill>
+            <a:schemeClr val="lt2"/>
+          </a:solidFill>
+          <a:ln w="9525" cap="flat" cmpd="sng">
+            <a:solidFill>
+              <a:schemeClr val="dk2"/>
+            </a:solidFill>
+            <a:prstDash val="solid"/>
+            <a:round/>
+            <a:headEnd type="none" w="sm" len="sm"/>
+            <a:tailEnd type="none" w="sm" len="sm"/>
+          </a:ln>
+        </p:spPr>
+        <p:txBody>
+          <a:bodyPr spcFirstLastPara="1" wrap="square" lIns="121900" tIns="121900" rIns="121900" bIns="121900" anchor="ctr" anchorCtr="0">
+            <a:noAutofit/>
+          </a:bodyPr>
+          <a:lstStyle/>
+          <a:p>
+            <a:pPr algn="ctr"/>
+            <a:endParaRPr sz="1867" dirty="0">
+              <a:latin typeface="Century Gothic"/>
+              <a:ea typeface="Century Gothic"/>
+              <a:cs typeface="Century Gothic"/>
+              <a:sym typeface="Century Gothic"/>
+            </a:endParaRPr>
+          </a:p>
+        </p:txBody>
+      </p:sp>
+      <p:sp>
+        <p:nvSpPr>
+          <p:cNvPr id="45" name="TextBox 44">
+            <a:extLst>
+              <a:ext uri="{FF2B5EF4-FFF2-40B4-BE49-F238E27FC236}">
+                <a16:creationId xmlns:a16="http://schemas.microsoft.com/office/drawing/2014/main" id="{E4819DD2-A9C7-A543-9B48-E32CF949C9FE}"/>
+              </a:ext>
+            </a:extLst>
+          </p:cNvPr>
+          <p:cNvSpPr txBox="1"/>
+          <p:nvPr/>
+        </p:nvSpPr>
+        <p:spPr>
+          <a:xfrm>
+            <a:off x="9167417" y="2310364"/>
+            <a:ext cx="1633781" cy="1200329"/>
+          </a:xfrm>
+          <a:prstGeom prst="rect">
+            <a:avLst/>
+          </a:prstGeom>
+          <a:noFill/>
+        </p:spPr>
+        <p:txBody>
+          <a:bodyPr wrap="none" rtlCol="0">
+            <a:spAutoFit/>
+          </a:bodyPr>
+          <a:lstStyle/>
+          <a:p>
+            <a:pPr algn="ctr"/>
+            <a:r>
+              <a:rPr lang="en-US" sz="2400" dirty="0">
+                <a:latin typeface="Century Gothic" panose="020B0502020202020204" pitchFamily="34" charset="0"/>
+              </a:rPr>
+              <a:t>Mental</a:t>
+            </a:r>
+          </a:p>
+          <a:p>
+            <a:pPr algn="ctr"/>
+            <a:r>
+              <a:rPr lang="en-US" sz="2400" dirty="0">
+                <a:latin typeface="Century Gothic" panose="020B0502020202020204" pitchFamily="34" charset="0"/>
+              </a:rPr>
+              <a:t>Health</a:t>
+            </a:r>
+          </a:p>
+          <a:p>
+            <a:pPr algn="ctr"/>
+            <a:r>
+              <a:rPr lang="en-US" sz="2400" dirty="0">
+                <a:latin typeface="Century Gothic" panose="020B0502020202020204" pitchFamily="34" charset="0"/>
+              </a:rPr>
+              <a:t>Outreach</a:t>
+            </a:r>
+          </a:p>
+        </p:txBody>
+      </p:sp>
+      <p:sp>
+        <p:nvSpPr>
+          <p:cNvPr id="46" name="Google Shape;75;p10">
+            <a:extLst>
+              <a:ext uri="{FF2B5EF4-FFF2-40B4-BE49-F238E27FC236}">
+                <a16:creationId xmlns:a16="http://schemas.microsoft.com/office/drawing/2014/main" id="{162E5AA6-9B51-DD4C-9E71-D5D0C0DE7EEC}"/>
+              </a:ext>
+            </a:extLst>
+          </p:cNvPr>
+          <p:cNvSpPr/>
+          <p:nvPr/>
+        </p:nvSpPr>
+        <p:spPr>
+          <a:xfrm>
+            <a:off x="9020826" y="4644025"/>
+            <a:ext cx="1981242" cy="1153172"/>
+          </a:xfrm>
+          <a:prstGeom prst="rect">
+            <a:avLst/>
+          </a:prstGeom>
+          <a:solidFill>
+            <a:schemeClr val="lt2"/>
+          </a:solidFill>
+          <a:ln w="9525" cap="flat" cmpd="sng">
+            <a:solidFill>
+              <a:schemeClr val="dk2"/>
+            </a:solidFill>
+            <a:prstDash val="solid"/>
+            <a:round/>
+            <a:headEnd type="none" w="sm" len="sm"/>
+            <a:tailEnd type="none" w="sm" len="sm"/>
+          </a:ln>
+        </p:spPr>
+        <p:txBody>
+          <a:bodyPr spcFirstLastPara="1" wrap="square" lIns="121900" tIns="121900" rIns="121900" bIns="121900" anchor="ctr" anchorCtr="0">
+            <a:noAutofit/>
+          </a:bodyPr>
+          <a:lstStyle/>
+          <a:p>
+            <a:pPr algn="ctr"/>
+            <a:endParaRPr sz="1867" dirty="0">
+              <a:latin typeface="Century Gothic"/>
+              <a:ea typeface="Century Gothic"/>
+              <a:cs typeface="Century Gothic"/>
+              <a:sym typeface="Century Gothic"/>
+            </a:endParaRPr>
+          </a:p>
+        </p:txBody>
+      </p:sp>
+      <p:sp>
+        <p:nvSpPr>
+          <p:cNvPr id="47" name="TextBox 46">
+            <a:extLst>
+              <a:ext uri="{FF2B5EF4-FFF2-40B4-BE49-F238E27FC236}">
+                <a16:creationId xmlns:a16="http://schemas.microsoft.com/office/drawing/2014/main" id="{2153B0C9-A395-0D4E-9870-A399AAC450A3}"/>
+              </a:ext>
+            </a:extLst>
+          </p:cNvPr>
+          <p:cNvSpPr txBox="1"/>
+          <p:nvPr/>
+        </p:nvSpPr>
+        <p:spPr>
+          <a:xfrm>
+            <a:off x="9265200" y="4811209"/>
+            <a:ext cx="1535998" cy="830997"/>
+          </a:xfrm>
+          <a:prstGeom prst="rect">
+            <a:avLst/>
+          </a:prstGeom>
+          <a:noFill/>
+        </p:spPr>
+        <p:txBody>
+          <a:bodyPr wrap="none" rtlCol="0">
+            <a:spAutoFit/>
+          </a:bodyPr>
+          <a:lstStyle/>
+          <a:p>
+            <a:pPr algn="ctr"/>
+            <a:r>
+              <a:rPr lang="en-US" sz="2400" dirty="0">
+                <a:latin typeface="Century Gothic" panose="020B0502020202020204" pitchFamily="34" charset="0"/>
+              </a:rPr>
+              <a:t>Return to</a:t>
+            </a:r>
+          </a:p>
+          <a:p>
+            <a:pPr algn="ctr"/>
+            <a:r>
+              <a:rPr lang="en-US" sz="2400" dirty="0">
+                <a:latin typeface="Century Gothic" panose="020B0502020202020204" pitchFamily="34" charset="0"/>
+              </a:rPr>
+              <a:t>Jail</a:t>
+            </a:r>
+          </a:p>
+        </p:txBody>
+      </p:sp>
+      <p:sp>
+        <p:nvSpPr>
+          <p:cNvPr id="48" name="Right Arrow 47">
+            <a:extLst>
+              <a:ext uri="{FF2B5EF4-FFF2-40B4-BE49-F238E27FC236}">
+                <a16:creationId xmlns:a16="http://schemas.microsoft.com/office/drawing/2014/main" id="{703A189E-3971-8841-B588-03762A073818}"/>
+              </a:ext>
+            </a:extLst>
+          </p:cNvPr>
+          <p:cNvSpPr/>
+          <p:nvPr/>
+        </p:nvSpPr>
+        <p:spPr>
+          <a:xfrm rot="5400000">
+            <a:off x="9467615" y="3882766"/>
+            <a:ext cx="1033382" cy="350729"/>
+          </a:xfrm>
+          <a:prstGeom prst="rightArrow">
+            <a:avLst/>
+          </a:prstGeom>
+          <a:solidFill>
+            <a:schemeClr val="tx2">
+              <a:lumMod val="75000"/>
+            </a:schemeClr>
+          </a:solidFill>
+          <a:ln>
+            <a:noFill/>
+          </a:ln>
+        </p:spPr>
+        <p:style>
+          <a:lnRef idx="2">
+            <a:schemeClr val="accent1">
+              <a:shade val="50000"/>
+            </a:schemeClr>
+          </a:lnRef>
+          <a:fillRef idx="1">
+            <a:schemeClr val="accent1"/>
+          </a:fillRef>
+          <a:effectRef idx="0">
+            <a:schemeClr val="accent1"/>
+          </a:effectRef>
+          <a:fontRef idx="minor">
+            <a:schemeClr val="lt1"/>
+          </a:fontRef>
+        </p:style>
+        <p:txBody>
+          <a:bodyPr rtlCol="0" anchor="ctr"/>
+          <a:lstStyle/>
+          <a:p>
+            <a:pPr algn="ctr"/>
+            <a:endParaRPr lang="en-US"/>
+          </a:p>
+        </p:txBody>
+      </p:sp>
+      <p:sp>
+        <p:nvSpPr>
+          <p:cNvPr id="49" name="TextBox 48">
+            <a:extLst>
+              <a:ext uri="{FF2B5EF4-FFF2-40B4-BE49-F238E27FC236}">
+                <a16:creationId xmlns:a16="http://schemas.microsoft.com/office/drawing/2014/main" id="{C40228CA-82BC-764B-B936-59C954EB3F4A}"/>
+              </a:ext>
+            </a:extLst>
+          </p:cNvPr>
+          <p:cNvSpPr txBox="1"/>
+          <p:nvPr/>
+        </p:nvSpPr>
+        <p:spPr>
+          <a:xfrm>
+            <a:off x="9635492" y="3446737"/>
+            <a:ext cx="697627" cy="1015663"/>
+          </a:xfrm>
+          <a:prstGeom prst="rect">
+            <a:avLst/>
+          </a:prstGeom>
+          <a:noFill/>
+        </p:spPr>
+        <p:txBody>
+          <a:bodyPr wrap="none" rtlCol="0">
+            <a:spAutoFit/>
+          </a:bodyPr>
+          <a:lstStyle/>
+          <a:p>
+            <a:r>
+              <a:rPr lang="en-US" sz="6000" dirty="0">
+                <a:solidFill>
+                  <a:srgbClr val="FF0000"/>
+                </a:solidFill>
+              </a:rPr>
+              <a:t>X</a:t>
+            </a:r>
+          </a:p>
+        </p:txBody>
+      </p:sp>
+    </p:spTree>
+    <p:extLst>
+      <p:ext uri="{BB962C8B-B14F-4D97-AF65-F5344CB8AC3E}">
+        <p14:creationId xmlns:p14="http://schemas.microsoft.com/office/powerpoint/2010/main" val="701318457"/>
+      </p:ext>
+    </p:extLst>
+  </p:cSld>
+  <p:clrMapOvr>
+    <a:masterClrMapping/>
+  </p:clrMapOvr>
+</p:sld>
+</file>
+
+<file path=ppt/slides/slide11.xml><?xml version="1.0" encoding="utf-8"?>
 <p:sld xmlns:a="http://schemas.openxmlformats.org/drawingml/2006/main" xmlns:r="http://schemas.openxmlformats.org/officeDocument/2006/relationships" xmlns:p="http://schemas.openxmlformats.org/presentationml/2006/main">
   <p:cSld>
     <p:spTree>
@@ -15989,7 +18100,7 @@
 </p:sld>
 </file>
 
-<file path=ppt/slides/slide11.xml><?xml version="1.0" encoding="utf-8"?>
+<file path=ppt/slides/slide12.xml><?xml version="1.0" encoding="utf-8"?>
 <p:sld xmlns:a="http://schemas.openxmlformats.org/drawingml/2006/main" xmlns:r="http://schemas.openxmlformats.org/officeDocument/2006/relationships" xmlns:p="http://schemas.openxmlformats.org/presentationml/2006/main">
   <p:cSld>
     <p:spTree>
@@ -16049,7 +18160,7 @@
 </p:sld>
 </file>
 
-<file path=ppt/slides/slide12.xml><?xml version="1.0" encoding="utf-8"?>
+<file path=ppt/slides/slide13.xml><?xml version="1.0" encoding="utf-8"?>
 <p:sld xmlns:a="http://schemas.openxmlformats.org/drawingml/2006/main" xmlns:r="http://schemas.openxmlformats.org/officeDocument/2006/relationships" xmlns:p="http://schemas.openxmlformats.org/presentationml/2006/main">
   <p:cSld>
     <p:spTree>
@@ -16138,7 +18249,7 @@
 </p:sld>
 </file>
 
-<file path=ppt/slides/slide13.xml><?xml version="1.0" encoding="utf-8"?>
+<file path=ppt/slides/slide14.xml><?xml version="1.0" encoding="utf-8"?>
 <p:sld xmlns:a="http://schemas.openxmlformats.org/drawingml/2006/main" xmlns:r="http://schemas.openxmlformats.org/officeDocument/2006/relationships" xmlns:p="http://schemas.openxmlformats.org/presentationml/2006/main">
   <p:cSld>
     <p:spTree>
@@ -16186,7 +18297,7 @@
             </a:r>
             <a:r>
               <a:rPr lang="en-US" sz="3200" dirty="0"/>
-              <a:t> Affect Outcomes? For Whom?</a:t>
+              <a:t> improve Outcomes? Q3: For Whom?</a:t>
             </a:r>
             <a:endParaRPr sz="3200" dirty="0"/>
           </a:p>
@@ -16235,7 +18346,516 @@
 </p:sld>
 </file>
 
-<file path=ppt/slides/slide14.xml><?xml version="1.0" encoding="utf-8"?>
+<file path=ppt/slides/slide15.xml><?xml version="1.0" encoding="utf-8"?>
+<p:sld xmlns:a="http://schemas.openxmlformats.org/drawingml/2006/main" xmlns:r="http://schemas.openxmlformats.org/officeDocument/2006/relationships" xmlns:p="http://schemas.openxmlformats.org/presentationml/2006/main" showMasterSp="0">
+  <p:cSld>
+    <p:bg>
+      <p:bgPr>
+        <a:solidFill>
+          <a:srgbClr val="FFFFFF"/>
+        </a:solidFill>
+        <a:effectLst/>
+      </p:bgPr>
+    </p:bg>
+    <p:spTree>
+      <p:nvGrpSpPr>
+        <p:cNvPr id="1" name=""/>
+        <p:cNvGrpSpPr/>
+        <p:nvPr/>
+      </p:nvGrpSpPr>
+      <p:grpSpPr>
+        <a:xfrm>
+          <a:off x="0" y="0"/>
+          <a:ext cx="0" cy="0"/>
+          <a:chOff x="0" y="0"/>
+          <a:chExt cx="0" cy="0"/>
+        </a:xfrm>
+      </p:grpSpPr>
+      <p:sp>
+        <p:nvSpPr>
+          <p:cNvPr id="3" name="Rectangle 2">
+            <a:extLst>
+              <a:ext uri="{FF2B5EF4-FFF2-40B4-BE49-F238E27FC236}">
+                <a16:creationId xmlns:a16="http://schemas.microsoft.com/office/drawing/2014/main" id="{CA7ADDD9-B7F9-DD79-CB75-EB1611C5BCED}"/>
+              </a:ext>
+            </a:extLst>
+          </p:cNvPr>
+          <p:cNvSpPr/>
+          <p:nvPr>
+            <p:custDataLst>
+              <p:tags r:id="rId2"/>
+            </p:custDataLst>
+          </p:nvPr>
+        </p:nvSpPr>
+        <p:spPr>
+          <a:xfrm>
+            <a:off x="296462" y="926720"/>
+            <a:ext cx="10359307" cy="3855308"/>
+          </a:xfrm>
+          <a:prstGeom prst="rect">
+            <a:avLst/>
+          </a:prstGeom>
+          <a:noFill/>
+          <a:ln w="25400" cap="flat" cmpd="sng" algn="ctr">
+            <a:solidFill>
+              <a:srgbClr val="FFFFFF"/>
+            </a:solidFill>
+            <a:prstDash val="solid"/>
+          </a:ln>
+          <a:effectLst/>
+          <a:extLst>
+            <a:ext uri="{909E8E84-426E-40DD-AFC4-6F175D3DCCD1}">
+              <a14:hiddenFill xmlns:a14="http://schemas.microsoft.com/office/drawing/2010/main">
+                <a:solidFill>
+                  <a:schemeClr val="accent1"/>
+                </a:solidFill>
+              </a14:hiddenFill>
+            </a:ext>
+          </a:extLst>
+        </p:spPr>
+        <p:style>
+          <a:lnRef idx="2">
+            <a:schemeClr val="accent1">
+              <a:shade val="15000"/>
+            </a:schemeClr>
+          </a:lnRef>
+          <a:fillRef idx="1">
+            <a:schemeClr val="accent1"/>
+          </a:fillRef>
+          <a:effectRef idx="0">
+            <a:schemeClr val="accent1"/>
+          </a:effectRef>
+          <a:fontRef idx="minor">
+            <a:schemeClr val="lt1"/>
+          </a:fontRef>
+        </p:style>
+        <p:txBody>
+          <a:bodyPr rtlCol="0" anchor="ctr"/>
+          <a:lstStyle/>
+          <a:p>
+            <a:r>
+              <a:rPr lang="en-US" sz="2400" b="1" dirty="0">
+                <a:solidFill>
+                  <a:srgbClr val="000000"/>
+                </a:solidFill>
+              </a:rPr>
+              <a:t>An online retailer found that shoppers using MacBooks spent more money on their website. 
+They got very excited and ran an A/B test where they recommended a uniformly random sample of 1M subscribers using </a:t>
+            </a:r>
+            <a:r>
+              <a:rPr lang="en-US" sz="2400" b="1" dirty="0" err="1">
+                <a:solidFill>
+                  <a:srgbClr val="000000"/>
+                </a:solidFill>
+              </a:rPr>
+              <a:t>macbooks</a:t>
+            </a:r>
+            <a:r>
+              <a:rPr lang="en-US" sz="2400" b="1" dirty="0">
+                <a:solidFill>
+                  <a:srgbClr val="000000"/>
+                </a:solidFill>
+              </a:rPr>
+              <a:t> (out of 2M) higher priced products (where the store made more money). 
+They found that the 1M who got those higher priced recommendations did in fact spend more money ($1.2M vs $800k), leading them to conclude that </a:t>
+            </a:r>
+            <a:r>
+              <a:rPr lang="en-US" sz="2400" b="1" dirty="0" err="1">
+                <a:solidFill>
+                  <a:srgbClr val="000000"/>
+                </a:solidFill>
+              </a:rPr>
+              <a:t>macbook</a:t>
+            </a:r>
+            <a:r>
+              <a:rPr lang="en-US" sz="2400" b="1" dirty="0">
+                <a:solidFill>
+                  <a:srgbClr val="000000"/>
+                </a:solidFill>
+              </a:rPr>
+              <a:t> users can be upsold to high profit products..  They implemented this new program by by targeting all shoppers using </a:t>
+            </a:r>
+            <a:r>
+              <a:rPr lang="en-US" sz="2400" b="1" dirty="0" err="1">
+                <a:solidFill>
+                  <a:srgbClr val="000000"/>
+                </a:solidFill>
+              </a:rPr>
+              <a:t>macbooks</a:t>
+            </a:r>
+            <a:r>
+              <a:rPr lang="en-US" sz="2400" b="1" dirty="0">
+                <a:solidFill>
+                  <a:srgbClr val="000000"/>
+                </a:solidFill>
+              </a:rPr>
+              <a:t> them with higher priced products.
+Were they right or wrong?</a:t>
+            </a:r>
+          </a:p>
+        </p:txBody>
+      </p:sp>
+      <p:sp>
+        <p:nvSpPr>
+          <p:cNvPr id="4" name="Rectangle 3">
+            <a:extLst>
+              <a:ext uri="{FF2B5EF4-FFF2-40B4-BE49-F238E27FC236}">
+                <a16:creationId xmlns:a16="http://schemas.microsoft.com/office/drawing/2014/main" id="{B46D9C0D-3A6F-FE63-C58B-7E099370950C}"/>
+              </a:ext>
+            </a:extLst>
+          </p:cNvPr>
+          <p:cNvSpPr/>
+          <p:nvPr/>
+        </p:nvSpPr>
+        <p:spPr>
+          <a:xfrm>
+            <a:off x="0" y="5820032"/>
+            <a:ext cx="12192001" cy="1037968"/>
+          </a:xfrm>
+          <a:prstGeom prst="rect">
+            <a:avLst/>
+          </a:prstGeom>
+          <a:solidFill>
+            <a:srgbClr val="198038"/>
+          </a:solidFill>
+          <a:ln w="25400" cap="flat" cmpd="sng" algn="ctr">
+            <a:noFill/>
+            <a:prstDash val="solid"/>
+          </a:ln>
+          <a:effectLst/>
+          <a:extLst>
+            <a:ext uri="{91240B29-F687-4F45-9708-019B960494DF}">
+              <a14:hiddenLine xmlns:a14="http://schemas.microsoft.com/office/drawing/2010/main" w="25400" cap="flat" cmpd="sng" algn="ctr">
+                <a:solidFill>
+                  <a:schemeClr val="accent1">
+                    <a:shade val="15000"/>
+                  </a:schemeClr>
+                </a:solidFill>
+                <a:prstDash val="solid"/>
+              </a14:hiddenLine>
+            </a:ext>
+          </a:extLst>
+        </p:spPr>
+        <p:style>
+          <a:lnRef idx="2">
+            <a:schemeClr val="accent1">
+              <a:shade val="15000"/>
+            </a:schemeClr>
+          </a:lnRef>
+          <a:fillRef idx="1">
+            <a:schemeClr val="accent1"/>
+          </a:fillRef>
+          <a:effectRef idx="0">
+            <a:schemeClr val="accent1"/>
+          </a:effectRef>
+          <a:fontRef idx="minor">
+            <a:schemeClr val="lt1"/>
+          </a:fontRef>
+        </p:style>
+        <p:txBody>
+          <a:bodyPr lIns="741155" tIns="259492" rIns="1852888" bIns="203886" rtlCol="0" anchor="ctr">
+            <a:normAutofit fontScale="85000" lnSpcReduction="10000"/>
+          </a:bodyPr>
+          <a:lstStyle/>
+          <a:p>
+            <a:r>
+              <a:rPr lang="en-US" sz="2600">
+                <a:solidFill>
+                  <a:srgbClr val="FFFFFF"/>
+                </a:solidFill>
+              </a:rPr>
+              <a:t>The </a:t>
+            </a:r>
+            <a:r>
+              <a:rPr lang="en-US" sz="2600">
+                <a:solidFill>
+                  <a:srgbClr val="FFFFFF"/>
+                </a:solidFill>
+                <a:hlinkClick r:id="rId4">
+                  <a:extLst>
+                    <a:ext uri="{A12FA001-AC4F-418D-AE19-62706E023703}">
+                      <ahyp:hlinkClr xmlns:ahyp="http://schemas.microsoft.com/office/drawing/2018/hyperlinkcolor" val="tx"/>
+                    </a:ext>
+                  </a:extLst>
+                </a:hlinkClick>
+              </a:rPr>
+              <a:t>Slido app</a:t>
+            </a:r>
+            <a:r>
+              <a:rPr lang="en-US" sz="2600">
+                <a:solidFill>
+                  <a:srgbClr val="FFFFFF"/>
+                </a:solidFill>
+              </a:rPr>
+              <a:t> must be installed on every computer you’re presenting from</a:t>
+            </a:r>
+          </a:p>
+        </p:txBody>
+      </p:sp>
+      <p:pic>
+        <p:nvPicPr>
+          <p:cNvPr id="6" name="Graphic 5">
+            <a:extLst>
+              <a:ext uri="{FF2B5EF4-FFF2-40B4-BE49-F238E27FC236}">
+                <a16:creationId xmlns:a16="http://schemas.microsoft.com/office/drawing/2014/main" id="{A3064C8C-094A-CF02-9F41-7D7A3881A78E}"/>
+              </a:ext>
+            </a:extLst>
+          </p:cNvPr>
+          <p:cNvPicPr>
+            <a:picLocks/>
+          </p:cNvPicPr>
+          <p:nvPr/>
+        </p:nvPicPr>
+        <p:blipFill>
+          <a:blip r:embed="rId5">
+            <a:extLst>
+              <a:ext uri="{96DAC541-7B7A-43D3-8B79-37D633B846F1}">
+                <asvg:svgBlip xmlns:asvg="http://schemas.microsoft.com/office/drawing/2016/SVG/main" r:embed="rId6"/>
+              </a:ext>
+            </a:extLst>
+          </a:blip>
+          <a:stretch>
+            <a:fillRect/>
+          </a:stretch>
+        </p:blipFill>
+        <p:spPr>
+          <a:xfrm>
+            <a:off x="296462" y="6190785"/>
+            <a:ext cx="296462" cy="296462"/>
+          </a:xfrm>
+          <a:prstGeom prst="rect">
+            <a:avLst/>
+          </a:prstGeom>
+        </p:spPr>
+      </p:pic>
+      <p:sp>
+        <p:nvSpPr>
+          <p:cNvPr id="7" name="Trapezoid 6">
+            <a:extLst>
+              <a:ext uri="{FF2B5EF4-FFF2-40B4-BE49-F238E27FC236}">
+                <a16:creationId xmlns:a16="http://schemas.microsoft.com/office/drawing/2014/main" id="{C2ECB3F7-86FD-7FBF-1ACF-03C1388952CD}"/>
+              </a:ext>
+            </a:extLst>
+          </p:cNvPr>
+          <p:cNvSpPr/>
+          <p:nvPr/>
+        </p:nvSpPr>
+        <p:spPr>
+          <a:xfrm rot="2700000">
+            <a:off x="9620371" y="514924"/>
+            <a:ext cx="3335198" cy="778213"/>
+          </a:xfrm>
+          <a:prstGeom prst="trapezoid">
+            <a:avLst>
+              <a:gd name="adj" fmla="val 100000"/>
+            </a:avLst>
+          </a:prstGeom>
+          <a:solidFill>
+            <a:srgbClr val="EDFAF2"/>
+          </a:solidFill>
+          <a:ln w="25400" cap="flat" cmpd="sng" algn="ctr">
+            <a:noFill/>
+            <a:prstDash val="solid"/>
+          </a:ln>
+          <a:effectLst/>
+          <a:extLst>
+            <a:ext uri="{91240B29-F687-4F45-9708-019B960494DF}">
+              <a14:hiddenLine xmlns:a14="http://schemas.microsoft.com/office/drawing/2010/main" w="25400" cap="flat" cmpd="sng" algn="ctr">
+                <a:solidFill>
+                  <a:schemeClr val="accent1">
+                    <a:shade val="15000"/>
+                  </a:schemeClr>
+                </a:solidFill>
+                <a:prstDash val="solid"/>
+              </a14:hiddenLine>
+            </a:ext>
+          </a:extLst>
+        </p:spPr>
+        <p:style>
+          <a:lnRef idx="2">
+            <a:schemeClr val="accent1">
+              <a:shade val="15000"/>
+            </a:schemeClr>
+          </a:lnRef>
+          <a:fillRef idx="1">
+            <a:schemeClr val="accent1"/>
+          </a:fillRef>
+          <a:effectRef idx="0">
+            <a:schemeClr val="accent1"/>
+          </a:effectRef>
+          <a:fontRef idx="minor">
+            <a:schemeClr val="lt1"/>
+          </a:fontRef>
+        </p:style>
+        <p:txBody>
+          <a:bodyPr tIns="0" bIns="0" rtlCol="0" anchor="t">
+            <a:normAutofit fontScale="70000" lnSpcReduction="20000"/>
+          </a:bodyPr>
+          <a:lstStyle/>
+          <a:p>
+            <a:pPr algn="ctr"/>
+            <a:r>
+              <a:rPr lang="en-US" sz="2600" b="1">
+                <a:solidFill>
+                  <a:srgbClr val="198038"/>
+                </a:solidFill>
+              </a:rPr>
+              <a:t>Do not edit
+</a:t>
+            </a:r>
+            <a:r>
+              <a:rPr lang="en-US" sz="2200">
+                <a:solidFill>
+                  <a:srgbClr val="198038"/>
+                </a:solidFill>
+                <a:hlinkClick r:id="rId7">
+                  <a:extLst>
+                    <a:ext uri="{A12FA001-AC4F-418D-AE19-62706E023703}">
+                      <ahyp:hlinkClr xmlns:ahyp="http://schemas.microsoft.com/office/drawing/2018/hyperlinkcolor" val="tx"/>
+                    </a:ext>
+                  </a:extLst>
+                </a:hlinkClick>
+              </a:rPr>
+              <a:t>How to change the design</a:t>
+            </a:r>
+            <a:endParaRPr lang="en-US" sz="2200">
+              <a:solidFill>
+                <a:srgbClr val="198038"/>
+              </a:solidFill>
+            </a:endParaRPr>
+          </a:p>
+        </p:txBody>
+      </p:sp>
+      <p:pic>
+        <p:nvPicPr>
+          <p:cNvPr id="9" name="Graphic 8">
+            <a:extLst>
+              <a:ext uri="{FF2B5EF4-FFF2-40B4-BE49-F238E27FC236}">
+                <a16:creationId xmlns:a16="http://schemas.microsoft.com/office/drawing/2014/main" id="{DF9882E2-17EE-522B-54D6-36FB98351F96}"/>
+              </a:ext>
+            </a:extLst>
+          </p:cNvPr>
+          <p:cNvPicPr>
+            <a:picLocks/>
+          </p:cNvPicPr>
+          <p:nvPr/>
+        </p:nvPicPr>
+        <p:blipFill>
+          <a:blip r:embed="rId8">
+            <a:extLst>
+              <a:ext uri="{96DAC541-7B7A-43D3-8B79-37D633B846F1}">
+                <asvg:svgBlip xmlns:asvg="http://schemas.microsoft.com/office/drawing/2016/SVG/main" r:embed="rId9"/>
+              </a:ext>
+            </a:extLst>
+          </a:blip>
+          <a:stretch>
+            <a:fillRect/>
+          </a:stretch>
+        </p:blipFill>
+        <p:spPr>
+          <a:xfrm>
+            <a:off x="10746748" y="6153727"/>
+            <a:ext cx="1111733" cy="370578"/>
+          </a:xfrm>
+          <a:prstGeom prst="rect">
+            <a:avLst/>
+          </a:prstGeom>
+        </p:spPr>
+      </p:pic>
+    </p:spTree>
+    <p:custDataLst>
+      <p:tags r:id="rId1"/>
+    </p:custDataLst>
+    <p:extLst>
+      <p:ext uri="{BB962C8B-B14F-4D97-AF65-F5344CB8AC3E}">
+        <p14:creationId xmlns:p14="http://schemas.microsoft.com/office/powerpoint/2010/main" val="391892118"/>
+      </p:ext>
+    </p:extLst>
+  </p:cSld>
+  <p:clrMapOvr>
+    <a:masterClrMapping/>
+  </p:clrMapOvr>
+  <p:timing>
+    <p:tnLst>
+      <p:par>
+        <p:cTn id="1" dur="indefinite" restart="never" nodeType="tmRoot">
+          <p:childTnLst>
+            <p:seq concurrent="1" nextAc="seek">
+              <p:cTn id="2" dur="indefinite" nodeType="mainSeq">
+                <p:childTnLst>
+                  <p:par>
+                    <p:cTn id="3" fill="hold">
+                      <p:stCondLst>
+                        <p:cond delay="indefinite"/>
+                      </p:stCondLst>
+                      <p:childTnLst>
+                        <p:par>
+                          <p:cTn id="4" fill="hold">
+                            <p:stCondLst>
+                              <p:cond delay="0"/>
+                            </p:stCondLst>
+                            <p:childTnLst>
+                              <p:par>
+                                <p:cTn id="5" presetID="26" presetClass="emph" presetSubtype="0" fill="hold" grpId="0" nodeType="clickEffect">
+                                  <p:stCondLst>
+                                    <p:cond delay="0"/>
+                                  </p:stCondLst>
+                                  <p:childTnLst>
+                                    <p:animEffect transition="out" filter="fade">
+                                      <p:cBhvr>
+                                        <p:cTn id="6" dur="50" tmFilter="0, 0; .2, .5; .8, .5; 1, 0"/>
+                                        <p:tgtEl>
+                                          <p:spTgt spid="3"/>
+                                        </p:tgtEl>
+                                      </p:cBhvr>
+                                    </p:animEffect>
+                                    <p:animScale>
+                                      <p:cBhvr>
+                                        <p:cTn id="7" dur="25" autoRev="1" fill="hold"/>
+                                        <p:tgtEl>
+                                          <p:spTgt spid="3"/>
+                                        </p:tgtEl>
+                                      </p:cBhvr>
+                                      <p:by x="105000" y="105000"/>
+                                    </p:animScale>
+                                  </p:childTnLst>
+                                </p:cTn>
+                              </p:par>
+                            </p:childTnLst>
+                          </p:cTn>
+                        </p:par>
+                      </p:childTnLst>
+                    </p:cTn>
+                  </p:par>
+                </p:childTnLst>
+              </p:cTn>
+              <p:prevCondLst>
+                <p:cond evt="onPrev" delay="0">
+                  <p:tgtEl>
+                    <p:sldTgt/>
+                  </p:tgtEl>
+                </p:cond>
+              </p:prevCondLst>
+              <p:nextCondLst>
+                <p:cond evt="onNext" delay="0">
+                  <p:tgtEl>
+                    <p:sldTgt/>
+                  </p:tgtEl>
+                </p:cond>
+              </p:nextCondLst>
+            </p:seq>
+          </p:childTnLst>
+        </p:cTn>
+      </p:par>
+    </p:tnLst>
+    <p:bldLst>
+      <p:bldP spid="3" grpId="0" animBg="1"/>
+    </p:bldLst>
+  </p:timing>
+</p:sld>
+</file>
+
+<file path=ppt/slides/slide16.xml><?xml version="1.0" encoding="utf-8"?>
 <p:sld xmlns:a="http://schemas.openxmlformats.org/drawingml/2006/main" xmlns:r="http://schemas.openxmlformats.org/officeDocument/2006/relationships" xmlns:p="http://schemas.openxmlformats.org/presentationml/2006/main">
   <p:cSld>
     <p:spTree>
@@ -16431,7 +19051,7 @@
             </a:pPr>
             <a:r>
               <a:rPr lang="en-US" dirty="0"/>
-              <a:t>Sample size</a:t>
+              <a:t>Sample size (and duration)</a:t>
             </a:r>
             <a:endParaRPr dirty="0"/>
           </a:p>
@@ -16541,7 +19161,7 @@
 </p:sld>
 </file>
 
-<file path=ppt/slides/slide15.xml><?xml version="1.0" encoding="utf-8"?>
+<file path=ppt/slides/slide17.xml><?xml version="1.0" encoding="utf-8"?>
 <p:sld xmlns:a="http://schemas.openxmlformats.org/drawingml/2006/main" xmlns:r="http://schemas.openxmlformats.org/officeDocument/2006/relationships" xmlns:p="http://schemas.openxmlformats.org/presentationml/2006/main">
   <p:cSld>
     <p:spTree>
@@ -16581,7 +19201,7 @@
           <a:p>
             <a:r>
               <a:rPr lang="en-US" dirty="0"/>
-              <a:t>Some things to keep in mind</a:t>
+              <a:t>Running the numbers </a:t>
             </a:r>
           </a:p>
         </p:txBody>
@@ -16915,6 +19535,51 @@
           </a:p>
         </p:txBody>
       </p:sp>
+      <p:sp>
+        <p:nvSpPr>
+          <p:cNvPr id="6" name="TextBox 5">
+            <a:extLst>
+              <a:ext uri="{FF2B5EF4-FFF2-40B4-BE49-F238E27FC236}">
+                <a16:creationId xmlns:a16="http://schemas.microsoft.com/office/drawing/2014/main" id="{D8672791-5EDD-2036-6DDB-96890C08DCBA}"/>
+              </a:ext>
+            </a:extLst>
+          </p:cNvPr>
+          <p:cNvSpPr txBox="1"/>
+          <p:nvPr/>
+        </p:nvSpPr>
+        <p:spPr>
+          <a:xfrm>
+            <a:off x="2051824" y="6508378"/>
+            <a:ext cx="6402715" cy="523220"/>
+          </a:xfrm>
+          <a:prstGeom prst="rect">
+            <a:avLst/>
+          </a:prstGeom>
+          <a:noFill/>
+        </p:spPr>
+        <p:txBody>
+          <a:bodyPr wrap="none" rtlCol="0">
+            <a:spAutoFit/>
+          </a:bodyPr>
+          <a:lstStyle/>
+          <a:p>
+            <a:r>
+              <a:rPr lang="en-US" dirty="0"/>
+              <a:t>Useful resource: </a:t>
+            </a:r>
+            <a:r>
+              <a:rPr lang="en-US" dirty="0">
+                <a:hlinkClick r:id="rId3"/>
+              </a:rPr>
+              <a:t>https://www.povertyactionlab.org/resource/power-calculations</a:t>
+            </a:r>
+            <a:endParaRPr lang="en-US" dirty="0"/>
+          </a:p>
+          <a:p>
+            <a:endParaRPr lang="en-US" dirty="0"/>
+          </a:p>
+        </p:txBody>
+      </p:sp>
     </p:spTree>
     <p:extLst>
       <p:ext uri="{BB962C8B-B14F-4D97-AF65-F5344CB8AC3E}">
@@ -16928,7 +19593,7 @@
 </p:sld>
 </file>
 
-<file path=ppt/slides/slide16.xml><?xml version="1.0" encoding="utf-8"?>
+<file path=ppt/slides/slide18.xml><?xml version="1.0" encoding="utf-8"?>
 <p:sld xmlns:a="http://schemas.openxmlformats.org/drawingml/2006/main" xmlns:r="http://schemas.openxmlformats.org/officeDocument/2006/relationships" xmlns:p="http://schemas.openxmlformats.org/presentationml/2006/main">
   <p:cSld>
     <p:spTree>
@@ -17197,7 +19862,7 @@
 </p:sld>
 </file>
 
-<file path=ppt/slides/slide17.xml><?xml version="1.0" encoding="utf-8"?>
+<file path=ppt/slides/slide19.xml><?xml version="1.0" encoding="utf-8"?>
 <p:sld xmlns:a="http://schemas.openxmlformats.org/drawingml/2006/main" xmlns:r="http://schemas.openxmlformats.org/officeDocument/2006/relationships" xmlns:p="http://schemas.openxmlformats.org/presentationml/2006/main">
   <p:cSld>
     <p:spTree>
@@ -17501,7 +20166,138 @@
 </p:sld>
 </file>
 
-<file path=ppt/slides/slide18.xml><?xml version="1.0" encoding="utf-8"?>
+<file path=ppt/slides/slide2.xml><?xml version="1.0" encoding="utf-8"?>
+<p:sld xmlns:a="http://schemas.openxmlformats.org/drawingml/2006/main" xmlns:r="http://schemas.openxmlformats.org/officeDocument/2006/relationships" xmlns:p="http://schemas.openxmlformats.org/presentationml/2006/main">
+  <p:cSld>
+    <p:spTree>
+      <p:nvGrpSpPr>
+        <p:cNvPr id="1" name=""/>
+        <p:cNvGrpSpPr/>
+        <p:nvPr/>
+      </p:nvGrpSpPr>
+      <p:grpSpPr>
+        <a:xfrm>
+          <a:off x="0" y="0"/>
+          <a:ext cx="0" cy="0"/>
+          <a:chOff x="0" y="0"/>
+          <a:chExt cx="0" cy="0"/>
+        </a:xfrm>
+      </p:grpSpPr>
+      <p:sp>
+        <p:nvSpPr>
+          <p:cNvPr id="3" name="Title 2">
+            <a:extLst>
+              <a:ext uri="{FF2B5EF4-FFF2-40B4-BE49-F238E27FC236}">
+                <a16:creationId xmlns:a16="http://schemas.microsoft.com/office/drawing/2014/main" id="{9323871C-7CA8-1448-8FFC-1AE6E1838941}"/>
+              </a:ext>
+            </a:extLst>
+          </p:cNvPr>
+          <p:cNvSpPr>
+            <a:spLocks noGrp="1"/>
+          </p:cNvSpPr>
+          <p:nvPr>
+            <p:ph type="title"/>
+          </p:nvPr>
+        </p:nvSpPr>
+        <p:spPr/>
+        <p:txBody>
+          <a:bodyPr/>
+          <a:lstStyle/>
+          <a:p>
+            <a:r>
+              <a:rPr lang="en-US" dirty="0"/>
+              <a:t>Reminders</a:t>
+            </a:r>
+          </a:p>
+        </p:txBody>
+      </p:sp>
+      <p:sp>
+        <p:nvSpPr>
+          <p:cNvPr id="5" name="Text Placeholder 4">
+            <a:extLst>
+              <a:ext uri="{FF2B5EF4-FFF2-40B4-BE49-F238E27FC236}">
+                <a16:creationId xmlns:a16="http://schemas.microsoft.com/office/drawing/2014/main" id="{F4E0A5F0-1D89-954D-91FB-596CD9E690F2}"/>
+              </a:ext>
+            </a:extLst>
+          </p:cNvPr>
+          <p:cNvSpPr>
+            <a:spLocks noGrp="1"/>
+          </p:cNvSpPr>
+          <p:nvPr>
+            <p:ph type="body" idx="1"/>
+          </p:nvPr>
+        </p:nvSpPr>
+        <p:spPr/>
+        <p:txBody>
+          <a:bodyPr/>
+          <a:lstStyle/>
+          <a:p>
+            <a:pPr marL="76200" indent="0">
+              <a:buNone/>
+            </a:pPr>
+            <a:r>
+              <a:rPr lang="en-US" b="1" dirty="0"/>
+              <a:t>Coming up next week:</a:t>
+            </a:r>
+          </a:p>
+          <a:p>
+            <a:r>
+              <a:rPr lang="en-US" dirty="0"/>
+              <a:t>Understanding your models assignment (plus any fixes)</a:t>
+            </a:r>
+          </a:p>
+          <a:p>
+            <a:endParaRPr lang="en-US" dirty="0"/>
+          </a:p>
+          <a:p>
+            <a:pPr marL="76200" indent="0">
+              <a:buNone/>
+            </a:pPr>
+            <a:endParaRPr lang="en-US" dirty="0"/>
+          </a:p>
+          <a:p>
+            <a:pPr marL="76200" indent="0">
+              <a:buNone/>
+            </a:pPr>
+            <a:r>
+              <a:rPr lang="en-US" b="1" dirty="0">
+                <a:hlinkClick r:id="rId2"/>
+              </a:rPr>
+              <a:t>Topic Assignments</a:t>
+            </a:r>
+            <a:endParaRPr lang="en-US" b="1" dirty="0"/>
+          </a:p>
+          <a:p>
+            <a:pPr marL="76200" indent="0">
+              <a:buNone/>
+            </a:pPr>
+            <a:endParaRPr lang="en-US" dirty="0"/>
+          </a:p>
+          <a:p>
+            <a:pPr marL="76200" indent="0">
+              <a:buNone/>
+            </a:pPr>
+            <a:endParaRPr lang="en-US" dirty="0"/>
+          </a:p>
+          <a:p>
+            <a:endParaRPr lang="en-US" dirty="0"/>
+          </a:p>
+        </p:txBody>
+      </p:sp>
+    </p:spTree>
+    <p:extLst>
+      <p:ext uri="{BB962C8B-B14F-4D97-AF65-F5344CB8AC3E}">
+        <p14:creationId xmlns:p14="http://schemas.microsoft.com/office/powerpoint/2010/main" val="1921918501"/>
+      </p:ext>
+    </p:extLst>
+  </p:cSld>
+  <p:clrMapOvr>
+    <a:masterClrMapping/>
+  </p:clrMapOvr>
+</p:sld>
+</file>
+
+<file path=ppt/slides/slide20.xml><?xml version="1.0" encoding="utf-8"?>
 <p:sld xmlns:a="http://schemas.openxmlformats.org/drawingml/2006/main" xmlns:r="http://schemas.openxmlformats.org/officeDocument/2006/relationships" xmlns:p="http://schemas.openxmlformats.org/presentationml/2006/main">
   <p:cSld>
     <p:spTree>
@@ -18067,7 +20863,7 @@
 </p:sld>
 </file>
 
-<file path=ppt/slides/slide19.xml><?xml version="1.0" encoding="utf-8"?>
+<file path=ppt/slides/slide21.xml><?xml version="1.0" encoding="utf-8"?>
 <p:sld xmlns:a="http://schemas.openxmlformats.org/drawingml/2006/main" xmlns:r="http://schemas.openxmlformats.org/officeDocument/2006/relationships" xmlns:p="http://schemas.openxmlformats.org/presentationml/2006/main">
   <p:cSld>
     <p:spTree>
@@ -18239,7 +21035,7 @@
 </p:sld>
 </file>
 
-<file path=ppt/slides/slide2.xml><?xml version="1.0" encoding="utf-8"?>
+<file path=ppt/slides/slide22.xml><?xml version="1.0" encoding="utf-8"?>
 <p:sld xmlns:a="http://schemas.openxmlformats.org/drawingml/2006/main" xmlns:r="http://schemas.openxmlformats.org/officeDocument/2006/relationships" xmlns:p="http://schemas.openxmlformats.org/presentationml/2006/main">
   <p:cSld>
     <p:spTree>
@@ -18258,10 +21054,10 @@
       </p:grpSpPr>
       <p:sp>
         <p:nvSpPr>
-          <p:cNvPr id="3" name="Title 2">
+          <p:cNvPr id="2" name="Title 1">
             <a:extLst>
               <a:ext uri="{FF2B5EF4-FFF2-40B4-BE49-F238E27FC236}">
-                <a16:creationId xmlns:a16="http://schemas.microsoft.com/office/drawing/2014/main" id="{9323871C-7CA8-1448-8FFC-1AE6E1838941}"/>
+                <a16:creationId xmlns:a16="http://schemas.microsoft.com/office/drawing/2014/main" id="{E2EEA252-0CC4-D26F-D1CB-C2E63124DDD5}"/>
               </a:ext>
             </a:extLst>
           </p:cNvPr>
@@ -18279,17 +21075,17 @@
           <a:p>
             <a:r>
               <a:rPr lang="en-US" dirty="0"/>
-              <a:t>Reminders</a:t>
+              <a:t>Issues to keep in mind</a:t>
             </a:r>
           </a:p>
         </p:txBody>
       </p:sp>
       <p:sp>
         <p:nvSpPr>
-          <p:cNvPr id="5" name="Text Placeholder 4">
+          <p:cNvPr id="3" name="Text Placeholder 2">
             <a:extLst>
               <a:ext uri="{FF2B5EF4-FFF2-40B4-BE49-F238E27FC236}">
-                <a16:creationId xmlns:a16="http://schemas.microsoft.com/office/drawing/2014/main" id="{F4E0A5F0-1D89-954D-91FB-596CD9E690F2}"/>
+                <a16:creationId xmlns:a16="http://schemas.microsoft.com/office/drawing/2014/main" id="{9E9D40DB-6F84-70FA-E34E-7F4270C35735}"/>
               </a:ext>
             </a:extLst>
           </p:cNvPr>
@@ -18305,19 +21101,176 @@
           <a:bodyPr/>
           <a:lstStyle/>
           <a:p>
-            <a:pPr marL="76200" indent="0">
-              <a:buNone/>
-            </a:pPr>
             <a:r>
-              <a:rPr lang="en-US" b="1" dirty="0"/>
-              <a:t>Coming up next week:</a:t>
+              <a:rPr lang="en-US" dirty="0"/>
+              <a:t>Randomization – how do we do it? How do we know we did it well?</a:t>
             </a:r>
           </a:p>
           <a:p>
             <a:r>
               <a:rPr lang="en-US" dirty="0"/>
-              <a:t>Module 3 Presentations – Preprocessing</a:t>
+              <a:t>Compliance (overrides by downstream action-takers)</a:t>
             </a:r>
+          </a:p>
+          <a:p>
+            <a:r>
+              <a:rPr lang="en-US" dirty="0"/>
+              <a:t>Single blind, double blind, triple blind…?</a:t>
+            </a:r>
+          </a:p>
+          <a:p>
+            <a:r>
+              <a:rPr lang="en-US" dirty="0"/>
+              <a:t>What “model” are we testing?</a:t>
+            </a:r>
+          </a:p>
+          <a:p>
+            <a:pPr lvl="1"/>
+            <a:r>
+              <a:rPr lang="en-US" dirty="0"/>
+              <a:t>The latest “best-performing” model built during model development</a:t>
+            </a:r>
+          </a:p>
+          <a:p>
+            <a:pPr lvl="1"/>
+            <a:r>
+              <a:rPr lang="en-US" dirty="0"/>
+              <a:t>The last “best-performing” model built during model development retrained on new data</a:t>
+            </a:r>
+          </a:p>
+          <a:p>
+            <a:pPr lvl="1"/>
+            <a:r>
+              <a:rPr lang="en-US" dirty="0"/>
+              <a:t>The model retraining and selection methodology </a:t>
+            </a:r>
+          </a:p>
+          <a:p>
+            <a:endParaRPr lang="en-US" dirty="0"/>
+          </a:p>
+          <a:p>
+            <a:endParaRPr lang="en-US" dirty="0"/>
+          </a:p>
+        </p:txBody>
+      </p:sp>
+    </p:spTree>
+    <p:extLst>
+      <p:ext uri="{BB962C8B-B14F-4D97-AF65-F5344CB8AC3E}">
+        <p14:creationId xmlns:p14="http://schemas.microsoft.com/office/powerpoint/2010/main" val="2874991972"/>
+      </p:ext>
+    </p:extLst>
+  </p:cSld>
+  <p:clrMapOvr>
+    <a:masterClrMapping/>
+  </p:clrMapOvr>
+</p:sld>
+</file>
+
+<file path=ppt/slides/slide23.xml><?xml version="1.0" encoding="utf-8"?>
+<p:sld xmlns:a="http://schemas.openxmlformats.org/drawingml/2006/main" xmlns:r="http://schemas.openxmlformats.org/officeDocument/2006/relationships" xmlns:p="http://schemas.openxmlformats.org/presentationml/2006/main">
+  <p:cSld>
+    <p:spTree>
+      <p:nvGrpSpPr>
+        <p:cNvPr id="1" name=""/>
+        <p:cNvGrpSpPr/>
+        <p:nvPr/>
+      </p:nvGrpSpPr>
+      <p:grpSpPr>
+        <a:xfrm>
+          <a:off x="0" y="0"/>
+          <a:ext cx="0" cy="0"/>
+          <a:chOff x="0" y="0"/>
+          <a:chExt cx="0" cy="0"/>
+        </a:xfrm>
+      </p:grpSpPr>
+      <p:sp>
+        <p:nvSpPr>
+          <p:cNvPr id="2" name="Title 1">
+            <a:extLst>
+              <a:ext uri="{FF2B5EF4-FFF2-40B4-BE49-F238E27FC236}">
+                <a16:creationId xmlns:a16="http://schemas.microsoft.com/office/drawing/2014/main" id="{C15001BC-B50F-6D6F-69E0-33EBF6C38E9E}"/>
+              </a:ext>
+            </a:extLst>
+          </p:cNvPr>
+          <p:cNvSpPr>
+            <a:spLocks noGrp="1"/>
+          </p:cNvSpPr>
+          <p:nvPr>
+            <p:ph type="title"/>
+          </p:nvPr>
+        </p:nvSpPr>
+        <p:spPr/>
+        <p:txBody>
+          <a:bodyPr/>
+          <a:lstStyle/>
+          <a:p>
+            <a:r>
+              <a:rPr lang="en-US" dirty="0"/>
+              <a:t>Recap</a:t>
+            </a:r>
+          </a:p>
+        </p:txBody>
+      </p:sp>
+      <p:sp>
+        <p:nvSpPr>
+          <p:cNvPr id="3" name="Text Placeholder 2">
+            <a:extLst>
+              <a:ext uri="{FF2B5EF4-FFF2-40B4-BE49-F238E27FC236}">
+                <a16:creationId xmlns:a16="http://schemas.microsoft.com/office/drawing/2014/main" id="{5B3029AE-B128-8C18-A951-B21711EBA014}"/>
+              </a:ext>
+            </a:extLst>
+          </p:cNvPr>
+          <p:cNvSpPr>
+            <a:spLocks noGrp="1"/>
+          </p:cNvSpPr>
+          <p:nvPr>
+            <p:ph type="body" idx="1"/>
+          </p:nvPr>
+        </p:nvSpPr>
+        <p:spPr/>
+        <p:txBody>
+          <a:bodyPr/>
+          <a:lstStyle/>
+          <a:p>
+            <a:r>
+              <a:rPr lang="en-US" dirty="0"/>
+              <a:t>Model Selection =&gt; best candidate model to evaluate</a:t>
+            </a:r>
+          </a:p>
+          <a:p>
+            <a:endParaRPr lang="en-US" dirty="0"/>
+          </a:p>
+          <a:p>
+            <a:r>
+              <a:rPr lang="en-US" dirty="0"/>
+              <a:t>Evaluation = Does using this “</a:t>
+            </a:r>
+            <a:r>
+              <a:rPr lang="en-US" i="1" dirty="0"/>
+              <a:t>model</a:t>
+            </a:r>
+            <a:r>
+              <a:rPr lang="en-US" dirty="0"/>
+              <a:t>” (and downstream actions) improve what we wanted to improve?</a:t>
+            </a:r>
+          </a:p>
+          <a:p>
+            <a:pPr lvl="1"/>
+            <a:r>
+              <a:rPr lang="en-US" i="1" dirty="0"/>
+              <a:t> “model” is likely the modeling pipeline that includes retraining, updating, and possibly redoing model selection</a:t>
+            </a:r>
+          </a:p>
+          <a:p>
+            <a:pPr lvl="1"/>
+            <a:endParaRPr lang="en-US" dirty="0"/>
+          </a:p>
+          <a:p>
+            <a:r>
+              <a:rPr lang="en-US" dirty="0"/>
+              <a:t>Next class: what happens when we cannot run randomized experiments?</a:t>
+            </a:r>
+            <a:endParaRPr lang="en-US" i="1" dirty="0"/>
           </a:p>
           <a:p>
             <a:pPr marL="76200" indent="0">
@@ -18330,14 +21283,8 @@
               <a:buNone/>
             </a:pPr>
             <a:r>
-              <a:rPr lang="en-US" b="1" dirty="0"/>
-              <a:t>Coming up the following week:</a:t>
-            </a:r>
-          </a:p>
-          <a:p>
-            <a:r>
               <a:rPr lang="en-US" dirty="0"/>
-              <a:t>Module 3 Presentation Recordings (no class meetings)</a:t>
+              <a:t>	</a:t>
             </a:r>
           </a:p>
           <a:p>
@@ -18346,15 +21293,12 @@
             </a:pPr>
             <a:endParaRPr lang="en-US" dirty="0"/>
           </a:p>
-          <a:p>
-            <a:endParaRPr lang="en-US" dirty="0"/>
-          </a:p>
         </p:txBody>
       </p:sp>
     </p:spTree>
     <p:extLst>
       <p:ext uri="{BB962C8B-B14F-4D97-AF65-F5344CB8AC3E}">
-        <p14:creationId xmlns:p14="http://schemas.microsoft.com/office/powerpoint/2010/main" val="1921918501"/>
+        <p14:creationId xmlns:p14="http://schemas.microsoft.com/office/powerpoint/2010/main" val="3948085959"/>
       </p:ext>
     </p:extLst>
   </p:cSld>
@@ -18498,7 +21442,7 @@
   <p:cSld>
     <p:spTree>
       <p:nvGrpSpPr>
-        <p:cNvPr id="1" name="Shape 47"/>
+        <p:cNvPr id="1" name=""/>
         <p:cNvGrpSpPr/>
         <p:nvPr/>
       </p:nvGrpSpPr>
@@ -18512,276 +21456,78 @@
       </p:grpSpPr>
       <p:sp>
         <p:nvSpPr>
-          <p:cNvPr id="48" name="Google Shape;48;p21"/>
-          <p:cNvSpPr txBox="1">
+          <p:cNvPr id="3" name="Title 2">
+            <a:extLst>
+              <a:ext uri="{FF2B5EF4-FFF2-40B4-BE49-F238E27FC236}">
+                <a16:creationId xmlns:a16="http://schemas.microsoft.com/office/drawing/2014/main" id="{4A86FD19-DA36-DD98-054F-F7B82B7371DC}"/>
+              </a:ext>
+            </a:extLst>
+          </p:cNvPr>
+          <p:cNvSpPr>
             <a:spLocks noGrp="1"/>
           </p:cNvSpPr>
           <p:nvPr>
             <p:ph type="title"/>
           </p:nvPr>
         </p:nvSpPr>
-        <p:spPr>
-          <a:xfrm>
-            <a:off x="415600" y="86563"/>
-            <a:ext cx="11360700" cy="763500"/>
-          </a:xfrm>
-          <a:prstGeom prst="rect">
-            <a:avLst/>
-          </a:prstGeom>
-          <a:noFill/>
-          <a:ln>
-            <a:noFill/>
-          </a:ln>
-        </p:spPr>
+        <p:spPr/>
         <p:txBody>
-          <a:bodyPr spcFirstLastPara="1" wrap="square" lIns="121900" tIns="121900" rIns="121900" bIns="121900" anchor="t" anchorCtr="0">
-            <a:noAutofit/>
-          </a:bodyPr>
+          <a:bodyPr/>
           <a:lstStyle/>
           <a:p>
-            <a:pPr marL="0" lvl="0" indent="0" algn="l" rtl="0">
-              <a:lnSpc>
-                <a:spcPct val="100000"/>
-              </a:lnSpc>
-              <a:spcBef>
-                <a:spcPts val="0"/>
-              </a:spcBef>
-              <a:spcAft>
-                <a:spcPts val="0"/>
-              </a:spcAft>
-              <a:buClr>
-                <a:srgbClr val="FFFFFF"/>
-              </a:buClr>
-              <a:buSzPts val="3700"/>
-              <a:buNone/>
-            </a:pPr>
             <a:r>
-              <a:rPr lang="en-US"/>
-              <a:t>Things to cover today</a:t>
+              <a:rPr lang="en-US" dirty="0"/>
+              <a:t>Motivation</a:t>
             </a:r>
-            <a:endParaRPr/>
           </a:p>
         </p:txBody>
       </p:sp>
       <p:sp>
         <p:nvSpPr>
-          <p:cNvPr id="49" name="Google Shape;49;p21"/>
-          <p:cNvSpPr txBox="1">
+          <p:cNvPr id="4" name="Text Placeholder 3">
+            <a:extLst>
+              <a:ext uri="{FF2B5EF4-FFF2-40B4-BE49-F238E27FC236}">
+                <a16:creationId xmlns:a16="http://schemas.microsoft.com/office/drawing/2014/main" id="{4E5708E2-A31C-FEA5-EA26-910BB5B654AB}"/>
+              </a:ext>
+            </a:extLst>
+          </p:cNvPr>
+          <p:cNvSpPr>
             <a:spLocks noGrp="1"/>
           </p:cNvSpPr>
           <p:nvPr>
             <p:ph type="body" idx="1"/>
           </p:nvPr>
         </p:nvSpPr>
-        <p:spPr>
-          <a:xfrm>
-            <a:off x="415600" y="1536633"/>
-            <a:ext cx="11360700" cy="4555200"/>
-          </a:xfrm>
-          <a:prstGeom prst="rect">
-            <a:avLst/>
-          </a:prstGeom>
-          <a:noFill/>
-          <a:ln>
-            <a:noFill/>
-          </a:ln>
-        </p:spPr>
+        <p:spPr/>
         <p:txBody>
-          <a:bodyPr spcFirstLastPara="1" wrap="square" lIns="121900" tIns="121900" rIns="121900" bIns="121900" anchor="t" anchorCtr="0">
-            <a:noAutofit/>
-          </a:bodyPr>
+          <a:bodyPr/>
           <a:lstStyle/>
           <a:p>
-            <a:pPr marL="457200" lvl="0" indent="-381000" algn="l" rtl="0">
-              <a:lnSpc>
-                <a:spcPct val="100000"/>
-              </a:lnSpc>
-              <a:spcBef>
-                <a:spcPts val="0"/>
-              </a:spcBef>
-              <a:spcAft>
-                <a:spcPts val="0"/>
-              </a:spcAft>
-              <a:buSzPts val="2400"/>
-              <a:buChar char="●"/>
-            </a:pPr>
             <a:r>
               <a:rPr lang="en-US" dirty="0"/>
-              <a:t>Causal Inference 001</a:t>
+              <a:t>ML metrics (AUC, precision, recall ,etc.) on offline data are insufficient for real world evaluation</a:t>
             </a:r>
-            <a:br>
-              <a:rPr lang="en-US" dirty="0"/>
-            </a:br>
-            <a:endParaRPr dirty="0"/>
           </a:p>
           <a:p>
-            <a:pPr lvl="1" indent="-381000">
-              <a:lnSpc>
-                <a:spcPct val="100000"/>
-              </a:lnSpc>
-              <a:spcBef>
-                <a:spcPts val="0"/>
-              </a:spcBef>
-              <a:buSzPts val="2400"/>
-              <a:buChar char="●"/>
-            </a:pPr>
+            <a:endParaRPr lang="en-US" dirty="0"/>
+          </a:p>
+          <a:p>
+            <a:endParaRPr lang="en-US" dirty="0"/>
+          </a:p>
+          <a:p>
             <a:r>
               <a:rPr lang="en-US" dirty="0"/>
-              <a:t>With Observational Data</a:t>
+              <a:t>We need to carefully design evaluations to test whether our system will have real world impact</a:t>
             </a:r>
-            <a:endParaRPr dirty="0"/>
-          </a:p>
-          <a:p>
-            <a:pPr lvl="2">
-              <a:lnSpc>
-                <a:spcPct val="100000"/>
-              </a:lnSpc>
-              <a:spcBef>
-                <a:spcPts val="0"/>
-              </a:spcBef>
-              <a:buChar char="○"/>
-            </a:pPr>
-            <a:r>
-              <a:rPr lang="en-US" dirty="0"/>
-              <a:t>Methods</a:t>
-            </a:r>
-            <a:endParaRPr dirty="0"/>
-          </a:p>
-          <a:p>
-            <a:pPr lvl="2">
-              <a:lnSpc>
-                <a:spcPct val="100000"/>
-              </a:lnSpc>
-              <a:spcBef>
-                <a:spcPts val="0"/>
-              </a:spcBef>
-              <a:buChar char="○"/>
-            </a:pPr>
-            <a:r>
-              <a:rPr lang="en-US" dirty="0"/>
-              <a:t>Examples</a:t>
-            </a:r>
-            <a:br>
-              <a:rPr lang="en-US" dirty="0"/>
-            </a:br>
-            <a:endParaRPr dirty="0"/>
-          </a:p>
-          <a:p>
-            <a:pPr lvl="1" indent="-381000">
-              <a:lnSpc>
-                <a:spcPct val="100000"/>
-              </a:lnSpc>
-              <a:spcBef>
-                <a:spcPts val="0"/>
-              </a:spcBef>
-              <a:buSzPts val="2400"/>
-              <a:buChar char="●"/>
-            </a:pPr>
-            <a:r>
-              <a:rPr lang="en-US" dirty="0"/>
-              <a:t>Experiments</a:t>
-            </a:r>
-            <a:endParaRPr dirty="0"/>
-          </a:p>
-          <a:p>
-            <a:pPr lvl="2">
-              <a:lnSpc>
-                <a:spcPct val="100000"/>
-              </a:lnSpc>
-              <a:spcBef>
-                <a:spcPts val="0"/>
-              </a:spcBef>
-              <a:buChar char="○"/>
-            </a:pPr>
-            <a:r>
-              <a:rPr lang="en-US" dirty="0"/>
-              <a:t>Standard Randomized Controlled Trials</a:t>
-            </a:r>
-            <a:endParaRPr dirty="0"/>
-          </a:p>
-          <a:p>
-            <a:pPr lvl="3">
-              <a:lnSpc>
-                <a:spcPct val="100000"/>
-              </a:lnSpc>
-              <a:spcBef>
-                <a:spcPts val="0"/>
-              </a:spcBef>
-              <a:buChar char="■"/>
-            </a:pPr>
-            <a:r>
-              <a:rPr lang="en-US" dirty="0"/>
-              <a:t>Trial Design</a:t>
-            </a:r>
-            <a:endParaRPr dirty="0"/>
-          </a:p>
-          <a:p>
-            <a:pPr lvl="3">
-              <a:lnSpc>
-                <a:spcPct val="100000"/>
-              </a:lnSpc>
-              <a:spcBef>
-                <a:spcPts val="0"/>
-              </a:spcBef>
-              <a:buChar char="■"/>
-            </a:pPr>
-            <a:r>
-              <a:rPr lang="en-US" dirty="0"/>
-              <a:t>Examples</a:t>
-            </a:r>
-            <a:endParaRPr dirty="0"/>
-          </a:p>
-          <a:p>
-            <a:pPr lvl="2">
-              <a:lnSpc>
-                <a:spcPct val="100000"/>
-              </a:lnSpc>
-              <a:spcBef>
-                <a:spcPts val="0"/>
-              </a:spcBef>
-              <a:buChar char="○"/>
-            </a:pPr>
-            <a:r>
-              <a:rPr lang="en-US" dirty="0"/>
-              <a:t>Validating ML models/systems</a:t>
-            </a:r>
-            <a:endParaRPr dirty="0"/>
-          </a:p>
-          <a:p>
-            <a:pPr lvl="3">
-              <a:lnSpc>
-                <a:spcPct val="100000"/>
-              </a:lnSpc>
-              <a:spcBef>
-                <a:spcPts val="0"/>
-              </a:spcBef>
-              <a:buChar char="■"/>
-            </a:pPr>
-            <a:r>
-              <a:rPr lang="en-US" dirty="0"/>
-              <a:t>Trial Design</a:t>
-            </a:r>
-            <a:endParaRPr dirty="0"/>
-          </a:p>
-          <a:p>
-            <a:pPr lvl="3">
-              <a:lnSpc>
-                <a:spcPct val="100000"/>
-              </a:lnSpc>
-              <a:spcBef>
-                <a:spcPts val="0"/>
-              </a:spcBef>
-              <a:buChar char="■"/>
-            </a:pPr>
-            <a:r>
-              <a:rPr lang="en-US" dirty="0"/>
-              <a:t>Examples</a:t>
-            </a:r>
-            <a:endParaRPr dirty="0"/>
           </a:p>
         </p:txBody>
       </p:sp>
     </p:spTree>
+    <p:extLst>
+      <p:ext uri="{BB962C8B-B14F-4D97-AF65-F5344CB8AC3E}">
+        <p14:creationId xmlns:p14="http://schemas.microsoft.com/office/powerpoint/2010/main" val="3852960978"/>
+      </p:ext>
+    </p:extLst>
   </p:cSld>
   <p:clrMapOvr>
     <a:masterClrMapping/>
@@ -18790,6 +21536,614 @@
 </file>
 
 <file path=ppt/slides/slide5.xml><?xml version="1.0" encoding="utf-8"?>
+<p:sld xmlns:a="http://schemas.openxmlformats.org/drawingml/2006/main" xmlns:r="http://schemas.openxmlformats.org/officeDocument/2006/relationships" xmlns:p="http://schemas.openxmlformats.org/presentationml/2006/main">
+  <p:cSld>
+    <p:spTree>
+      <p:nvGrpSpPr>
+        <p:cNvPr id="1" name=""/>
+        <p:cNvGrpSpPr/>
+        <p:nvPr/>
+      </p:nvGrpSpPr>
+      <p:grpSpPr>
+        <a:xfrm>
+          <a:off x="0" y="0"/>
+          <a:ext cx="0" cy="0"/>
+          <a:chOff x="0" y="0"/>
+          <a:chExt cx="0" cy="0"/>
+        </a:xfrm>
+      </p:grpSpPr>
+      <p:sp>
+        <p:nvSpPr>
+          <p:cNvPr id="3" name="Title 2">
+            <a:extLst>
+              <a:ext uri="{FF2B5EF4-FFF2-40B4-BE49-F238E27FC236}">
+                <a16:creationId xmlns:a16="http://schemas.microsoft.com/office/drawing/2014/main" id="{09DA22F7-7CF4-AE13-9018-8CA18CBE8018}"/>
+              </a:ext>
+            </a:extLst>
+          </p:cNvPr>
+          <p:cNvSpPr>
+            <a:spLocks noGrp="1"/>
+          </p:cNvSpPr>
+          <p:nvPr>
+            <p:ph type="title"/>
+          </p:nvPr>
+        </p:nvSpPr>
+        <p:spPr/>
+        <p:txBody>
+          <a:bodyPr/>
+          <a:lstStyle/>
+          <a:p>
+            <a:r>
+              <a:rPr lang="en-US" dirty="0"/>
+              <a:t>How would we evaluate the system we’re building?</a:t>
+            </a:r>
+          </a:p>
+        </p:txBody>
+      </p:sp>
+      <p:sp>
+        <p:nvSpPr>
+          <p:cNvPr id="4" name="Text Placeholder 3">
+            <a:extLst>
+              <a:ext uri="{FF2B5EF4-FFF2-40B4-BE49-F238E27FC236}">
+                <a16:creationId xmlns:a16="http://schemas.microsoft.com/office/drawing/2014/main" id="{F3A2EB2C-4EF1-5EB0-A6E8-A0CFFFAF80BB}"/>
+              </a:ext>
+            </a:extLst>
+          </p:cNvPr>
+          <p:cNvSpPr>
+            <a:spLocks noGrp="1"/>
+          </p:cNvSpPr>
+          <p:nvPr>
+            <p:ph type="body" idx="1"/>
+          </p:nvPr>
+        </p:nvSpPr>
+        <p:spPr/>
+        <p:txBody>
+          <a:bodyPr/>
+          <a:lstStyle/>
+          <a:p>
+            <a:endParaRPr lang="en-US"/>
+          </a:p>
+        </p:txBody>
+      </p:sp>
+    </p:spTree>
+    <p:extLst>
+      <p:ext uri="{BB962C8B-B14F-4D97-AF65-F5344CB8AC3E}">
+        <p14:creationId xmlns:p14="http://schemas.microsoft.com/office/powerpoint/2010/main" val="3547051385"/>
+      </p:ext>
+    </p:extLst>
+  </p:cSld>
+  <p:clrMapOvr>
+    <a:masterClrMapping/>
+  </p:clrMapOvr>
+</p:sld>
+</file>
+
+<file path=ppt/slides/slide6.xml><?xml version="1.0" encoding="utf-8"?>
+<p:sld xmlns:a="http://schemas.openxmlformats.org/drawingml/2006/main" xmlns:r="http://schemas.openxmlformats.org/officeDocument/2006/relationships" xmlns:p="http://schemas.openxmlformats.org/presentationml/2006/main" showMasterSp="0">
+  <p:cSld>
+    <p:bg>
+      <p:bgPr>
+        <a:solidFill>
+          <a:srgbClr val="FFFFFF"/>
+        </a:solidFill>
+        <a:effectLst/>
+      </p:bgPr>
+    </p:bg>
+    <p:spTree>
+      <p:nvGrpSpPr>
+        <p:cNvPr id="1" name=""/>
+        <p:cNvGrpSpPr/>
+        <p:nvPr/>
+      </p:nvGrpSpPr>
+      <p:grpSpPr>
+        <a:xfrm>
+          <a:off x="0" y="0"/>
+          <a:ext cx="0" cy="0"/>
+          <a:chOff x="0" y="0"/>
+          <a:chExt cx="0" cy="0"/>
+        </a:xfrm>
+      </p:grpSpPr>
+      <p:sp>
+        <p:nvSpPr>
+          <p:cNvPr id="2" name="Rectangle 1">
+            <a:extLst>
+              <a:ext uri="{FF2B5EF4-FFF2-40B4-BE49-F238E27FC236}">
+                <a16:creationId xmlns:a16="http://schemas.microsoft.com/office/drawing/2014/main" id="{26BF8C91-EE9F-6553-0A77-CE38AC7B988D}"/>
+              </a:ext>
+            </a:extLst>
+          </p:cNvPr>
+          <p:cNvSpPr/>
+          <p:nvPr>
+            <p:custDataLst>
+              <p:tags r:id="rId2"/>
+            </p:custDataLst>
+          </p:nvPr>
+        </p:nvSpPr>
+        <p:spPr>
+          <a:xfrm>
+            <a:off x="444693" y="1742703"/>
+            <a:ext cx="2371696" cy="2371696"/>
+          </a:xfrm>
+          <a:prstGeom prst="rect">
+            <a:avLst/>
+          </a:prstGeom>
+          <a:blipFill>
+            <a:blip r:embed="rId5">
+              <a:extLst>
+                <a:ext uri="{96DAC541-7B7A-43D3-8B79-37D633B846F1}">
+                  <asvg:svgBlip xmlns:asvg="http://schemas.microsoft.com/office/drawing/2016/SVG/main" r:embed="rId6"/>
+                </a:ext>
+              </a:extLst>
+            </a:blip>
+            <a:stretch>
+              <a:fillRect/>
+            </a:stretch>
+          </a:blipFill>
+          <a:ln>
+            <a:solidFill>
+              <a:srgbClr val="FFFFFF"/>
+            </a:solidFill>
+          </a:ln>
+        </p:spPr>
+        <p:style>
+          <a:lnRef idx="2">
+            <a:schemeClr val="accent1">
+              <a:shade val="15000"/>
+            </a:schemeClr>
+          </a:lnRef>
+          <a:fillRef idx="1">
+            <a:schemeClr val="accent1"/>
+          </a:fillRef>
+          <a:effectRef idx="0">
+            <a:schemeClr val="accent1"/>
+          </a:effectRef>
+          <a:fontRef idx="minor">
+            <a:schemeClr val="lt1"/>
+          </a:fontRef>
+        </p:style>
+        <p:txBody>
+          <a:bodyPr rtlCol="0" anchor="ctr"/>
+          <a:lstStyle/>
+          <a:p>
+            <a:pPr algn="ctr"/>
+            <a:endParaRPr lang="en-US"/>
+          </a:p>
+        </p:txBody>
+      </p:sp>
+      <p:sp>
+        <p:nvSpPr>
+          <p:cNvPr id="3" name="Rectangle 2">
+            <a:extLst>
+              <a:ext uri="{FF2B5EF4-FFF2-40B4-BE49-F238E27FC236}">
+                <a16:creationId xmlns:a16="http://schemas.microsoft.com/office/drawing/2014/main" id="{4924F55C-8A58-68BB-EE18-11A763302114}"/>
+              </a:ext>
+            </a:extLst>
+          </p:cNvPr>
+          <p:cNvSpPr/>
+          <p:nvPr>
+            <p:custDataLst>
+              <p:tags r:id="rId3"/>
+            </p:custDataLst>
+          </p:nvPr>
+        </p:nvSpPr>
+        <p:spPr>
+          <a:xfrm>
+            <a:off x="3112851" y="1000897"/>
+            <a:ext cx="8486226" cy="3855308"/>
+          </a:xfrm>
+          <a:prstGeom prst="rect">
+            <a:avLst/>
+          </a:prstGeom>
+          <a:noFill/>
+          <a:ln w="25400" cap="flat" cmpd="sng" algn="ctr">
+            <a:solidFill>
+              <a:srgbClr val="FFFFFF"/>
+            </a:solidFill>
+            <a:prstDash val="solid"/>
+          </a:ln>
+          <a:effectLst/>
+          <a:extLst>
+            <a:ext uri="{909E8E84-426E-40DD-AFC4-6F175D3DCCD1}">
+              <a14:hiddenFill xmlns:a14="http://schemas.microsoft.com/office/drawing/2010/main">
+                <a:solidFill>
+                  <a:schemeClr val="accent1"/>
+                </a:solidFill>
+              </a14:hiddenFill>
+            </a:ext>
+          </a:extLst>
+        </p:spPr>
+        <p:style>
+          <a:lnRef idx="2">
+            <a:schemeClr val="accent1">
+              <a:shade val="15000"/>
+            </a:schemeClr>
+          </a:lnRef>
+          <a:fillRef idx="1">
+            <a:schemeClr val="accent1"/>
+          </a:fillRef>
+          <a:effectRef idx="0">
+            <a:schemeClr val="accent1"/>
+          </a:effectRef>
+          <a:fontRef idx="minor">
+            <a:schemeClr val="lt1"/>
+          </a:fontRef>
+        </p:style>
+        <p:txBody>
+          <a:bodyPr rtlCol="0" anchor="ctr"/>
+          <a:lstStyle/>
+          <a:p>
+            <a:r>
+              <a:rPr lang="en-US" sz="4000" b="1">
+                <a:solidFill>
+                  <a:srgbClr val="000000"/>
+                </a:solidFill>
+              </a:rPr>
+              <a:t>What question(s) would you want a field evaluation (A/B test or trial) to answer?</a:t>
+            </a:r>
+          </a:p>
+        </p:txBody>
+      </p:sp>
+      <p:sp>
+        <p:nvSpPr>
+          <p:cNvPr id="4" name="Rectangle 3">
+            <a:extLst>
+              <a:ext uri="{FF2B5EF4-FFF2-40B4-BE49-F238E27FC236}">
+                <a16:creationId xmlns:a16="http://schemas.microsoft.com/office/drawing/2014/main" id="{E9B54877-4F38-78DF-CEE0-37B4462AFA4F}"/>
+              </a:ext>
+            </a:extLst>
+          </p:cNvPr>
+          <p:cNvSpPr/>
+          <p:nvPr/>
+        </p:nvSpPr>
+        <p:spPr>
+          <a:xfrm>
+            <a:off x="0" y="5820032"/>
+            <a:ext cx="12192001" cy="1037968"/>
+          </a:xfrm>
+          <a:prstGeom prst="rect">
+            <a:avLst/>
+          </a:prstGeom>
+          <a:solidFill>
+            <a:srgbClr val="198038"/>
+          </a:solidFill>
+          <a:ln w="25400" cap="flat" cmpd="sng" algn="ctr">
+            <a:noFill/>
+            <a:prstDash val="solid"/>
+          </a:ln>
+          <a:effectLst/>
+          <a:extLst>
+            <a:ext uri="{91240B29-F687-4F45-9708-019B960494DF}">
+              <a14:hiddenLine xmlns:a14="http://schemas.microsoft.com/office/drawing/2010/main" w="25400" cap="flat" cmpd="sng" algn="ctr">
+                <a:solidFill>
+                  <a:schemeClr val="accent1">
+                    <a:shade val="15000"/>
+                  </a:schemeClr>
+                </a:solidFill>
+                <a:prstDash val="solid"/>
+              </a14:hiddenLine>
+            </a:ext>
+          </a:extLst>
+        </p:spPr>
+        <p:style>
+          <a:lnRef idx="2">
+            <a:schemeClr val="accent1">
+              <a:shade val="15000"/>
+            </a:schemeClr>
+          </a:lnRef>
+          <a:fillRef idx="1">
+            <a:schemeClr val="accent1"/>
+          </a:fillRef>
+          <a:effectRef idx="0">
+            <a:schemeClr val="accent1"/>
+          </a:effectRef>
+          <a:fontRef idx="minor">
+            <a:schemeClr val="lt1"/>
+          </a:fontRef>
+        </p:style>
+        <p:txBody>
+          <a:bodyPr lIns="741155" tIns="259492" rIns="1852888" bIns="203886" rtlCol="0" anchor="ctr">
+            <a:normAutofit fontScale="85000" lnSpcReduction="10000"/>
+          </a:bodyPr>
+          <a:lstStyle/>
+          <a:p>
+            <a:r>
+              <a:rPr lang="en-US" sz="2600">
+                <a:solidFill>
+                  <a:srgbClr val="FFFFFF"/>
+                </a:solidFill>
+              </a:rPr>
+              <a:t>The </a:t>
+            </a:r>
+            <a:r>
+              <a:rPr lang="en-US" sz="2600">
+                <a:solidFill>
+                  <a:srgbClr val="FFFFFF"/>
+                </a:solidFill>
+                <a:hlinkClick r:id="rId7">
+                  <a:extLst>
+                    <a:ext uri="{A12FA001-AC4F-418D-AE19-62706E023703}">
+                      <ahyp:hlinkClr xmlns:ahyp="http://schemas.microsoft.com/office/drawing/2018/hyperlinkcolor" val="tx"/>
+                    </a:ext>
+                  </a:extLst>
+                </a:hlinkClick>
+              </a:rPr>
+              <a:t>Slido app</a:t>
+            </a:r>
+            <a:r>
+              <a:rPr lang="en-US" sz="2600">
+                <a:solidFill>
+                  <a:srgbClr val="FFFFFF"/>
+                </a:solidFill>
+              </a:rPr>
+              <a:t> must be installed on every computer you’re presenting from</a:t>
+            </a:r>
+          </a:p>
+        </p:txBody>
+      </p:sp>
+      <p:pic>
+        <p:nvPicPr>
+          <p:cNvPr id="6" name="Graphic 5">
+            <a:extLst>
+              <a:ext uri="{FF2B5EF4-FFF2-40B4-BE49-F238E27FC236}">
+                <a16:creationId xmlns:a16="http://schemas.microsoft.com/office/drawing/2014/main" id="{556C15C7-0D32-E4D2-1080-2439722D4E93}"/>
+              </a:ext>
+            </a:extLst>
+          </p:cNvPr>
+          <p:cNvPicPr>
+            <a:picLocks/>
+          </p:cNvPicPr>
+          <p:nvPr/>
+        </p:nvPicPr>
+        <p:blipFill>
+          <a:blip r:embed="rId8">
+            <a:extLst>
+              <a:ext uri="{96DAC541-7B7A-43D3-8B79-37D633B846F1}">
+                <asvg:svgBlip xmlns:asvg="http://schemas.microsoft.com/office/drawing/2016/SVG/main" r:embed="rId9"/>
+              </a:ext>
+            </a:extLst>
+          </a:blip>
+          <a:stretch>
+            <a:fillRect/>
+          </a:stretch>
+        </p:blipFill>
+        <p:spPr>
+          <a:xfrm>
+            <a:off x="296462" y="6190785"/>
+            <a:ext cx="296462" cy="296462"/>
+          </a:xfrm>
+          <a:prstGeom prst="rect">
+            <a:avLst/>
+          </a:prstGeom>
+        </p:spPr>
+      </p:pic>
+      <p:sp>
+        <p:nvSpPr>
+          <p:cNvPr id="7" name="Trapezoid 6">
+            <a:extLst>
+              <a:ext uri="{FF2B5EF4-FFF2-40B4-BE49-F238E27FC236}">
+                <a16:creationId xmlns:a16="http://schemas.microsoft.com/office/drawing/2014/main" id="{3318DFE1-39BE-780D-4402-464F8B3A7095}"/>
+              </a:ext>
+            </a:extLst>
+          </p:cNvPr>
+          <p:cNvSpPr/>
+          <p:nvPr/>
+        </p:nvSpPr>
+        <p:spPr>
+          <a:xfrm rot="2700000">
+            <a:off x="9620371" y="514924"/>
+            <a:ext cx="3335198" cy="778213"/>
+          </a:xfrm>
+          <a:prstGeom prst="trapezoid">
+            <a:avLst>
+              <a:gd name="adj" fmla="val 100000"/>
+            </a:avLst>
+          </a:prstGeom>
+          <a:solidFill>
+            <a:srgbClr val="EDFAF2"/>
+          </a:solidFill>
+          <a:ln w="25400" cap="flat" cmpd="sng" algn="ctr">
+            <a:noFill/>
+            <a:prstDash val="solid"/>
+          </a:ln>
+          <a:effectLst/>
+          <a:extLst>
+            <a:ext uri="{91240B29-F687-4F45-9708-019B960494DF}">
+              <a14:hiddenLine xmlns:a14="http://schemas.microsoft.com/office/drawing/2010/main" w="25400" cap="flat" cmpd="sng" algn="ctr">
+                <a:solidFill>
+                  <a:schemeClr val="accent1">
+                    <a:shade val="15000"/>
+                  </a:schemeClr>
+                </a:solidFill>
+                <a:prstDash val="solid"/>
+              </a14:hiddenLine>
+            </a:ext>
+          </a:extLst>
+        </p:spPr>
+        <p:style>
+          <a:lnRef idx="2">
+            <a:schemeClr val="accent1">
+              <a:shade val="15000"/>
+            </a:schemeClr>
+          </a:lnRef>
+          <a:fillRef idx="1">
+            <a:schemeClr val="accent1"/>
+          </a:fillRef>
+          <a:effectRef idx="0">
+            <a:schemeClr val="accent1"/>
+          </a:effectRef>
+          <a:fontRef idx="minor">
+            <a:schemeClr val="lt1"/>
+          </a:fontRef>
+        </p:style>
+        <p:txBody>
+          <a:bodyPr tIns="0" bIns="0" rtlCol="0" anchor="t">
+            <a:normAutofit fontScale="70000" lnSpcReduction="20000"/>
+          </a:bodyPr>
+          <a:lstStyle/>
+          <a:p>
+            <a:pPr algn="ctr"/>
+            <a:r>
+              <a:rPr lang="en-US" sz="2600" b="1">
+                <a:solidFill>
+                  <a:srgbClr val="198038"/>
+                </a:solidFill>
+              </a:rPr>
+              <a:t>Do not edit
+</a:t>
+            </a:r>
+            <a:r>
+              <a:rPr lang="en-US" sz="2200">
+                <a:solidFill>
+                  <a:srgbClr val="198038"/>
+                </a:solidFill>
+                <a:hlinkClick r:id="rId10">
+                  <a:extLst>
+                    <a:ext uri="{A12FA001-AC4F-418D-AE19-62706E023703}">
+                      <ahyp:hlinkClr xmlns:ahyp="http://schemas.microsoft.com/office/drawing/2018/hyperlinkcolor" val="tx"/>
+                    </a:ext>
+                  </a:extLst>
+                </a:hlinkClick>
+              </a:rPr>
+              <a:t>How to change the design</a:t>
+            </a:r>
+            <a:endParaRPr lang="en-US" sz="2200">
+              <a:solidFill>
+                <a:srgbClr val="198038"/>
+              </a:solidFill>
+            </a:endParaRPr>
+          </a:p>
+        </p:txBody>
+      </p:sp>
+      <p:pic>
+        <p:nvPicPr>
+          <p:cNvPr id="9" name="Graphic 8">
+            <a:extLst>
+              <a:ext uri="{FF2B5EF4-FFF2-40B4-BE49-F238E27FC236}">
+                <a16:creationId xmlns:a16="http://schemas.microsoft.com/office/drawing/2014/main" id="{5D2365BA-5EDC-698F-4971-01CC55351DD4}"/>
+              </a:ext>
+            </a:extLst>
+          </p:cNvPr>
+          <p:cNvPicPr>
+            <a:picLocks/>
+          </p:cNvPicPr>
+          <p:nvPr/>
+        </p:nvPicPr>
+        <p:blipFill>
+          <a:blip r:embed="rId11">
+            <a:extLst>
+              <a:ext uri="{96DAC541-7B7A-43D3-8B79-37D633B846F1}">
+                <asvg:svgBlip xmlns:asvg="http://schemas.microsoft.com/office/drawing/2016/SVG/main" r:embed="rId12"/>
+              </a:ext>
+            </a:extLst>
+          </a:blip>
+          <a:stretch>
+            <a:fillRect/>
+          </a:stretch>
+        </p:blipFill>
+        <p:spPr>
+          <a:xfrm>
+            <a:off x="10746748" y="6153727"/>
+            <a:ext cx="1111733" cy="370578"/>
+          </a:xfrm>
+          <a:prstGeom prst="rect">
+            <a:avLst/>
+          </a:prstGeom>
+        </p:spPr>
+      </p:pic>
+    </p:spTree>
+    <p:custDataLst>
+      <p:tags r:id="rId1"/>
+    </p:custDataLst>
+    <p:extLst>
+      <p:ext uri="{BB962C8B-B14F-4D97-AF65-F5344CB8AC3E}">
+        <p14:creationId xmlns:p14="http://schemas.microsoft.com/office/powerpoint/2010/main" val="1924041657"/>
+      </p:ext>
+    </p:extLst>
+  </p:cSld>
+  <p:clrMapOvr>
+    <a:masterClrMapping/>
+  </p:clrMapOvr>
+  <p:timing>
+    <p:tnLst>
+      <p:par>
+        <p:cTn id="1" dur="indefinite" restart="never" nodeType="tmRoot">
+          <p:childTnLst>
+            <p:seq concurrent="1" nextAc="seek">
+              <p:cTn id="2" dur="indefinite" nodeType="mainSeq">
+                <p:childTnLst>
+                  <p:par>
+                    <p:cTn id="3" fill="hold">
+                      <p:stCondLst>
+                        <p:cond delay="indefinite"/>
+                      </p:stCondLst>
+                      <p:childTnLst>
+                        <p:par>
+                          <p:cTn id="4" fill="hold">
+                            <p:stCondLst>
+                              <p:cond delay="0"/>
+                            </p:stCondLst>
+                            <p:childTnLst>
+                              <p:par>
+                                <p:cTn id="5" presetID="26" presetClass="emph" presetSubtype="0" fill="hold" grpId="0" nodeType="clickEffect">
+                                  <p:stCondLst>
+                                    <p:cond delay="0"/>
+                                  </p:stCondLst>
+                                  <p:childTnLst>
+                                    <p:animEffect transition="out" filter="fade">
+                                      <p:cBhvr>
+                                        <p:cTn id="6" dur="50" tmFilter="0, 0; .2, .5; .8, .5; 1, 0"/>
+                                        <p:tgtEl>
+                                          <p:spTgt spid="3"/>
+                                        </p:tgtEl>
+                                      </p:cBhvr>
+                                    </p:animEffect>
+                                    <p:animScale>
+                                      <p:cBhvr>
+                                        <p:cTn id="7" dur="25" autoRev="1" fill="hold"/>
+                                        <p:tgtEl>
+                                          <p:spTgt spid="3"/>
+                                        </p:tgtEl>
+                                      </p:cBhvr>
+                                      <p:by x="105000" y="105000"/>
+                                    </p:animScale>
+                                  </p:childTnLst>
+                                </p:cTn>
+                              </p:par>
+                            </p:childTnLst>
+                          </p:cTn>
+                        </p:par>
+                      </p:childTnLst>
+                    </p:cTn>
+                  </p:par>
+                </p:childTnLst>
+              </p:cTn>
+              <p:prevCondLst>
+                <p:cond evt="onPrev" delay="0">
+                  <p:tgtEl>
+                    <p:sldTgt/>
+                  </p:tgtEl>
+                </p:cond>
+              </p:prevCondLst>
+              <p:nextCondLst>
+                <p:cond evt="onNext" delay="0">
+                  <p:tgtEl>
+                    <p:sldTgt/>
+                  </p:tgtEl>
+                </p:cond>
+              </p:nextCondLst>
+            </p:seq>
+          </p:childTnLst>
+        </p:cTn>
+      </p:par>
+    </p:tnLst>
+    <p:bldLst>
+      <p:bldP spid="3" grpId="0" animBg="1"/>
+    </p:bldLst>
+  </p:timing>
+</p:sld>
+</file>
+
+<file path=ppt/slides/slide7.xml><?xml version="1.0" encoding="utf-8"?>
 <p:sld xmlns:a="http://schemas.openxmlformats.org/drawingml/2006/main" xmlns:r="http://schemas.openxmlformats.org/officeDocument/2006/relationships" xmlns:p="http://schemas.openxmlformats.org/presentationml/2006/main">
   <p:cSld>
     <p:spTree>
@@ -18853,84 +22207,6 @@
             </a:pPr>
             <a:r>
               <a:rPr lang="en-US" dirty="0"/>
-              <a:t>What is the purpose of doing field validation?</a:t>
-            </a:r>
-            <a:endParaRPr dirty="0"/>
-          </a:p>
-        </p:txBody>
-      </p:sp>
-    </p:spTree>
-  </p:cSld>
-  <p:clrMapOvr>
-    <a:masterClrMapping/>
-  </p:clrMapOvr>
-</p:sld>
-</file>
-
-<file path=ppt/slides/slide6.xml><?xml version="1.0" encoding="utf-8"?>
-<p:sld xmlns:a="http://schemas.openxmlformats.org/drawingml/2006/main" xmlns:r="http://schemas.openxmlformats.org/officeDocument/2006/relationships" xmlns:p="http://schemas.openxmlformats.org/presentationml/2006/main">
-  <p:cSld>
-    <p:spTree>
-      <p:nvGrpSpPr>
-        <p:cNvPr id="1" name="Shape 257"/>
-        <p:cNvGrpSpPr/>
-        <p:nvPr/>
-      </p:nvGrpSpPr>
-      <p:grpSpPr>
-        <a:xfrm>
-          <a:off x="0" y="0"/>
-          <a:ext cx="0" cy="0"/>
-          <a:chOff x="0" y="0"/>
-          <a:chExt cx="0" cy="0"/>
-        </a:xfrm>
-      </p:grpSpPr>
-      <p:sp>
-        <p:nvSpPr>
-          <p:cNvPr id="258" name="Google Shape;258;p36"/>
-          <p:cNvSpPr txBox="1">
-            <a:spLocks noGrp="1"/>
-          </p:cNvSpPr>
-          <p:nvPr>
-            <p:ph type="title"/>
-          </p:nvPr>
-        </p:nvSpPr>
-        <p:spPr>
-          <a:xfrm>
-            <a:off x="415600" y="86563"/>
-            <a:ext cx="11360700" cy="763500"/>
-          </a:xfrm>
-          <a:prstGeom prst="rect">
-            <a:avLst/>
-          </a:prstGeom>
-          <a:noFill/>
-          <a:ln>
-            <a:noFill/>
-          </a:ln>
-        </p:spPr>
-        <p:txBody>
-          <a:bodyPr spcFirstLastPara="1" wrap="square" lIns="121900" tIns="121900" rIns="121900" bIns="121900" anchor="t" anchorCtr="0">
-            <a:noAutofit/>
-          </a:bodyPr>
-          <a:lstStyle/>
-          <a:p>
-            <a:pPr marL="0" lvl="0" indent="0" algn="l" rtl="0">
-              <a:lnSpc>
-                <a:spcPct val="100000"/>
-              </a:lnSpc>
-              <a:spcBef>
-                <a:spcPts val="0"/>
-              </a:spcBef>
-              <a:spcAft>
-                <a:spcPts val="0"/>
-              </a:spcAft>
-              <a:buClr>
-                <a:srgbClr val="FFFFFF"/>
-              </a:buClr>
-              <a:buSzPts val="3700"/>
-              <a:buNone/>
-            </a:pPr>
-            <a:r>
-              <a:rPr lang="en-US" dirty="0"/>
               <a:t>Field Validation: Beyond A/B Testing</a:t>
             </a:r>
             <a:endParaRPr dirty="0"/>
@@ -18997,7 +22273,7 @@
             </a:pPr>
             <a:r>
               <a:rPr lang="en-US" sz="2400" dirty="0"/>
-              <a:t>Validation on truly unseen future data; only way to ensure against leakage</a:t>
+              <a:t>Validation on truly unseen future data; only way to ensure against leakage and confounders</a:t>
             </a:r>
             <a:br>
               <a:rPr lang="en-US" dirty="0"/>
@@ -19471,7 +22747,7 @@
 </p:sld>
 </file>
 
-<file path=ppt/slides/slide7.xml><?xml version="1.0" encoding="utf-8"?>
+<file path=ppt/slides/slide8.xml><?xml version="1.0" encoding="utf-8"?>
 <p:sld xmlns:a="http://schemas.openxmlformats.org/drawingml/2006/main" xmlns:r="http://schemas.openxmlformats.org/officeDocument/2006/relationships" xmlns:p="http://schemas.openxmlformats.org/presentationml/2006/main">
   <p:cSld>
     <p:spTree>
@@ -19947,7 +23223,7 @@
 </p:sld>
 </file>
 
-<file path=ppt/slides/slide8.xml><?xml version="1.0" encoding="utf-8"?>
+<file path=ppt/slides/slide9.xml><?xml version="1.0" encoding="utf-8"?>
 <p:sld xmlns:a="http://schemas.openxmlformats.org/drawingml/2006/main" xmlns:r="http://schemas.openxmlformats.org/officeDocument/2006/relationships" xmlns:p="http://schemas.openxmlformats.org/presentationml/2006/main">
   <p:cSld>
     <p:spTree>
@@ -20477,2199 +23753,48 @@
 </p:sld>
 </file>
 
-<file path=ppt/slides/slide9.xml><?xml version="1.0" encoding="utf-8"?>
-<p:sld xmlns:a="http://schemas.openxmlformats.org/drawingml/2006/main" xmlns:r="http://schemas.openxmlformats.org/officeDocument/2006/relationships" xmlns:p="http://schemas.openxmlformats.org/presentationml/2006/main">
-  <p:cSld>
-    <p:spTree>
-      <p:nvGrpSpPr>
-        <p:cNvPr id="1" name="Shape 1225"/>
-        <p:cNvGrpSpPr/>
-        <p:nvPr/>
-      </p:nvGrpSpPr>
-      <p:grpSpPr>
-        <a:xfrm>
-          <a:off x="0" y="0"/>
-          <a:ext cx="0" cy="0"/>
-          <a:chOff x="0" y="0"/>
-          <a:chExt cx="0" cy="0"/>
-        </a:xfrm>
-      </p:grpSpPr>
-      <p:sp>
-        <p:nvSpPr>
-          <p:cNvPr id="1226" name="Google Shape;1226;p142"/>
-          <p:cNvSpPr txBox="1">
-            <a:spLocks noGrp="1"/>
-          </p:cNvSpPr>
-          <p:nvPr>
-            <p:ph type="title"/>
-          </p:nvPr>
-        </p:nvSpPr>
-        <p:spPr>
-          <a:prstGeom prst="rect">
-            <a:avLst/>
-          </a:prstGeom>
-        </p:spPr>
-        <p:txBody>
-          <a:bodyPr spcFirstLastPara="1" wrap="square" lIns="121900" tIns="121900" rIns="121900" bIns="121900" anchor="ctr" anchorCtr="0">
-            <a:noAutofit/>
-          </a:bodyPr>
-          <a:lstStyle/>
-          <a:p>
-            <a:r>
-              <a:rPr lang="en-US" sz="3200" dirty="0"/>
-              <a:t>CASE STUDY: Mental Health and Incarceration</a:t>
-            </a:r>
-            <a:endParaRPr sz="3200" dirty="0"/>
-          </a:p>
-        </p:txBody>
-      </p:sp>
-      <p:sp>
-        <p:nvSpPr>
-          <p:cNvPr id="12" name="Google Shape;75;p10">
-            <a:extLst>
-              <a:ext uri="{FF2B5EF4-FFF2-40B4-BE49-F238E27FC236}">
-                <a16:creationId xmlns:a16="http://schemas.microsoft.com/office/drawing/2014/main" id="{8C379909-E112-AF40-AB06-F3DCE0D1D789}"/>
-              </a:ext>
-            </a:extLst>
-          </p:cNvPr>
-          <p:cNvSpPr/>
-          <p:nvPr/>
-        </p:nvSpPr>
-        <p:spPr>
-          <a:xfrm>
-            <a:off x="242315" y="1399344"/>
-            <a:ext cx="3352656" cy="4888721"/>
-          </a:xfrm>
-          <a:prstGeom prst="rect">
-            <a:avLst/>
-          </a:prstGeom>
-          <a:solidFill>
-            <a:schemeClr val="lt2"/>
-          </a:solidFill>
-          <a:ln w="9525" cap="flat" cmpd="sng">
-            <a:solidFill>
-              <a:schemeClr val="dk2"/>
-            </a:solidFill>
-            <a:prstDash val="solid"/>
-            <a:round/>
-            <a:headEnd type="none" w="sm" len="sm"/>
-            <a:tailEnd type="none" w="sm" len="sm"/>
-          </a:ln>
-        </p:spPr>
-        <p:txBody>
-          <a:bodyPr spcFirstLastPara="1" wrap="square" lIns="121900" tIns="121900" rIns="121900" bIns="121900" anchor="ctr" anchorCtr="0">
-            <a:noAutofit/>
-          </a:bodyPr>
-          <a:lstStyle/>
-          <a:p>
-            <a:pPr algn="ctr"/>
-            <a:endParaRPr sz="1867" dirty="0">
-              <a:latin typeface="Century Gothic"/>
-              <a:ea typeface="Century Gothic"/>
-              <a:cs typeface="Century Gothic"/>
-              <a:sym typeface="Century Gothic"/>
-            </a:endParaRPr>
-          </a:p>
-        </p:txBody>
-      </p:sp>
-      <p:sp>
-        <p:nvSpPr>
-          <p:cNvPr id="2" name="TextBox 1">
-            <a:extLst>
-              <a:ext uri="{FF2B5EF4-FFF2-40B4-BE49-F238E27FC236}">
-                <a16:creationId xmlns:a16="http://schemas.microsoft.com/office/drawing/2014/main" id="{624431EB-4D8A-1442-9803-AA95ADA5372B}"/>
-              </a:ext>
-            </a:extLst>
-          </p:cNvPr>
-          <p:cNvSpPr txBox="1"/>
-          <p:nvPr/>
-        </p:nvSpPr>
-        <p:spPr>
-          <a:xfrm>
-            <a:off x="415600" y="1479367"/>
-            <a:ext cx="2959465" cy="830997"/>
-          </a:xfrm>
-          <a:prstGeom prst="rect">
-            <a:avLst/>
-          </a:prstGeom>
-          <a:noFill/>
-        </p:spPr>
-        <p:txBody>
-          <a:bodyPr wrap="none" rtlCol="0">
-            <a:spAutoFit/>
-          </a:bodyPr>
-          <a:lstStyle/>
-          <a:p>
-            <a:r>
-              <a:rPr lang="en-US" sz="2400" dirty="0">
-                <a:latin typeface="Century Gothic" panose="020B0502020202020204" pitchFamily="34" charset="0"/>
-              </a:rPr>
-              <a:t>Released From Jail</a:t>
-            </a:r>
-          </a:p>
-          <a:p>
-            <a:r>
-              <a:rPr lang="en-US" sz="2400" dirty="0">
-                <a:latin typeface="Century Gothic" panose="020B0502020202020204" pitchFamily="34" charset="0"/>
-              </a:rPr>
-              <a:t>In Past 3 Years</a:t>
-            </a:r>
-          </a:p>
-        </p:txBody>
-      </p:sp>
-      <p:sp>
-        <p:nvSpPr>
-          <p:cNvPr id="14" name="Google Shape;75;p10">
-            <a:extLst>
-              <a:ext uri="{FF2B5EF4-FFF2-40B4-BE49-F238E27FC236}">
-                <a16:creationId xmlns:a16="http://schemas.microsoft.com/office/drawing/2014/main" id="{4DF198BD-39AA-964B-8EB5-FB1B260A34A5}"/>
-              </a:ext>
-            </a:extLst>
-          </p:cNvPr>
-          <p:cNvSpPr/>
-          <p:nvPr/>
-        </p:nvSpPr>
-        <p:spPr>
-          <a:xfrm>
-            <a:off x="789142" y="3429000"/>
-            <a:ext cx="2665062" cy="2734106"/>
-          </a:xfrm>
-          <a:prstGeom prst="rect">
-            <a:avLst/>
-          </a:prstGeom>
-          <a:solidFill>
-            <a:srgbClr val="0070C0"/>
-          </a:solidFill>
-          <a:ln w="9525" cap="flat" cmpd="sng">
-            <a:solidFill>
-              <a:schemeClr val="dk2"/>
-            </a:solidFill>
-            <a:prstDash val="solid"/>
-            <a:round/>
-            <a:headEnd type="none" w="sm" len="sm"/>
-            <a:tailEnd type="none" w="sm" len="sm"/>
-          </a:ln>
-        </p:spPr>
-        <p:txBody>
-          <a:bodyPr spcFirstLastPara="1" wrap="square" lIns="121900" tIns="121900" rIns="121900" bIns="121900" anchor="ctr" anchorCtr="0">
-            <a:noAutofit/>
-          </a:bodyPr>
-          <a:lstStyle/>
-          <a:p>
-            <a:pPr algn="ctr"/>
-            <a:endParaRPr sz="1867" dirty="0">
-              <a:latin typeface="Century Gothic"/>
-              <a:ea typeface="Century Gothic"/>
-              <a:cs typeface="Century Gothic"/>
-              <a:sym typeface="Century Gothic"/>
-            </a:endParaRPr>
-          </a:p>
-        </p:txBody>
-      </p:sp>
-      <p:sp>
-        <p:nvSpPr>
-          <p:cNvPr id="15" name="TextBox 14">
-            <a:extLst>
-              <a:ext uri="{FF2B5EF4-FFF2-40B4-BE49-F238E27FC236}">
-                <a16:creationId xmlns:a16="http://schemas.microsoft.com/office/drawing/2014/main" id="{3EE42FA2-6A12-0044-AA06-B868FCDE372D}"/>
-              </a:ext>
-            </a:extLst>
-          </p:cNvPr>
-          <p:cNvSpPr txBox="1"/>
-          <p:nvPr/>
-        </p:nvSpPr>
-        <p:spPr>
-          <a:xfrm>
-            <a:off x="890681" y="3610880"/>
-            <a:ext cx="2563522" cy="1200329"/>
-          </a:xfrm>
-          <a:prstGeom prst="rect">
-            <a:avLst/>
-          </a:prstGeom>
-          <a:noFill/>
-        </p:spPr>
-        <p:txBody>
-          <a:bodyPr wrap="none" rtlCol="0">
-            <a:spAutoFit/>
-          </a:bodyPr>
-          <a:lstStyle/>
-          <a:p>
-            <a:r>
-              <a:rPr lang="en-US" sz="2400" dirty="0">
-                <a:solidFill>
-                  <a:schemeClr val="bg1"/>
-                </a:solidFill>
-                <a:latin typeface="Century Gothic" panose="020B0502020202020204" pitchFamily="34" charset="0"/>
-              </a:rPr>
-              <a:t>…With History of</a:t>
-            </a:r>
-          </a:p>
-          <a:p>
-            <a:r>
-              <a:rPr lang="en-US" sz="2400" dirty="0">
-                <a:solidFill>
-                  <a:schemeClr val="bg1"/>
-                </a:solidFill>
-                <a:latin typeface="Century Gothic" panose="020B0502020202020204" pitchFamily="34" charset="0"/>
-              </a:rPr>
-              <a:t>Mental Health</a:t>
-            </a:r>
-          </a:p>
-          <a:p>
-            <a:r>
-              <a:rPr lang="en-US" sz="2400" dirty="0">
-                <a:solidFill>
-                  <a:schemeClr val="bg1"/>
-                </a:solidFill>
-                <a:latin typeface="Century Gothic" panose="020B0502020202020204" pitchFamily="34" charset="0"/>
-              </a:rPr>
-              <a:t>Needs</a:t>
-            </a:r>
-          </a:p>
-        </p:txBody>
-      </p:sp>
-      <p:grpSp>
-        <p:nvGrpSpPr>
-          <p:cNvPr id="16" name="Group 15">
-            <a:extLst>
-              <a:ext uri="{FF2B5EF4-FFF2-40B4-BE49-F238E27FC236}">
-                <a16:creationId xmlns:a16="http://schemas.microsoft.com/office/drawing/2014/main" id="{893B8E00-7081-1F47-9553-568F65765633}"/>
-              </a:ext>
-            </a:extLst>
-          </p:cNvPr>
-          <p:cNvGrpSpPr/>
-          <p:nvPr/>
-        </p:nvGrpSpPr>
-        <p:grpSpPr>
-          <a:xfrm>
-            <a:off x="3857489" y="3829293"/>
-            <a:ext cx="860597" cy="763501"/>
-            <a:chOff x="4389120" y="2462784"/>
-            <a:chExt cx="1706830" cy="1514258"/>
-          </a:xfrm>
-        </p:grpSpPr>
-        <p:sp>
-          <p:nvSpPr>
-            <p:cNvPr id="17" name="Oval 16">
-              <a:extLst>
-                <a:ext uri="{FF2B5EF4-FFF2-40B4-BE49-F238E27FC236}">
-                  <a16:creationId xmlns:a16="http://schemas.microsoft.com/office/drawing/2014/main" id="{F71938DB-AC52-2A4F-903C-9A0F093EEAA8}"/>
-                </a:ext>
-              </a:extLst>
-            </p:cNvPr>
-            <p:cNvSpPr/>
-            <p:nvPr/>
-          </p:nvSpPr>
-          <p:spPr>
-            <a:xfrm>
-              <a:off x="4389120" y="2462784"/>
-              <a:ext cx="402336" cy="402336"/>
-            </a:xfrm>
-            <a:prstGeom prst="ellipse">
-              <a:avLst/>
-            </a:prstGeom>
-            <a:solidFill>
-              <a:schemeClr val="bg2"/>
-            </a:solidFill>
-            <a:ln w="9525">
-              <a:solidFill>
-                <a:schemeClr val="tx1"/>
-              </a:solidFill>
-            </a:ln>
-          </p:spPr>
-          <p:style>
-            <a:lnRef idx="2">
-              <a:schemeClr val="accent1">
-                <a:shade val="50000"/>
-              </a:schemeClr>
-            </a:lnRef>
-            <a:fillRef idx="1">
-              <a:schemeClr val="accent1"/>
-            </a:fillRef>
-            <a:effectRef idx="0">
-              <a:schemeClr val="accent1"/>
-            </a:effectRef>
-            <a:fontRef idx="minor">
-              <a:schemeClr val="lt1"/>
-            </a:fontRef>
-          </p:style>
-          <p:txBody>
-            <a:bodyPr rtlCol="0" anchor="ctr"/>
-            <a:lstStyle/>
-            <a:p>
-              <a:pPr algn="ctr"/>
-              <a:endParaRPr lang="en-US"/>
-            </a:p>
-          </p:txBody>
-        </p:sp>
-        <p:sp>
-          <p:nvSpPr>
-            <p:cNvPr id="18" name="Oval 17">
-              <a:extLst>
-                <a:ext uri="{FF2B5EF4-FFF2-40B4-BE49-F238E27FC236}">
-                  <a16:creationId xmlns:a16="http://schemas.microsoft.com/office/drawing/2014/main" id="{443EB63D-67D3-4E45-B65B-3AE6C37117B7}"/>
-                </a:ext>
-              </a:extLst>
-            </p:cNvPr>
-            <p:cNvSpPr/>
-            <p:nvPr/>
-          </p:nvSpPr>
-          <p:spPr>
-            <a:xfrm>
-              <a:off x="4389120" y="3018745"/>
-              <a:ext cx="402336" cy="402336"/>
-            </a:xfrm>
-            <a:prstGeom prst="ellipse">
-              <a:avLst/>
-            </a:prstGeom>
-            <a:solidFill>
-              <a:schemeClr val="bg2"/>
-            </a:solidFill>
-            <a:ln w="9525">
-              <a:solidFill>
-                <a:schemeClr val="tx1"/>
-              </a:solidFill>
-            </a:ln>
-          </p:spPr>
-          <p:style>
-            <a:lnRef idx="2">
-              <a:schemeClr val="accent1">
-                <a:shade val="50000"/>
-              </a:schemeClr>
-            </a:lnRef>
-            <a:fillRef idx="1">
-              <a:schemeClr val="accent1"/>
-            </a:fillRef>
-            <a:effectRef idx="0">
-              <a:schemeClr val="accent1"/>
-            </a:effectRef>
-            <a:fontRef idx="minor">
-              <a:schemeClr val="lt1"/>
-            </a:fontRef>
-          </p:style>
-          <p:txBody>
-            <a:bodyPr rtlCol="0" anchor="ctr"/>
-            <a:lstStyle/>
-            <a:p>
-              <a:pPr algn="ctr"/>
-              <a:endParaRPr lang="en-US"/>
-            </a:p>
-          </p:txBody>
-        </p:sp>
-        <p:sp>
-          <p:nvSpPr>
-            <p:cNvPr id="19" name="Oval 18">
-              <a:extLst>
-                <a:ext uri="{FF2B5EF4-FFF2-40B4-BE49-F238E27FC236}">
-                  <a16:creationId xmlns:a16="http://schemas.microsoft.com/office/drawing/2014/main" id="{B868292F-40CE-8846-909D-8E042F9E7876}"/>
-                </a:ext>
-              </a:extLst>
-            </p:cNvPr>
-            <p:cNvSpPr/>
-            <p:nvPr/>
-          </p:nvSpPr>
-          <p:spPr>
-            <a:xfrm>
-              <a:off x="4389120" y="3574706"/>
-              <a:ext cx="402336" cy="402336"/>
-            </a:xfrm>
-            <a:prstGeom prst="ellipse">
-              <a:avLst/>
-            </a:prstGeom>
-            <a:solidFill>
-              <a:schemeClr val="bg2"/>
-            </a:solidFill>
-            <a:ln w="9525">
-              <a:solidFill>
-                <a:schemeClr val="tx1"/>
-              </a:solidFill>
-            </a:ln>
-          </p:spPr>
-          <p:style>
-            <a:lnRef idx="2">
-              <a:schemeClr val="accent1">
-                <a:shade val="50000"/>
-              </a:schemeClr>
-            </a:lnRef>
-            <a:fillRef idx="1">
-              <a:schemeClr val="accent1"/>
-            </a:fillRef>
-            <a:effectRef idx="0">
-              <a:schemeClr val="accent1"/>
-            </a:effectRef>
-            <a:fontRef idx="minor">
-              <a:schemeClr val="lt1"/>
-            </a:fontRef>
-          </p:style>
-          <p:txBody>
-            <a:bodyPr rtlCol="0" anchor="ctr"/>
-            <a:lstStyle/>
-            <a:p>
-              <a:pPr algn="ctr"/>
-              <a:endParaRPr lang="en-US"/>
-            </a:p>
-          </p:txBody>
-        </p:sp>
-        <p:sp>
-          <p:nvSpPr>
-            <p:cNvPr id="20" name="Oval 19">
-              <a:extLst>
-                <a:ext uri="{FF2B5EF4-FFF2-40B4-BE49-F238E27FC236}">
-                  <a16:creationId xmlns:a16="http://schemas.microsoft.com/office/drawing/2014/main" id="{87CBACA9-7504-BE46-A082-FA1F0DB3991A}"/>
-                </a:ext>
-              </a:extLst>
-            </p:cNvPr>
-            <p:cNvSpPr/>
-            <p:nvPr/>
-          </p:nvSpPr>
-          <p:spPr>
-            <a:xfrm>
-              <a:off x="5029200" y="2768809"/>
-              <a:ext cx="402336" cy="402336"/>
-            </a:xfrm>
-            <a:prstGeom prst="ellipse">
-              <a:avLst/>
-            </a:prstGeom>
-            <a:solidFill>
-              <a:schemeClr val="bg2"/>
-            </a:solidFill>
-            <a:ln w="9525">
-              <a:solidFill>
-                <a:schemeClr val="tx1"/>
-              </a:solidFill>
-            </a:ln>
-          </p:spPr>
-          <p:style>
-            <a:lnRef idx="2">
-              <a:schemeClr val="accent1">
-                <a:shade val="50000"/>
-              </a:schemeClr>
-            </a:lnRef>
-            <a:fillRef idx="1">
-              <a:schemeClr val="accent1"/>
-            </a:fillRef>
-            <a:effectRef idx="0">
-              <a:schemeClr val="accent1"/>
-            </a:effectRef>
-            <a:fontRef idx="minor">
-              <a:schemeClr val="lt1"/>
-            </a:fontRef>
-          </p:style>
-          <p:txBody>
-            <a:bodyPr rtlCol="0" anchor="ctr"/>
-            <a:lstStyle/>
-            <a:p>
-              <a:pPr algn="ctr"/>
-              <a:endParaRPr lang="en-US"/>
-            </a:p>
-          </p:txBody>
-        </p:sp>
-        <p:sp>
-          <p:nvSpPr>
-            <p:cNvPr id="25" name="Oval 24">
-              <a:extLst>
-                <a:ext uri="{FF2B5EF4-FFF2-40B4-BE49-F238E27FC236}">
-                  <a16:creationId xmlns:a16="http://schemas.microsoft.com/office/drawing/2014/main" id="{7E7DE2BA-187D-4144-BCB9-4822657FE213}"/>
-                </a:ext>
-              </a:extLst>
-            </p:cNvPr>
-            <p:cNvSpPr/>
-            <p:nvPr/>
-          </p:nvSpPr>
-          <p:spPr>
-            <a:xfrm>
-              <a:off x="5029200" y="3350379"/>
-              <a:ext cx="402336" cy="402336"/>
-            </a:xfrm>
-            <a:prstGeom prst="ellipse">
-              <a:avLst/>
-            </a:prstGeom>
-            <a:solidFill>
-              <a:schemeClr val="bg2"/>
-            </a:solidFill>
-            <a:ln w="9525">
-              <a:solidFill>
-                <a:schemeClr val="tx1"/>
-              </a:solidFill>
-            </a:ln>
-          </p:spPr>
-          <p:style>
-            <a:lnRef idx="2">
-              <a:schemeClr val="accent1">
-                <a:shade val="50000"/>
-              </a:schemeClr>
-            </a:lnRef>
-            <a:fillRef idx="1">
-              <a:schemeClr val="accent1"/>
-            </a:fillRef>
-            <a:effectRef idx="0">
-              <a:schemeClr val="accent1"/>
-            </a:effectRef>
-            <a:fontRef idx="minor">
-              <a:schemeClr val="lt1"/>
-            </a:fontRef>
-          </p:style>
-          <p:txBody>
-            <a:bodyPr rtlCol="0" anchor="ctr"/>
-            <a:lstStyle/>
-            <a:p>
-              <a:pPr algn="ctr"/>
-              <a:endParaRPr lang="en-US"/>
-            </a:p>
-          </p:txBody>
-        </p:sp>
-        <p:sp>
-          <p:nvSpPr>
-            <p:cNvPr id="28" name="Oval 27">
-              <a:extLst>
-                <a:ext uri="{FF2B5EF4-FFF2-40B4-BE49-F238E27FC236}">
-                  <a16:creationId xmlns:a16="http://schemas.microsoft.com/office/drawing/2014/main" id="{1A7BFEE9-9AB5-0E4D-ACF5-9DFA5671C333}"/>
-                </a:ext>
-              </a:extLst>
-            </p:cNvPr>
-            <p:cNvSpPr/>
-            <p:nvPr/>
-          </p:nvSpPr>
-          <p:spPr>
-            <a:xfrm>
-              <a:off x="5693614" y="2757135"/>
-              <a:ext cx="402336" cy="402336"/>
-            </a:xfrm>
-            <a:prstGeom prst="ellipse">
-              <a:avLst/>
-            </a:prstGeom>
-            <a:solidFill>
-              <a:schemeClr val="bg2"/>
-            </a:solidFill>
-            <a:ln w="9525">
-              <a:solidFill>
-                <a:schemeClr val="tx1"/>
-              </a:solidFill>
-            </a:ln>
-          </p:spPr>
-          <p:style>
-            <a:lnRef idx="2">
-              <a:schemeClr val="accent1">
-                <a:shade val="50000"/>
-              </a:schemeClr>
-            </a:lnRef>
-            <a:fillRef idx="1">
-              <a:schemeClr val="accent1"/>
-            </a:fillRef>
-            <a:effectRef idx="0">
-              <a:schemeClr val="accent1"/>
-            </a:effectRef>
-            <a:fontRef idx="minor">
-              <a:schemeClr val="lt1"/>
-            </a:fontRef>
-          </p:style>
-          <p:txBody>
-            <a:bodyPr rtlCol="0" anchor="ctr"/>
-            <a:lstStyle/>
-            <a:p>
-              <a:pPr algn="ctr"/>
-              <a:endParaRPr lang="en-US"/>
-            </a:p>
-          </p:txBody>
-        </p:sp>
-        <p:sp>
-          <p:nvSpPr>
-            <p:cNvPr id="29" name="Oval 28">
-              <a:extLst>
-                <a:ext uri="{FF2B5EF4-FFF2-40B4-BE49-F238E27FC236}">
-                  <a16:creationId xmlns:a16="http://schemas.microsoft.com/office/drawing/2014/main" id="{C6B3BF28-ABC9-CB4E-8050-B49E9B365028}"/>
-                </a:ext>
-              </a:extLst>
-            </p:cNvPr>
-            <p:cNvSpPr/>
-            <p:nvPr/>
-          </p:nvSpPr>
-          <p:spPr>
-            <a:xfrm>
-              <a:off x="5669280" y="3338187"/>
-              <a:ext cx="402336" cy="402336"/>
-            </a:xfrm>
-            <a:prstGeom prst="ellipse">
-              <a:avLst/>
-            </a:prstGeom>
-            <a:solidFill>
-              <a:schemeClr val="bg2"/>
-            </a:solidFill>
-            <a:ln w="9525">
-              <a:solidFill>
-                <a:schemeClr val="tx1"/>
-              </a:solidFill>
-            </a:ln>
-          </p:spPr>
-          <p:style>
-            <a:lnRef idx="2">
-              <a:schemeClr val="accent1">
-                <a:shade val="50000"/>
-              </a:schemeClr>
-            </a:lnRef>
-            <a:fillRef idx="1">
-              <a:schemeClr val="accent1"/>
-            </a:fillRef>
-            <a:effectRef idx="0">
-              <a:schemeClr val="accent1"/>
-            </a:effectRef>
-            <a:fontRef idx="minor">
-              <a:schemeClr val="lt1"/>
-            </a:fontRef>
-          </p:style>
-          <p:txBody>
-            <a:bodyPr rtlCol="0" anchor="ctr"/>
-            <a:lstStyle/>
-            <a:p>
-              <a:pPr algn="ctr"/>
-              <a:endParaRPr lang="en-US"/>
-            </a:p>
-          </p:txBody>
-        </p:sp>
-        <p:cxnSp>
-          <p:nvCxnSpPr>
-            <p:cNvPr id="30" name="Straight Connector 29">
-              <a:extLst>
-                <a:ext uri="{FF2B5EF4-FFF2-40B4-BE49-F238E27FC236}">
-                  <a16:creationId xmlns:a16="http://schemas.microsoft.com/office/drawing/2014/main" id="{8472FECF-6CFC-334F-BE08-5E927AAD8527}"/>
-                </a:ext>
-              </a:extLst>
-            </p:cNvPr>
-            <p:cNvCxnSpPr>
-              <a:stCxn id="17" idx="6"/>
-              <a:endCxn id="20" idx="2"/>
-            </p:cNvCxnSpPr>
-            <p:nvPr/>
-          </p:nvCxnSpPr>
-          <p:spPr>
-            <a:xfrm>
-              <a:off x="4791456" y="2663952"/>
-              <a:ext cx="237744" cy="306025"/>
-            </a:xfrm>
-            <a:prstGeom prst="line">
-              <a:avLst/>
-            </a:prstGeom>
-            <a:ln w="28575"/>
-          </p:spPr>
-          <p:style>
-            <a:lnRef idx="1">
-              <a:schemeClr val="dk1"/>
-            </a:lnRef>
-            <a:fillRef idx="0">
-              <a:schemeClr val="dk1"/>
-            </a:fillRef>
-            <a:effectRef idx="0">
-              <a:schemeClr val="dk1"/>
-            </a:effectRef>
-            <a:fontRef idx="minor">
-              <a:schemeClr val="tx1"/>
-            </a:fontRef>
-          </p:style>
-        </p:cxnSp>
-        <p:cxnSp>
-          <p:nvCxnSpPr>
-            <p:cNvPr id="31" name="Straight Connector 30">
-              <a:extLst>
-                <a:ext uri="{FF2B5EF4-FFF2-40B4-BE49-F238E27FC236}">
-                  <a16:creationId xmlns:a16="http://schemas.microsoft.com/office/drawing/2014/main" id="{FE2C2F4C-E9DD-E64A-8D0A-73CC3AEBD025}"/>
-                </a:ext>
-              </a:extLst>
-            </p:cNvPr>
-            <p:cNvCxnSpPr>
-              <a:cxnSpLocks/>
-              <a:stCxn id="17" idx="6"/>
-            </p:cNvCxnSpPr>
-            <p:nvPr/>
-          </p:nvCxnSpPr>
-          <p:spPr>
-            <a:xfrm>
-              <a:off x="4791456" y="2663952"/>
-              <a:ext cx="237744" cy="861986"/>
-            </a:xfrm>
-            <a:prstGeom prst="line">
-              <a:avLst/>
-            </a:prstGeom>
-            <a:ln w="28575"/>
-          </p:spPr>
-          <p:style>
-            <a:lnRef idx="1">
-              <a:schemeClr val="dk1"/>
-            </a:lnRef>
-            <a:fillRef idx="0">
-              <a:schemeClr val="dk1"/>
-            </a:fillRef>
-            <a:effectRef idx="0">
-              <a:schemeClr val="dk1"/>
-            </a:effectRef>
-            <a:fontRef idx="minor">
-              <a:schemeClr val="tx1"/>
-            </a:fontRef>
-          </p:style>
-        </p:cxnSp>
-        <p:cxnSp>
-          <p:nvCxnSpPr>
-            <p:cNvPr id="32" name="Straight Connector 31">
-              <a:extLst>
-                <a:ext uri="{FF2B5EF4-FFF2-40B4-BE49-F238E27FC236}">
-                  <a16:creationId xmlns:a16="http://schemas.microsoft.com/office/drawing/2014/main" id="{409DE789-770A-774A-9861-6E413217C2BC}"/>
-                </a:ext>
-              </a:extLst>
-            </p:cNvPr>
-            <p:cNvCxnSpPr>
-              <a:cxnSpLocks/>
-              <a:stCxn id="18" idx="6"/>
-              <a:endCxn id="20" idx="2"/>
-            </p:cNvCxnSpPr>
-            <p:nvPr/>
-          </p:nvCxnSpPr>
-          <p:spPr>
-            <a:xfrm flipV="1">
-              <a:off x="4791456" y="2969977"/>
-              <a:ext cx="237744" cy="249936"/>
-            </a:xfrm>
-            <a:prstGeom prst="line">
-              <a:avLst/>
-            </a:prstGeom>
-            <a:ln w="28575"/>
-          </p:spPr>
-          <p:style>
-            <a:lnRef idx="1">
-              <a:schemeClr val="dk1"/>
-            </a:lnRef>
-            <a:fillRef idx="0">
-              <a:schemeClr val="dk1"/>
-            </a:fillRef>
-            <a:effectRef idx="0">
-              <a:schemeClr val="dk1"/>
-            </a:effectRef>
-            <a:fontRef idx="minor">
-              <a:schemeClr val="tx1"/>
-            </a:fontRef>
-          </p:style>
-        </p:cxnSp>
-        <p:cxnSp>
-          <p:nvCxnSpPr>
-            <p:cNvPr id="33" name="Straight Connector 32">
-              <a:extLst>
-                <a:ext uri="{FF2B5EF4-FFF2-40B4-BE49-F238E27FC236}">
-                  <a16:creationId xmlns:a16="http://schemas.microsoft.com/office/drawing/2014/main" id="{70E7FF1A-B3F7-F844-B958-D27F45E1DC2D}"/>
-                </a:ext>
-              </a:extLst>
-            </p:cNvPr>
-            <p:cNvCxnSpPr/>
-            <p:nvPr/>
-          </p:nvCxnSpPr>
-          <p:spPr>
-            <a:xfrm>
-              <a:off x="4794479" y="3244297"/>
-              <a:ext cx="237744" cy="306025"/>
-            </a:xfrm>
-            <a:prstGeom prst="line">
-              <a:avLst/>
-            </a:prstGeom>
-            <a:ln w="28575"/>
-          </p:spPr>
-          <p:style>
-            <a:lnRef idx="1">
-              <a:schemeClr val="dk1"/>
-            </a:lnRef>
-            <a:fillRef idx="0">
-              <a:schemeClr val="dk1"/>
-            </a:fillRef>
-            <a:effectRef idx="0">
-              <a:schemeClr val="dk1"/>
-            </a:effectRef>
-            <a:fontRef idx="minor">
-              <a:schemeClr val="tx1"/>
-            </a:fontRef>
-          </p:style>
-        </p:cxnSp>
-        <p:cxnSp>
-          <p:nvCxnSpPr>
-            <p:cNvPr id="34" name="Straight Connector 33">
-              <a:extLst>
-                <a:ext uri="{FF2B5EF4-FFF2-40B4-BE49-F238E27FC236}">
-                  <a16:creationId xmlns:a16="http://schemas.microsoft.com/office/drawing/2014/main" id="{CC5E2131-B1EE-BC43-AF0F-76A74F8C8107}"/>
-                </a:ext>
-              </a:extLst>
-            </p:cNvPr>
-            <p:cNvCxnSpPr>
-              <a:cxnSpLocks/>
-              <a:endCxn id="20" idx="2"/>
-            </p:cNvCxnSpPr>
-            <p:nvPr/>
-          </p:nvCxnSpPr>
-          <p:spPr>
-            <a:xfrm flipV="1">
-              <a:off x="4791456" y="2969977"/>
-              <a:ext cx="237744" cy="805897"/>
-            </a:xfrm>
-            <a:prstGeom prst="line">
-              <a:avLst/>
-            </a:prstGeom>
-            <a:ln w="28575"/>
-          </p:spPr>
-          <p:style>
-            <a:lnRef idx="1">
-              <a:schemeClr val="dk1"/>
-            </a:lnRef>
-            <a:fillRef idx="0">
-              <a:schemeClr val="dk1"/>
-            </a:fillRef>
-            <a:effectRef idx="0">
-              <a:schemeClr val="dk1"/>
-            </a:effectRef>
-            <a:fontRef idx="minor">
-              <a:schemeClr val="tx1"/>
-            </a:fontRef>
-          </p:style>
-        </p:cxnSp>
-        <p:cxnSp>
-          <p:nvCxnSpPr>
-            <p:cNvPr id="35" name="Straight Connector 34">
-              <a:extLst>
-                <a:ext uri="{FF2B5EF4-FFF2-40B4-BE49-F238E27FC236}">
-                  <a16:creationId xmlns:a16="http://schemas.microsoft.com/office/drawing/2014/main" id="{2DBFED98-B6FA-8B4E-876D-F52C114E6024}"/>
-                </a:ext>
-              </a:extLst>
-            </p:cNvPr>
-            <p:cNvCxnSpPr>
-              <a:cxnSpLocks/>
-              <a:endCxn id="25" idx="2"/>
-            </p:cNvCxnSpPr>
-            <p:nvPr/>
-          </p:nvCxnSpPr>
-          <p:spPr>
-            <a:xfrm flipV="1">
-              <a:off x="4791456" y="3551547"/>
-              <a:ext cx="237744" cy="224327"/>
-            </a:xfrm>
-            <a:prstGeom prst="line">
-              <a:avLst/>
-            </a:prstGeom>
-            <a:ln w="28575"/>
-          </p:spPr>
-          <p:style>
-            <a:lnRef idx="1">
-              <a:schemeClr val="dk1"/>
-            </a:lnRef>
-            <a:fillRef idx="0">
-              <a:schemeClr val="dk1"/>
-            </a:fillRef>
-            <a:effectRef idx="0">
-              <a:schemeClr val="dk1"/>
-            </a:effectRef>
-            <a:fontRef idx="minor">
-              <a:schemeClr val="tx1"/>
-            </a:fontRef>
-          </p:style>
-        </p:cxnSp>
-        <p:cxnSp>
-          <p:nvCxnSpPr>
-            <p:cNvPr id="36" name="Straight Connector 35">
-              <a:extLst>
-                <a:ext uri="{FF2B5EF4-FFF2-40B4-BE49-F238E27FC236}">
-                  <a16:creationId xmlns:a16="http://schemas.microsoft.com/office/drawing/2014/main" id="{791D79EA-EDB5-EB44-BFE1-4E1378E764D2}"/>
-                </a:ext>
-              </a:extLst>
-            </p:cNvPr>
-            <p:cNvCxnSpPr>
-              <a:cxnSpLocks/>
-              <a:endCxn id="28" idx="2"/>
-            </p:cNvCxnSpPr>
-            <p:nvPr/>
-          </p:nvCxnSpPr>
-          <p:spPr>
-            <a:xfrm flipV="1">
-              <a:off x="5431536" y="2958303"/>
-              <a:ext cx="262078" cy="33010"/>
-            </a:xfrm>
-            <a:prstGeom prst="line">
-              <a:avLst/>
-            </a:prstGeom>
-            <a:ln w="28575"/>
-          </p:spPr>
-          <p:style>
-            <a:lnRef idx="1">
-              <a:schemeClr val="dk1"/>
-            </a:lnRef>
-            <a:fillRef idx="0">
-              <a:schemeClr val="dk1"/>
-            </a:fillRef>
-            <a:effectRef idx="0">
-              <a:schemeClr val="dk1"/>
-            </a:effectRef>
-            <a:fontRef idx="minor">
-              <a:schemeClr val="tx1"/>
-            </a:fontRef>
-          </p:style>
-        </p:cxnSp>
-        <p:cxnSp>
-          <p:nvCxnSpPr>
-            <p:cNvPr id="37" name="Straight Connector 36">
-              <a:extLst>
-                <a:ext uri="{FF2B5EF4-FFF2-40B4-BE49-F238E27FC236}">
-                  <a16:creationId xmlns:a16="http://schemas.microsoft.com/office/drawing/2014/main" id="{AC8D7F98-F828-4749-89A9-70A2687F9B2D}"/>
-                </a:ext>
-              </a:extLst>
-            </p:cNvPr>
-            <p:cNvCxnSpPr>
-              <a:cxnSpLocks/>
-              <a:endCxn id="29" idx="2"/>
-            </p:cNvCxnSpPr>
-            <p:nvPr/>
-          </p:nvCxnSpPr>
-          <p:spPr>
-            <a:xfrm>
-              <a:off x="5431536" y="3023616"/>
-              <a:ext cx="237744" cy="515739"/>
-            </a:xfrm>
-            <a:prstGeom prst="line">
-              <a:avLst/>
-            </a:prstGeom>
-            <a:ln w="28575"/>
-          </p:spPr>
-          <p:style>
-            <a:lnRef idx="1">
-              <a:schemeClr val="dk1"/>
-            </a:lnRef>
-            <a:fillRef idx="0">
-              <a:schemeClr val="dk1"/>
-            </a:fillRef>
-            <a:effectRef idx="0">
-              <a:schemeClr val="dk1"/>
-            </a:effectRef>
-            <a:fontRef idx="minor">
-              <a:schemeClr val="tx1"/>
-            </a:fontRef>
-          </p:style>
-        </p:cxnSp>
-        <p:cxnSp>
-          <p:nvCxnSpPr>
-            <p:cNvPr id="38" name="Straight Connector 37">
-              <a:extLst>
-                <a:ext uri="{FF2B5EF4-FFF2-40B4-BE49-F238E27FC236}">
-                  <a16:creationId xmlns:a16="http://schemas.microsoft.com/office/drawing/2014/main" id="{CCAA8FC4-6819-0342-9A83-42B280E06237}"/>
-                </a:ext>
-              </a:extLst>
-            </p:cNvPr>
-            <p:cNvCxnSpPr>
-              <a:cxnSpLocks/>
-              <a:endCxn id="28" idx="2"/>
-            </p:cNvCxnSpPr>
-            <p:nvPr/>
-          </p:nvCxnSpPr>
-          <p:spPr>
-            <a:xfrm flipV="1">
-              <a:off x="5428513" y="2958303"/>
-              <a:ext cx="265101" cy="589598"/>
-            </a:xfrm>
-            <a:prstGeom prst="line">
-              <a:avLst/>
-            </a:prstGeom>
-            <a:ln w="28575"/>
-          </p:spPr>
-          <p:style>
-            <a:lnRef idx="1">
-              <a:schemeClr val="dk1"/>
-            </a:lnRef>
-            <a:fillRef idx="0">
-              <a:schemeClr val="dk1"/>
-            </a:fillRef>
-            <a:effectRef idx="0">
-              <a:schemeClr val="dk1"/>
-            </a:effectRef>
-            <a:fontRef idx="minor">
-              <a:schemeClr val="tx1"/>
-            </a:fontRef>
-          </p:style>
-        </p:cxnSp>
-        <p:cxnSp>
-          <p:nvCxnSpPr>
-            <p:cNvPr id="39" name="Straight Connector 38">
-              <a:extLst>
-                <a:ext uri="{FF2B5EF4-FFF2-40B4-BE49-F238E27FC236}">
-                  <a16:creationId xmlns:a16="http://schemas.microsoft.com/office/drawing/2014/main" id="{9DB29A49-FD36-804C-B626-ECEBE343A946}"/>
-                </a:ext>
-              </a:extLst>
-            </p:cNvPr>
-            <p:cNvCxnSpPr>
-              <a:cxnSpLocks/>
-              <a:endCxn id="29" idx="2"/>
-            </p:cNvCxnSpPr>
-            <p:nvPr/>
-          </p:nvCxnSpPr>
-          <p:spPr>
-            <a:xfrm>
-              <a:off x="5431536" y="3510697"/>
-              <a:ext cx="237744" cy="28658"/>
-            </a:xfrm>
-            <a:prstGeom prst="line">
-              <a:avLst/>
-            </a:prstGeom>
-            <a:ln w="28575"/>
-          </p:spPr>
-          <p:style>
-            <a:lnRef idx="1">
-              <a:schemeClr val="dk1"/>
-            </a:lnRef>
-            <a:fillRef idx="0">
-              <a:schemeClr val="dk1"/>
-            </a:fillRef>
-            <a:effectRef idx="0">
-              <a:schemeClr val="dk1"/>
-            </a:effectRef>
-            <a:fontRef idx="minor">
-              <a:schemeClr val="tx1"/>
-            </a:fontRef>
-          </p:style>
-        </p:cxnSp>
-      </p:grpSp>
-      <p:graphicFrame>
-        <p:nvGraphicFramePr>
-          <p:cNvPr id="5" name="Table 5">
-            <a:extLst>
-              <a:ext uri="{FF2B5EF4-FFF2-40B4-BE49-F238E27FC236}">
-                <a16:creationId xmlns:a16="http://schemas.microsoft.com/office/drawing/2014/main" id="{77FEABA3-487B-1046-962E-19F31B5554DD}"/>
-              </a:ext>
-            </a:extLst>
-          </p:cNvPr>
-          <p:cNvGraphicFramePr>
-            <a:graphicFrameLocks noGrp="1"/>
-          </p:cNvGraphicFramePr>
-          <p:nvPr>
-            <p:extLst>
-              <p:ext uri="{D42A27DB-BD31-4B8C-83A1-F6EECF244321}">
-                <p14:modId xmlns:p14="http://schemas.microsoft.com/office/powerpoint/2010/main" val="2891490566"/>
-              </p:ext>
-            </p:extLst>
-          </p:nvPr>
-        </p:nvGraphicFramePr>
-        <p:xfrm>
-          <a:off x="5382865" y="1803689"/>
-          <a:ext cx="1654828" cy="4876800"/>
-        </p:xfrm>
-        <a:graphic>
-          <a:graphicData uri="http://schemas.openxmlformats.org/drawingml/2006/table">
-            <a:tbl>
-              <a:tblPr firstRow="1" bandRow="1">
-                <a:tableStyleId>{073A0DAA-6AF3-43AB-8588-CEC1D06C72B9}</a:tableStyleId>
-              </a:tblPr>
-              <a:tblGrid>
-                <a:gridCol w="827414">
-                  <a:extLst>
-                    <a:ext uri="{9D8B030D-6E8A-4147-A177-3AD203B41FA5}">
-                      <a16:colId xmlns:a16="http://schemas.microsoft.com/office/drawing/2014/main" val="1088238618"/>
-                    </a:ext>
-                  </a:extLst>
-                </a:gridCol>
-                <a:gridCol w="827414">
-                  <a:extLst>
-                    <a:ext uri="{9D8B030D-6E8A-4147-A177-3AD203B41FA5}">
-                      <a16:colId xmlns:a16="http://schemas.microsoft.com/office/drawing/2014/main" val="2545921369"/>
-                    </a:ext>
-                  </a:extLst>
-                </a:gridCol>
-              </a:tblGrid>
-              <a:tr h="258046">
-                <a:tc>
-                  <a:txBody>
-                    <a:bodyPr/>
-                    <a:lstStyle/>
-                    <a:p>
-                      <a:pPr algn="ctr"/>
-                      <a:r>
-                        <a:rPr lang="en-US" dirty="0"/>
-                        <a:t>ID</a:t>
-                      </a:r>
-                    </a:p>
-                  </a:txBody>
-                  <a:tcPr/>
-                </a:tc>
-                <a:tc>
-                  <a:txBody>
-                    <a:bodyPr/>
-                    <a:lstStyle/>
-                    <a:p>
-                      <a:pPr algn="ctr"/>
-                      <a:r>
-                        <a:rPr lang="en-US" dirty="0"/>
-                        <a:t>SCORE</a:t>
-                      </a:r>
-                    </a:p>
-                  </a:txBody>
-                  <a:tcPr/>
-                </a:tc>
-                <a:extLst>
-                  <a:ext uri="{0D108BD9-81ED-4DB2-BD59-A6C34878D82A}">
-                    <a16:rowId xmlns:a16="http://schemas.microsoft.com/office/drawing/2014/main" val="302251417"/>
-                  </a:ext>
-                </a:extLst>
-              </a:tr>
-              <a:tr h="258046">
-                <a:tc>
-                  <a:txBody>
-                    <a:bodyPr/>
-                    <a:lstStyle/>
-                    <a:p>
-                      <a:pPr algn="ctr"/>
-                      <a:r>
-                        <a:rPr lang="en-US" dirty="0"/>
-                        <a:t>27</a:t>
-                      </a:r>
-                    </a:p>
-                  </a:txBody>
-                  <a:tcPr/>
-                </a:tc>
-                <a:tc>
-                  <a:txBody>
-                    <a:bodyPr/>
-                    <a:lstStyle/>
-                    <a:p>
-                      <a:pPr algn="ctr"/>
-                      <a:r>
-                        <a:rPr lang="en-US" dirty="0"/>
-                        <a:t>0.95</a:t>
-                      </a:r>
-                    </a:p>
-                  </a:txBody>
-                  <a:tcPr/>
-                </a:tc>
-                <a:extLst>
-                  <a:ext uri="{0D108BD9-81ED-4DB2-BD59-A6C34878D82A}">
-                    <a16:rowId xmlns:a16="http://schemas.microsoft.com/office/drawing/2014/main" val="122529026"/>
-                  </a:ext>
-                </a:extLst>
-              </a:tr>
-              <a:tr h="258046">
-                <a:tc>
-                  <a:txBody>
-                    <a:bodyPr/>
-                    <a:lstStyle/>
-                    <a:p>
-                      <a:pPr algn="ctr"/>
-                      <a:r>
-                        <a:rPr lang="en-US" dirty="0"/>
-                        <a:t>13</a:t>
-                      </a:r>
-                    </a:p>
-                  </a:txBody>
-                  <a:tcPr/>
-                </a:tc>
-                <a:tc>
-                  <a:txBody>
-                    <a:bodyPr/>
-                    <a:lstStyle/>
-                    <a:p>
-                      <a:pPr algn="ctr"/>
-                      <a:r>
-                        <a:rPr lang="en-US" dirty="0"/>
-                        <a:t>0.93</a:t>
-                      </a:r>
-                    </a:p>
-                  </a:txBody>
-                  <a:tcPr/>
-                </a:tc>
-                <a:extLst>
-                  <a:ext uri="{0D108BD9-81ED-4DB2-BD59-A6C34878D82A}">
-                    <a16:rowId xmlns:a16="http://schemas.microsoft.com/office/drawing/2014/main" val="4025916763"/>
-                  </a:ext>
-                </a:extLst>
-              </a:tr>
-              <a:tr h="258046">
-                <a:tc>
-                  <a:txBody>
-                    <a:bodyPr/>
-                    <a:lstStyle/>
-                    <a:p>
-                      <a:pPr algn="ctr"/>
-                      <a:r>
-                        <a:rPr lang="en-US" dirty="0"/>
-                        <a:t>1</a:t>
-                      </a:r>
-                    </a:p>
-                  </a:txBody>
-                  <a:tcPr/>
-                </a:tc>
-                <a:tc>
-                  <a:txBody>
-                    <a:bodyPr/>
-                    <a:lstStyle/>
-                    <a:p>
-                      <a:pPr algn="ctr"/>
-                      <a:r>
-                        <a:rPr lang="en-US" dirty="0"/>
-                        <a:t>0.89</a:t>
-                      </a:r>
-                    </a:p>
-                  </a:txBody>
-                  <a:tcPr/>
-                </a:tc>
-                <a:extLst>
-                  <a:ext uri="{0D108BD9-81ED-4DB2-BD59-A6C34878D82A}">
-                    <a16:rowId xmlns:a16="http://schemas.microsoft.com/office/drawing/2014/main" val="2323964280"/>
-                  </a:ext>
-                </a:extLst>
-              </a:tr>
-              <a:tr h="258046">
-                <a:tc>
-                  <a:txBody>
-                    <a:bodyPr/>
-                    <a:lstStyle/>
-                    <a:p>
-                      <a:pPr algn="ctr"/>
-                      <a:r>
-                        <a:rPr lang="en-US" dirty="0"/>
-                        <a:t>93</a:t>
-                      </a:r>
-                    </a:p>
-                  </a:txBody>
-                  <a:tcPr/>
-                </a:tc>
-                <a:tc>
-                  <a:txBody>
-                    <a:bodyPr/>
-                    <a:lstStyle/>
-                    <a:p>
-                      <a:pPr algn="ctr"/>
-                      <a:r>
-                        <a:rPr lang="en-US" dirty="0"/>
-                        <a:t>0.89</a:t>
-                      </a:r>
-                    </a:p>
-                  </a:txBody>
-                  <a:tcPr/>
-                </a:tc>
-                <a:extLst>
-                  <a:ext uri="{0D108BD9-81ED-4DB2-BD59-A6C34878D82A}">
-                    <a16:rowId xmlns:a16="http://schemas.microsoft.com/office/drawing/2014/main" val="2948836163"/>
-                  </a:ext>
-                </a:extLst>
-              </a:tr>
-              <a:tr h="258046">
-                <a:tc>
-                  <a:txBody>
-                    <a:bodyPr/>
-                    <a:lstStyle/>
-                    <a:p>
-                      <a:pPr algn="ctr"/>
-                      <a:r>
-                        <a:rPr lang="en-US" dirty="0"/>
-                        <a:t>53</a:t>
-                      </a:r>
-                    </a:p>
-                  </a:txBody>
-                  <a:tcPr/>
-                </a:tc>
-                <a:tc>
-                  <a:txBody>
-                    <a:bodyPr/>
-                    <a:lstStyle/>
-                    <a:p>
-                      <a:pPr algn="ctr"/>
-                      <a:r>
-                        <a:rPr lang="en-US" dirty="0"/>
-                        <a:t>0.82</a:t>
-                      </a:r>
-                    </a:p>
-                  </a:txBody>
-                  <a:tcPr/>
-                </a:tc>
-                <a:extLst>
-                  <a:ext uri="{0D108BD9-81ED-4DB2-BD59-A6C34878D82A}">
-                    <a16:rowId xmlns:a16="http://schemas.microsoft.com/office/drawing/2014/main" val="1952042522"/>
-                  </a:ext>
-                </a:extLst>
-              </a:tr>
-              <a:tr h="258046">
-                <a:tc>
-                  <a:txBody>
-                    <a:bodyPr/>
-                    <a:lstStyle/>
-                    <a:p>
-                      <a:pPr algn="ctr"/>
-                      <a:r>
-                        <a:rPr lang="en-US" dirty="0"/>
-                        <a:t>23</a:t>
-                      </a:r>
-                    </a:p>
-                  </a:txBody>
-                  <a:tcPr/>
-                </a:tc>
-                <a:tc>
-                  <a:txBody>
-                    <a:bodyPr/>
-                    <a:lstStyle/>
-                    <a:p>
-                      <a:pPr algn="ctr"/>
-                      <a:r>
-                        <a:rPr lang="en-US" dirty="0"/>
-                        <a:t>0.75</a:t>
-                      </a:r>
-                    </a:p>
-                  </a:txBody>
-                  <a:tcPr/>
-                </a:tc>
-                <a:extLst>
-                  <a:ext uri="{0D108BD9-81ED-4DB2-BD59-A6C34878D82A}">
-                    <a16:rowId xmlns:a16="http://schemas.microsoft.com/office/drawing/2014/main" val="974555594"/>
-                  </a:ext>
-                </a:extLst>
-              </a:tr>
-              <a:tr h="258046">
-                <a:tc>
-                  <a:txBody>
-                    <a:bodyPr/>
-                    <a:lstStyle/>
-                    <a:p>
-                      <a:pPr algn="ctr"/>
-                      <a:r>
-                        <a:rPr lang="en-US" dirty="0"/>
-                        <a:t>59</a:t>
-                      </a:r>
-                    </a:p>
-                  </a:txBody>
-                  <a:tcPr/>
-                </a:tc>
-                <a:tc>
-                  <a:txBody>
-                    <a:bodyPr/>
-                    <a:lstStyle/>
-                    <a:p>
-                      <a:pPr algn="ctr"/>
-                      <a:r>
-                        <a:rPr lang="en-US" dirty="0"/>
-                        <a:t>0.72</a:t>
-                      </a:r>
-                    </a:p>
-                  </a:txBody>
-                  <a:tcPr/>
-                </a:tc>
-                <a:extLst>
-                  <a:ext uri="{0D108BD9-81ED-4DB2-BD59-A6C34878D82A}">
-                    <a16:rowId xmlns:a16="http://schemas.microsoft.com/office/drawing/2014/main" val="3832195445"/>
-                  </a:ext>
-                </a:extLst>
-              </a:tr>
-              <a:tr h="258046">
-                <a:tc>
-                  <a:txBody>
-                    <a:bodyPr/>
-                    <a:lstStyle/>
-                    <a:p>
-                      <a:pPr algn="ctr"/>
-                      <a:r>
-                        <a:rPr lang="en-US" dirty="0"/>
-                        <a:t>64</a:t>
-                      </a:r>
-                    </a:p>
-                  </a:txBody>
-                  <a:tcPr/>
-                </a:tc>
-                <a:tc>
-                  <a:txBody>
-                    <a:bodyPr/>
-                    <a:lstStyle/>
-                    <a:p>
-                      <a:pPr algn="ctr"/>
-                      <a:r>
-                        <a:rPr lang="en-US" dirty="0"/>
-                        <a:t>0.65</a:t>
-                      </a:r>
-                    </a:p>
-                  </a:txBody>
-                  <a:tcPr/>
-                </a:tc>
-                <a:extLst>
-                  <a:ext uri="{0D108BD9-81ED-4DB2-BD59-A6C34878D82A}">
-                    <a16:rowId xmlns:a16="http://schemas.microsoft.com/office/drawing/2014/main" val="1564902966"/>
-                  </a:ext>
-                </a:extLst>
-              </a:tr>
-              <a:tr h="258046">
-                <a:tc>
-                  <a:txBody>
-                    <a:bodyPr/>
-                    <a:lstStyle/>
-                    <a:p>
-                      <a:pPr algn="ctr"/>
-                      <a:r>
-                        <a:rPr lang="en-US" dirty="0"/>
-                        <a:t>20</a:t>
-                      </a:r>
-                    </a:p>
-                  </a:txBody>
-                  <a:tcPr/>
-                </a:tc>
-                <a:tc>
-                  <a:txBody>
-                    <a:bodyPr/>
-                    <a:lstStyle/>
-                    <a:p>
-                      <a:pPr algn="ctr"/>
-                      <a:r>
-                        <a:rPr lang="en-US" dirty="0"/>
-                        <a:t>0.61</a:t>
-                      </a:r>
-                    </a:p>
-                  </a:txBody>
-                  <a:tcPr/>
-                </a:tc>
-                <a:extLst>
-                  <a:ext uri="{0D108BD9-81ED-4DB2-BD59-A6C34878D82A}">
-                    <a16:rowId xmlns:a16="http://schemas.microsoft.com/office/drawing/2014/main" val="1650052668"/>
-                  </a:ext>
-                </a:extLst>
-              </a:tr>
-              <a:tr h="258046">
-                <a:tc>
-                  <a:txBody>
-                    <a:bodyPr/>
-                    <a:lstStyle/>
-                    <a:p>
-                      <a:pPr algn="ctr"/>
-                      <a:r>
-                        <a:rPr lang="en-US" dirty="0"/>
-                        <a:t>18</a:t>
-                      </a:r>
-                    </a:p>
-                  </a:txBody>
-                  <a:tcPr/>
-                </a:tc>
-                <a:tc>
-                  <a:txBody>
-                    <a:bodyPr/>
-                    <a:lstStyle/>
-                    <a:p>
-                      <a:pPr algn="ctr"/>
-                      <a:r>
-                        <a:rPr lang="en-US" dirty="0"/>
-                        <a:t>0.59</a:t>
-                      </a:r>
-                    </a:p>
-                  </a:txBody>
-                  <a:tcPr/>
-                </a:tc>
-                <a:extLst>
-                  <a:ext uri="{0D108BD9-81ED-4DB2-BD59-A6C34878D82A}">
-                    <a16:rowId xmlns:a16="http://schemas.microsoft.com/office/drawing/2014/main" val="1045450806"/>
-                  </a:ext>
-                </a:extLst>
-              </a:tr>
-              <a:tr h="258046">
-                <a:tc>
-                  <a:txBody>
-                    <a:bodyPr/>
-                    <a:lstStyle/>
-                    <a:p>
-                      <a:pPr algn="ctr"/>
-                      <a:r>
-                        <a:rPr lang="en-US" dirty="0"/>
-                        <a:t>46</a:t>
-                      </a:r>
-                    </a:p>
-                  </a:txBody>
-                  <a:tcPr/>
-                </a:tc>
-                <a:tc>
-                  <a:txBody>
-                    <a:bodyPr/>
-                    <a:lstStyle/>
-                    <a:p>
-                      <a:pPr algn="ctr"/>
-                      <a:r>
-                        <a:rPr lang="en-US" dirty="0"/>
-                        <a:t>0.52</a:t>
-                      </a:r>
-                    </a:p>
-                  </a:txBody>
-                  <a:tcPr/>
-                </a:tc>
-                <a:extLst>
-                  <a:ext uri="{0D108BD9-81ED-4DB2-BD59-A6C34878D82A}">
-                    <a16:rowId xmlns:a16="http://schemas.microsoft.com/office/drawing/2014/main" val="2499045432"/>
-                  </a:ext>
-                </a:extLst>
-              </a:tr>
-              <a:tr h="258046">
-                <a:tc>
-                  <a:txBody>
-                    <a:bodyPr/>
-                    <a:lstStyle/>
-                    <a:p>
-                      <a:pPr algn="ctr"/>
-                      <a:r>
-                        <a:rPr lang="en-US" dirty="0"/>
-                        <a:t>82</a:t>
-                      </a:r>
-                    </a:p>
-                  </a:txBody>
-                  <a:tcPr/>
-                </a:tc>
-                <a:tc>
-                  <a:txBody>
-                    <a:bodyPr/>
-                    <a:lstStyle/>
-                    <a:p>
-                      <a:pPr algn="ctr"/>
-                      <a:r>
-                        <a:rPr lang="en-US" dirty="0"/>
-                        <a:t>0.48</a:t>
-                      </a:r>
-                    </a:p>
-                  </a:txBody>
-                  <a:tcPr/>
-                </a:tc>
-                <a:extLst>
-                  <a:ext uri="{0D108BD9-81ED-4DB2-BD59-A6C34878D82A}">
-                    <a16:rowId xmlns:a16="http://schemas.microsoft.com/office/drawing/2014/main" val="4231666519"/>
-                  </a:ext>
-                </a:extLst>
-              </a:tr>
-              <a:tr h="258046">
-                <a:tc>
-                  <a:txBody>
-                    <a:bodyPr/>
-                    <a:lstStyle/>
-                    <a:p>
-                      <a:pPr algn="ctr"/>
-                      <a:r>
-                        <a:rPr lang="en-US" dirty="0"/>
-                        <a:t>49</a:t>
-                      </a:r>
-                    </a:p>
-                  </a:txBody>
-                  <a:tcPr/>
-                </a:tc>
-                <a:tc>
-                  <a:txBody>
-                    <a:bodyPr/>
-                    <a:lstStyle/>
-                    <a:p>
-                      <a:pPr algn="ctr"/>
-                      <a:r>
-                        <a:rPr lang="en-US" dirty="0"/>
-                        <a:t>0.37</a:t>
-                      </a:r>
-                    </a:p>
-                  </a:txBody>
-                  <a:tcPr/>
-                </a:tc>
-                <a:extLst>
-                  <a:ext uri="{0D108BD9-81ED-4DB2-BD59-A6C34878D82A}">
-                    <a16:rowId xmlns:a16="http://schemas.microsoft.com/office/drawing/2014/main" val="1155732854"/>
-                  </a:ext>
-                </a:extLst>
-              </a:tr>
-              <a:tr h="258046">
-                <a:tc>
-                  <a:txBody>
-                    <a:bodyPr/>
-                    <a:lstStyle/>
-                    <a:p>
-                      <a:pPr algn="ctr"/>
-                      <a:r>
-                        <a:rPr lang="en-US" dirty="0"/>
-                        <a:t>56</a:t>
-                      </a:r>
-                    </a:p>
-                  </a:txBody>
-                  <a:tcPr/>
-                </a:tc>
-                <a:tc>
-                  <a:txBody>
-                    <a:bodyPr/>
-                    <a:lstStyle/>
-                    <a:p>
-                      <a:pPr algn="ctr"/>
-                      <a:r>
-                        <a:rPr lang="en-US" dirty="0"/>
-                        <a:t>0.22</a:t>
-                      </a:r>
-                    </a:p>
-                  </a:txBody>
-                  <a:tcPr/>
-                </a:tc>
-                <a:extLst>
-                  <a:ext uri="{0D108BD9-81ED-4DB2-BD59-A6C34878D82A}">
-                    <a16:rowId xmlns:a16="http://schemas.microsoft.com/office/drawing/2014/main" val="2603839184"/>
-                  </a:ext>
-                </a:extLst>
-              </a:tr>
-              <a:tr h="258046">
-                <a:tc>
-                  <a:txBody>
-                    <a:bodyPr/>
-                    <a:lstStyle/>
-                    <a:p>
-                      <a:pPr algn="ctr"/>
-                      <a:r>
-                        <a:rPr lang="en-US" dirty="0"/>
-                        <a:t>17</a:t>
-                      </a:r>
-                    </a:p>
-                  </a:txBody>
-                  <a:tcPr/>
-                </a:tc>
-                <a:tc>
-                  <a:txBody>
-                    <a:bodyPr/>
-                    <a:lstStyle/>
-                    <a:p>
-                      <a:pPr algn="ctr"/>
-                      <a:r>
-                        <a:rPr lang="en-US" dirty="0"/>
-                        <a:t>0.12</a:t>
-                      </a:r>
-                    </a:p>
-                  </a:txBody>
-                  <a:tcPr/>
-                </a:tc>
-                <a:extLst>
-                  <a:ext uri="{0D108BD9-81ED-4DB2-BD59-A6C34878D82A}">
-                    <a16:rowId xmlns:a16="http://schemas.microsoft.com/office/drawing/2014/main" val="14563681"/>
-                  </a:ext>
-                </a:extLst>
-              </a:tr>
-            </a:tbl>
-          </a:graphicData>
-        </a:graphic>
-      </p:graphicFrame>
-      <p:sp>
-        <p:nvSpPr>
-          <p:cNvPr id="6" name="Right Arrow 5">
-            <a:extLst>
-              <a:ext uri="{FF2B5EF4-FFF2-40B4-BE49-F238E27FC236}">
-                <a16:creationId xmlns:a16="http://schemas.microsoft.com/office/drawing/2014/main" id="{9B6C0F7E-394D-C849-AEEA-57F9432B58C8}"/>
-              </a:ext>
-            </a:extLst>
-          </p:cNvPr>
-          <p:cNvSpPr/>
-          <p:nvPr/>
-        </p:nvSpPr>
-        <p:spPr>
-          <a:xfrm>
-            <a:off x="3454203" y="4622104"/>
-            <a:ext cx="1916392" cy="350729"/>
-          </a:xfrm>
-          <a:prstGeom prst="rightArrow">
-            <a:avLst/>
-          </a:prstGeom>
-          <a:solidFill>
-            <a:srgbClr val="0070C0"/>
-          </a:solidFill>
-          <a:ln>
-            <a:noFill/>
-          </a:ln>
-        </p:spPr>
-        <p:style>
-          <a:lnRef idx="2">
-            <a:schemeClr val="accent1">
-              <a:shade val="50000"/>
-            </a:schemeClr>
-          </a:lnRef>
-          <a:fillRef idx="1">
-            <a:schemeClr val="accent1"/>
-          </a:fillRef>
-          <a:effectRef idx="0">
-            <a:schemeClr val="accent1"/>
-          </a:effectRef>
-          <a:fontRef idx="minor">
-            <a:schemeClr val="lt1"/>
-          </a:fontRef>
-        </p:style>
-        <p:txBody>
-          <a:bodyPr rtlCol="0" anchor="ctr"/>
-          <a:lstStyle/>
-          <a:p>
-            <a:pPr algn="ctr"/>
-            <a:endParaRPr lang="en-US"/>
-          </a:p>
-        </p:txBody>
-      </p:sp>
-      <p:sp>
-        <p:nvSpPr>
-          <p:cNvPr id="40" name="TextBox 39">
-            <a:extLst>
-              <a:ext uri="{FF2B5EF4-FFF2-40B4-BE49-F238E27FC236}">
-                <a16:creationId xmlns:a16="http://schemas.microsoft.com/office/drawing/2014/main" id="{CD8EA7B6-012E-3340-9E87-E323487E7303}"/>
-              </a:ext>
-            </a:extLst>
-          </p:cNvPr>
-          <p:cNvSpPr txBox="1"/>
-          <p:nvPr/>
-        </p:nvSpPr>
-        <p:spPr>
-          <a:xfrm>
-            <a:off x="3696510" y="3272099"/>
-            <a:ext cx="1141659" cy="461665"/>
-          </a:xfrm>
-          <a:prstGeom prst="rect">
-            <a:avLst/>
-          </a:prstGeom>
-          <a:noFill/>
-        </p:spPr>
-        <p:txBody>
-          <a:bodyPr wrap="none" rtlCol="0">
-            <a:spAutoFit/>
-          </a:bodyPr>
-          <a:lstStyle/>
-          <a:p>
-            <a:r>
-              <a:rPr lang="en-US" sz="2400" dirty="0">
-                <a:latin typeface="Century Gothic" panose="020B0502020202020204" pitchFamily="34" charset="0"/>
-              </a:rPr>
-              <a:t>Model</a:t>
-            </a:r>
-          </a:p>
-        </p:txBody>
-      </p:sp>
-      <p:sp>
-        <p:nvSpPr>
-          <p:cNvPr id="41" name="TextBox 40">
-            <a:extLst>
-              <a:ext uri="{FF2B5EF4-FFF2-40B4-BE49-F238E27FC236}">
-                <a16:creationId xmlns:a16="http://schemas.microsoft.com/office/drawing/2014/main" id="{FE13169F-ADA2-914B-8C32-2AD6FA04C976}"/>
-              </a:ext>
-            </a:extLst>
-          </p:cNvPr>
-          <p:cNvSpPr txBox="1"/>
-          <p:nvPr/>
-        </p:nvSpPr>
-        <p:spPr>
-          <a:xfrm>
-            <a:off x="4955885" y="1187209"/>
-            <a:ext cx="2709396" cy="461665"/>
-          </a:xfrm>
-          <a:prstGeom prst="rect">
-            <a:avLst/>
-          </a:prstGeom>
-          <a:noFill/>
-        </p:spPr>
-        <p:txBody>
-          <a:bodyPr wrap="none" rtlCol="0">
-            <a:spAutoFit/>
-          </a:bodyPr>
-          <a:lstStyle/>
-          <a:p>
-            <a:r>
-              <a:rPr lang="en-US" sz="2400" dirty="0">
-                <a:latin typeface="Century Gothic" panose="020B0502020202020204" pitchFamily="34" charset="0"/>
-              </a:rPr>
-              <a:t>Return to Jail Risk</a:t>
-            </a:r>
-          </a:p>
-        </p:txBody>
-      </p:sp>
-      <p:sp>
-        <p:nvSpPr>
-          <p:cNvPr id="7" name="Rectangle 6">
-            <a:extLst>
-              <a:ext uri="{FF2B5EF4-FFF2-40B4-BE49-F238E27FC236}">
-                <a16:creationId xmlns:a16="http://schemas.microsoft.com/office/drawing/2014/main" id="{81BFFD78-6ACB-084C-8897-FB70032B66B3}"/>
-              </a:ext>
-            </a:extLst>
-          </p:cNvPr>
-          <p:cNvSpPr/>
-          <p:nvPr/>
-        </p:nvSpPr>
-        <p:spPr>
-          <a:xfrm>
-            <a:off x="5370595" y="2129425"/>
-            <a:ext cx="1667098" cy="1481455"/>
-          </a:xfrm>
-          <a:prstGeom prst="rect">
-            <a:avLst/>
-          </a:prstGeom>
-          <a:noFill/>
-          <a:ln w="76200">
-            <a:solidFill>
-              <a:srgbClr val="FFC000"/>
-            </a:solidFill>
-          </a:ln>
-        </p:spPr>
-        <p:style>
-          <a:lnRef idx="2">
-            <a:schemeClr val="accent1">
-              <a:shade val="50000"/>
-            </a:schemeClr>
-          </a:lnRef>
-          <a:fillRef idx="1">
-            <a:schemeClr val="accent1"/>
-          </a:fillRef>
-          <a:effectRef idx="0">
-            <a:schemeClr val="accent1"/>
-          </a:effectRef>
-          <a:fontRef idx="minor">
-            <a:schemeClr val="lt1"/>
-          </a:fontRef>
-        </p:style>
-        <p:txBody>
-          <a:bodyPr rtlCol="0" anchor="ctr"/>
-          <a:lstStyle/>
-          <a:p>
-            <a:pPr algn="ctr"/>
-            <a:endParaRPr lang="en-US"/>
-          </a:p>
-        </p:txBody>
-      </p:sp>
-      <p:sp>
-        <p:nvSpPr>
-          <p:cNvPr id="42" name="Right Arrow 41">
-            <a:extLst>
-              <a:ext uri="{FF2B5EF4-FFF2-40B4-BE49-F238E27FC236}">
-                <a16:creationId xmlns:a16="http://schemas.microsoft.com/office/drawing/2014/main" id="{B29C028E-CDA4-604B-9B8F-64BDD06881B5}"/>
-              </a:ext>
-            </a:extLst>
-          </p:cNvPr>
-          <p:cNvSpPr/>
-          <p:nvPr/>
-        </p:nvSpPr>
-        <p:spPr>
-          <a:xfrm>
-            <a:off x="7049963" y="2694787"/>
-            <a:ext cx="1943723" cy="350729"/>
-          </a:xfrm>
-          <a:prstGeom prst="rightArrow">
-            <a:avLst/>
-          </a:prstGeom>
-          <a:solidFill>
-            <a:srgbClr val="FFC000"/>
-          </a:solidFill>
-          <a:ln>
-            <a:noFill/>
-          </a:ln>
-        </p:spPr>
-        <p:style>
-          <a:lnRef idx="2">
-            <a:schemeClr val="accent1">
-              <a:shade val="50000"/>
-            </a:schemeClr>
-          </a:lnRef>
-          <a:fillRef idx="1">
-            <a:schemeClr val="accent1"/>
-          </a:fillRef>
-          <a:effectRef idx="0">
-            <a:schemeClr val="accent1"/>
-          </a:effectRef>
-          <a:fontRef idx="minor">
-            <a:schemeClr val="lt1"/>
-          </a:fontRef>
-        </p:style>
-        <p:txBody>
-          <a:bodyPr rtlCol="0" anchor="ctr"/>
-          <a:lstStyle/>
-          <a:p>
-            <a:pPr algn="ctr"/>
-            <a:endParaRPr lang="en-US"/>
-          </a:p>
-        </p:txBody>
-      </p:sp>
-      <p:sp>
-        <p:nvSpPr>
-          <p:cNvPr id="44" name="Google Shape;75;p10">
-            <a:extLst>
-              <a:ext uri="{FF2B5EF4-FFF2-40B4-BE49-F238E27FC236}">
-                <a16:creationId xmlns:a16="http://schemas.microsoft.com/office/drawing/2014/main" id="{80248251-D983-E945-852F-13ECC4C7A7A1}"/>
-              </a:ext>
-            </a:extLst>
-          </p:cNvPr>
-          <p:cNvSpPr/>
-          <p:nvPr/>
-        </p:nvSpPr>
-        <p:spPr>
-          <a:xfrm>
-            <a:off x="8993687" y="2293565"/>
-            <a:ext cx="1981242" cy="1153172"/>
-          </a:xfrm>
-          <a:prstGeom prst="rect">
-            <a:avLst/>
-          </a:prstGeom>
-          <a:solidFill>
-            <a:schemeClr val="lt2"/>
-          </a:solidFill>
-          <a:ln w="9525" cap="flat" cmpd="sng">
-            <a:solidFill>
-              <a:schemeClr val="dk2"/>
-            </a:solidFill>
-            <a:prstDash val="solid"/>
-            <a:round/>
-            <a:headEnd type="none" w="sm" len="sm"/>
-            <a:tailEnd type="none" w="sm" len="sm"/>
-          </a:ln>
-        </p:spPr>
-        <p:txBody>
-          <a:bodyPr spcFirstLastPara="1" wrap="square" lIns="121900" tIns="121900" rIns="121900" bIns="121900" anchor="ctr" anchorCtr="0">
-            <a:noAutofit/>
-          </a:bodyPr>
-          <a:lstStyle/>
-          <a:p>
-            <a:pPr algn="ctr"/>
-            <a:endParaRPr sz="1867" dirty="0">
-              <a:latin typeface="Century Gothic"/>
-              <a:ea typeface="Century Gothic"/>
-              <a:cs typeface="Century Gothic"/>
-              <a:sym typeface="Century Gothic"/>
-            </a:endParaRPr>
-          </a:p>
-        </p:txBody>
-      </p:sp>
-      <p:sp>
-        <p:nvSpPr>
-          <p:cNvPr id="45" name="TextBox 44">
-            <a:extLst>
-              <a:ext uri="{FF2B5EF4-FFF2-40B4-BE49-F238E27FC236}">
-                <a16:creationId xmlns:a16="http://schemas.microsoft.com/office/drawing/2014/main" id="{E4819DD2-A9C7-A543-9B48-E32CF949C9FE}"/>
-              </a:ext>
-            </a:extLst>
-          </p:cNvPr>
-          <p:cNvSpPr txBox="1"/>
-          <p:nvPr/>
-        </p:nvSpPr>
-        <p:spPr>
-          <a:xfrm>
-            <a:off x="9167417" y="2310364"/>
-            <a:ext cx="1633781" cy="1200329"/>
-          </a:xfrm>
-          <a:prstGeom prst="rect">
-            <a:avLst/>
-          </a:prstGeom>
-          <a:noFill/>
-        </p:spPr>
-        <p:txBody>
-          <a:bodyPr wrap="none" rtlCol="0">
-            <a:spAutoFit/>
-          </a:bodyPr>
-          <a:lstStyle/>
-          <a:p>
-            <a:pPr algn="ctr"/>
-            <a:r>
-              <a:rPr lang="en-US" sz="2400" dirty="0">
-                <a:latin typeface="Century Gothic" panose="020B0502020202020204" pitchFamily="34" charset="0"/>
-              </a:rPr>
-              <a:t>Mental</a:t>
-            </a:r>
-          </a:p>
-          <a:p>
-            <a:pPr algn="ctr"/>
-            <a:r>
-              <a:rPr lang="en-US" sz="2400" dirty="0">
-                <a:latin typeface="Century Gothic" panose="020B0502020202020204" pitchFamily="34" charset="0"/>
-              </a:rPr>
-              <a:t>Health</a:t>
-            </a:r>
-          </a:p>
-          <a:p>
-            <a:pPr algn="ctr"/>
-            <a:r>
-              <a:rPr lang="en-US" sz="2400" dirty="0">
-                <a:latin typeface="Century Gothic" panose="020B0502020202020204" pitchFamily="34" charset="0"/>
-              </a:rPr>
-              <a:t>Outreach</a:t>
-            </a:r>
-          </a:p>
-        </p:txBody>
-      </p:sp>
-      <p:sp>
-        <p:nvSpPr>
-          <p:cNvPr id="46" name="Google Shape;75;p10">
-            <a:extLst>
-              <a:ext uri="{FF2B5EF4-FFF2-40B4-BE49-F238E27FC236}">
-                <a16:creationId xmlns:a16="http://schemas.microsoft.com/office/drawing/2014/main" id="{162E5AA6-9B51-DD4C-9E71-D5D0C0DE7EEC}"/>
-              </a:ext>
-            </a:extLst>
-          </p:cNvPr>
-          <p:cNvSpPr/>
-          <p:nvPr/>
-        </p:nvSpPr>
-        <p:spPr>
-          <a:xfrm>
-            <a:off x="9020826" y="4644025"/>
-            <a:ext cx="1981242" cy="1153172"/>
-          </a:xfrm>
-          <a:prstGeom prst="rect">
-            <a:avLst/>
-          </a:prstGeom>
-          <a:solidFill>
-            <a:schemeClr val="lt2"/>
-          </a:solidFill>
-          <a:ln w="9525" cap="flat" cmpd="sng">
-            <a:solidFill>
-              <a:schemeClr val="dk2"/>
-            </a:solidFill>
-            <a:prstDash val="solid"/>
-            <a:round/>
-            <a:headEnd type="none" w="sm" len="sm"/>
-            <a:tailEnd type="none" w="sm" len="sm"/>
-          </a:ln>
-        </p:spPr>
-        <p:txBody>
-          <a:bodyPr spcFirstLastPara="1" wrap="square" lIns="121900" tIns="121900" rIns="121900" bIns="121900" anchor="ctr" anchorCtr="0">
-            <a:noAutofit/>
-          </a:bodyPr>
-          <a:lstStyle/>
-          <a:p>
-            <a:pPr algn="ctr"/>
-            <a:endParaRPr sz="1867" dirty="0">
-              <a:latin typeface="Century Gothic"/>
-              <a:ea typeface="Century Gothic"/>
-              <a:cs typeface="Century Gothic"/>
-              <a:sym typeface="Century Gothic"/>
-            </a:endParaRPr>
-          </a:p>
-        </p:txBody>
-      </p:sp>
-      <p:sp>
-        <p:nvSpPr>
-          <p:cNvPr id="47" name="TextBox 46">
-            <a:extLst>
-              <a:ext uri="{FF2B5EF4-FFF2-40B4-BE49-F238E27FC236}">
-                <a16:creationId xmlns:a16="http://schemas.microsoft.com/office/drawing/2014/main" id="{2153B0C9-A395-0D4E-9870-A399AAC450A3}"/>
-              </a:ext>
-            </a:extLst>
-          </p:cNvPr>
-          <p:cNvSpPr txBox="1"/>
-          <p:nvPr/>
-        </p:nvSpPr>
-        <p:spPr>
-          <a:xfrm>
-            <a:off x="9265200" y="4811209"/>
-            <a:ext cx="1535998" cy="830997"/>
-          </a:xfrm>
-          <a:prstGeom prst="rect">
-            <a:avLst/>
-          </a:prstGeom>
-          <a:noFill/>
-        </p:spPr>
-        <p:txBody>
-          <a:bodyPr wrap="none" rtlCol="0">
-            <a:spAutoFit/>
-          </a:bodyPr>
-          <a:lstStyle/>
-          <a:p>
-            <a:pPr algn="ctr"/>
-            <a:r>
-              <a:rPr lang="en-US" sz="2400" dirty="0">
-                <a:latin typeface="Century Gothic" panose="020B0502020202020204" pitchFamily="34" charset="0"/>
-              </a:rPr>
-              <a:t>Return to</a:t>
-            </a:r>
-          </a:p>
-          <a:p>
-            <a:pPr algn="ctr"/>
-            <a:r>
-              <a:rPr lang="en-US" sz="2400" dirty="0">
-                <a:latin typeface="Century Gothic" panose="020B0502020202020204" pitchFamily="34" charset="0"/>
-              </a:rPr>
-              <a:t>Jail</a:t>
-            </a:r>
-          </a:p>
-        </p:txBody>
-      </p:sp>
-      <p:sp>
-        <p:nvSpPr>
-          <p:cNvPr id="48" name="Right Arrow 47">
-            <a:extLst>
-              <a:ext uri="{FF2B5EF4-FFF2-40B4-BE49-F238E27FC236}">
-                <a16:creationId xmlns:a16="http://schemas.microsoft.com/office/drawing/2014/main" id="{703A189E-3971-8841-B588-03762A073818}"/>
-              </a:ext>
-            </a:extLst>
-          </p:cNvPr>
-          <p:cNvSpPr/>
-          <p:nvPr/>
-        </p:nvSpPr>
-        <p:spPr>
-          <a:xfrm rot="5400000">
-            <a:off x="9467615" y="3882766"/>
-            <a:ext cx="1033382" cy="350729"/>
-          </a:xfrm>
-          <a:prstGeom prst="rightArrow">
-            <a:avLst/>
-          </a:prstGeom>
-          <a:solidFill>
-            <a:schemeClr val="tx2">
-              <a:lumMod val="75000"/>
-            </a:schemeClr>
-          </a:solidFill>
-          <a:ln>
-            <a:noFill/>
-          </a:ln>
-        </p:spPr>
-        <p:style>
-          <a:lnRef idx="2">
-            <a:schemeClr val="accent1">
-              <a:shade val="50000"/>
-            </a:schemeClr>
-          </a:lnRef>
-          <a:fillRef idx="1">
-            <a:schemeClr val="accent1"/>
-          </a:fillRef>
-          <a:effectRef idx="0">
-            <a:schemeClr val="accent1"/>
-          </a:effectRef>
-          <a:fontRef idx="minor">
-            <a:schemeClr val="lt1"/>
-          </a:fontRef>
-        </p:style>
-        <p:txBody>
-          <a:bodyPr rtlCol="0" anchor="ctr"/>
-          <a:lstStyle/>
-          <a:p>
-            <a:pPr algn="ctr"/>
-            <a:endParaRPr lang="en-US"/>
-          </a:p>
-        </p:txBody>
-      </p:sp>
-      <p:sp>
-        <p:nvSpPr>
-          <p:cNvPr id="49" name="TextBox 48">
-            <a:extLst>
-              <a:ext uri="{FF2B5EF4-FFF2-40B4-BE49-F238E27FC236}">
-                <a16:creationId xmlns:a16="http://schemas.microsoft.com/office/drawing/2014/main" id="{C40228CA-82BC-764B-B936-59C954EB3F4A}"/>
-              </a:ext>
-            </a:extLst>
-          </p:cNvPr>
-          <p:cNvSpPr txBox="1"/>
-          <p:nvPr/>
-        </p:nvSpPr>
-        <p:spPr>
-          <a:xfrm>
-            <a:off x="9635492" y="3446737"/>
-            <a:ext cx="697627" cy="1015663"/>
-          </a:xfrm>
-          <a:prstGeom prst="rect">
-            <a:avLst/>
-          </a:prstGeom>
-          <a:noFill/>
-        </p:spPr>
-        <p:txBody>
-          <a:bodyPr wrap="none" rtlCol="0">
-            <a:spAutoFit/>
-          </a:bodyPr>
-          <a:lstStyle/>
-          <a:p>
-            <a:r>
-              <a:rPr lang="en-US" sz="6000" dirty="0">
-                <a:solidFill>
-                  <a:srgbClr val="FF0000"/>
-                </a:solidFill>
-              </a:rPr>
-              <a:t>X</a:t>
-            </a:r>
-          </a:p>
-        </p:txBody>
-      </p:sp>
-    </p:spTree>
-    <p:extLst>
-      <p:ext uri="{BB962C8B-B14F-4D97-AF65-F5344CB8AC3E}">
-        <p14:creationId xmlns:p14="http://schemas.microsoft.com/office/powerpoint/2010/main" val="701318457"/>
-      </p:ext>
-    </p:extLst>
-  </p:cSld>
-  <p:clrMapOvr>
-    <a:masterClrMapping/>
-  </p:clrMapOvr>
-</p:sld>
+<file path=ppt/tags/tag1.xml><?xml version="1.0" encoding="utf-8"?>
+<p:tagLst xmlns:a="http://schemas.openxmlformats.org/drawingml/2006/main" xmlns:r="http://schemas.openxmlformats.org/officeDocument/2006/relationships" xmlns:p="http://schemas.openxmlformats.org/presentationml/2006/main">
+  <p:tag name="SLIDO_APP_VERSION" val="1.5.0.0"/>
+  <p:tag name="SLIDO_PRESENTATION_ID" val="a168d9bc-0163-4cfb-94e3-a9fe10287b04"/>
+  <p:tag name="SLIDO_EVENT_UUID" val="0161bee7-9b52-48ab-bd01-308fc07c8a33"/>
+  <p:tag name="SLIDO_EVENT_SECTION_UUID" val="53f7b2fd-9b37-4ce9-89ff-a9a7d9b782ad"/>
+</p:tagLst>
+</file>
+
+<file path=ppt/tags/tag2.xml><?xml version="1.0" encoding="utf-8"?>
+<p:tagLst xmlns:a="http://schemas.openxmlformats.org/drawingml/2006/main" xmlns:r="http://schemas.openxmlformats.org/officeDocument/2006/relationships" xmlns:p="http://schemas.openxmlformats.org/presentationml/2006/main">
+  <p:tag name="SLIDO_TYPE" val="SlidoPoll"/>
+  <p:tag name="SLIDO_POLL_UUID" val="5a114cdc-0f7a-400c-863f-585c205f076a"/>
+  <p:tag name="SLIDO_TIMELINE" val="W3sic2hvd1Jlc3VsdHMiOmZhbHNlLCJwb2xsUXVlc3Rpb25VdWlkIjoiNjA3M2YxMzgtNWY0MS00ZjZmLTgwZGUtYTkxODRjYjk1MTcyIn0seyJzaG93UmVzdWx0cyI6dHJ1ZSwicG9sbFF1ZXN0aW9uVXVpZCI6IjYwNzNmMTM4LTVmNDEtNGY2Zi04MGRlLWE5MTg0Y2I5NTE3MiJ9XQ=="/>
+</p:tagLst>
+</file>
+
+<file path=ppt/tags/tag3.xml><?xml version="1.0" encoding="utf-8"?>
+<p:tagLst xmlns:a="http://schemas.openxmlformats.org/drawingml/2006/main" xmlns:r="http://schemas.openxmlformats.org/officeDocument/2006/relationships" xmlns:p="http://schemas.openxmlformats.org/presentationml/2006/main">
+  <p:tag name="SLIDO_ELEMENT" val="interaction_image"/>
+  <p:tag name="INTERACTION_TYPE" val="MultipleChoice"/>
+</p:tagLst>
+</file>
+
+<file path=ppt/tags/tag4.xml><?xml version="1.0" encoding="utf-8"?>
+<p:tagLst xmlns:a="http://schemas.openxmlformats.org/drawingml/2006/main" xmlns:r="http://schemas.openxmlformats.org/officeDocument/2006/relationships" xmlns:p="http://schemas.openxmlformats.org/presentationml/2006/main">
+  <p:tag name="SLIDO_ELEMENT" val="title"/>
+</p:tagLst>
+</file>
+
+<file path=ppt/tags/tag5.xml><?xml version="1.0" encoding="utf-8"?>
+<p:tagLst xmlns:a="http://schemas.openxmlformats.org/drawingml/2006/main" xmlns:r="http://schemas.openxmlformats.org/officeDocument/2006/relationships" xmlns:p="http://schemas.openxmlformats.org/presentationml/2006/main">
+  <p:tag name="SLIDO_TYPE" val="SlidoPoll"/>
+  <p:tag name="SLIDO_POLL_UUID" val="5403a073-6346-4851-a648-4165acf13b0d"/>
+  <p:tag name="SLIDO_TIMELINE" val="W3sic2hvd1Jlc3VsdHMiOmZhbHNlLCJwb2xsUXVlc3Rpb25VdWlkIjoiZTg3MjQ2Y2YtNTAwMi00MTYzLTk2MTYtZTg3ZTE2OTJmODMwIn0seyJzaG93UmVzdWx0cyI6dHJ1ZSwicG9sbFF1ZXN0aW9uVXVpZCI6ImU4NzI0NmNmLTUwMDItNDE2My05NjE2LWU4N2UxNjkyZjgzMCJ9XQ=="/>
+</p:tagLst>
+</file>
+
+<file path=ppt/tags/tag6.xml><?xml version="1.0" encoding="utf-8"?>
+<p:tagLst xmlns:a="http://schemas.openxmlformats.org/drawingml/2006/main" xmlns:r="http://schemas.openxmlformats.org/officeDocument/2006/relationships" xmlns:p="http://schemas.openxmlformats.org/presentationml/2006/main">
+  <p:tag name="SLIDO_ELEMENT" val="title"/>
+</p:tagLst>
 </file>
 
 <file path=ppt/theme/theme1.xml><?xml version="1.0" encoding="utf-8"?>
